--- a/wed_aug_5_morning_tutorials/Steve_Rozen_R_trajectory_inference_2026_08_05.pptx
+++ b/wed_aug_5_morning_tutorials/Steve_Rozen_R_trajectory_inference_2026_08_05.pptx
@@ -32,8 +32,8 @@
 </file>
 
 <file path=ppt/slideLayouts/slideLayout1.xml><?xml version="1.0" encoding="utf-8"?>
-<p:sldLayout xmlns:a="http://schemas.openxmlformats.org/drawingml/2006/main" xmlns:p="http://schemas.openxmlformats.org/presentationml/2006/main" xmlns:r="http://schemas.openxmlformats.org/officeDocument/2006/relationships" xmlns:p14="http://schemas.microsoft.com/office/powerpoint/2010/main" xmlns:p15="http://schemas.microsoft.com/office/powerpoint/2012/main" xmlns:mc="http://schemas.openxmlformats.org/markup-compatibility/2006" type="title" preserve="1">
-  <p:cSld name="Title Slide">
+<p:sldLayout xmlns:a="http://schemas.openxmlformats.org/drawingml/2006/main" xmlns:p="http://schemas.openxmlformats.org/presentationml/2006/main" xmlns:r="http://schemas.openxmlformats.org/officeDocument/2006/relationships" xmlns:p14="http://schemas.microsoft.com/office/powerpoint/2010/main" xmlns:p15="http://schemas.microsoft.com/office/powerpoint/2012/main" xmlns:mc="http://schemas.openxmlformats.org/markup-compatibility/2006" type="blank" preserve="1">
+  <p:cSld name="Blank">
     <p:bg>
       <p:bgPr>
         <a:solidFill>
@@ -62,85 +62,13 @@
             <a:spLocks noGrp="1"/>
           </p:cNvSpPr>
           <p:nvPr>
-            <p:ph type="title"/>
-          </p:nvPr>
-        </p:nvSpPr>
-        <p:spPr>
-          <a:xfrm>
-            <a:off x="685800" y="2130480"/>
-            <a:ext cx="7772040" cy="1469520"/>
-          </a:xfrm>
-          <a:prstGeom prst="rect">
-            <a:avLst/>
-          </a:prstGeom>
-          <a:noFill/>
-          <a:ln w="0">
-            <a:noFill/>
-          </a:ln>
-        </p:spPr>
-        <p:txBody>
-          <a:bodyPr lIns="91440" tIns="45720" rIns="91440" bIns="45720" anchor="ctr">
-            <a:noAutofit/>
-          </a:bodyPr>
-          <a:lstStyle>
-            <a:lvl1pPr indent="0" algn="ctr" defTabSz="457200">
-              <a:lnSpc>
-                <a:spcPct val="100000"/>
-              </a:lnSpc>
-              <a:buNone/>
-              <a:defRPr lang="en-US" sz="4400" b="0" u="none" strike="noStrike">
-                <a:solidFill>
-                  <a:schemeClr val="dk1"/>
-                </a:solidFill>
-                <a:effectLst/>
-                <a:uFillTx/>
-                <a:latin typeface="Calibri"/>
-              </a:defRPr>
-            </a:lvl1pPr>
-          </a:lstStyle>
-          <a:p>
-            <a:pPr indent="0" algn="ctr" defTabSz="457200">
-              <a:lnSpc>
-                <a:spcPct val="100000"/>
-              </a:lnSpc>
-              <a:buNone/>
-            </a:pPr>
-            <a:r>
-              <a:rPr lang="en-US" sz="4400" b="0" u="none" strike="noStrike">
-                <a:solidFill>
-                  <a:schemeClr val="dk1"/>
-                </a:solidFill>
-                <a:effectLst/>
-                <a:uFillTx/>
-                <a:latin typeface="Calibri"/>
-              </a:rPr>
-              <a:t>Click to edit Master title style</a:t>
-            </a:r>
-            <a:endParaRPr lang="en-US" sz="4400" b="0" u="none" strike="noStrike">
-              <a:solidFill>
-                <a:schemeClr val="dk1"/>
-              </a:solidFill>
-              <a:effectLst/>
-              <a:uFillTx/>
-              <a:latin typeface="Calibri"/>
-            </a:endParaRPr>
-          </a:p>
-        </p:txBody>
-      </p:sp>
-      <p:sp>
-        <p:nvSpPr>
-          <p:cNvPr id="3" name="PlaceHolder 2"/>
-          <p:cNvSpPr>
-            <a:spLocks noGrp="1"/>
-          </p:cNvSpPr>
-          <p:nvPr>
             <p:ph type="dt" idx="1"/>
           </p:nvPr>
         </p:nvSpPr>
         <p:spPr>
           <a:xfrm>
             <a:off x="457200" y="6356520"/>
-            <a:ext cx="2133360" cy="364680"/>
+            <a:ext cx="2133000" cy="364320"/>
           </a:xfrm>
           <a:prstGeom prst="rect">
             <a:avLst/>
@@ -160,6 +88,9 @@
                 <a:spcPct val="100000"/>
               </a:lnSpc>
               <a:buNone/>
+              <a:tabLst>
+                <a:tab pos="0" algn="l"/>
+              </a:tabLst>
               <a:defRPr lang="en-US" sz="1200" b="0" u="none" strike="noStrike">
                 <a:solidFill>
                   <a:schemeClr val="dk1">
@@ -178,6 +109,9 @@
                 <a:spcPct val="100000"/>
               </a:lnSpc>
               <a:buNone/>
+              <a:tabLst>
+                <a:tab pos="0" algn="l"/>
+              </a:tabLst>
             </a:pPr>
             <a:r>
               <a:rPr lang="en-US" sz="1200" b="0" u="none" strike="noStrike">
@@ -205,7 +139,7 @@
       </p:sp>
       <p:sp>
         <p:nvSpPr>
-          <p:cNvPr id="4" name="PlaceHolder 3"/>
+          <p:cNvPr id="3" name="PlaceHolder 2"/>
           <p:cNvSpPr>
             <a:spLocks noGrp="1"/>
           </p:cNvSpPr>
@@ -216,7 +150,7 @@
         <p:spPr>
           <a:xfrm>
             <a:off x="3124080" y="6356520"/>
-            <a:ext cx="2895120" cy="364680"/>
+            <a:ext cx="2894760" cy="364320"/>
           </a:xfrm>
           <a:prstGeom prst="rect">
             <a:avLst/>
@@ -232,7 +166,13 @@
           </a:bodyPr>
           <a:lstStyle>
             <a:lvl1pPr indent="0" algn="ctr">
+              <a:lnSpc>
+                <a:spcPct val="100000"/>
+              </a:lnSpc>
               <a:buNone/>
+              <a:tabLst>
+                <a:tab pos="0" algn="l"/>
+              </a:tabLst>
               <a:defRPr lang="en-US" sz="1400" b="0" u="none" strike="noStrike">
                 <a:solidFill>
                   <a:srgbClr val="000000"/>
@@ -245,7 +185,13 @@
           </a:lstStyle>
           <a:p>
             <a:pPr indent="0" algn="ctr">
+              <a:lnSpc>
+                <a:spcPct val="100000"/>
+              </a:lnSpc>
               <a:buNone/>
+              <a:tabLst>
+                <a:tab pos="0" algn="l"/>
+              </a:tabLst>
             </a:pPr>
             <a:r>
               <a:rPr lang="en-US" sz="1400" b="0" u="none" strike="noStrike">
@@ -271,7 +217,7 @@
       </p:sp>
       <p:sp>
         <p:nvSpPr>
-          <p:cNvPr id="5" name="PlaceHolder 4"/>
+          <p:cNvPr id="4" name="PlaceHolder 3"/>
           <p:cNvSpPr>
             <a:spLocks noGrp="1"/>
           </p:cNvSpPr>
@@ -282,7 +228,7 @@
         <p:spPr>
           <a:xfrm>
             <a:off x="6553080" y="6356520"/>
-            <a:ext cx="2133360" cy="364680"/>
+            <a:ext cx="2133000" cy="364320"/>
           </a:xfrm>
           <a:prstGeom prst="rect">
             <a:avLst/>
@@ -302,6 +248,9 @@
                 <a:spcPct val="100000"/>
               </a:lnSpc>
               <a:buNone/>
+              <a:tabLst>
+                <a:tab pos="0" algn="l"/>
+              </a:tabLst>
               <a:defRPr lang="en-US" sz="1200" b="0" u="none" strike="noStrike">
                 <a:solidFill>
                   <a:schemeClr val="dk1">
@@ -320,8 +269,11 @@
                 <a:spcPct val="100000"/>
               </a:lnSpc>
               <a:buNone/>
-            </a:pPr>
-            <a:fld id="{3C6DB868-A37C-4465-86B0-6FE7C8E8A330}" type="slidenum">
+              <a:tabLst>
+                <a:tab pos="0" algn="l"/>
+              </a:tabLst>
+            </a:pPr>
+            <a:fld id="{0A1D1A07-91B5-401C-BE11-C58BBF945ADF}" type="slidenum">
               <a:rPr lang="en-US" sz="1200" b="0" u="none" strike="noStrike">
                 <a:solidFill>
                   <a:schemeClr val="dk1">
@@ -341,6 +293,512 @@
               <a:effectLst/>
               <a:uFillTx/>
               <a:latin typeface="Times New Roman"/>
+            </a:endParaRPr>
+          </a:p>
+        </p:txBody>
+      </p:sp>
+      <p:sp>
+        <p:nvSpPr>
+          <p:cNvPr id="5" name="PlaceHolder 4"/>
+          <p:cNvSpPr>
+            <a:spLocks noGrp="1"/>
+          </p:cNvSpPr>
+          <p:nvPr>
+            <p:ph type="title"/>
+          </p:nvPr>
+        </p:nvSpPr>
+        <p:spPr>
+          <a:xfrm>
+            <a:off x="609480" y="273600"/>
+            <a:ext cx="10972080" cy="1144440"/>
+          </a:xfrm>
+          <a:prstGeom prst="rect">
+            <a:avLst/>
+          </a:prstGeom>
+          <a:noFill/>
+          <a:ln w="0">
+            <a:noFill/>
+          </a:ln>
+        </p:spPr>
+        <p:txBody>
+          <a:bodyPr lIns="0" tIns="0" rIns="0" bIns="0" anchor="ctr">
+            <a:noAutofit/>
+          </a:bodyPr>
+          <a:lstStyle>
+            <a:lvl1pPr indent="0" algn="ctr" defTabSz="457200">
+              <a:lnSpc>
+                <a:spcPct val="100000"/>
+              </a:lnSpc>
+              <a:buNone/>
+              <a:tabLst>
+                <a:tab pos="0" algn="l"/>
+              </a:tabLst>
+              <a:defRPr lang="en-US" sz="4400" b="0" u="none" strike="noStrike">
+                <a:solidFill>
+                  <a:schemeClr val="dk1"/>
+                </a:solidFill>
+                <a:effectLst/>
+                <a:uFillTx/>
+                <a:latin typeface="Calibri"/>
+              </a:defRPr>
+            </a:lvl1pPr>
+          </a:lstStyle>
+          <a:p>
+            <a:pPr indent="0" algn="ctr" defTabSz="457200">
+              <a:lnSpc>
+                <a:spcPct val="100000"/>
+              </a:lnSpc>
+              <a:buNone/>
+              <a:tabLst>
+                <a:tab pos="0" algn="l"/>
+              </a:tabLst>
+            </a:pPr>
+            <a:r>
+              <a:rPr lang="en-US" sz="4400" b="0" u="none" strike="noStrike">
+                <a:solidFill>
+                  <a:schemeClr val="dk1"/>
+                </a:solidFill>
+                <a:effectLst/>
+                <a:uFillTx/>
+                <a:latin typeface="Calibri"/>
+              </a:rPr>
+              <a:t>Click to edit the title text format</a:t>
+            </a:r>
+            <a:endParaRPr lang="en-US" sz="4400" b="0" u="none" strike="noStrike">
+              <a:solidFill>
+                <a:schemeClr val="dk1"/>
+              </a:solidFill>
+              <a:effectLst/>
+              <a:uFillTx/>
+              <a:latin typeface="Calibri"/>
+            </a:endParaRPr>
+          </a:p>
+        </p:txBody>
+      </p:sp>
+      <p:sp>
+        <p:nvSpPr>
+          <p:cNvPr id="6" name="PlaceHolder 5"/>
+          <p:cNvSpPr>
+            <a:spLocks noGrp="1"/>
+          </p:cNvSpPr>
+          <p:nvPr>
+            <p:ph type="body"/>
+          </p:nvPr>
+        </p:nvSpPr>
+        <p:spPr>
+          <a:xfrm>
+            <a:off x="609480" y="1604520"/>
+            <a:ext cx="10972080" cy="3976920"/>
+          </a:xfrm>
+          <a:prstGeom prst="rect">
+            <a:avLst/>
+          </a:prstGeom>
+          <a:noFill/>
+          <a:ln w="0">
+            <a:noFill/>
+          </a:ln>
+        </p:spPr>
+        <p:txBody>
+          <a:bodyPr lIns="0" tIns="0" rIns="0" bIns="0" anchor="t">
+            <a:normAutofit/>
+          </a:bodyPr>
+          <a:lstStyle>
+            <a:lvl1pPr algn="l" defTabSz="457200">
+              <a:lnSpc>
+                <a:spcPct val="100000"/>
+              </a:lnSpc>
+              <a:spcBef>
+                <a:spcPts val="641"/>
+              </a:spcBef>
+              <a:buClr>
+                <a:srgbClr val="000000"/>
+              </a:buClr>
+              <a:buFont typeface="Arial"/>
+              <a:buChar char="•"/>
+              <a:defRPr lang="en-US" sz="3200" b="0" u="none" strike="noStrike">
+                <a:solidFill>
+                  <a:schemeClr val="dk1"/>
+                </a:solidFill>
+                <a:effectLst/>
+                <a:uFillTx/>
+                <a:latin typeface="Calibri"/>
+              </a:defRPr>
+            </a:lvl1pPr>
+            <a:lvl2pPr lvl="1" algn="l" defTabSz="457200">
+              <a:lnSpc>
+                <a:spcPct val="100000"/>
+              </a:lnSpc>
+              <a:spcBef>
+                <a:spcPts val="561"/>
+              </a:spcBef>
+              <a:buClr>
+                <a:srgbClr val="000000"/>
+              </a:buClr>
+              <a:buSzPct val="75000"/>
+              <a:buFont typeface="Symbol" charset="2"/>
+              <a:buChar char=""/>
+              <a:defRPr lang="en-US" sz="2800" b="0" u="none" strike="noStrike">
+                <a:solidFill>
+                  <a:schemeClr val="dk1"/>
+                </a:solidFill>
+                <a:effectLst/>
+                <a:uFillTx/>
+                <a:latin typeface="Calibri"/>
+              </a:defRPr>
+            </a:lvl2pPr>
+            <a:lvl3pPr lvl="2" algn="l" defTabSz="457200">
+              <a:lnSpc>
+                <a:spcPct val="100000"/>
+              </a:lnSpc>
+              <a:spcBef>
+                <a:spcPts val="479"/>
+              </a:spcBef>
+              <a:buClr>
+                <a:srgbClr val="000000"/>
+              </a:buClr>
+              <a:buSzPct val="45000"/>
+              <a:buFont typeface="Wingdings" charset="2"/>
+              <a:buChar char=""/>
+              <a:defRPr lang="en-US" sz="2400" b="0" u="none" strike="noStrike">
+                <a:solidFill>
+                  <a:schemeClr val="dk1"/>
+                </a:solidFill>
+                <a:effectLst/>
+                <a:uFillTx/>
+                <a:latin typeface="Calibri"/>
+              </a:defRPr>
+            </a:lvl3pPr>
+            <a:lvl4pPr lvl="3" algn="l" defTabSz="457200">
+              <a:lnSpc>
+                <a:spcPct val="100000"/>
+              </a:lnSpc>
+              <a:spcBef>
+                <a:spcPts val="400"/>
+              </a:spcBef>
+              <a:buClr>
+                <a:srgbClr val="000000"/>
+              </a:buClr>
+              <a:buSzPct val="75000"/>
+              <a:buFont typeface="Symbol" charset="2"/>
+              <a:buChar char=""/>
+              <a:defRPr lang="en-US" sz="2000" b="0" u="none" strike="noStrike">
+                <a:solidFill>
+                  <a:schemeClr val="dk1"/>
+                </a:solidFill>
+                <a:effectLst/>
+                <a:uFillTx/>
+                <a:latin typeface="Calibri"/>
+              </a:defRPr>
+            </a:lvl4pPr>
+            <a:lvl5pPr lvl="4" algn="l" defTabSz="457200">
+              <a:lnSpc>
+                <a:spcPct val="100000"/>
+              </a:lnSpc>
+              <a:spcBef>
+                <a:spcPts val="400"/>
+              </a:spcBef>
+              <a:buClr>
+                <a:srgbClr val="000000"/>
+              </a:buClr>
+              <a:buSzPct val="45000"/>
+              <a:buFont typeface="Wingdings" charset="2"/>
+              <a:buChar char=""/>
+              <a:defRPr lang="en-US" sz="2000" b="0" u="none" strike="noStrike">
+                <a:solidFill>
+                  <a:schemeClr val="dk1"/>
+                </a:solidFill>
+                <a:effectLst/>
+                <a:uFillTx/>
+                <a:latin typeface="Calibri"/>
+              </a:defRPr>
+            </a:lvl5pPr>
+            <a:lvl6pPr lvl="5" algn="l" defTabSz="457200">
+              <a:lnSpc>
+                <a:spcPct val="100000"/>
+              </a:lnSpc>
+              <a:spcBef>
+                <a:spcPts val="283"/>
+              </a:spcBef>
+              <a:buClr>
+                <a:srgbClr val="000000"/>
+              </a:buClr>
+              <a:buSzPct val="45000"/>
+              <a:buFont typeface="Wingdings" charset="2"/>
+              <a:buChar char=""/>
+              <a:defRPr lang="en-US" sz="2000" b="0" u="none" strike="noStrike">
+                <a:solidFill>
+                  <a:schemeClr val="dk1"/>
+                </a:solidFill>
+                <a:effectLst/>
+                <a:uFillTx/>
+                <a:latin typeface="Calibri"/>
+              </a:defRPr>
+            </a:lvl6pPr>
+            <a:lvl7pPr lvl="6" algn="l" defTabSz="457200">
+              <a:lnSpc>
+                <a:spcPct val="100000"/>
+              </a:lnSpc>
+              <a:spcBef>
+                <a:spcPts val="283"/>
+              </a:spcBef>
+              <a:buClr>
+                <a:srgbClr val="000000"/>
+              </a:buClr>
+              <a:buSzPct val="45000"/>
+              <a:buFont typeface="Wingdings" charset="2"/>
+              <a:buChar char=""/>
+              <a:defRPr lang="en-US" sz="2000" b="0" u="none" strike="noStrike">
+                <a:solidFill>
+                  <a:schemeClr val="dk1"/>
+                </a:solidFill>
+                <a:effectLst/>
+                <a:uFillTx/>
+                <a:latin typeface="Calibri"/>
+              </a:defRPr>
+            </a:lvl7pPr>
+          </a:lstStyle>
+          <a:p>
+            <a:pPr marL="343080" indent="-343080" algn="l" defTabSz="457200">
+              <a:lnSpc>
+                <a:spcPct val="100000"/>
+              </a:lnSpc>
+              <a:spcBef>
+                <a:spcPts val="641"/>
+              </a:spcBef>
+              <a:buClr>
+                <a:srgbClr val="000000"/>
+              </a:buClr>
+              <a:buFont typeface="Arial"/>
+              <a:buChar char="•"/>
+            </a:pPr>
+            <a:r>
+              <a:rPr lang="en-US" sz="3200" b="0" u="none" strike="noStrike">
+                <a:solidFill>
+                  <a:schemeClr val="dk1"/>
+                </a:solidFill>
+                <a:effectLst/>
+                <a:uFillTx/>
+                <a:latin typeface="Calibri"/>
+              </a:rPr>
+              <a:t>Click to edit the outline text format</a:t>
+            </a:r>
+            <a:endParaRPr lang="en-US" sz="3200" b="0" u="none" strike="noStrike">
+              <a:solidFill>
+                <a:schemeClr val="dk1"/>
+              </a:solidFill>
+              <a:effectLst/>
+              <a:uFillTx/>
+              <a:latin typeface="Calibri"/>
+            </a:endParaRPr>
+          </a:p>
+          <a:p>
+            <a:pPr marL="864000" lvl="1" indent="-324000" algn="l" defTabSz="457200">
+              <a:lnSpc>
+                <a:spcPct val="100000"/>
+              </a:lnSpc>
+              <a:spcBef>
+                <a:spcPts val="561"/>
+              </a:spcBef>
+              <a:buClr>
+                <a:srgbClr val="000000"/>
+              </a:buClr>
+              <a:buSzPct val="75000"/>
+              <a:buFont typeface="Symbol" charset="2"/>
+              <a:buChar char=""/>
+            </a:pPr>
+            <a:r>
+              <a:rPr lang="en-US" sz="2800" b="0" u="none" strike="noStrike">
+                <a:solidFill>
+                  <a:schemeClr val="dk1"/>
+                </a:solidFill>
+                <a:effectLst/>
+                <a:uFillTx/>
+                <a:latin typeface="Calibri"/>
+              </a:rPr>
+              <a:t>Second Outline Level</a:t>
+            </a:r>
+            <a:endParaRPr lang="en-US" sz="2800" b="0" u="none" strike="noStrike">
+              <a:solidFill>
+                <a:schemeClr val="dk1"/>
+              </a:solidFill>
+              <a:effectLst/>
+              <a:uFillTx/>
+              <a:latin typeface="Calibri"/>
+            </a:endParaRPr>
+          </a:p>
+          <a:p>
+            <a:pPr marL="1296000" lvl="2" indent="-288000" algn="l" defTabSz="457200">
+              <a:lnSpc>
+                <a:spcPct val="100000"/>
+              </a:lnSpc>
+              <a:spcBef>
+                <a:spcPts val="479"/>
+              </a:spcBef>
+              <a:buClr>
+                <a:srgbClr val="000000"/>
+              </a:buClr>
+              <a:buSzPct val="45000"/>
+              <a:buFont typeface="Wingdings" charset="2"/>
+              <a:buChar char=""/>
+            </a:pPr>
+            <a:r>
+              <a:rPr lang="en-US" sz="2400" b="0" u="none" strike="noStrike">
+                <a:solidFill>
+                  <a:schemeClr val="dk1"/>
+                </a:solidFill>
+                <a:effectLst/>
+                <a:uFillTx/>
+                <a:latin typeface="Calibri"/>
+              </a:rPr>
+              <a:t>Third Outline Level</a:t>
+            </a:r>
+            <a:endParaRPr lang="en-US" sz="2400" b="0" u="none" strike="noStrike">
+              <a:solidFill>
+                <a:schemeClr val="dk1"/>
+              </a:solidFill>
+              <a:effectLst/>
+              <a:uFillTx/>
+              <a:latin typeface="Calibri"/>
+            </a:endParaRPr>
+          </a:p>
+          <a:p>
+            <a:pPr marL="1728000" lvl="3" indent="-216000" algn="l" defTabSz="457200">
+              <a:lnSpc>
+                <a:spcPct val="100000"/>
+              </a:lnSpc>
+              <a:spcBef>
+                <a:spcPts val="400"/>
+              </a:spcBef>
+              <a:buClr>
+                <a:srgbClr val="000000"/>
+              </a:buClr>
+              <a:buSzPct val="75000"/>
+              <a:buFont typeface="Symbol" charset="2"/>
+              <a:buChar char=""/>
+            </a:pPr>
+            <a:r>
+              <a:rPr lang="en-US" sz="2000" b="0" u="none" strike="noStrike">
+                <a:solidFill>
+                  <a:schemeClr val="dk1"/>
+                </a:solidFill>
+                <a:effectLst/>
+                <a:uFillTx/>
+                <a:latin typeface="Calibri"/>
+              </a:rPr>
+              <a:t>Fourth Outline Level</a:t>
+            </a:r>
+            <a:endParaRPr lang="en-US" sz="2000" b="0" u="none" strike="noStrike">
+              <a:solidFill>
+                <a:schemeClr val="dk1"/>
+              </a:solidFill>
+              <a:effectLst/>
+              <a:uFillTx/>
+              <a:latin typeface="Calibri"/>
+            </a:endParaRPr>
+          </a:p>
+          <a:p>
+            <a:pPr marL="2160000" lvl="4" indent="-216000" algn="l" defTabSz="457200">
+              <a:lnSpc>
+                <a:spcPct val="100000"/>
+              </a:lnSpc>
+              <a:spcBef>
+                <a:spcPts val="400"/>
+              </a:spcBef>
+              <a:buClr>
+                <a:srgbClr val="000000"/>
+              </a:buClr>
+              <a:buSzPct val="45000"/>
+              <a:buFont typeface="Wingdings" charset="2"/>
+              <a:buChar char=""/>
+            </a:pPr>
+            <a:r>
+              <a:rPr lang="en-US" sz="2000" b="0" u="none" strike="noStrike">
+                <a:solidFill>
+                  <a:schemeClr val="dk1"/>
+                </a:solidFill>
+                <a:effectLst/>
+                <a:uFillTx/>
+                <a:latin typeface="Calibri"/>
+              </a:rPr>
+              <a:t>Fifth Outline Level</a:t>
+            </a:r>
+            <a:endParaRPr lang="en-US" sz="2000" b="0" u="none" strike="noStrike">
+              <a:solidFill>
+                <a:schemeClr val="dk1"/>
+              </a:solidFill>
+              <a:effectLst/>
+              <a:uFillTx/>
+              <a:latin typeface="Calibri"/>
+            </a:endParaRPr>
+          </a:p>
+          <a:p>
+            <a:pPr marL="2592000" lvl="5" indent="-216000" algn="l" defTabSz="457200">
+              <a:lnSpc>
+                <a:spcPct val="100000"/>
+              </a:lnSpc>
+              <a:spcBef>
+                <a:spcPts val="283"/>
+              </a:spcBef>
+              <a:buClr>
+                <a:srgbClr val="000000"/>
+              </a:buClr>
+              <a:buSzPct val="45000"/>
+              <a:buFont typeface="Wingdings" charset="2"/>
+              <a:buChar char=""/>
+            </a:pPr>
+            <a:r>
+              <a:rPr lang="en-US" sz="2000" b="0" u="none" strike="noStrike">
+                <a:solidFill>
+                  <a:schemeClr val="dk1"/>
+                </a:solidFill>
+                <a:effectLst/>
+                <a:uFillTx/>
+                <a:latin typeface="Calibri"/>
+              </a:rPr>
+              <a:t>Sixth Outline Level</a:t>
+            </a:r>
+            <a:endParaRPr lang="en-US" sz="2000" b="0" u="none" strike="noStrike">
+              <a:solidFill>
+                <a:schemeClr val="dk1"/>
+              </a:solidFill>
+              <a:effectLst/>
+              <a:uFillTx/>
+              <a:latin typeface="Calibri"/>
+            </a:endParaRPr>
+          </a:p>
+          <a:p>
+            <a:pPr marL="3024000" lvl="6" indent="-216000" algn="l" defTabSz="457200">
+              <a:lnSpc>
+                <a:spcPct val="100000"/>
+              </a:lnSpc>
+              <a:spcBef>
+                <a:spcPts val="283"/>
+              </a:spcBef>
+              <a:buClr>
+                <a:srgbClr val="000000"/>
+              </a:buClr>
+              <a:buSzPct val="45000"/>
+              <a:buFont typeface="Wingdings" charset="2"/>
+              <a:buChar char=""/>
+            </a:pPr>
+            <a:r>
+              <a:rPr lang="en-US" sz="2000" b="0" u="none" strike="noStrike">
+                <a:solidFill>
+                  <a:schemeClr val="dk1"/>
+                </a:solidFill>
+                <a:effectLst/>
+                <a:uFillTx/>
+                <a:latin typeface="Calibri"/>
+              </a:rPr>
+              <a:t>Seventh Outline Level</a:t>
+            </a:r>
+            <a:endParaRPr lang="en-US" sz="2000" b="0" u="none" strike="noStrike">
+              <a:solidFill>
+                <a:schemeClr val="dk1"/>
+              </a:solidFill>
+              <a:effectLst/>
+              <a:uFillTx/>
+              <a:latin typeface="Calibri"/>
             </a:endParaRPr>
           </a:p>
         </p:txBody>
@@ -352,7 +810,7 @@
 
 <file path=ppt/slideLayouts/slideLayout10.xml><?xml version="1.0" encoding="utf-8"?>
 <p:sldLayout xmlns:a="http://schemas.openxmlformats.org/drawingml/2006/main" xmlns:p="http://schemas.openxmlformats.org/presentationml/2006/main" xmlns:r="http://schemas.openxmlformats.org/officeDocument/2006/relationships" xmlns:p14="http://schemas.microsoft.com/office/powerpoint/2010/main" xmlns:p15="http://schemas.microsoft.com/office/powerpoint/2012/main" xmlns:mc="http://schemas.openxmlformats.org/markup-compatibility/2006" type="blank" preserve="1">
-  <p:cSld name="Content with Caption">
+  <p:cSld name="Comparison">
     <p:bg>
       <p:bgPr>
         <a:solidFill>
@@ -386,8 +844,86 @@
         </p:nvSpPr>
         <p:spPr>
           <a:xfrm>
-            <a:off x="457200" y="272880"/>
-            <a:ext cx="3007800" cy="1161720"/>
+            <a:off x="457200" y="274680"/>
+            <a:ext cx="8228880" cy="1142280"/>
+          </a:xfrm>
+          <a:prstGeom prst="rect">
+            <a:avLst/>
+          </a:prstGeom>
+          <a:noFill/>
+          <a:ln w="0">
+            <a:noFill/>
+          </a:ln>
+        </p:spPr>
+        <p:txBody>
+          <a:bodyPr lIns="91440" tIns="45720" rIns="91440" bIns="45720" anchor="ctr">
+            <a:noAutofit/>
+          </a:bodyPr>
+          <a:lstStyle>
+            <a:lvl1pPr indent="0" algn="ctr" defTabSz="457200">
+              <a:lnSpc>
+                <a:spcPct val="100000"/>
+              </a:lnSpc>
+              <a:buNone/>
+              <a:tabLst>
+                <a:tab pos="0" algn="l"/>
+              </a:tabLst>
+              <a:defRPr lang="en-US" sz="4400" b="0" u="none" strike="noStrike">
+                <a:solidFill>
+                  <a:schemeClr val="dk1"/>
+                </a:solidFill>
+                <a:effectLst/>
+                <a:uFillTx/>
+                <a:latin typeface="Calibri"/>
+              </a:defRPr>
+            </a:lvl1pPr>
+          </a:lstStyle>
+          <a:p>
+            <a:pPr indent="0" algn="ctr" defTabSz="457200">
+              <a:lnSpc>
+                <a:spcPct val="100000"/>
+              </a:lnSpc>
+              <a:buNone/>
+              <a:tabLst>
+                <a:tab pos="0" algn="l"/>
+              </a:tabLst>
+            </a:pPr>
+            <a:r>
+              <a:rPr lang="en-US" sz="4400" b="0" u="none" strike="noStrike">
+                <a:solidFill>
+                  <a:schemeClr val="dk1"/>
+                </a:solidFill>
+                <a:effectLst/>
+                <a:uFillTx/>
+                <a:latin typeface="Calibri"/>
+              </a:rPr>
+              <a:t>Click to edit Master title style</a:t>
+            </a:r>
+            <a:endParaRPr lang="en-US" sz="4400" b="0" u="none" strike="noStrike">
+              <a:solidFill>
+                <a:schemeClr val="dk1"/>
+              </a:solidFill>
+              <a:effectLst/>
+              <a:uFillTx/>
+              <a:latin typeface="Calibri"/>
+            </a:endParaRPr>
+          </a:p>
+        </p:txBody>
+      </p:sp>
+      <p:sp>
+        <p:nvSpPr>
+          <p:cNvPr id="50" name="PlaceHolder 2"/>
+          <p:cNvSpPr>
+            <a:spLocks noGrp="1"/>
+          </p:cNvSpPr>
+          <p:nvPr>
+            <p:ph type="body"/>
+          </p:nvPr>
+        </p:nvSpPr>
+        <p:spPr>
+          <a:xfrm>
+            <a:off x="457200" y="1535040"/>
+            <a:ext cx="4039560" cy="639000"/>
           </a:xfrm>
           <a:prstGeom prst="rect">
             <a:avLst/>
@@ -406,8 +942,14 @@
               <a:lnSpc>
                 <a:spcPct val="100000"/>
               </a:lnSpc>
+              <a:spcBef>
+                <a:spcPts val="479"/>
+              </a:spcBef>
               <a:buNone/>
-              <a:defRPr lang="en-US" sz="2000" b="1" u="none" strike="noStrike">
+              <a:tabLst>
+                <a:tab pos="0" algn="l"/>
+              </a:tabLst>
+              <a:defRPr lang="en-US" sz="2400" b="1" u="none" strike="noStrike">
                 <a:solidFill>
                   <a:schemeClr val="dk1"/>
                 </a:solidFill>
@@ -422,20 +964,26 @@
               <a:lnSpc>
                 <a:spcPct val="100000"/>
               </a:lnSpc>
+              <a:spcBef>
+                <a:spcPts val="479"/>
+              </a:spcBef>
               <a:buNone/>
-            </a:pPr>
-            <a:r>
-              <a:rPr lang="en-US" sz="2000" b="1" u="none" strike="noStrike">
-                <a:solidFill>
-                  <a:schemeClr val="dk1"/>
-                </a:solidFill>
-                <a:effectLst/>
-                <a:uFillTx/>
-                <a:latin typeface="Calibri"/>
-              </a:rPr>
-              <a:t>Click to edit Master title style</a:t>
-            </a:r>
-            <a:endParaRPr lang="en-US" sz="2000" b="1" u="none" strike="noStrike">
+              <a:tabLst>
+                <a:tab pos="0" algn="l"/>
+              </a:tabLst>
+            </a:pPr>
+            <a:r>
+              <a:rPr lang="en-US" sz="2400" b="1" u="none" strike="noStrike">
+                <a:solidFill>
+                  <a:schemeClr val="dk1"/>
+                </a:solidFill>
+                <a:effectLst/>
+                <a:uFillTx/>
+                <a:latin typeface="Calibri"/>
+              </a:rPr>
+              <a:t>Click to edit Master text styles</a:t>
+            </a:r>
+            <a:endParaRPr lang="en-US" sz="2400" b="0" u="none" strike="noStrike">
               <a:solidFill>
                 <a:schemeClr val="dk1"/>
               </a:solidFill>
@@ -448,7 +996,7 @@
       </p:sp>
       <p:sp>
         <p:nvSpPr>
-          <p:cNvPr id="50" name="PlaceHolder 2"/>
+          <p:cNvPr id="51" name="PlaceHolder 3"/>
           <p:cNvSpPr>
             <a:spLocks noGrp="1"/>
           </p:cNvSpPr>
@@ -458,8 +1006,8 @@
         </p:nvSpPr>
         <p:spPr>
           <a:xfrm>
-            <a:off x="3575160" y="272880"/>
-            <a:ext cx="5111280" cy="5852880"/>
+            <a:off x="457200" y="2174760"/>
+            <a:ext cx="4039560" cy="3950640"/>
           </a:xfrm>
           <a:prstGeom prst="rect">
             <a:avLst/>
@@ -479,6 +1027,1460 @@
                 <a:spcPct val="100000"/>
               </a:lnSpc>
               <a:spcBef>
+                <a:spcPts val="479"/>
+              </a:spcBef>
+              <a:buClr>
+                <a:srgbClr val="000000"/>
+              </a:buClr>
+              <a:buFont typeface="Arial"/>
+              <a:buChar char="•"/>
+              <a:tabLst>
+                <a:tab pos="0" algn="l"/>
+              </a:tabLst>
+              <a:defRPr lang="en-US" sz="2400" b="0" u="none" strike="noStrike">
+                <a:solidFill>
+                  <a:schemeClr val="dk1"/>
+                </a:solidFill>
+                <a:effectLst/>
+                <a:uFillTx/>
+                <a:latin typeface="Calibri"/>
+              </a:defRPr>
+            </a:lvl1pPr>
+            <a:lvl2pPr lvl="1" algn="l" defTabSz="457200">
+              <a:lnSpc>
+                <a:spcPct val="100000"/>
+              </a:lnSpc>
+              <a:spcBef>
+                <a:spcPts val="400"/>
+              </a:spcBef>
+              <a:buClr>
+                <a:srgbClr val="000000"/>
+              </a:buClr>
+              <a:buFont typeface="Arial"/>
+              <a:buChar char="–"/>
+              <a:tabLst>
+                <a:tab pos="0" algn="l"/>
+              </a:tabLst>
+              <a:defRPr lang="en-US" sz="2000" b="0" u="none" strike="noStrike">
+                <a:solidFill>
+                  <a:schemeClr val="dk1"/>
+                </a:solidFill>
+                <a:effectLst/>
+                <a:uFillTx/>
+                <a:latin typeface="Calibri"/>
+              </a:defRPr>
+            </a:lvl2pPr>
+            <a:lvl3pPr lvl="2" algn="l" defTabSz="457200">
+              <a:lnSpc>
+                <a:spcPct val="100000"/>
+              </a:lnSpc>
+              <a:spcBef>
+                <a:spcPts val="360"/>
+              </a:spcBef>
+              <a:buClr>
+                <a:srgbClr val="000000"/>
+              </a:buClr>
+              <a:buFont typeface="Arial"/>
+              <a:buChar char="•"/>
+              <a:tabLst>
+                <a:tab pos="0" algn="l"/>
+              </a:tabLst>
+              <a:defRPr lang="en-US" sz="1800" b="0" u="none" strike="noStrike">
+                <a:solidFill>
+                  <a:schemeClr val="dk1"/>
+                </a:solidFill>
+                <a:effectLst/>
+                <a:uFillTx/>
+                <a:latin typeface="Calibri"/>
+              </a:defRPr>
+            </a:lvl3pPr>
+            <a:lvl4pPr lvl="3" algn="l" defTabSz="457200">
+              <a:lnSpc>
+                <a:spcPct val="100000"/>
+              </a:lnSpc>
+              <a:spcBef>
+                <a:spcPts val="320"/>
+              </a:spcBef>
+              <a:buClr>
+                <a:srgbClr val="000000"/>
+              </a:buClr>
+              <a:buFont typeface="Arial"/>
+              <a:buChar char="–"/>
+              <a:tabLst>
+                <a:tab pos="0" algn="l"/>
+              </a:tabLst>
+              <a:defRPr lang="en-US" sz="1600" b="0" u="none" strike="noStrike">
+                <a:solidFill>
+                  <a:schemeClr val="dk1"/>
+                </a:solidFill>
+                <a:effectLst/>
+                <a:uFillTx/>
+                <a:latin typeface="Calibri"/>
+              </a:defRPr>
+            </a:lvl4pPr>
+            <a:lvl5pPr lvl="4" algn="l" defTabSz="457200">
+              <a:lnSpc>
+                <a:spcPct val="100000"/>
+              </a:lnSpc>
+              <a:spcBef>
+                <a:spcPts val="320"/>
+              </a:spcBef>
+              <a:buClr>
+                <a:srgbClr val="000000"/>
+              </a:buClr>
+              <a:buFont typeface="Arial"/>
+              <a:buChar char="»"/>
+              <a:tabLst>
+                <a:tab pos="0" algn="l"/>
+              </a:tabLst>
+              <a:defRPr lang="en-US" sz="1600" b="0" u="none" strike="noStrike">
+                <a:solidFill>
+                  <a:schemeClr val="dk1"/>
+                </a:solidFill>
+                <a:effectLst/>
+                <a:uFillTx/>
+                <a:latin typeface="Calibri"/>
+              </a:defRPr>
+            </a:lvl5pPr>
+          </a:lstStyle>
+          <a:p>
+            <a:pPr marL="343080" indent="-343080" algn="l" defTabSz="457200">
+              <a:lnSpc>
+                <a:spcPct val="100000"/>
+              </a:lnSpc>
+              <a:spcBef>
+                <a:spcPts val="479"/>
+              </a:spcBef>
+              <a:buClr>
+                <a:srgbClr val="000000"/>
+              </a:buClr>
+              <a:buFont typeface="Arial"/>
+              <a:buChar char="•"/>
+              <a:tabLst>
+                <a:tab pos="0" algn="l"/>
+              </a:tabLst>
+            </a:pPr>
+            <a:r>
+              <a:rPr lang="en-US" sz="2400" b="0" u="none" strike="noStrike">
+                <a:solidFill>
+                  <a:schemeClr val="dk1"/>
+                </a:solidFill>
+                <a:effectLst/>
+                <a:uFillTx/>
+                <a:latin typeface="Calibri"/>
+              </a:rPr>
+              <a:t>Click to edit Master text styles</a:t>
+            </a:r>
+            <a:endParaRPr lang="en-US" sz="2400" b="0" u="none" strike="noStrike">
+              <a:solidFill>
+                <a:schemeClr val="dk1"/>
+              </a:solidFill>
+              <a:effectLst/>
+              <a:uFillTx/>
+              <a:latin typeface="Calibri"/>
+            </a:endParaRPr>
+          </a:p>
+          <a:p>
+            <a:pPr marL="743040" lvl="1" indent="-285840" algn="l" defTabSz="457200">
+              <a:lnSpc>
+                <a:spcPct val="100000"/>
+              </a:lnSpc>
+              <a:spcBef>
+                <a:spcPts val="400"/>
+              </a:spcBef>
+              <a:buClr>
+                <a:srgbClr val="000000"/>
+              </a:buClr>
+              <a:buFont typeface="Arial"/>
+              <a:buChar char="–"/>
+              <a:tabLst>
+                <a:tab pos="0" algn="l"/>
+              </a:tabLst>
+            </a:pPr>
+            <a:r>
+              <a:rPr lang="en-US" sz="2000" b="0" u="none" strike="noStrike">
+                <a:solidFill>
+                  <a:schemeClr val="dk1"/>
+                </a:solidFill>
+                <a:effectLst/>
+                <a:uFillTx/>
+                <a:latin typeface="Calibri"/>
+              </a:rPr>
+              <a:t>Second level</a:t>
+            </a:r>
+            <a:endParaRPr lang="en-US" sz="2000" b="0" u="none" strike="noStrike">
+              <a:solidFill>
+                <a:schemeClr val="dk1"/>
+              </a:solidFill>
+              <a:effectLst/>
+              <a:uFillTx/>
+              <a:latin typeface="Calibri"/>
+            </a:endParaRPr>
+          </a:p>
+          <a:p>
+            <a:pPr marL="1143000" lvl="2" indent="-228600" algn="l" defTabSz="457200">
+              <a:lnSpc>
+                <a:spcPct val="100000"/>
+              </a:lnSpc>
+              <a:spcBef>
+                <a:spcPts val="360"/>
+              </a:spcBef>
+              <a:buClr>
+                <a:srgbClr val="000000"/>
+              </a:buClr>
+              <a:buFont typeface="Arial"/>
+              <a:buChar char="•"/>
+              <a:tabLst>
+                <a:tab pos="0" algn="l"/>
+              </a:tabLst>
+            </a:pPr>
+            <a:r>
+              <a:rPr lang="en-US" sz="1800" b="0" u="none" strike="noStrike">
+                <a:solidFill>
+                  <a:schemeClr val="dk1"/>
+                </a:solidFill>
+                <a:effectLst/>
+                <a:uFillTx/>
+                <a:latin typeface="Calibri"/>
+              </a:rPr>
+              <a:t>Third level</a:t>
+            </a:r>
+            <a:endParaRPr lang="en-US" sz="1800" b="0" u="none" strike="noStrike">
+              <a:solidFill>
+                <a:schemeClr val="dk1"/>
+              </a:solidFill>
+              <a:effectLst/>
+              <a:uFillTx/>
+              <a:latin typeface="Calibri"/>
+            </a:endParaRPr>
+          </a:p>
+          <a:p>
+            <a:pPr marL="1600200" lvl="3" indent="-228600" algn="l" defTabSz="457200">
+              <a:lnSpc>
+                <a:spcPct val="100000"/>
+              </a:lnSpc>
+              <a:spcBef>
+                <a:spcPts val="320"/>
+              </a:spcBef>
+              <a:buClr>
+                <a:srgbClr val="000000"/>
+              </a:buClr>
+              <a:buFont typeface="Arial"/>
+              <a:buChar char="–"/>
+              <a:tabLst>
+                <a:tab pos="0" algn="l"/>
+              </a:tabLst>
+            </a:pPr>
+            <a:r>
+              <a:rPr lang="en-US" sz="1600" b="0" u="none" strike="noStrike">
+                <a:solidFill>
+                  <a:schemeClr val="dk1"/>
+                </a:solidFill>
+                <a:effectLst/>
+                <a:uFillTx/>
+                <a:latin typeface="Calibri"/>
+              </a:rPr>
+              <a:t>Fourth level</a:t>
+            </a:r>
+            <a:endParaRPr lang="en-US" sz="1600" b="0" u="none" strike="noStrike">
+              <a:solidFill>
+                <a:schemeClr val="dk1"/>
+              </a:solidFill>
+              <a:effectLst/>
+              <a:uFillTx/>
+              <a:latin typeface="Calibri"/>
+            </a:endParaRPr>
+          </a:p>
+          <a:p>
+            <a:pPr marL="2057400" lvl="4" indent="-228600" algn="l" defTabSz="457200">
+              <a:lnSpc>
+                <a:spcPct val="100000"/>
+              </a:lnSpc>
+              <a:spcBef>
+                <a:spcPts val="320"/>
+              </a:spcBef>
+              <a:buClr>
+                <a:srgbClr val="000000"/>
+              </a:buClr>
+              <a:buFont typeface="Arial"/>
+              <a:buChar char="»"/>
+              <a:tabLst>
+                <a:tab pos="0" algn="l"/>
+              </a:tabLst>
+            </a:pPr>
+            <a:r>
+              <a:rPr lang="en-US" sz="1600" b="0" u="none" strike="noStrike">
+                <a:solidFill>
+                  <a:schemeClr val="dk1"/>
+                </a:solidFill>
+                <a:effectLst/>
+                <a:uFillTx/>
+                <a:latin typeface="Calibri"/>
+              </a:rPr>
+              <a:t>Fifth level</a:t>
+            </a:r>
+            <a:endParaRPr lang="en-US" sz="1600" b="0" u="none" strike="noStrike">
+              <a:solidFill>
+                <a:schemeClr val="dk1"/>
+              </a:solidFill>
+              <a:effectLst/>
+              <a:uFillTx/>
+              <a:latin typeface="Calibri"/>
+            </a:endParaRPr>
+          </a:p>
+        </p:txBody>
+      </p:sp>
+      <p:sp>
+        <p:nvSpPr>
+          <p:cNvPr id="52" name="PlaceHolder 4"/>
+          <p:cNvSpPr>
+            <a:spLocks noGrp="1"/>
+          </p:cNvSpPr>
+          <p:nvPr>
+            <p:ph type="body"/>
+          </p:nvPr>
+        </p:nvSpPr>
+        <p:spPr>
+          <a:xfrm>
+            <a:off x="4645080" y="1535040"/>
+            <a:ext cx="4041000" cy="639000"/>
+          </a:xfrm>
+          <a:prstGeom prst="rect">
+            <a:avLst/>
+          </a:prstGeom>
+          <a:noFill/>
+          <a:ln w="0">
+            <a:noFill/>
+          </a:ln>
+        </p:spPr>
+        <p:txBody>
+          <a:bodyPr lIns="91440" tIns="45720" rIns="91440" bIns="45720" anchor="b">
+            <a:noAutofit/>
+          </a:bodyPr>
+          <a:lstStyle>
+            <a:lvl1pPr indent="0" algn="l" defTabSz="457200">
+              <a:lnSpc>
+                <a:spcPct val="100000"/>
+              </a:lnSpc>
+              <a:spcBef>
+                <a:spcPts val="479"/>
+              </a:spcBef>
+              <a:buNone/>
+              <a:tabLst>
+                <a:tab pos="0" algn="l"/>
+              </a:tabLst>
+              <a:defRPr lang="en-US" sz="2400" b="1" u="none" strike="noStrike">
+                <a:solidFill>
+                  <a:schemeClr val="dk1"/>
+                </a:solidFill>
+                <a:effectLst/>
+                <a:uFillTx/>
+                <a:latin typeface="Calibri"/>
+              </a:defRPr>
+            </a:lvl1pPr>
+          </a:lstStyle>
+          <a:p>
+            <a:pPr indent="0" algn="l" defTabSz="457200">
+              <a:lnSpc>
+                <a:spcPct val="100000"/>
+              </a:lnSpc>
+              <a:spcBef>
+                <a:spcPts val="479"/>
+              </a:spcBef>
+              <a:buNone/>
+              <a:tabLst>
+                <a:tab pos="0" algn="l"/>
+              </a:tabLst>
+            </a:pPr>
+            <a:r>
+              <a:rPr lang="en-US" sz="2400" b="1" u="none" strike="noStrike">
+                <a:solidFill>
+                  <a:schemeClr val="dk1"/>
+                </a:solidFill>
+                <a:effectLst/>
+                <a:uFillTx/>
+                <a:latin typeface="Calibri"/>
+              </a:rPr>
+              <a:t>Click to edit Master text styles</a:t>
+            </a:r>
+            <a:endParaRPr lang="en-US" sz="2400" b="0" u="none" strike="noStrike">
+              <a:solidFill>
+                <a:schemeClr val="dk1"/>
+              </a:solidFill>
+              <a:effectLst/>
+              <a:uFillTx/>
+              <a:latin typeface="Calibri"/>
+            </a:endParaRPr>
+          </a:p>
+        </p:txBody>
+      </p:sp>
+      <p:sp>
+        <p:nvSpPr>
+          <p:cNvPr id="53" name="PlaceHolder 5"/>
+          <p:cNvSpPr>
+            <a:spLocks noGrp="1"/>
+          </p:cNvSpPr>
+          <p:nvPr>
+            <p:ph type="body"/>
+          </p:nvPr>
+        </p:nvSpPr>
+        <p:spPr>
+          <a:xfrm>
+            <a:off x="4645080" y="2174760"/>
+            <a:ext cx="4041000" cy="3950640"/>
+          </a:xfrm>
+          <a:prstGeom prst="rect">
+            <a:avLst/>
+          </a:prstGeom>
+          <a:noFill/>
+          <a:ln w="0">
+            <a:noFill/>
+          </a:ln>
+        </p:spPr>
+        <p:txBody>
+          <a:bodyPr lIns="91440" tIns="45720" rIns="91440" bIns="45720" anchor="t">
+            <a:noAutofit/>
+          </a:bodyPr>
+          <a:lstStyle>
+            <a:lvl1pPr algn="l" defTabSz="457200">
+              <a:lnSpc>
+                <a:spcPct val="100000"/>
+              </a:lnSpc>
+              <a:spcBef>
+                <a:spcPts val="479"/>
+              </a:spcBef>
+              <a:buClr>
+                <a:srgbClr val="000000"/>
+              </a:buClr>
+              <a:buFont typeface="Arial"/>
+              <a:buChar char="•"/>
+              <a:tabLst>
+                <a:tab pos="0" algn="l"/>
+              </a:tabLst>
+              <a:defRPr lang="en-US" sz="2400" b="0" u="none" strike="noStrike">
+                <a:solidFill>
+                  <a:schemeClr val="dk1"/>
+                </a:solidFill>
+                <a:effectLst/>
+                <a:uFillTx/>
+                <a:latin typeface="Calibri"/>
+              </a:defRPr>
+            </a:lvl1pPr>
+            <a:lvl2pPr lvl="1" algn="l" defTabSz="457200">
+              <a:lnSpc>
+                <a:spcPct val="100000"/>
+              </a:lnSpc>
+              <a:spcBef>
+                <a:spcPts val="400"/>
+              </a:spcBef>
+              <a:buClr>
+                <a:srgbClr val="000000"/>
+              </a:buClr>
+              <a:buFont typeface="Arial"/>
+              <a:buChar char="–"/>
+              <a:tabLst>
+                <a:tab pos="0" algn="l"/>
+              </a:tabLst>
+              <a:defRPr lang="en-US" sz="2000" b="0" u="none" strike="noStrike">
+                <a:solidFill>
+                  <a:schemeClr val="dk1"/>
+                </a:solidFill>
+                <a:effectLst/>
+                <a:uFillTx/>
+                <a:latin typeface="Calibri"/>
+              </a:defRPr>
+            </a:lvl2pPr>
+            <a:lvl3pPr lvl="2" algn="l" defTabSz="457200">
+              <a:lnSpc>
+                <a:spcPct val="100000"/>
+              </a:lnSpc>
+              <a:spcBef>
+                <a:spcPts val="360"/>
+              </a:spcBef>
+              <a:buClr>
+                <a:srgbClr val="000000"/>
+              </a:buClr>
+              <a:buFont typeface="Arial"/>
+              <a:buChar char="•"/>
+              <a:tabLst>
+                <a:tab pos="0" algn="l"/>
+              </a:tabLst>
+              <a:defRPr lang="en-US" sz="1800" b="0" u="none" strike="noStrike">
+                <a:solidFill>
+                  <a:schemeClr val="dk1"/>
+                </a:solidFill>
+                <a:effectLst/>
+                <a:uFillTx/>
+                <a:latin typeface="Calibri"/>
+              </a:defRPr>
+            </a:lvl3pPr>
+            <a:lvl4pPr lvl="3" algn="l" defTabSz="457200">
+              <a:lnSpc>
+                <a:spcPct val="100000"/>
+              </a:lnSpc>
+              <a:spcBef>
+                <a:spcPts val="320"/>
+              </a:spcBef>
+              <a:buClr>
+                <a:srgbClr val="000000"/>
+              </a:buClr>
+              <a:buFont typeface="Arial"/>
+              <a:buChar char="–"/>
+              <a:tabLst>
+                <a:tab pos="0" algn="l"/>
+              </a:tabLst>
+              <a:defRPr lang="en-US" sz="1600" b="0" u="none" strike="noStrike">
+                <a:solidFill>
+                  <a:schemeClr val="dk1"/>
+                </a:solidFill>
+                <a:effectLst/>
+                <a:uFillTx/>
+                <a:latin typeface="Calibri"/>
+              </a:defRPr>
+            </a:lvl4pPr>
+            <a:lvl5pPr lvl="4" algn="l" defTabSz="457200">
+              <a:lnSpc>
+                <a:spcPct val="100000"/>
+              </a:lnSpc>
+              <a:spcBef>
+                <a:spcPts val="320"/>
+              </a:spcBef>
+              <a:buClr>
+                <a:srgbClr val="000000"/>
+              </a:buClr>
+              <a:buFont typeface="Arial"/>
+              <a:buChar char="»"/>
+              <a:tabLst>
+                <a:tab pos="0" algn="l"/>
+              </a:tabLst>
+              <a:defRPr lang="en-US" sz="1600" b="0" u="none" strike="noStrike">
+                <a:solidFill>
+                  <a:schemeClr val="dk1"/>
+                </a:solidFill>
+                <a:effectLst/>
+                <a:uFillTx/>
+                <a:latin typeface="Calibri"/>
+              </a:defRPr>
+            </a:lvl5pPr>
+          </a:lstStyle>
+          <a:p>
+            <a:pPr marL="343080" indent="-343080" algn="l" defTabSz="457200">
+              <a:lnSpc>
+                <a:spcPct val="100000"/>
+              </a:lnSpc>
+              <a:spcBef>
+                <a:spcPts val="479"/>
+              </a:spcBef>
+              <a:buClr>
+                <a:srgbClr val="000000"/>
+              </a:buClr>
+              <a:buFont typeface="Arial"/>
+              <a:buChar char="•"/>
+              <a:tabLst>
+                <a:tab pos="0" algn="l"/>
+              </a:tabLst>
+            </a:pPr>
+            <a:r>
+              <a:rPr lang="en-US" sz="2400" b="0" u="none" strike="noStrike">
+                <a:solidFill>
+                  <a:schemeClr val="dk1"/>
+                </a:solidFill>
+                <a:effectLst/>
+                <a:uFillTx/>
+                <a:latin typeface="Calibri"/>
+              </a:rPr>
+              <a:t>Click to edit Master text styles</a:t>
+            </a:r>
+            <a:endParaRPr lang="en-US" sz="2400" b="0" u="none" strike="noStrike">
+              <a:solidFill>
+                <a:schemeClr val="dk1"/>
+              </a:solidFill>
+              <a:effectLst/>
+              <a:uFillTx/>
+              <a:latin typeface="Calibri"/>
+            </a:endParaRPr>
+          </a:p>
+          <a:p>
+            <a:pPr marL="743040" lvl="1" indent="-285840" algn="l" defTabSz="457200">
+              <a:lnSpc>
+                <a:spcPct val="100000"/>
+              </a:lnSpc>
+              <a:spcBef>
+                <a:spcPts val="400"/>
+              </a:spcBef>
+              <a:buClr>
+                <a:srgbClr val="000000"/>
+              </a:buClr>
+              <a:buFont typeface="Arial"/>
+              <a:buChar char="–"/>
+              <a:tabLst>
+                <a:tab pos="0" algn="l"/>
+              </a:tabLst>
+            </a:pPr>
+            <a:r>
+              <a:rPr lang="en-US" sz="2000" b="0" u="none" strike="noStrike">
+                <a:solidFill>
+                  <a:schemeClr val="dk1"/>
+                </a:solidFill>
+                <a:effectLst/>
+                <a:uFillTx/>
+                <a:latin typeface="Calibri"/>
+              </a:rPr>
+              <a:t>Second level</a:t>
+            </a:r>
+            <a:endParaRPr lang="en-US" sz="2000" b="0" u="none" strike="noStrike">
+              <a:solidFill>
+                <a:schemeClr val="dk1"/>
+              </a:solidFill>
+              <a:effectLst/>
+              <a:uFillTx/>
+              <a:latin typeface="Calibri"/>
+            </a:endParaRPr>
+          </a:p>
+          <a:p>
+            <a:pPr marL="1143000" lvl="2" indent="-228600" algn="l" defTabSz="457200">
+              <a:lnSpc>
+                <a:spcPct val="100000"/>
+              </a:lnSpc>
+              <a:spcBef>
+                <a:spcPts val="360"/>
+              </a:spcBef>
+              <a:buClr>
+                <a:srgbClr val="000000"/>
+              </a:buClr>
+              <a:buFont typeface="Arial"/>
+              <a:buChar char="•"/>
+              <a:tabLst>
+                <a:tab pos="0" algn="l"/>
+              </a:tabLst>
+            </a:pPr>
+            <a:r>
+              <a:rPr lang="en-US" sz="1800" b="0" u="none" strike="noStrike">
+                <a:solidFill>
+                  <a:schemeClr val="dk1"/>
+                </a:solidFill>
+                <a:effectLst/>
+                <a:uFillTx/>
+                <a:latin typeface="Calibri"/>
+              </a:rPr>
+              <a:t>Third level</a:t>
+            </a:r>
+            <a:endParaRPr lang="en-US" sz="1800" b="0" u="none" strike="noStrike">
+              <a:solidFill>
+                <a:schemeClr val="dk1"/>
+              </a:solidFill>
+              <a:effectLst/>
+              <a:uFillTx/>
+              <a:latin typeface="Calibri"/>
+            </a:endParaRPr>
+          </a:p>
+          <a:p>
+            <a:pPr marL="1600200" lvl="3" indent="-228600" algn="l" defTabSz="457200">
+              <a:lnSpc>
+                <a:spcPct val="100000"/>
+              </a:lnSpc>
+              <a:spcBef>
+                <a:spcPts val="320"/>
+              </a:spcBef>
+              <a:buClr>
+                <a:srgbClr val="000000"/>
+              </a:buClr>
+              <a:buFont typeface="Arial"/>
+              <a:buChar char="–"/>
+              <a:tabLst>
+                <a:tab pos="0" algn="l"/>
+              </a:tabLst>
+            </a:pPr>
+            <a:r>
+              <a:rPr lang="en-US" sz="1600" b="0" u="none" strike="noStrike">
+                <a:solidFill>
+                  <a:schemeClr val="dk1"/>
+                </a:solidFill>
+                <a:effectLst/>
+                <a:uFillTx/>
+                <a:latin typeface="Calibri"/>
+              </a:rPr>
+              <a:t>Fourth level</a:t>
+            </a:r>
+            <a:endParaRPr lang="en-US" sz="1600" b="0" u="none" strike="noStrike">
+              <a:solidFill>
+                <a:schemeClr val="dk1"/>
+              </a:solidFill>
+              <a:effectLst/>
+              <a:uFillTx/>
+              <a:latin typeface="Calibri"/>
+            </a:endParaRPr>
+          </a:p>
+          <a:p>
+            <a:pPr marL="2057400" lvl="4" indent="-228600" algn="l" defTabSz="457200">
+              <a:lnSpc>
+                <a:spcPct val="100000"/>
+              </a:lnSpc>
+              <a:spcBef>
+                <a:spcPts val="320"/>
+              </a:spcBef>
+              <a:buClr>
+                <a:srgbClr val="000000"/>
+              </a:buClr>
+              <a:buFont typeface="Arial"/>
+              <a:buChar char="»"/>
+              <a:tabLst>
+                <a:tab pos="0" algn="l"/>
+              </a:tabLst>
+            </a:pPr>
+            <a:r>
+              <a:rPr lang="en-US" sz="1600" b="0" u="none" strike="noStrike">
+                <a:solidFill>
+                  <a:schemeClr val="dk1"/>
+                </a:solidFill>
+                <a:effectLst/>
+                <a:uFillTx/>
+                <a:latin typeface="Calibri"/>
+              </a:rPr>
+              <a:t>Fifth level</a:t>
+            </a:r>
+            <a:endParaRPr lang="en-US" sz="1600" b="0" u="none" strike="noStrike">
+              <a:solidFill>
+                <a:schemeClr val="dk1"/>
+              </a:solidFill>
+              <a:effectLst/>
+              <a:uFillTx/>
+              <a:latin typeface="Calibri"/>
+            </a:endParaRPr>
+          </a:p>
+        </p:txBody>
+      </p:sp>
+      <p:sp>
+        <p:nvSpPr>
+          <p:cNvPr id="54" name="PlaceHolder 6"/>
+          <p:cNvSpPr>
+            <a:spLocks noGrp="1"/>
+          </p:cNvSpPr>
+          <p:nvPr>
+            <p:ph type="dt" idx="28"/>
+          </p:nvPr>
+        </p:nvSpPr>
+        <p:spPr>
+          <a:xfrm>
+            <a:off x="457200" y="6356520"/>
+            <a:ext cx="2133000" cy="364320"/>
+          </a:xfrm>
+          <a:prstGeom prst="rect">
+            <a:avLst/>
+          </a:prstGeom>
+          <a:noFill/>
+          <a:ln w="0">
+            <a:noFill/>
+          </a:ln>
+        </p:spPr>
+        <p:txBody>
+          <a:bodyPr lIns="91440" tIns="45720" rIns="91440" bIns="45720" anchor="ctr">
+            <a:noAutofit/>
+          </a:bodyPr>
+          <a:lstStyle>
+            <a:lvl1pPr indent="0" algn="l" defTabSz="457200">
+              <a:lnSpc>
+                <a:spcPct val="100000"/>
+              </a:lnSpc>
+              <a:buNone/>
+              <a:tabLst>
+                <a:tab pos="0" algn="l"/>
+              </a:tabLst>
+              <a:defRPr lang="en-US" sz="1200" b="0" u="none" strike="noStrike">
+                <a:solidFill>
+                  <a:schemeClr val="dk1">
+                    <a:tint val="75000"/>
+                  </a:schemeClr>
+                </a:solidFill>
+                <a:effectLst/>
+                <a:uFillTx/>
+                <a:latin typeface="Calibri"/>
+              </a:defRPr>
+            </a:lvl1pPr>
+          </a:lstStyle>
+          <a:p>
+            <a:pPr indent="0" algn="l" defTabSz="457200">
+              <a:lnSpc>
+                <a:spcPct val="100000"/>
+              </a:lnSpc>
+              <a:buNone/>
+              <a:tabLst>
+                <a:tab pos="0" algn="l"/>
+              </a:tabLst>
+            </a:pPr>
+            <a:r>
+              <a:rPr lang="en-US" sz="1200" b="0" u="none" strike="noStrike">
+                <a:solidFill>
+                  <a:schemeClr val="dk1">
+                    <a:tint val="75000"/>
+                  </a:schemeClr>
+                </a:solidFill>
+                <a:effectLst/>
+                <a:uFillTx/>
+                <a:latin typeface="Calibri"/>
+              </a:rPr>
+              <a:t>&lt;date/time&gt;</a:t>
+            </a:r>
+            <a:endParaRPr lang="en-US" sz="1200" b="0" u="none" strike="noStrike">
+              <a:solidFill>
+                <a:srgbClr val="000000"/>
+              </a:solidFill>
+              <a:effectLst/>
+              <a:uFillTx/>
+              <a:latin typeface="Times New Roman"/>
+            </a:endParaRPr>
+          </a:p>
+        </p:txBody>
+      </p:sp>
+      <p:sp>
+        <p:nvSpPr>
+          <p:cNvPr id="55" name="PlaceHolder 7"/>
+          <p:cNvSpPr>
+            <a:spLocks noGrp="1"/>
+          </p:cNvSpPr>
+          <p:nvPr>
+            <p:ph type="ftr" idx="29"/>
+          </p:nvPr>
+        </p:nvSpPr>
+        <p:spPr>
+          <a:xfrm>
+            <a:off x="3124080" y="6356520"/>
+            <a:ext cx="2894760" cy="364320"/>
+          </a:xfrm>
+          <a:prstGeom prst="rect">
+            <a:avLst/>
+          </a:prstGeom>
+          <a:noFill/>
+          <a:ln w="0">
+            <a:noFill/>
+          </a:ln>
+        </p:spPr>
+        <p:txBody>
+          <a:bodyPr lIns="91440" tIns="45720" rIns="91440" bIns="45720" anchor="ctr">
+            <a:noAutofit/>
+          </a:bodyPr>
+          <a:lstStyle>
+            <a:lvl1pPr indent="0" algn="ctr">
+              <a:lnSpc>
+                <a:spcPct val="100000"/>
+              </a:lnSpc>
+              <a:buNone/>
+              <a:tabLst>
+                <a:tab pos="0" algn="l"/>
+              </a:tabLst>
+              <a:defRPr lang="en-US" sz="1400" b="0" u="none" strike="noStrike">
+                <a:solidFill>
+                  <a:srgbClr val="000000"/>
+                </a:solidFill>
+                <a:effectLst/>
+                <a:uFillTx/>
+                <a:latin typeface="Times New Roman"/>
+              </a:defRPr>
+            </a:lvl1pPr>
+          </a:lstStyle>
+          <a:p>
+            <a:pPr indent="0" algn="ctr">
+              <a:lnSpc>
+                <a:spcPct val="100000"/>
+              </a:lnSpc>
+              <a:buNone/>
+              <a:tabLst>
+                <a:tab pos="0" algn="l"/>
+              </a:tabLst>
+            </a:pPr>
+            <a:r>
+              <a:rPr lang="en-US" sz="1400" b="0" u="none" strike="noStrike">
+                <a:solidFill>
+                  <a:srgbClr val="000000"/>
+                </a:solidFill>
+                <a:effectLst/>
+                <a:uFillTx/>
+                <a:latin typeface="Times New Roman"/>
+              </a:rPr>
+              <a:t>&lt;footer&gt;</a:t>
+            </a:r>
+            <a:endParaRPr lang="en-US" sz="1400" b="0" u="none" strike="noStrike">
+              <a:solidFill>
+                <a:srgbClr val="000000"/>
+              </a:solidFill>
+              <a:effectLst/>
+              <a:uFillTx/>
+              <a:latin typeface="Times New Roman"/>
+            </a:endParaRPr>
+          </a:p>
+        </p:txBody>
+      </p:sp>
+      <p:sp>
+        <p:nvSpPr>
+          <p:cNvPr id="56" name="PlaceHolder 8"/>
+          <p:cNvSpPr>
+            <a:spLocks noGrp="1"/>
+          </p:cNvSpPr>
+          <p:nvPr>
+            <p:ph type="sldNum" idx="30"/>
+          </p:nvPr>
+        </p:nvSpPr>
+        <p:spPr>
+          <a:xfrm>
+            <a:off x="6553080" y="6356520"/>
+            <a:ext cx="2133000" cy="364320"/>
+          </a:xfrm>
+          <a:prstGeom prst="rect">
+            <a:avLst/>
+          </a:prstGeom>
+          <a:noFill/>
+          <a:ln w="0">
+            <a:noFill/>
+          </a:ln>
+        </p:spPr>
+        <p:txBody>
+          <a:bodyPr lIns="91440" tIns="45720" rIns="91440" bIns="45720" anchor="ctr">
+            <a:noAutofit/>
+          </a:bodyPr>
+          <a:lstStyle>
+            <a:lvl1pPr indent="0" algn="r" defTabSz="457200">
+              <a:lnSpc>
+                <a:spcPct val="100000"/>
+              </a:lnSpc>
+              <a:buNone/>
+              <a:tabLst>
+                <a:tab pos="0" algn="l"/>
+              </a:tabLst>
+              <a:defRPr lang="en-US" sz="1200" b="0" u="none" strike="noStrike">
+                <a:solidFill>
+                  <a:schemeClr val="dk1">
+                    <a:tint val="75000"/>
+                  </a:schemeClr>
+                </a:solidFill>
+                <a:effectLst/>
+                <a:uFillTx/>
+                <a:latin typeface="Calibri"/>
+              </a:defRPr>
+            </a:lvl1pPr>
+          </a:lstStyle>
+          <a:p>
+            <a:pPr indent="0" algn="r" defTabSz="457200">
+              <a:lnSpc>
+                <a:spcPct val="100000"/>
+              </a:lnSpc>
+              <a:buNone/>
+              <a:tabLst>
+                <a:tab pos="0" algn="l"/>
+              </a:tabLst>
+            </a:pPr>
+            <a:fld id="{BFA19FC1-4BB8-454E-ADAC-E8E03B9E41F2}" type="slidenum">
+              <a:rPr lang="en-US" sz="1200" b="0" u="none" strike="noStrike">
+                <a:solidFill>
+                  <a:schemeClr val="dk1">
+                    <a:tint val="75000"/>
+                  </a:schemeClr>
+                </a:solidFill>
+                <a:effectLst/>
+                <a:uFillTx/>
+                <a:latin typeface="Calibri"/>
+              </a:rPr>
+              <a:t>&lt;number&gt;</a:t>
+            </a:fld>
+            <a:endParaRPr lang="en-US" sz="1200" b="0" u="none" strike="noStrike">
+              <a:solidFill>
+                <a:srgbClr val="000000"/>
+              </a:solidFill>
+              <a:effectLst/>
+              <a:uFillTx/>
+              <a:latin typeface="Times New Roman"/>
+            </a:endParaRPr>
+          </a:p>
+        </p:txBody>
+      </p:sp>
+    </p:spTree>
+  </p:cSld>
+</p:sldLayout>
+</file>
+
+<file path=ppt/slideLayouts/slideLayout11.xml><?xml version="1.0" encoding="utf-8"?>
+<p:sldLayout xmlns:a="http://schemas.openxmlformats.org/drawingml/2006/main" xmlns:p="http://schemas.openxmlformats.org/presentationml/2006/main" xmlns:r="http://schemas.openxmlformats.org/officeDocument/2006/relationships" xmlns:p14="http://schemas.microsoft.com/office/powerpoint/2010/main" xmlns:p15="http://schemas.microsoft.com/office/powerpoint/2012/main" xmlns:mc="http://schemas.openxmlformats.org/markup-compatibility/2006" type="titleOnly" preserve="1">
+  <p:cSld name="Title Only">
+    <p:bg>
+      <p:bgPr>
+        <a:solidFill>
+          <a:srgbClr val="FFFFFF"/>
+        </a:solidFill>
+      </p:bgPr>
+    </p:bg>
+    <p:spTree>
+      <p:nvGrpSpPr>
+        <p:cNvPr id="1" name=""/>
+        <p:cNvGrpSpPr/>
+        <p:nvPr/>
+      </p:nvGrpSpPr>
+      <p:grpSpPr>
+        <a:xfrm>
+          <a:off x="0" y="0"/>
+          <a:ext cx="0" cy="0"/>
+          <a:chOff x="0" y="0"/>
+          <a:chExt cx="0" cy="0"/>
+        </a:xfrm>
+      </p:grpSpPr>
+      <p:sp>
+        <p:nvSpPr>
+          <p:cNvPr id="57" name="PlaceHolder 1"/>
+          <p:cNvSpPr>
+            <a:spLocks noGrp="1"/>
+          </p:cNvSpPr>
+          <p:nvPr>
+            <p:ph type="title"/>
+          </p:nvPr>
+        </p:nvSpPr>
+        <p:spPr>
+          <a:xfrm>
+            <a:off x="457200" y="274680"/>
+            <a:ext cx="8228880" cy="1142280"/>
+          </a:xfrm>
+          <a:prstGeom prst="rect">
+            <a:avLst/>
+          </a:prstGeom>
+          <a:noFill/>
+          <a:ln w="0">
+            <a:noFill/>
+          </a:ln>
+        </p:spPr>
+        <p:txBody>
+          <a:bodyPr lIns="91440" tIns="45720" rIns="91440" bIns="45720" anchor="ctr">
+            <a:noAutofit/>
+          </a:bodyPr>
+          <a:lstStyle>
+            <a:lvl1pPr indent="0" algn="ctr" defTabSz="457200">
+              <a:lnSpc>
+                <a:spcPct val="100000"/>
+              </a:lnSpc>
+              <a:buNone/>
+              <a:tabLst>
+                <a:tab pos="0" algn="l"/>
+              </a:tabLst>
+              <a:defRPr lang="en-US" sz="4400" b="0" u="none" strike="noStrike">
+                <a:solidFill>
+                  <a:schemeClr val="dk1"/>
+                </a:solidFill>
+                <a:effectLst/>
+                <a:uFillTx/>
+                <a:latin typeface="Calibri"/>
+              </a:defRPr>
+            </a:lvl1pPr>
+          </a:lstStyle>
+          <a:p>
+            <a:pPr indent="0" algn="ctr" defTabSz="457200">
+              <a:lnSpc>
+                <a:spcPct val="100000"/>
+              </a:lnSpc>
+              <a:buNone/>
+              <a:tabLst>
+                <a:tab pos="0" algn="l"/>
+              </a:tabLst>
+            </a:pPr>
+            <a:r>
+              <a:rPr lang="en-US" sz="4400" b="0" u="none" strike="noStrike">
+                <a:solidFill>
+                  <a:schemeClr val="dk1"/>
+                </a:solidFill>
+                <a:effectLst/>
+                <a:uFillTx/>
+                <a:latin typeface="Calibri"/>
+              </a:rPr>
+              <a:t>Click to edit Master title style</a:t>
+            </a:r>
+            <a:endParaRPr lang="en-US" sz="4400" b="0" u="none" strike="noStrike">
+              <a:solidFill>
+                <a:schemeClr val="dk1"/>
+              </a:solidFill>
+              <a:effectLst/>
+              <a:uFillTx/>
+              <a:latin typeface="Calibri"/>
+            </a:endParaRPr>
+          </a:p>
+        </p:txBody>
+      </p:sp>
+      <p:sp>
+        <p:nvSpPr>
+          <p:cNvPr id="58" name="PlaceHolder 2"/>
+          <p:cNvSpPr>
+            <a:spLocks noGrp="1"/>
+          </p:cNvSpPr>
+          <p:nvPr>
+            <p:ph type="dt" idx="31"/>
+          </p:nvPr>
+        </p:nvSpPr>
+        <p:spPr>
+          <a:xfrm>
+            <a:off x="457200" y="6356520"/>
+            <a:ext cx="2133000" cy="364320"/>
+          </a:xfrm>
+          <a:prstGeom prst="rect">
+            <a:avLst/>
+          </a:prstGeom>
+          <a:noFill/>
+          <a:ln w="0">
+            <a:noFill/>
+          </a:ln>
+        </p:spPr>
+        <p:txBody>
+          <a:bodyPr lIns="91440" tIns="45720" rIns="91440" bIns="45720" anchor="ctr">
+            <a:noAutofit/>
+          </a:bodyPr>
+          <a:lstStyle>
+            <a:lvl1pPr indent="0" algn="l" defTabSz="457200">
+              <a:lnSpc>
+                <a:spcPct val="100000"/>
+              </a:lnSpc>
+              <a:buNone/>
+              <a:tabLst>
+                <a:tab pos="0" algn="l"/>
+              </a:tabLst>
+              <a:defRPr lang="en-US" sz="1200" b="0" u="none" strike="noStrike">
+                <a:solidFill>
+                  <a:schemeClr val="dk1">
+                    <a:tint val="75000"/>
+                  </a:schemeClr>
+                </a:solidFill>
+                <a:effectLst/>
+                <a:uFillTx/>
+                <a:latin typeface="Calibri"/>
+              </a:defRPr>
+            </a:lvl1pPr>
+          </a:lstStyle>
+          <a:p>
+            <a:pPr indent="0" algn="l" defTabSz="457200">
+              <a:lnSpc>
+                <a:spcPct val="100000"/>
+              </a:lnSpc>
+              <a:buNone/>
+              <a:tabLst>
+                <a:tab pos="0" algn="l"/>
+              </a:tabLst>
+            </a:pPr>
+            <a:r>
+              <a:rPr lang="en-US" sz="1200" b="0" u="none" strike="noStrike">
+                <a:solidFill>
+                  <a:schemeClr val="dk1">
+                    <a:tint val="75000"/>
+                  </a:schemeClr>
+                </a:solidFill>
+                <a:effectLst/>
+                <a:uFillTx/>
+                <a:latin typeface="Calibri"/>
+              </a:rPr>
+              <a:t>&lt;date/time&gt;</a:t>
+            </a:r>
+            <a:endParaRPr lang="en-US" sz="1200" b="0" u="none" strike="noStrike">
+              <a:solidFill>
+                <a:srgbClr val="000000"/>
+              </a:solidFill>
+              <a:effectLst/>
+              <a:uFillTx/>
+              <a:latin typeface="Times New Roman"/>
+            </a:endParaRPr>
+          </a:p>
+        </p:txBody>
+      </p:sp>
+      <p:sp>
+        <p:nvSpPr>
+          <p:cNvPr id="59" name="PlaceHolder 3"/>
+          <p:cNvSpPr>
+            <a:spLocks noGrp="1"/>
+          </p:cNvSpPr>
+          <p:nvPr>
+            <p:ph type="ftr" idx="32"/>
+          </p:nvPr>
+        </p:nvSpPr>
+        <p:spPr>
+          <a:xfrm>
+            <a:off x="3124080" y="6356520"/>
+            <a:ext cx="2894760" cy="364320"/>
+          </a:xfrm>
+          <a:prstGeom prst="rect">
+            <a:avLst/>
+          </a:prstGeom>
+          <a:noFill/>
+          <a:ln w="0">
+            <a:noFill/>
+          </a:ln>
+        </p:spPr>
+        <p:txBody>
+          <a:bodyPr lIns="91440" tIns="45720" rIns="91440" bIns="45720" anchor="ctr">
+            <a:noAutofit/>
+          </a:bodyPr>
+          <a:lstStyle>
+            <a:lvl1pPr indent="0" algn="ctr">
+              <a:lnSpc>
+                <a:spcPct val="100000"/>
+              </a:lnSpc>
+              <a:buNone/>
+              <a:tabLst>
+                <a:tab pos="0" algn="l"/>
+              </a:tabLst>
+              <a:defRPr lang="en-US" sz="1400" b="0" u="none" strike="noStrike">
+                <a:solidFill>
+                  <a:srgbClr val="000000"/>
+                </a:solidFill>
+                <a:effectLst/>
+                <a:uFillTx/>
+                <a:latin typeface="Times New Roman"/>
+              </a:defRPr>
+            </a:lvl1pPr>
+          </a:lstStyle>
+          <a:p>
+            <a:pPr indent="0" algn="ctr">
+              <a:lnSpc>
+                <a:spcPct val="100000"/>
+              </a:lnSpc>
+              <a:buNone/>
+              <a:tabLst>
+                <a:tab pos="0" algn="l"/>
+              </a:tabLst>
+            </a:pPr>
+            <a:r>
+              <a:rPr lang="en-US" sz="1400" b="0" u="none" strike="noStrike">
+                <a:solidFill>
+                  <a:srgbClr val="000000"/>
+                </a:solidFill>
+                <a:effectLst/>
+                <a:uFillTx/>
+                <a:latin typeface="Times New Roman"/>
+              </a:rPr>
+              <a:t>&lt;footer&gt;</a:t>
+            </a:r>
+            <a:endParaRPr lang="en-US" sz="1400" b="0" u="none" strike="noStrike">
+              <a:solidFill>
+                <a:srgbClr val="000000"/>
+              </a:solidFill>
+              <a:effectLst/>
+              <a:uFillTx/>
+              <a:latin typeface="Times New Roman"/>
+            </a:endParaRPr>
+          </a:p>
+        </p:txBody>
+      </p:sp>
+      <p:sp>
+        <p:nvSpPr>
+          <p:cNvPr id="60" name="PlaceHolder 4"/>
+          <p:cNvSpPr>
+            <a:spLocks noGrp="1"/>
+          </p:cNvSpPr>
+          <p:nvPr>
+            <p:ph type="sldNum" idx="33"/>
+          </p:nvPr>
+        </p:nvSpPr>
+        <p:spPr>
+          <a:xfrm>
+            <a:off x="6553080" y="6356520"/>
+            <a:ext cx="2133000" cy="364320"/>
+          </a:xfrm>
+          <a:prstGeom prst="rect">
+            <a:avLst/>
+          </a:prstGeom>
+          <a:noFill/>
+          <a:ln w="0">
+            <a:noFill/>
+          </a:ln>
+        </p:spPr>
+        <p:txBody>
+          <a:bodyPr lIns="91440" tIns="45720" rIns="91440" bIns="45720" anchor="ctr">
+            <a:noAutofit/>
+          </a:bodyPr>
+          <a:lstStyle>
+            <a:lvl1pPr indent="0" algn="r" defTabSz="457200">
+              <a:lnSpc>
+                <a:spcPct val="100000"/>
+              </a:lnSpc>
+              <a:buNone/>
+              <a:tabLst>
+                <a:tab pos="0" algn="l"/>
+              </a:tabLst>
+              <a:defRPr lang="en-US" sz="1200" b="0" u="none" strike="noStrike">
+                <a:solidFill>
+                  <a:schemeClr val="dk1">
+                    <a:tint val="75000"/>
+                  </a:schemeClr>
+                </a:solidFill>
+                <a:effectLst/>
+                <a:uFillTx/>
+                <a:latin typeface="Calibri"/>
+              </a:defRPr>
+            </a:lvl1pPr>
+          </a:lstStyle>
+          <a:p>
+            <a:pPr indent="0" algn="r" defTabSz="457200">
+              <a:lnSpc>
+                <a:spcPct val="100000"/>
+              </a:lnSpc>
+              <a:buNone/>
+              <a:tabLst>
+                <a:tab pos="0" algn="l"/>
+              </a:tabLst>
+            </a:pPr>
+            <a:fld id="{CAC9C5E5-EE0C-4BBE-AC22-0EF980935626}" type="slidenum">
+              <a:rPr lang="en-US" sz="1200" b="0" u="none" strike="noStrike">
+                <a:solidFill>
+                  <a:schemeClr val="dk1">
+                    <a:tint val="75000"/>
+                  </a:schemeClr>
+                </a:solidFill>
+                <a:effectLst/>
+                <a:uFillTx/>
+                <a:latin typeface="Calibri"/>
+              </a:rPr>
+              <a:t>&lt;number&gt;</a:t>
+            </a:fld>
+            <a:endParaRPr lang="en-US" sz="1200" b="0" u="none" strike="noStrike">
+              <a:solidFill>
+                <a:srgbClr val="000000"/>
+              </a:solidFill>
+              <a:effectLst/>
+              <a:uFillTx/>
+              <a:latin typeface="Times New Roman"/>
+            </a:endParaRPr>
+          </a:p>
+        </p:txBody>
+      </p:sp>
+    </p:spTree>
+  </p:cSld>
+</p:sldLayout>
+</file>
+
+<file path=ppt/slideLayouts/slideLayout2.xml><?xml version="1.0" encoding="utf-8"?>
+<p:sldLayout xmlns:a="http://schemas.openxmlformats.org/drawingml/2006/main" xmlns:p="http://schemas.openxmlformats.org/presentationml/2006/main" xmlns:r="http://schemas.openxmlformats.org/officeDocument/2006/relationships" xmlns:p14="http://schemas.microsoft.com/office/powerpoint/2010/main" xmlns:p15="http://schemas.microsoft.com/office/powerpoint/2012/main" xmlns:mc="http://schemas.openxmlformats.org/markup-compatibility/2006" type="blank" preserve="1">
+  <p:cSld name="Content with Caption">
+    <p:bg>
+      <p:bgPr>
+        <a:solidFill>
+          <a:srgbClr val="FFFFFF"/>
+        </a:solidFill>
+      </p:bgPr>
+    </p:bg>
+    <p:spTree>
+      <p:nvGrpSpPr>
+        <p:cNvPr id="1" name=""/>
+        <p:cNvGrpSpPr/>
+        <p:nvPr/>
+      </p:nvGrpSpPr>
+      <p:grpSpPr>
+        <a:xfrm>
+          <a:off x="0" y="0"/>
+          <a:ext cx="0" cy="0"/>
+          <a:chOff x="0" y="0"/>
+          <a:chExt cx="0" cy="0"/>
+        </a:xfrm>
+      </p:grpSpPr>
+      <p:sp>
+        <p:nvSpPr>
+          <p:cNvPr id="7" name="PlaceHolder 1"/>
+          <p:cNvSpPr>
+            <a:spLocks noGrp="1"/>
+          </p:cNvSpPr>
+          <p:nvPr>
+            <p:ph type="title"/>
+          </p:nvPr>
+        </p:nvSpPr>
+        <p:spPr>
+          <a:xfrm>
+            <a:off x="457200" y="272880"/>
+            <a:ext cx="3007440" cy="1161360"/>
+          </a:xfrm>
+          <a:prstGeom prst="rect">
+            <a:avLst/>
+          </a:prstGeom>
+          <a:noFill/>
+          <a:ln w="0">
+            <a:noFill/>
+          </a:ln>
+        </p:spPr>
+        <p:txBody>
+          <a:bodyPr lIns="91440" tIns="45720" rIns="91440" bIns="45720" anchor="b">
+            <a:noAutofit/>
+          </a:bodyPr>
+          <a:lstStyle>
+            <a:lvl1pPr indent="0" algn="l" defTabSz="457200">
+              <a:lnSpc>
+                <a:spcPct val="100000"/>
+              </a:lnSpc>
+              <a:buNone/>
+              <a:tabLst>
+                <a:tab pos="0" algn="l"/>
+              </a:tabLst>
+              <a:defRPr lang="en-US" sz="2000" b="1" u="none" strike="noStrike">
+                <a:solidFill>
+                  <a:schemeClr val="dk1"/>
+                </a:solidFill>
+                <a:effectLst/>
+                <a:uFillTx/>
+                <a:latin typeface="Calibri"/>
+              </a:defRPr>
+            </a:lvl1pPr>
+          </a:lstStyle>
+          <a:p>
+            <a:pPr indent="0" algn="l" defTabSz="457200">
+              <a:lnSpc>
+                <a:spcPct val="100000"/>
+              </a:lnSpc>
+              <a:buNone/>
+              <a:tabLst>
+                <a:tab pos="0" algn="l"/>
+              </a:tabLst>
+            </a:pPr>
+            <a:r>
+              <a:rPr lang="en-US" sz="2000" b="1" u="none" strike="noStrike">
+                <a:solidFill>
+                  <a:schemeClr val="dk1"/>
+                </a:solidFill>
+                <a:effectLst/>
+                <a:uFillTx/>
+                <a:latin typeface="Calibri"/>
+              </a:rPr>
+              <a:t>Click to edit Master title style</a:t>
+            </a:r>
+            <a:endParaRPr lang="en-US" sz="2000" b="1" u="none" strike="noStrike">
+              <a:solidFill>
+                <a:schemeClr val="dk1"/>
+              </a:solidFill>
+              <a:effectLst/>
+              <a:uFillTx/>
+              <a:latin typeface="Calibri"/>
+            </a:endParaRPr>
+          </a:p>
+        </p:txBody>
+      </p:sp>
+      <p:sp>
+        <p:nvSpPr>
+          <p:cNvPr id="8" name="PlaceHolder 2"/>
+          <p:cNvSpPr>
+            <a:spLocks noGrp="1"/>
+          </p:cNvSpPr>
+          <p:nvPr>
+            <p:ph type="body"/>
+          </p:nvPr>
+        </p:nvSpPr>
+        <p:spPr>
+          <a:xfrm>
+            <a:off x="3575160" y="272880"/>
+            <a:ext cx="5110920" cy="5852520"/>
+          </a:xfrm>
+          <a:prstGeom prst="rect">
+            <a:avLst/>
+          </a:prstGeom>
+          <a:noFill/>
+          <a:ln w="0">
+            <a:noFill/>
+          </a:ln>
+        </p:spPr>
+        <p:txBody>
+          <a:bodyPr lIns="91440" tIns="45720" rIns="91440" bIns="45720" anchor="t">
+            <a:noAutofit/>
+          </a:bodyPr>
+          <a:lstStyle>
+            <a:lvl1pPr algn="l" defTabSz="457200">
+              <a:lnSpc>
+                <a:spcPct val="100000"/>
+              </a:lnSpc>
+              <a:spcBef>
                 <a:spcPts val="641"/>
               </a:spcBef>
               <a:buClr>
@@ -754,7 +2756,7 @@
       </p:sp>
       <p:sp>
         <p:nvSpPr>
-          <p:cNvPr id="51" name="PlaceHolder 3"/>
+          <p:cNvPr id="9" name="PlaceHolder 3"/>
           <p:cNvSpPr>
             <a:spLocks noGrp="1"/>
           </p:cNvSpPr>
@@ -765,7 +2767,7 @@
         <p:spPr>
           <a:xfrm>
             <a:off x="457200" y="1434960"/>
-            <a:ext cx="3007800" cy="4690800"/>
+            <a:ext cx="3007440" cy="4690440"/>
           </a:xfrm>
           <a:prstGeom prst="rect">
             <a:avLst/>
@@ -838,18 +2840,18 @@
       </p:sp>
       <p:sp>
         <p:nvSpPr>
-          <p:cNvPr id="52" name="PlaceHolder 4"/>
+          <p:cNvPr id="10" name="PlaceHolder 4"/>
           <p:cNvSpPr>
             <a:spLocks noGrp="1"/>
           </p:cNvSpPr>
           <p:nvPr>
-            <p:ph type="dt" idx="28"/>
+            <p:ph type="dt" idx="4"/>
           </p:nvPr>
         </p:nvSpPr>
         <p:spPr>
           <a:xfrm>
             <a:off x="457200" y="6356520"/>
-            <a:ext cx="2133360" cy="364680"/>
+            <a:ext cx="2133000" cy="364320"/>
           </a:xfrm>
           <a:prstGeom prst="rect">
             <a:avLst/>
@@ -869,6 +2871,9 @@
                 <a:spcPct val="100000"/>
               </a:lnSpc>
               <a:buNone/>
+              <a:tabLst>
+                <a:tab pos="0" algn="l"/>
+              </a:tabLst>
               <a:defRPr lang="en-US" sz="1200" b="0" u="none" strike="noStrike">
                 <a:solidFill>
                   <a:schemeClr val="dk1">
@@ -887,6 +2892,9 @@
                 <a:spcPct val="100000"/>
               </a:lnSpc>
               <a:buNone/>
+              <a:tabLst>
+                <a:tab pos="0" algn="l"/>
+              </a:tabLst>
             </a:pPr>
             <a:r>
               <a:rPr lang="en-US" sz="1200" b="0" u="none" strike="noStrike">
@@ -914,18 +2922,18 @@
       </p:sp>
       <p:sp>
         <p:nvSpPr>
-          <p:cNvPr id="53" name="PlaceHolder 5"/>
+          <p:cNvPr id="11" name="PlaceHolder 5"/>
           <p:cNvSpPr>
             <a:spLocks noGrp="1"/>
           </p:cNvSpPr>
           <p:nvPr>
-            <p:ph type="ftr" idx="29"/>
+            <p:ph type="ftr" idx="5"/>
           </p:nvPr>
         </p:nvSpPr>
         <p:spPr>
           <a:xfrm>
             <a:off x="3124080" y="6356520"/>
-            <a:ext cx="2895120" cy="364680"/>
+            <a:ext cx="2894760" cy="364320"/>
           </a:xfrm>
           <a:prstGeom prst="rect">
             <a:avLst/>
@@ -941,7 +2949,13 @@
           </a:bodyPr>
           <a:lstStyle>
             <a:lvl1pPr indent="0" algn="ctr">
+              <a:lnSpc>
+                <a:spcPct val="100000"/>
+              </a:lnSpc>
               <a:buNone/>
+              <a:tabLst>
+                <a:tab pos="0" algn="l"/>
+              </a:tabLst>
               <a:defRPr lang="en-US" sz="1400" b="0" u="none" strike="noStrike">
                 <a:solidFill>
                   <a:srgbClr val="000000"/>
@@ -954,7 +2968,13 @@
           </a:lstStyle>
           <a:p>
             <a:pPr indent="0" algn="ctr">
+              <a:lnSpc>
+                <a:spcPct val="100000"/>
+              </a:lnSpc>
               <a:buNone/>
+              <a:tabLst>
+                <a:tab pos="0" algn="l"/>
+              </a:tabLst>
             </a:pPr>
             <a:r>
               <a:rPr lang="en-US" sz="1400" b="0" u="none" strike="noStrike">
@@ -980,18 +3000,18 @@
       </p:sp>
       <p:sp>
         <p:nvSpPr>
-          <p:cNvPr id="54" name="PlaceHolder 6"/>
+          <p:cNvPr id="12" name="PlaceHolder 6"/>
           <p:cNvSpPr>
             <a:spLocks noGrp="1"/>
           </p:cNvSpPr>
           <p:nvPr>
-            <p:ph type="sldNum" idx="30"/>
+            <p:ph type="sldNum" idx="6"/>
           </p:nvPr>
         </p:nvSpPr>
         <p:spPr>
           <a:xfrm>
             <a:off x="6553080" y="6356520"/>
-            <a:ext cx="2133360" cy="364680"/>
+            <a:ext cx="2133000" cy="364320"/>
           </a:xfrm>
           <a:prstGeom prst="rect">
             <a:avLst/>
@@ -1011,6 +3031,9 @@
                 <a:spcPct val="100000"/>
               </a:lnSpc>
               <a:buNone/>
+              <a:tabLst>
+                <a:tab pos="0" algn="l"/>
+              </a:tabLst>
               <a:defRPr lang="en-US" sz="1200" b="0" u="none" strike="noStrike">
                 <a:solidFill>
                   <a:schemeClr val="dk1">
@@ -1029,8 +3052,11 @@
                 <a:spcPct val="100000"/>
               </a:lnSpc>
               <a:buNone/>
-            </a:pPr>
-            <a:fld id="{E66355C7-BA26-4DE0-ADE7-BC3C87A5A274}" type="slidenum">
+              <a:tabLst>
+                <a:tab pos="0" algn="l"/>
+              </a:tabLst>
+            </a:pPr>
+            <a:fld id="{8FA858F1-FE33-486F-9C6C-84B31CAB0EC4}" type="slidenum">
               <a:rPr lang="en-US" sz="1200" b="0" u="none" strike="noStrike">
                 <a:solidFill>
                   <a:schemeClr val="dk1">
@@ -1059,7 +3085,7 @@
 </p:sldLayout>
 </file>
 
-<file path=ppt/slideLayouts/slideLayout11.xml><?xml version="1.0" encoding="utf-8"?>
+<file path=ppt/slideLayouts/slideLayout3.xml><?xml version="1.0" encoding="utf-8"?>
 <p:sldLayout xmlns:a="http://schemas.openxmlformats.org/drawingml/2006/main" xmlns:p="http://schemas.openxmlformats.org/presentationml/2006/main" xmlns:r="http://schemas.openxmlformats.org/officeDocument/2006/relationships" xmlns:p14="http://schemas.microsoft.com/office/powerpoint/2010/main" xmlns:p15="http://schemas.microsoft.com/office/powerpoint/2012/main" xmlns:mc="http://schemas.openxmlformats.org/markup-compatibility/2006" type="blank" preserve="1">
   <p:cSld name="Picture with Caption">
     <p:bg>
@@ -1085,7 +3111,7 @@
       </p:grpSpPr>
       <p:sp>
         <p:nvSpPr>
-          <p:cNvPr id="55" name="PlaceHolder 1"/>
+          <p:cNvPr id="13" name="PlaceHolder 1"/>
           <p:cNvSpPr>
             <a:spLocks noGrp="1"/>
           </p:cNvSpPr>
@@ -1096,7 +3122,7 @@
         <p:spPr>
           <a:xfrm>
             <a:off x="1792440" y="4800600"/>
-            <a:ext cx="5486040" cy="566280"/>
+            <a:ext cx="5485680" cy="565920"/>
           </a:xfrm>
           <a:prstGeom prst="rect">
             <a:avLst/>
@@ -1116,6 +3142,9 @@
                 <a:spcPct val="100000"/>
               </a:lnSpc>
               <a:buNone/>
+              <a:tabLst>
+                <a:tab pos="0" algn="l"/>
+              </a:tabLst>
               <a:defRPr lang="en-US" sz="2000" b="1" u="none" strike="noStrike">
                 <a:solidFill>
                   <a:schemeClr val="dk1"/>
@@ -1132,6 +3161,9 @@
                 <a:spcPct val="100000"/>
               </a:lnSpc>
               <a:buNone/>
+              <a:tabLst>
+                <a:tab pos="0" algn="l"/>
+              </a:tabLst>
             </a:pPr>
             <a:r>
               <a:rPr lang="en-US" sz="2000" b="1" u="none" strike="noStrike">
@@ -1157,7 +3189,7 @@
       </p:sp>
       <p:sp>
         <p:nvSpPr>
-          <p:cNvPr id="56" name="PlaceHolder 2"/>
+          <p:cNvPr id="14" name="PlaceHolder 2"/>
           <p:cNvSpPr>
             <a:spLocks noGrp="1"/>
           </p:cNvSpPr>
@@ -1168,7 +3200,7 @@
         <p:spPr>
           <a:xfrm>
             <a:off x="1792440" y="612720"/>
-            <a:ext cx="5486040" cy="4114440"/>
+            <a:ext cx="5485680" cy="4114080"/>
           </a:xfrm>
           <a:prstGeom prst="rect">
             <a:avLst/>
@@ -1184,6 +3216,9 @@
           </a:bodyPr>
           <a:lstStyle>
             <a:lvl1pPr algn="l" defTabSz="457200">
+              <a:lnSpc>
+                <a:spcPct val="100000"/>
+              </a:lnSpc>
               <a:spcBef>
                 <a:spcPts val="281"/>
               </a:spcBef>
@@ -1205,6 +3240,9 @@
               </a:defRPr>
             </a:lvl1pPr>
             <a:lvl2pPr lvl="1" algn="l" defTabSz="457200">
+              <a:lnSpc>
+                <a:spcPct val="100000"/>
+              </a:lnSpc>
               <a:spcBef>
                 <a:spcPts val="561"/>
               </a:spcBef>
@@ -1214,6 +3252,9 @@
               <a:buSzPct val="75000"/>
               <a:buFont typeface="Symbol" charset="2"/>
               <a:buChar char=""/>
+              <a:tabLst>
+                <a:tab pos="0" algn="l"/>
+              </a:tabLst>
               <a:defRPr lang="en-US" sz="3200" b="0" u="none" strike="noStrike">
                 <a:solidFill>
                   <a:schemeClr val="dk1"/>
@@ -1224,6 +3265,9 @@
               </a:defRPr>
             </a:lvl2pPr>
             <a:lvl3pPr lvl="2" algn="l" defTabSz="457200">
+              <a:lnSpc>
+                <a:spcPct val="100000"/>
+              </a:lnSpc>
               <a:spcBef>
                 <a:spcPts val="479"/>
               </a:spcBef>
@@ -1233,6 +3277,9 @@
               <a:buSzPct val="45000"/>
               <a:buFont typeface="Wingdings" charset="2"/>
               <a:buChar char=""/>
+              <a:tabLst>
+                <a:tab pos="0" algn="l"/>
+              </a:tabLst>
               <a:defRPr lang="en-US" sz="3200" b="0" u="none" strike="noStrike">
                 <a:solidFill>
                   <a:schemeClr val="dk1"/>
@@ -1243,6 +3290,9 @@
               </a:defRPr>
             </a:lvl3pPr>
             <a:lvl4pPr lvl="3" algn="l" defTabSz="457200">
+              <a:lnSpc>
+                <a:spcPct val="100000"/>
+              </a:lnSpc>
               <a:spcBef>
                 <a:spcPts val="400"/>
               </a:spcBef>
@@ -1252,6 +3302,9 @@
               <a:buSzPct val="75000"/>
               <a:buFont typeface="Symbol" charset="2"/>
               <a:buChar char=""/>
+              <a:tabLst>
+                <a:tab pos="0" algn="l"/>
+              </a:tabLst>
               <a:defRPr lang="en-US" sz="3200" b="0" u="none" strike="noStrike">
                 <a:solidFill>
                   <a:schemeClr val="dk1"/>
@@ -1262,6 +3315,9 @@
               </a:defRPr>
             </a:lvl4pPr>
             <a:lvl5pPr lvl="4" algn="l" defTabSz="457200">
+              <a:lnSpc>
+                <a:spcPct val="100000"/>
+              </a:lnSpc>
               <a:spcBef>
                 <a:spcPts val="400"/>
               </a:spcBef>
@@ -1271,6 +3327,9 @@
               <a:buSzPct val="45000"/>
               <a:buFont typeface="Wingdings" charset="2"/>
               <a:buChar char=""/>
+              <a:tabLst>
+                <a:tab pos="0" algn="l"/>
+              </a:tabLst>
               <a:defRPr lang="en-US" sz="3200" b="0" u="none" strike="noStrike">
                 <a:solidFill>
                   <a:schemeClr val="dk1"/>
@@ -1281,6 +3340,9 @@
               </a:defRPr>
             </a:lvl5pPr>
             <a:lvl6pPr lvl="5" algn="l" defTabSz="457200">
+              <a:lnSpc>
+                <a:spcPct val="100000"/>
+              </a:lnSpc>
               <a:spcBef>
                 <a:spcPts val="283"/>
               </a:spcBef>
@@ -1290,6 +3352,9 @@
               <a:buSzPct val="45000"/>
               <a:buFont typeface="Wingdings" charset="2"/>
               <a:buChar char=""/>
+              <a:tabLst>
+                <a:tab pos="0" algn="l"/>
+              </a:tabLst>
               <a:defRPr lang="en-US" sz="3200" b="0" u="none" strike="noStrike">
                 <a:solidFill>
                   <a:schemeClr val="dk1"/>
@@ -1300,6 +3365,9 @@
               </a:defRPr>
             </a:lvl6pPr>
             <a:lvl7pPr lvl="6" algn="l" defTabSz="457200">
+              <a:lnSpc>
+                <a:spcPct val="100000"/>
+              </a:lnSpc>
               <a:spcBef>
                 <a:spcPts val="283"/>
               </a:spcBef>
@@ -1309,6 +3377,9 @@
               <a:buSzPct val="45000"/>
               <a:buFont typeface="Wingdings" charset="2"/>
               <a:buChar char=""/>
+              <a:tabLst>
+                <a:tab pos="0" algn="l"/>
+              </a:tabLst>
               <a:defRPr lang="en-US" sz="3200" b="0" u="none" strike="noStrike">
                 <a:solidFill>
                   <a:schemeClr val="dk1"/>
@@ -1320,7 +3391,10 @@
             </a:lvl7pPr>
           </a:lstStyle>
           <a:p>
-            <a:pPr algn="l" defTabSz="457200">
+            <a:pPr marL="432000" indent="-324000" algn="l" defTabSz="457200">
+              <a:lnSpc>
+                <a:spcPct val="100000"/>
+              </a:lnSpc>
               <a:spcBef>
                 <a:spcPts val="281"/>
               </a:spcBef>
@@ -1354,7 +3428,10 @@
             </a:endParaRPr>
           </a:p>
           <a:p>
-            <a:pPr marL="457200" lvl="1" algn="l" defTabSz="457200">
+            <a:pPr marL="457200" lvl="1" indent="-324000" algn="l" defTabSz="457200">
+              <a:lnSpc>
+                <a:spcPct val="100000"/>
+              </a:lnSpc>
               <a:spcBef>
                 <a:spcPts val="561"/>
               </a:spcBef>
@@ -1364,6 +3441,9 @@
               <a:buSzPct val="75000"/>
               <a:buFont typeface="Symbol" charset="2"/>
               <a:buChar char=""/>
+              <a:tabLst>
+                <a:tab pos="0" algn="l"/>
+              </a:tabLst>
             </a:pPr>
             <a:r>
               <a:rPr lang="en-US" sz="3200" b="0" u="none" strike="noStrike">
@@ -1386,7 +3466,10 @@
             </a:endParaRPr>
           </a:p>
           <a:p>
-            <a:pPr marL="914400" lvl="2" algn="l" defTabSz="457200">
+            <a:pPr marL="914400" lvl="2" indent="-288000" algn="l" defTabSz="457200">
+              <a:lnSpc>
+                <a:spcPct val="100000"/>
+              </a:lnSpc>
               <a:spcBef>
                 <a:spcPts val="479"/>
               </a:spcBef>
@@ -1396,6 +3479,9 @@
               <a:buSzPct val="45000"/>
               <a:buFont typeface="Wingdings" charset="2"/>
               <a:buChar char=""/>
+              <a:tabLst>
+                <a:tab pos="0" algn="l"/>
+              </a:tabLst>
             </a:pPr>
             <a:r>
               <a:rPr lang="en-US" sz="3200" b="0" u="none" strike="noStrike">
@@ -1418,7 +3504,10 @@
             </a:endParaRPr>
           </a:p>
           <a:p>
-            <a:pPr marL="1371600" lvl="3" algn="l" defTabSz="457200">
+            <a:pPr marL="1371600" lvl="3" indent="-216000" algn="l" defTabSz="457200">
+              <a:lnSpc>
+                <a:spcPct val="100000"/>
+              </a:lnSpc>
               <a:spcBef>
                 <a:spcPts val="400"/>
               </a:spcBef>
@@ -1428,6 +3517,9 @@
               <a:buSzPct val="75000"/>
               <a:buFont typeface="Symbol" charset="2"/>
               <a:buChar char=""/>
+              <a:tabLst>
+                <a:tab pos="0" algn="l"/>
+              </a:tabLst>
             </a:pPr>
             <a:r>
               <a:rPr lang="en-US" sz="3200" b="0" u="none" strike="noStrike">
@@ -1450,7 +3542,10 @@
             </a:endParaRPr>
           </a:p>
           <a:p>
-            <a:pPr marL="1828800" lvl="4" algn="l" defTabSz="457200">
+            <a:pPr marL="1828800" lvl="4" indent="-216000" algn="l" defTabSz="457200">
+              <a:lnSpc>
+                <a:spcPct val="100000"/>
+              </a:lnSpc>
               <a:spcBef>
                 <a:spcPts val="400"/>
               </a:spcBef>
@@ -1460,6 +3555,9 @@
               <a:buSzPct val="45000"/>
               <a:buFont typeface="Wingdings" charset="2"/>
               <a:buChar char=""/>
+              <a:tabLst>
+                <a:tab pos="0" algn="l"/>
+              </a:tabLst>
             </a:pPr>
             <a:r>
               <a:rPr lang="en-US" sz="3200" b="0" u="none" strike="noStrike">
@@ -1482,7 +3580,10 @@
             </a:endParaRPr>
           </a:p>
           <a:p>
-            <a:pPr marL="2286000" lvl="5" algn="l" defTabSz="457200">
+            <a:pPr marL="2286000" lvl="5" indent="-216000" algn="l" defTabSz="457200">
+              <a:lnSpc>
+                <a:spcPct val="100000"/>
+              </a:lnSpc>
               <a:spcBef>
                 <a:spcPts val="283"/>
               </a:spcBef>
@@ -1492,6 +3593,9 @@
               <a:buSzPct val="45000"/>
               <a:buFont typeface="Wingdings" charset="2"/>
               <a:buChar char=""/>
+              <a:tabLst>
+                <a:tab pos="0" algn="l"/>
+              </a:tabLst>
             </a:pPr>
             <a:r>
               <a:rPr lang="en-US" sz="3200" b="0" u="none" strike="noStrike">
@@ -1514,7 +3618,10 @@
             </a:endParaRPr>
           </a:p>
           <a:p>
-            <a:pPr marL="2743200" lvl="6" algn="l" defTabSz="457200">
+            <a:pPr marL="2743200" lvl="6" indent="-216000" algn="l" defTabSz="457200">
+              <a:lnSpc>
+                <a:spcPct val="100000"/>
+              </a:lnSpc>
               <a:spcBef>
                 <a:spcPts val="283"/>
               </a:spcBef>
@@ -1524,6 +3631,9 @@
               <a:buSzPct val="45000"/>
               <a:buFont typeface="Wingdings" charset="2"/>
               <a:buChar char=""/>
+              <a:tabLst>
+                <a:tab pos="0" algn="l"/>
+              </a:tabLst>
             </a:pPr>
             <a:r>
               <a:rPr lang="en-US" sz="3200" b="0" u="none" strike="noStrike">
@@ -1549,7 +3659,7 @@
       </p:sp>
       <p:sp>
         <p:nvSpPr>
-          <p:cNvPr id="57" name="PlaceHolder 3"/>
+          <p:cNvPr id="15" name="PlaceHolder 3"/>
           <p:cNvSpPr>
             <a:spLocks noGrp="1"/>
           </p:cNvSpPr>
@@ -1560,7 +3670,7 @@
         <p:spPr>
           <a:xfrm>
             <a:off x="1792440" y="5367240"/>
-            <a:ext cx="5486040" cy="804600"/>
+            <a:ext cx="5485680" cy="804240"/>
           </a:xfrm>
           <a:prstGeom prst="rect">
             <a:avLst/>
@@ -1633,18 +3743,18 @@
       </p:sp>
       <p:sp>
         <p:nvSpPr>
-          <p:cNvPr id="58" name="PlaceHolder 4"/>
+          <p:cNvPr id="16" name="PlaceHolder 4"/>
           <p:cNvSpPr>
             <a:spLocks noGrp="1"/>
           </p:cNvSpPr>
           <p:nvPr>
-            <p:ph type="dt" idx="31"/>
+            <p:ph type="dt" idx="7"/>
           </p:nvPr>
         </p:nvSpPr>
         <p:spPr>
           <a:xfrm>
             <a:off x="457200" y="6356520"/>
-            <a:ext cx="2133360" cy="364680"/>
+            <a:ext cx="2133000" cy="364320"/>
           </a:xfrm>
           <a:prstGeom prst="rect">
             <a:avLst/>
@@ -1664,6 +3774,9 @@
                 <a:spcPct val="100000"/>
               </a:lnSpc>
               <a:buNone/>
+              <a:tabLst>
+                <a:tab pos="0" algn="l"/>
+              </a:tabLst>
               <a:defRPr lang="en-US" sz="1200" b="0" u="none" strike="noStrike">
                 <a:solidFill>
                   <a:schemeClr val="dk1">
@@ -1682,6 +3795,9 @@
                 <a:spcPct val="100000"/>
               </a:lnSpc>
               <a:buNone/>
+              <a:tabLst>
+                <a:tab pos="0" algn="l"/>
+              </a:tabLst>
             </a:pPr>
             <a:r>
               <a:rPr lang="en-US" sz="1200" b="0" u="none" strike="noStrike">
@@ -1709,18 +3825,18 @@
       </p:sp>
       <p:sp>
         <p:nvSpPr>
-          <p:cNvPr id="59" name="PlaceHolder 5"/>
+          <p:cNvPr id="17" name="PlaceHolder 5"/>
           <p:cNvSpPr>
             <a:spLocks noGrp="1"/>
           </p:cNvSpPr>
           <p:nvPr>
-            <p:ph type="ftr" idx="32"/>
+            <p:ph type="ftr" idx="8"/>
           </p:nvPr>
         </p:nvSpPr>
         <p:spPr>
           <a:xfrm>
             <a:off x="3124080" y="6356520"/>
-            <a:ext cx="2895120" cy="364680"/>
+            <a:ext cx="2894760" cy="364320"/>
           </a:xfrm>
           <a:prstGeom prst="rect">
             <a:avLst/>
@@ -1736,7 +3852,13 @@
           </a:bodyPr>
           <a:lstStyle>
             <a:lvl1pPr indent="0" algn="ctr">
+              <a:lnSpc>
+                <a:spcPct val="100000"/>
+              </a:lnSpc>
               <a:buNone/>
+              <a:tabLst>
+                <a:tab pos="0" algn="l"/>
+              </a:tabLst>
               <a:defRPr lang="en-US" sz="1400" b="0" u="none" strike="noStrike">
                 <a:solidFill>
                   <a:srgbClr val="000000"/>
@@ -1749,7 +3871,13 @@
           </a:lstStyle>
           <a:p>
             <a:pPr indent="0" algn="ctr">
+              <a:lnSpc>
+                <a:spcPct val="100000"/>
+              </a:lnSpc>
               <a:buNone/>
+              <a:tabLst>
+                <a:tab pos="0" algn="l"/>
+              </a:tabLst>
             </a:pPr>
             <a:r>
               <a:rPr lang="en-US" sz="1400" b="0" u="none" strike="noStrike">
@@ -1775,18 +3903,18 @@
       </p:sp>
       <p:sp>
         <p:nvSpPr>
-          <p:cNvPr id="60" name="PlaceHolder 6"/>
+          <p:cNvPr id="18" name="PlaceHolder 6"/>
           <p:cNvSpPr>
             <a:spLocks noGrp="1"/>
           </p:cNvSpPr>
           <p:nvPr>
-            <p:ph type="sldNum" idx="33"/>
+            <p:ph type="sldNum" idx="9"/>
           </p:nvPr>
         </p:nvSpPr>
         <p:spPr>
           <a:xfrm>
             <a:off x="6553080" y="6356520"/>
-            <a:ext cx="2133360" cy="364680"/>
+            <a:ext cx="2133000" cy="364320"/>
           </a:xfrm>
           <a:prstGeom prst="rect">
             <a:avLst/>
@@ -1806,6 +3934,9 @@
                 <a:spcPct val="100000"/>
               </a:lnSpc>
               <a:buNone/>
+              <a:tabLst>
+                <a:tab pos="0" algn="l"/>
+              </a:tabLst>
               <a:defRPr lang="en-US" sz="1200" b="0" u="none" strike="noStrike">
                 <a:solidFill>
                   <a:schemeClr val="dk1">
@@ -1824,8 +3955,11 @@
                 <a:spcPct val="100000"/>
               </a:lnSpc>
               <a:buNone/>
-            </a:pPr>
-            <a:fld id="{8D8F8A41-26CC-4C46-94D3-05AE66A37857}" type="slidenum">
+              <a:tabLst>
+                <a:tab pos="0" algn="l"/>
+              </a:tabLst>
+            </a:pPr>
+            <a:fld id="{EF746BD6-2133-4A47-B75E-6D7A619D35C5}" type="slidenum">
               <a:rPr lang="en-US" sz="1200" b="0" u="none" strike="noStrike">
                 <a:solidFill>
                   <a:schemeClr val="dk1">
@@ -1854,7 +3988,356 @@
 </p:sldLayout>
 </file>
 
-<file path=ppt/slideLayouts/slideLayout2.xml><?xml version="1.0" encoding="utf-8"?>
+<file path=ppt/slideLayouts/slideLayout4.xml><?xml version="1.0" encoding="utf-8"?>
+<p:sldLayout xmlns:a="http://schemas.openxmlformats.org/drawingml/2006/main" xmlns:p="http://schemas.openxmlformats.org/presentationml/2006/main" xmlns:r="http://schemas.openxmlformats.org/officeDocument/2006/relationships" xmlns:p14="http://schemas.microsoft.com/office/powerpoint/2010/main" xmlns:p15="http://schemas.microsoft.com/office/powerpoint/2012/main" xmlns:mc="http://schemas.openxmlformats.org/markup-compatibility/2006" type="title" preserve="1">
+  <p:cSld name="Title Slide">
+    <p:bg>
+      <p:bgPr>
+        <a:solidFill>
+          <a:srgbClr val="FFFFFF"/>
+        </a:solidFill>
+      </p:bgPr>
+    </p:bg>
+    <p:spTree>
+      <p:nvGrpSpPr>
+        <p:cNvPr id="1" name=""/>
+        <p:cNvGrpSpPr/>
+        <p:nvPr/>
+      </p:nvGrpSpPr>
+      <p:grpSpPr>
+        <a:xfrm>
+          <a:off x="0" y="0"/>
+          <a:ext cx="0" cy="0"/>
+          <a:chOff x="0" y="0"/>
+          <a:chExt cx="0" cy="0"/>
+        </a:xfrm>
+      </p:grpSpPr>
+      <p:sp>
+        <p:nvSpPr>
+          <p:cNvPr id="19" name="PlaceHolder 1"/>
+          <p:cNvSpPr>
+            <a:spLocks noGrp="1"/>
+          </p:cNvSpPr>
+          <p:nvPr>
+            <p:ph type="title"/>
+          </p:nvPr>
+        </p:nvSpPr>
+        <p:spPr>
+          <a:xfrm>
+            <a:off x="685800" y="2130480"/>
+            <a:ext cx="7771680" cy="1469160"/>
+          </a:xfrm>
+          <a:prstGeom prst="rect">
+            <a:avLst/>
+          </a:prstGeom>
+          <a:noFill/>
+          <a:ln w="0">
+            <a:noFill/>
+          </a:ln>
+        </p:spPr>
+        <p:txBody>
+          <a:bodyPr lIns="91440" tIns="45720" rIns="91440" bIns="45720" anchor="ctr">
+            <a:noAutofit/>
+          </a:bodyPr>
+          <a:lstStyle>
+            <a:lvl1pPr indent="0" algn="ctr" defTabSz="457200">
+              <a:lnSpc>
+                <a:spcPct val="100000"/>
+              </a:lnSpc>
+              <a:buNone/>
+              <a:tabLst>
+                <a:tab pos="0" algn="l"/>
+              </a:tabLst>
+              <a:defRPr lang="en-US" sz="4400" b="0" u="none" strike="noStrike">
+                <a:solidFill>
+                  <a:schemeClr val="dk1"/>
+                </a:solidFill>
+                <a:effectLst/>
+                <a:uFillTx/>
+                <a:latin typeface="Calibri"/>
+              </a:defRPr>
+            </a:lvl1pPr>
+          </a:lstStyle>
+          <a:p>
+            <a:pPr indent="0" algn="ctr" defTabSz="457200">
+              <a:lnSpc>
+                <a:spcPct val="100000"/>
+              </a:lnSpc>
+              <a:buNone/>
+              <a:tabLst>
+                <a:tab pos="0" algn="l"/>
+              </a:tabLst>
+            </a:pPr>
+            <a:r>
+              <a:rPr lang="en-US" sz="4400" b="0" u="none" strike="noStrike">
+                <a:solidFill>
+                  <a:schemeClr val="dk1"/>
+                </a:solidFill>
+                <a:effectLst/>
+                <a:uFillTx/>
+                <a:latin typeface="Calibri"/>
+              </a:rPr>
+              <a:t>Click to edit Master title style</a:t>
+            </a:r>
+            <a:endParaRPr lang="en-US" sz="4400" b="0" u="none" strike="noStrike">
+              <a:solidFill>
+                <a:schemeClr val="dk1"/>
+              </a:solidFill>
+              <a:effectLst/>
+              <a:uFillTx/>
+              <a:latin typeface="Calibri"/>
+            </a:endParaRPr>
+          </a:p>
+        </p:txBody>
+      </p:sp>
+      <p:sp>
+        <p:nvSpPr>
+          <p:cNvPr id="20" name="PlaceHolder 2"/>
+          <p:cNvSpPr>
+            <a:spLocks noGrp="1"/>
+          </p:cNvSpPr>
+          <p:nvPr>
+            <p:ph type="dt" idx="10"/>
+          </p:nvPr>
+        </p:nvSpPr>
+        <p:spPr>
+          <a:xfrm>
+            <a:off x="457200" y="6356520"/>
+            <a:ext cx="2133000" cy="364320"/>
+          </a:xfrm>
+          <a:prstGeom prst="rect">
+            <a:avLst/>
+          </a:prstGeom>
+          <a:noFill/>
+          <a:ln w="0">
+            <a:noFill/>
+          </a:ln>
+        </p:spPr>
+        <p:txBody>
+          <a:bodyPr lIns="91440" tIns="45720" rIns="91440" bIns="45720" anchor="ctr">
+            <a:noAutofit/>
+          </a:bodyPr>
+          <a:lstStyle>
+            <a:lvl1pPr indent="0" algn="l" defTabSz="457200">
+              <a:lnSpc>
+                <a:spcPct val="100000"/>
+              </a:lnSpc>
+              <a:buNone/>
+              <a:tabLst>
+                <a:tab pos="0" algn="l"/>
+              </a:tabLst>
+              <a:defRPr lang="en-US" sz="1200" b="0" u="none" strike="noStrike">
+                <a:solidFill>
+                  <a:schemeClr val="dk1">
+                    <a:tint val="75000"/>
+                  </a:schemeClr>
+                </a:solidFill>
+                <a:effectLst/>
+                <a:uFillTx/>
+                <a:latin typeface="Calibri"/>
+              </a:defRPr>
+            </a:lvl1pPr>
+          </a:lstStyle>
+          <a:p>
+            <a:pPr indent="0" algn="l" defTabSz="457200">
+              <a:lnSpc>
+                <a:spcPct val="100000"/>
+              </a:lnSpc>
+              <a:buNone/>
+              <a:tabLst>
+                <a:tab pos="0" algn="l"/>
+              </a:tabLst>
+            </a:pPr>
+            <a:r>
+              <a:rPr lang="en-US" sz="1200" b="0" u="none" strike="noStrike">
+                <a:solidFill>
+                  <a:schemeClr val="dk1">
+                    <a:tint val="75000"/>
+                  </a:schemeClr>
+                </a:solidFill>
+                <a:effectLst/>
+                <a:uFillTx/>
+                <a:latin typeface="Calibri"/>
+              </a:rPr>
+              <a:t>&lt;date/time&gt;</a:t>
+            </a:r>
+            <a:endParaRPr lang="en-US" sz="1200" b="0" u="none" strike="noStrike">
+              <a:solidFill>
+                <a:srgbClr val="000000"/>
+              </a:solidFill>
+              <a:effectLst/>
+              <a:uFillTx/>
+              <a:latin typeface="Times New Roman"/>
+            </a:endParaRPr>
+          </a:p>
+        </p:txBody>
+      </p:sp>
+      <p:sp>
+        <p:nvSpPr>
+          <p:cNvPr id="21" name="PlaceHolder 3"/>
+          <p:cNvSpPr>
+            <a:spLocks noGrp="1"/>
+          </p:cNvSpPr>
+          <p:nvPr>
+            <p:ph type="ftr" idx="11"/>
+          </p:nvPr>
+        </p:nvSpPr>
+        <p:spPr>
+          <a:xfrm>
+            <a:off x="3124080" y="6356520"/>
+            <a:ext cx="2894760" cy="364320"/>
+          </a:xfrm>
+          <a:prstGeom prst="rect">
+            <a:avLst/>
+          </a:prstGeom>
+          <a:noFill/>
+          <a:ln w="0">
+            <a:noFill/>
+          </a:ln>
+        </p:spPr>
+        <p:txBody>
+          <a:bodyPr lIns="91440" tIns="45720" rIns="91440" bIns="45720" anchor="ctr">
+            <a:noAutofit/>
+          </a:bodyPr>
+          <a:lstStyle>
+            <a:lvl1pPr indent="0" algn="ctr">
+              <a:lnSpc>
+                <a:spcPct val="100000"/>
+              </a:lnSpc>
+              <a:buNone/>
+              <a:tabLst>
+                <a:tab pos="0" algn="l"/>
+              </a:tabLst>
+              <a:defRPr lang="en-US" sz="1400" b="0" u="none" strike="noStrike">
+                <a:solidFill>
+                  <a:srgbClr val="000000"/>
+                </a:solidFill>
+                <a:effectLst/>
+                <a:uFillTx/>
+                <a:latin typeface="Times New Roman"/>
+              </a:defRPr>
+            </a:lvl1pPr>
+          </a:lstStyle>
+          <a:p>
+            <a:pPr indent="0" algn="ctr">
+              <a:lnSpc>
+                <a:spcPct val="100000"/>
+              </a:lnSpc>
+              <a:buNone/>
+              <a:tabLst>
+                <a:tab pos="0" algn="l"/>
+              </a:tabLst>
+            </a:pPr>
+            <a:r>
+              <a:rPr lang="en-US" sz="1400" b="0" u="none" strike="noStrike">
+                <a:solidFill>
+                  <a:srgbClr val="000000"/>
+                </a:solidFill>
+                <a:effectLst/>
+                <a:uFillTx/>
+                <a:latin typeface="Times New Roman"/>
+              </a:rPr>
+              <a:t>&lt;footer&gt;</a:t>
+            </a:r>
+            <a:endParaRPr lang="en-US" sz="1400" b="0" u="none" strike="noStrike">
+              <a:solidFill>
+                <a:srgbClr val="000000"/>
+              </a:solidFill>
+              <a:effectLst/>
+              <a:uFillTx/>
+              <a:latin typeface="Times New Roman"/>
+            </a:endParaRPr>
+          </a:p>
+        </p:txBody>
+      </p:sp>
+      <p:sp>
+        <p:nvSpPr>
+          <p:cNvPr id="22" name="PlaceHolder 4"/>
+          <p:cNvSpPr>
+            <a:spLocks noGrp="1"/>
+          </p:cNvSpPr>
+          <p:nvPr>
+            <p:ph type="sldNum" idx="12"/>
+          </p:nvPr>
+        </p:nvSpPr>
+        <p:spPr>
+          <a:xfrm>
+            <a:off x="6553080" y="6356520"/>
+            <a:ext cx="2133000" cy="364320"/>
+          </a:xfrm>
+          <a:prstGeom prst="rect">
+            <a:avLst/>
+          </a:prstGeom>
+          <a:noFill/>
+          <a:ln w="0">
+            <a:noFill/>
+          </a:ln>
+        </p:spPr>
+        <p:txBody>
+          <a:bodyPr lIns="91440" tIns="45720" rIns="91440" bIns="45720" anchor="ctr">
+            <a:noAutofit/>
+          </a:bodyPr>
+          <a:lstStyle>
+            <a:lvl1pPr indent="0" algn="r" defTabSz="457200">
+              <a:lnSpc>
+                <a:spcPct val="100000"/>
+              </a:lnSpc>
+              <a:buNone/>
+              <a:tabLst>
+                <a:tab pos="0" algn="l"/>
+              </a:tabLst>
+              <a:defRPr lang="en-US" sz="1200" b="0" u="none" strike="noStrike">
+                <a:solidFill>
+                  <a:schemeClr val="dk1">
+                    <a:tint val="75000"/>
+                  </a:schemeClr>
+                </a:solidFill>
+                <a:effectLst/>
+                <a:uFillTx/>
+                <a:latin typeface="Calibri"/>
+              </a:defRPr>
+            </a:lvl1pPr>
+          </a:lstStyle>
+          <a:p>
+            <a:pPr indent="0" algn="r" defTabSz="457200">
+              <a:lnSpc>
+                <a:spcPct val="100000"/>
+              </a:lnSpc>
+              <a:buNone/>
+              <a:tabLst>
+                <a:tab pos="0" algn="l"/>
+              </a:tabLst>
+            </a:pPr>
+            <a:fld id="{F59071BB-22D4-4425-8447-9CD08CCCF274}" type="slidenum">
+              <a:rPr lang="en-US" sz="1200" b="0" u="none" strike="noStrike">
+                <a:solidFill>
+                  <a:schemeClr val="dk1">
+                    <a:tint val="75000"/>
+                  </a:schemeClr>
+                </a:solidFill>
+                <a:effectLst/>
+                <a:uFillTx/>
+                <a:latin typeface="Calibri"/>
+              </a:rPr>
+              <a:t>&lt;number&gt;</a:t>
+            </a:fld>
+            <a:endParaRPr lang="en-US" sz="1200" b="0" u="none" strike="noStrike">
+              <a:solidFill>
+                <a:srgbClr val="000000"/>
+              </a:solidFill>
+              <a:effectLst/>
+              <a:uFillTx/>
+              <a:latin typeface="Times New Roman"/>
+            </a:endParaRPr>
+          </a:p>
+        </p:txBody>
+      </p:sp>
+    </p:spTree>
+  </p:cSld>
+</p:sldLayout>
+</file>
+
+<file path=ppt/slideLayouts/slideLayout5.xml><?xml version="1.0" encoding="utf-8"?>
 <p:sldLayout xmlns:a="http://schemas.openxmlformats.org/drawingml/2006/main" xmlns:p="http://schemas.openxmlformats.org/presentationml/2006/main" xmlns:r="http://schemas.openxmlformats.org/officeDocument/2006/relationships" xmlns:p14="http://schemas.microsoft.com/office/powerpoint/2010/main" xmlns:p15="http://schemas.microsoft.com/office/powerpoint/2012/main" xmlns:mc="http://schemas.openxmlformats.org/markup-compatibility/2006" type="vertTx" preserve="1">
   <p:cSld name="Title and Vertical Text">
     <p:bg>
@@ -1880,7 +4363,7 @@
       </p:grpSpPr>
       <p:sp>
         <p:nvSpPr>
-          <p:cNvPr id="6" name="PlaceHolder 1"/>
+          <p:cNvPr id="23" name="PlaceHolder 1"/>
           <p:cNvSpPr>
             <a:spLocks noGrp="1"/>
           </p:cNvSpPr>
@@ -1891,7 +4374,7 @@
         <p:spPr>
           <a:xfrm>
             <a:off x="457200" y="274680"/>
-            <a:ext cx="8229240" cy="1142640"/>
+            <a:ext cx="8228880" cy="1142280"/>
           </a:xfrm>
           <a:prstGeom prst="rect">
             <a:avLst/>
@@ -1911,6 +4394,9 @@
                 <a:spcPct val="100000"/>
               </a:lnSpc>
               <a:buNone/>
+              <a:tabLst>
+                <a:tab pos="0" algn="l"/>
+              </a:tabLst>
               <a:defRPr lang="en-US" sz="4400" b="0" u="none" strike="noStrike">
                 <a:solidFill>
                   <a:schemeClr val="dk1"/>
@@ -1927,6 +4413,9 @@
                 <a:spcPct val="100000"/>
               </a:lnSpc>
               <a:buNone/>
+              <a:tabLst>
+                <a:tab pos="0" algn="l"/>
+              </a:tabLst>
             </a:pPr>
             <a:r>
               <a:rPr lang="en-US" sz="4400" b="0" u="none" strike="noStrike">
@@ -1952,7 +4441,7 @@
       </p:sp>
       <p:sp>
         <p:nvSpPr>
-          <p:cNvPr id="7" name="PlaceHolder 2"/>
+          <p:cNvPr id="24" name="PlaceHolder 2"/>
           <p:cNvSpPr>
             <a:spLocks noGrp="1"/>
           </p:cNvSpPr>
@@ -1963,7 +4452,7 @@
         <p:spPr>
           <a:xfrm>
             <a:off x="457200" y="1600200"/>
-            <a:ext cx="8229240" cy="4525560"/>
+            <a:ext cx="8228880" cy="4525200"/>
           </a:xfrm>
           <a:prstGeom prst="rect">
             <a:avLst/>
@@ -2258,18 +4747,18 @@
       </p:sp>
       <p:sp>
         <p:nvSpPr>
-          <p:cNvPr id="8" name="PlaceHolder 3"/>
+          <p:cNvPr id="25" name="PlaceHolder 3"/>
           <p:cNvSpPr>
             <a:spLocks noGrp="1"/>
           </p:cNvSpPr>
           <p:nvPr>
-            <p:ph type="dt" idx="4"/>
+            <p:ph type="dt" idx="13"/>
           </p:nvPr>
         </p:nvSpPr>
         <p:spPr>
           <a:xfrm>
             <a:off x="457200" y="6356520"/>
-            <a:ext cx="2133360" cy="364680"/>
+            <a:ext cx="2133000" cy="364320"/>
           </a:xfrm>
           <a:prstGeom prst="rect">
             <a:avLst/>
@@ -2289,6 +4778,9 @@
                 <a:spcPct val="100000"/>
               </a:lnSpc>
               <a:buNone/>
+              <a:tabLst>
+                <a:tab pos="0" algn="l"/>
+              </a:tabLst>
               <a:defRPr lang="en-US" sz="1200" b="0" u="none" strike="noStrike">
                 <a:solidFill>
                   <a:schemeClr val="dk1">
@@ -2307,6 +4799,9 @@
                 <a:spcPct val="100000"/>
               </a:lnSpc>
               <a:buNone/>
+              <a:tabLst>
+                <a:tab pos="0" algn="l"/>
+              </a:tabLst>
             </a:pPr>
             <a:r>
               <a:rPr lang="en-US" sz="1200" b="0" u="none" strike="noStrike">
@@ -2334,18 +4829,18 @@
       </p:sp>
       <p:sp>
         <p:nvSpPr>
-          <p:cNvPr id="9" name="PlaceHolder 4"/>
+          <p:cNvPr id="26" name="PlaceHolder 4"/>
           <p:cNvSpPr>
             <a:spLocks noGrp="1"/>
           </p:cNvSpPr>
           <p:nvPr>
-            <p:ph type="ftr" idx="5"/>
+            <p:ph type="ftr" idx="14"/>
           </p:nvPr>
         </p:nvSpPr>
         <p:spPr>
           <a:xfrm>
             <a:off x="3124080" y="6356520"/>
-            <a:ext cx="2895120" cy="364680"/>
+            <a:ext cx="2894760" cy="364320"/>
           </a:xfrm>
           <a:prstGeom prst="rect">
             <a:avLst/>
@@ -2361,7 +4856,13 @@
           </a:bodyPr>
           <a:lstStyle>
             <a:lvl1pPr indent="0" algn="ctr">
+              <a:lnSpc>
+                <a:spcPct val="100000"/>
+              </a:lnSpc>
               <a:buNone/>
+              <a:tabLst>
+                <a:tab pos="0" algn="l"/>
+              </a:tabLst>
               <a:defRPr lang="en-US" sz="1400" b="0" u="none" strike="noStrike">
                 <a:solidFill>
                   <a:srgbClr val="000000"/>
@@ -2374,7 +4875,13 @@
           </a:lstStyle>
           <a:p>
             <a:pPr indent="0" algn="ctr">
+              <a:lnSpc>
+                <a:spcPct val="100000"/>
+              </a:lnSpc>
               <a:buNone/>
+              <a:tabLst>
+                <a:tab pos="0" algn="l"/>
+              </a:tabLst>
             </a:pPr>
             <a:r>
               <a:rPr lang="en-US" sz="1400" b="0" u="none" strike="noStrike">
@@ -2400,18 +4907,18 @@
       </p:sp>
       <p:sp>
         <p:nvSpPr>
-          <p:cNvPr id="10" name="PlaceHolder 5"/>
+          <p:cNvPr id="27" name="PlaceHolder 5"/>
           <p:cNvSpPr>
             <a:spLocks noGrp="1"/>
           </p:cNvSpPr>
           <p:nvPr>
-            <p:ph type="sldNum" idx="6"/>
+            <p:ph type="sldNum" idx="15"/>
           </p:nvPr>
         </p:nvSpPr>
         <p:spPr>
           <a:xfrm>
             <a:off x="6553080" y="6356520"/>
-            <a:ext cx="2133360" cy="364680"/>
+            <a:ext cx="2133000" cy="364320"/>
           </a:xfrm>
           <a:prstGeom prst="rect">
             <a:avLst/>
@@ -2431,6 +4938,9 @@
                 <a:spcPct val="100000"/>
               </a:lnSpc>
               <a:buNone/>
+              <a:tabLst>
+                <a:tab pos="0" algn="l"/>
+              </a:tabLst>
               <a:defRPr lang="en-US" sz="1200" b="0" u="none" strike="noStrike">
                 <a:solidFill>
                   <a:schemeClr val="dk1">
@@ -2449,8 +4959,11 @@
                 <a:spcPct val="100000"/>
               </a:lnSpc>
               <a:buNone/>
-            </a:pPr>
-            <a:fld id="{666B4290-CCC2-495B-89E8-A50005A1071D}" type="slidenum">
+              <a:tabLst>
+                <a:tab pos="0" algn="l"/>
+              </a:tabLst>
+            </a:pPr>
+            <a:fld id="{34E1ECCA-58BA-491B-8322-657F608C4EEB}" type="slidenum">
               <a:rPr lang="en-US" sz="1200" b="0" u="none" strike="noStrike">
                 <a:solidFill>
                   <a:schemeClr val="dk1">
@@ -2479,7 +4992,7 @@
 </p:sldLayout>
 </file>
 
-<file path=ppt/slideLayouts/slideLayout3.xml><?xml version="1.0" encoding="utf-8"?>
+<file path=ppt/slideLayouts/slideLayout6.xml><?xml version="1.0" encoding="utf-8"?>
 <p:sldLayout xmlns:a="http://schemas.openxmlformats.org/drawingml/2006/main" xmlns:p="http://schemas.openxmlformats.org/presentationml/2006/main" xmlns:r="http://schemas.openxmlformats.org/officeDocument/2006/relationships" xmlns:p14="http://schemas.microsoft.com/office/powerpoint/2010/main" xmlns:p15="http://schemas.microsoft.com/office/powerpoint/2012/main" xmlns:mc="http://schemas.openxmlformats.org/markup-compatibility/2006" type="vertTitleAndTx" preserve="1">
   <p:cSld name="Vertical Title and Text">
     <p:bg>
@@ -2505,7 +5018,7 @@
       </p:grpSpPr>
       <p:sp>
         <p:nvSpPr>
-          <p:cNvPr id="11" name="PlaceHolder 1"/>
+          <p:cNvPr id="28" name="PlaceHolder 1"/>
           <p:cNvSpPr>
             <a:spLocks noGrp="1"/>
           </p:cNvSpPr>
@@ -2516,7 +5029,7 @@
         <p:spPr>
           <a:xfrm>
             <a:off x="6629400" y="274680"/>
-            <a:ext cx="2057040" cy="5851080"/>
+            <a:ext cx="2056680" cy="5850720"/>
           </a:xfrm>
           <a:prstGeom prst="rect">
             <a:avLst/>
@@ -2536,6 +5049,9 @@
                 <a:spcPct val="100000"/>
               </a:lnSpc>
               <a:buNone/>
+              <a:tabLst>
+                <a:tab pos="0" algn="l"/>
+              </a:tabLst>
               <a:defRPr lang="en-US" sz="4400" b="0" u="none" strike="noStrike">
                 <a:solidFill>
                   <a:schemeClr val="dk1"/>
@@ -2552,6 +5068,9 @@
                 <a:spcPct val="100000"/>
               </a:lnSpc>
               <a:buNone/>
+              <a:tabLst>
+                <a:tab pos="0" algn="l"/>
+              </a:tabLst>
             </a:pPr>
             <a:r>
               <a:rPr lang="en-US" sz="4400" b="0" u="none" strike="noStrike">
@@ -2577,7 +5096,7 @@
       </p:sp>
       <p:sp>
         <p:nvSpPr>
-          <p:cNvPr id="12" name="PlaceHolder 2"/>
+          <p:cNvPr id="29" name="PlaceHolder 2"/>
           <p:cNvSpPr>
             <a:spLocks noGrp="1"/>
           </p:cNvSpPr>
@@ -2588,7 +5107,7 @@
         <p:spPr>
           <a:xfrm>
             <a:off x="457200" y="274680"/>
-            <a:ext cx="6019560" cy="5851080"/>
+            <a:ext cx="6019200" cy="5850720"/>
           </a:xfrm>
           <a:prstGeom prst="rect">
             <a:avLst/>
@@ -2883,18 +5402,18 @@
       </p:sp>
       <p:sp>
         <p:nvSpPr>
-          <p:cNvPr id="13" name="PlaceHolder 3"/>
+          <p:cNvPr id="30" name="PlaceHolder 3"/>
           <p:cNvSpPr>
             <a:spLocks noGrp="1"/>
           </p:cNvSpPr>
           <p:nvPr>
-            <p:ph type="dt" idx="7"/>
+            <p:ph type="dt" idx="16"/>
           </p:nvPr>
         </p:nvSpPr>
         <p:spPr>
           <a:xfrm>
             <a:off x="457200" y="6356520"/>
-            <a:ext cx="2133360" cy="364680"/>
+            <a:ext cx="2133000" cy="364320"/>
           </a:xfrm>
           <a:prstGeom prst="rect">
             <a:avLst/>
@@ -2914,6 +5433,9 @@
                 <a:spcPct val="100000"/>
               </a:lnSpc>
               <a:buNone/>
+              <a:tabLst>
+                <a:tab pos="0" algn="l"/>
+              </a:tabLst>
               <a:defRPr lang="en-US" sz="1200" b="0" u="none" strike="noStrike">
                 <a:solidFill>
                   <a:schemeClr val="dk1">
@@ -2932,6 +5454,9 @@
                 <a:spcPct val="100000"/>
               </a:lnSpc>
               <a:buNone/>
+              <a:tabLst>
+                <a:tab pos="0" algn="l"/>
+              </a:tabLst>
             </a:pPr>
             <a:r>
               <a:rPr lang="en-US" sz="1200" b="0" u="none" strike="noStrike">
@@ -2959,18 +5484,18 @@
       </p:sp>
       <p:sp>
         <p:nvSpPr>
-          <p:cNvPr id="14" name="PlaceHolder 4"/>
+          <p:cNvPr id="31" name="PlaceHolder 4"/>
           <p:cNvSpPr>
             <a:spLocks noGrp="1"/>
           </p:cNvSpPr>
           <p:nvPr>
-            <p:ph type="ftr" idx="8"/>
+            <p:ph type="ftr" idx="17"/>
           </p:nvPr>
         </p:nvSpPr>
         <p:spPr>
           <a:xfrm>
             <a:off x="3124080" y="6356520"/>
-            <a:ext cx="2895120" cy="364680"/>
+            <a:ext cx="2894760" cy="364320"/>
           </a:xfrm>
           <a:prstGeom prst="rect">
             <a:avLst/>
@@ -2986,7 +5511,13 @@
           </a:bodyPr>
           <a:lstStyle>
             <a:lvl1pPr indent="0" algn="ctr">
+              <a:lnSpc>
+                <a:spcPct val="100000"/>
+              </a:lnSpc>
               <a:buNone/>
+              <a:tabLst>
+                <a:tab pos="0" algn="l"/>
+              </a:tabLst>
               <a:defRPr lang="en-US" sz="1400" b="0" u="none" strike="noStrike">
                 <a:solidFill>
                   <a:srgbClr val="000000"/>
@@ -2999,7 +5530,13 @@
           </a:lstStyle>
           <a:p>
             <a:pPr indent="0" algn="ctr">
+              <a:lnSpc>
+                <a:spcPct val="100000"/>
+              </a:lnSpc>
               <a:buNone/>
+              <a:tabLst>
+                <a:tab pos="0" algn="l"/>
+              </a:tabLst>
             </a:pPr>
             <a:r>
               <a:rPr lang="en-US" sz="1400" b="0" u="none" strike="noStrike">
@@ -3025,18 +5562,18 @@
       </p:sp>
       <p:sp>
         <p:nvSpPr>
-          <p:cNvPr id="15" name="PlaceHolder 5"/>
+          <p:cNvPr id="32" name="PlaceHolder 5"/>
           <p:cNvSpPr>
             <a:spLocks noGrp="1"/>
           </p:cNvSpPr>
           <p:nvPr>
-            <p:ph type="sldNum" idx="9"/>
+            <p:ph type="sldNum" idx="18"/>
           </p:nvPr>
         </p:nvSpPr>
         <p:spPr>
           <a:xfrm>
             <a:off x="6553080" y="6356520"/>
-            <a:ext cx="2133360" cy="364680"/>
+            <a:ext cx="2133000" cy="364320"/>
           </a:xfrm>
           <a:prstGeom prst="rect">
             <a:avLst/>
@@ -3056,6 +5593,9 @@
                 <a:spcPct val="100000"/>
               </a:lnSpc>
               <a:buNone/>
+              <a:tabLst>
+                <a:tab pos="0" algn="l"/>
+              </a:tabLst>
               <a:defRPr lang="en-US" sz="1200" b="0" u="none" strike="noStrike">
                 <a:solidFill>
                   <a:schemeClr val="dk1">
@@ -3074,8 +5614,11 @@
                 <a:spcPct val="100000"/>
               </a:lnSpc>
               <a:buNone/>
-            </a:pPr>
-            <a:fld id="{5D543742-B9E9-41B8-8579-6DB8535C6A28}" type="slidenum">
+              <a:tabLst>
+                <a:tab pos="0" algn="l"/>
+              </a:tabLst>
+            </a:pPr>
+            <a:fld id="{77B24DB6-B862-4737-9872-EE5B264517B4}" type="slidenum">
               <a:rPr lang="en-US" sz="1200" b="0" u="none" strike="noStrike">
                 <a:solidFill>
                   <a:schemeClr val="dk1">
@@ -3104,7 +5647,7 @@
 </p:sldLayout>
 </file>
 
-<file path=ppt/slideLayouts/slideLayout4.xml><?xml version="1.0" encoding="utf-8"?>
+<file path=ppt/slideLayouts/slideLayout7.xml><?xml version="1.0" encoding="utf-8"?>
 <p:sldLayout xmlns:a="http://schemas.openxmlformats.org/drawingml/2006/main" xmlns:p="http://schemas.openxmlformats.org/presentationml/2006/main" xmlns:r="http://schemas.openxmlformats.org/officeDocument/2006/relationships" xmlns:p14="http://schemas.microsoft.com/office/powerpoint/2010/main" xmlns:p15="http://schemas.microsoft.com/office/powerpoint/2012/main" xmlns:mc="http://schemas.openxmlformats.org/markup-compatibility/2006" type="obj" preserve="1">
   <p:cSld name="Title and Content">
     <p:bg>
@@ -3130,7 +5673,7 @@
       </p:grpSpPr>
       <p:sp>
         <p:nvSpPr>
-          <p:cNvPr id="16" name="PlaceHolder 1"/>
+          <p:cNvPr id="33" name="PlaceHolder 1"/>
           <p:cNvSpPr>
             <a:spLocks noGrp="1"/>
           </p:cNvSpPr>
@@ -3141,7 +5684,7 @@
         <p:spPr>
           <a:xfrm>
             <a:off x="457200" y="274680"/>
-            <a:ext cx="8229240" cy="1142640"/>
+            <a:ext cx="8228880" cy="1142280"/>
           </a:xfrm>
           <a:prstGeom prst="rect">
             <a:avLst/>
@@ -3161,6 +5704,9 @@
                 <a:spcPct val="100000"/>
               </a:lnSpc>
               <a:buNone/>
+              <a:tabLst>
+                <a:tab pos="0" algn="l"/>
+              </a:tabLst>
               <a:defRPr lang="en-US" sz="4400" b="0" u="none" strike="noStrike">
                 <a:solidFill>
                   <a:schemeClr val="dk1"/>
@@ -3177,6 +5723,9 @@
                 <a:spcPct val="100000"/>
               </a:lnSpc>
               <a:buNone/>
+              <a:tabLst>
+                <a:tab pos="0" algn="l"/>
+              </a:tabLst>
             </a:pPr>
             <a:r>
               <a:rPr lang="en-US" sz="4400" b="0" u="none" strike="noStrike">
@@ -3202,7 +5751,7 @@
       </p:sp>
       <p:sp>
         <p:nvSpPr>
-          <p:cNvPr id="17" name="PlaceHolder 2"/>
+          <p:cNvPr id="34" name="PlaceHolder 2"/>
           <p:cNvSpPr>
             <a:spLocks noGrp="1"/>
           </p:cNvSpPr>
@@ -3213,7 +5762,7 @@
         <p:spPr>
           <a:xfrm>
             <a:off x="457200" y="1600200"/>
-            <a:ext cx="8229240" cy="4525560"/>
+            <a:ext cx="8228880" cy="4525200"/>
           </a:xfrm>
           <a:prstGeom prst="rect">
             <a:avLst/>
@@ -3508,18 +6057,18 @@
       </p:sp>
       <p:sp>
         <p:nvSpPr>
-          <p:cNvPr id="18" name="PlaceHolder 3"/>
+          <p:cNvPr id="35" name="PlaceHolder 3"/>
           <p:cNvSpPr>
             <a:spLocks noGrp="1"/>
           </p:cNvSpPr>
           <p:nvPr>
-            <p:ph type="dt" idx="10"/>
+            <p:ph type="dt" idx="19"/>
           </p:nvPr>
         </p:nvSpPr>
         <p:spPr>
           <a:xfrm>
             <a:off x="457200" y="6356520"/>
-            <a:ext cx="2133360" cy="364680"/>
+            <a:ext cx="2133000" cy="364320"/>
           </a:xfrm>
           <a:prstGeom prst="rect">
             <a:avLst/>
@@ -3539,6 +6088,9 @@
                 <a:spcPct val="100000"/>
               </a:lnSpc>
               <a:buNone/>
+              <a:tabLst>
+                <a:tab pos="0" algn="l"/>
+              </a:tabLst>
               <a:defRPr lang="en-US" sz="1200" b="0" u="none" strike="noStrike">
                 <a:solidFill>
                   <a:schemeClr val="dk1">
@@ -3557,6 +6109,9 @@
                 <a:spcPct val="100000"/>
               </a:lnSpc>
               <a:buNone/>
+              <a:tabLst>
+                <a:tab pos="0" algn="l"/>
+              </a:tabLst>
             </a:pPr>
             <a:r>
               <a:rPr lang="en-US" sz="1200" b="0" u="none" strike="noStrike">
@@ -3584,18 +6139,18 @@
       </p:sp>
       <p:sp>
         <p:nvSpPr>
-          <p:cNvPr id="19" name="PlaceHolder 4"/>
+          <p:cNvPr id="36" name="PlaceHolder 4"/>
           <p:cNvSpPr>
             <a:spLocks noGrp="1"/>
           </p:cNvSpPr>
           <p:nvPr>
-            <p:ph type="ftr" idx="11"/>
+            <p:ph type="ftr" idx="20"/>
           </p:nvPr>
         </p:nvSpPr>
         <p:spPr>
           <a:xfrm>
             <a:off x="3124080" y="6356520"/>
-            <a:ext cx="2895120" cy="364680"/>
+            <a:ext cx="2894760" cy="364320"/>
           </a:xfrm>
           <a:prstGeom prst="rect">
             <a:avLst/>
@@ -3611,7 +6166,13 @@
           </a:bodyPr>
           <a:lstStyle>
             <a:lvl1pPr indent="0" algn="ctr">
+              <a:lnSpc>
+                <a:spcPct val="100000"/>
+              </a:lnSpc>
               <a:buNone/>
+              <a:tabLst>
+                <a:tab pos="0" algn="l"/>
+              </a:tabLst>
               <a:defRPr lang="en-US" sz="1400" b="0" u="none" strike="noStrike">
                 <a:solidFill>
                   <a:srgbClr val="000000"/>
@@ -3624,7 +6185,13 @@
           </a:lstStyle>
           <a:p>
             <a:pPr indent="0" algn="ctr">
+              <a:lnSpc>
+                <a:spcPct val="100000"/>
+              </a:lnSpc>
               <a:buNone/>
+              <a:tabLst>
+                <a:tab pos="0" algn="l"/>
+              </a:tabLst>
             </a:pPr>
             <a:r>
               <a:rPr lang="en-US" sz="1400" b="0" u="none" strike="noStrike">
@@ -3650,18 +6217,18 @@
       </p:sp>
       <p:sp>
         <p:nvSpPr>
-          <p:cNvPr id="20" name="PlaceHolder 5"/>
+          <p:cNvPr id="37" name="PlaceHolder 5"/>
           <p:cNvSpPr>
             <a:spLocks noGrp="1"/>
           </p:cNvSpPr>
           <p:nvPr>
-            <p:ph type="sldNum" idx="12"/>
+            <p:ph type="sldNum" idx="21"/>
           </p:nvPr>
         </p:nvSpPr>
         <p:spPr>
           <a:xfrm>
             <a:off x="6553080" y="6356520"/>
-            <a:ext cx="2133360" cy="364680"/>
+            <a:ext cx="2133000" cy="364320"/>
           </a:xfrm>
           <a:prstGeom prst="rect">
             <a:avLst/>
@@ -3681,6 +6248,9 @@
                 <a:spcPct val="100000"/>
               </a:lnSpc>
               <a:buNone/>
+              <a:tabLst>
+                <a:tab pos="0" algn="l"/>
+              </a:tabLst>
               <a:defRPr lang="en-US" sz="1200" b="0" u="none" strike="noStrike">
                 <a:solidFill>
                   <a:schemeClr val="dk1">
@@ -3699,8 +6269,11 @@
                 <a:spcPct val="100000"/>
               </a:lnSpc>
               <a:buNone/>
-            </a:pPr>
-            <a:fld id="{37EBED25-6496-431E-8F20-127C6DA503B0}" type="slidenum">
+              <a:tabLst>
+                <a:tab pos="0" algn="l"/>
+              </a:tabLst>
+            </a:pPr>
+            <a:fld id="{C554D95B-ED82-4F0B-A789-35E5873C4FC0}" type="slidenum">
               <a:rPr lang="en-US" sz="1200" b="0" u="none" strike="noStrike">
                 <a:solidFill>
                   <a:schemeClr val="dk1">
@@ -3729,7 +6302,7 @@
 </p:sldLayout>
 </file>
 
-<file path=ppt/slideLayouts/slideLayout5.xml><?xml version="1.0" encoding="utf-8"?>
+<file path=ppt/slideLayouts/slideLayout8.xml><?xml version="1.0" encoding="utf-8"?>
 <p:sldLayout xmlns:a="http://schemas.openxmlformats.org/drawingml/2006/main" xmlns:p="http://schemas.openxmlformats.org/presentationml/2006/main" xmlns:r="http://schemas.openxmlformats.org/officeDocument/2006/relationships" xmlns:p14="http://schemas.microsoft.com/office/powerpoint/2010/main" xmlns:p15="http://schemas.microsoft.com/office/powerpoint/2012/main" xmlns:mc="http://schemas.openxmlformats.org/markup-compatibility/2006" type="blank" preserve="1">
   <p:cSld name="Section Header">
     <p:bg>
@@ -3755,7 +6328,7 @@
       </p:grpSpPr>
       <p:sp>
         <p:nvSpPr>
-          <p:cNvPr id="21" name="PlaceHolder 1"/>
+          <p:cNvPr id="38" name="PlaceHolder 1"/>
           <p:cNvSpPr>
             <a:spLocks noGrp="1"/>
           </p:cNvSpPr>
@@ -3766,7 +6339,7 @@
         <p:spPr>
           <a:xfrm>
             <a:off x="722160" y="4406760"/>
-            <a:ext cx="7772040" cy="1361880"/>
+            <a:ext cx="7771680" cy="1361520"/>
           </a:xfrm>
           <a:prstGeom prst="rect">
             <a:avLst/>
@@ -3786,6 +6359,9 @@
                 <a:spcPct val="100000"/>
               </a:lnSpc>
               <a:buNone/>
+              <a:tabLst>
+                <a:tab pos="0" algn="l"/>
+              </a:tabLst>
               <a:defRPr lang="en-US" sz="4000" b="1" u="none" strike="noStrike" cap="all">
                 <a:solidFill>
                   <a:schemeClr val="dk1"/>
@@ -3802,6 +6378,9 @@
                 <a:spcPct val="100000"/>
               </a:lnSpc>
               <a:buNone/>
+              <a:tabLst>
+                <a:tab pos="0" algn="l"/>
+              </a:tabLst>
             </a:pPr>
             <a:r>
               <a:rPr lang="en-US" sz="4000" b="1" u="none" strike="noStrike" cap="all">
@@ -3827,7 +6406,7 @@
       </p:sp>
       <p:sp>
         <p:nvSpPr>
-          <p:cNvPr id="22" name="PlaceHolder 2"/>
+          <p:cNvPr id="39" name="PlaceHolder 2"/>
           <p:cNvSpPr>
             <a:spLocks noGrp="1"/>
           </p:cNvSpPr>
@@ -3838,7 +6417,7 @@
         <p:spPr>
           <a:xfrm>
             <a:off x="722160" y="2906640"/>
-            <a:ext cx="7772040" cy="1499760"/>
+            <a:ext cx="7771680" cy="1499400"/>
           </a:xfrm>
           <a:prstGeom prst="rect">
             <a:avLst/>
@@ -3917,18 +6496,18 @@
       </p:sp>
       <p:sp>
         <p:nvSpPr>
-          <p:cNvPr id="23" name="PlaceHolder 3"/>
+          <p:cNvPr id="40" name="PlaceHolder 3"/>
           <p:cNvSpPr>
             <a:spLocks noGrp="1"/>
           </p:cNvSpPr>
           <p:nvPr>
-            <p:ph type="dt" idx="13"/>
+            <p:ph type="dt" idx="22"/>
           </p:nvPr>
         </p:nvSpPr>
         <p:spPr>
           <a:xfrm>
             <a:off x="457200" y="6356520"/>
-            <a:ext cx="2133360" cy="364680"/>
+            <a:ext cx="2133000" cy="364320"/>
           </a:xfrm>
           <a:prstGeom prst="rect">
             <a:avLst/>
@@ -3948,6 +6527,9 @@
                 <a:spcPct val="100000"/>
               </a:lnSpc>
               <a:buNone/>
+              <a:tabLst>
+                <a:tab pos="0" algn="l"/>
+              </a:tabLst>
               <a:defRPr lang="en-US" sz="1200" b="0" u="none" strike="noStrike">
                 <a:solidFill>
                   <a:schemeClr val="dk1">
@@ -3966,6 +6548,9 @@
                 <a:spcPct val="100000"/>
               </a:lnSpc>
               <a:buNone/>
+              <a:tabLst>
+                <a:tab pos="0" algn="l"/>
+              </a:tabLst>
             </a:pPr>
             <a:r>
               <a:rPr lang="en-US" sz="1200" b="0" u="none" strike="noStrike">
@@ -3993,18 +6578,18 @@
       </p:sp>
       <p:sp>
         <p:nvSpPr>
-          <p:cNvPr id="24" name="PlaceHolder 4"/>
+          <p:cNvPr id="41" name="PlaceHolder 4"/>
           <p:cNvSpPr>
             <a:spLocks noGrp="1"/>
           </p:cNvSpPr>
           <p:nvPr>
-            <p:ph type="ftr" idx="14"/>
+            <p:ph type="ftr" idx="23"/>
           </p:nvPr>
         </p:nvSpPr>
         <p:spPr>
           <a:xfrm>
             <a:off x="3124080" y="6356520"/>
-            <a:ext cx="2895120" cy="364680"/>
+            <a:ext cx="2894760" cy="364320"/>
           </a:xfrm>
           <a:prstGeom prst="rect">
             <a:avLst/>
@@ -4020,7 +6605,13 @@
           </a:bodyPr>
           <a:lstStyle>
             <a:lvl1pPr indent="0" algn="ctr">
+              <a:lnSpc>
+                <a:spcPct val="100000"/>
+              </a:lnSpc>
               <a:buNone/>
+              <a:tabLst>
+                <a:tab pos="0" algn="l"/>
+              </a:tabLst>
               <a:defRPr lang="en-US" sz="1400" b="0" u="none" strike="noStrike">
                 <a:solidFill>
                   <a:srgbClr val="000000"/>
@@ -4033,7 +6624,13 @@
           </a:lstStyle>
           <a:p>
             <a:pPr indent="0" algn="ctr">
+              <a:lnSpc>
+                <a:spcPct val="100000"/>
+              </a:lnSpc>
               <a:buNone/>
+              <a:tabLst>
+                <a:tab pos="0" algn="l"/>
+              </a:tabLst>
             </a:pPr>
             <a:r>
               <a:rPr lang="en-US" sz="1400" b="0" u="none" strike="noStrike">
@@ -4059,18 +6656,18 @@
       </p:sp>
       <p:sp>
         <p:nvSpPr>
-          <p:cNvPr id="25" name="PlaceHolder 5"/>
+          <p:cNvPr id="42" name="PlaceHolder 5"/>
           <p:cNvSpPr>
             <a:spLocks noGrp="1"/>
           </p:cNvSpPr>
           <p:nvPr>
-            <p:ph type="sldNum" idx="15"/>
+            <p:ph type="sldNum" idx="24"/>
           </p:nvPr>
         </p:nvSpPr>
         <p:spPr>
           <a:xfrm>
             <a:off x="6553080" y="6356520"/>
-            <a:ext cx="2133360" cy="364680"/>
+            <a:ext cx="2133000" cy="364320"/>
           </a:xfrm>
           <a:prstGeom prst="rect">
             <a:avLst/>
@@ -4090,6 +6687,9 @@
                 <a:spcPct val="100000"/>
               </a:lnSpc>
               <a:buNone/>
+              <a:tabLst>
+                <a:tab pos="0" algn="l"/>
+              </a:tabLst>
               <a:defRPr lang="en-US" sz="1200" b="0" u="none" strike="noStrike">
                 <a:solidFill>
                   <a:schemeClr val="dk1">
@@ -4108,8 +6708,11 @@
                 <a:spcPct val="100000"/>
               </a:lnSpc>
               <a:buNone/>
-            </a:pPr>
-            <a:fld id="{AD8E8698-FE19-4C05-AC6B-914AF319999F}" type="slidenum">
+              <a:tabLst>
+                <a:tab pos="0" algn="l"/>
+              </a:tabLst>
+            </a:pPr>
+            <a:fld id="{3B72471C-7D1A-4E68-A3F3-BE327EB7A48E}" type="slidenum">
               <a:rPr lang="en-US" sz="1200" b="0" u="none" strike="noStrike">
                 <a:solidFill>
                   <a:schemeClr val="dk1">
@@ -4138,7 +6741,7 @@
 </p:sldLayout>
 </file>
 
-<file path=ppt/slideLayouts/slideLayout6.xml><?xml version="1.0" encoding="utf-8"?>
+<file path=ppt/slideLayouts/slideLayout9.xml><?xml version="1.0" encoding="utf-8"?>
 <p:sldLayout xmlns:a="http://schemas.openxmlformats.org/drawingml/2006/main" xmlns:p="http://schemas.openxmlformats.org/presentationml/2006/main" xmlns:r="http://schemas.openxmlformats.org/officeDocument/2006/relationships" xmlns:p14="http://schemas.microsoft.com/office/powerpoint/2010/main" xmlns:p15="http://schemas.microsoft.com/office/powerpoint/2012/main" xmlns:mc="http://schemas.openxmlformats.org/markup-compatibility/2006" type="twoObj" preserve="1">
   <p:cSld name="Two Content">
     <p:bg>
@@ -4164,7 +6767,7 @@
       </p:grpSpPr>
       <p:sp>
         <p:nvSpPr>
-          <p:cNvPr id="26" name="PlaceHolder 1"/>
+          <p:cNvPr id="43" name="PlaceHolder 1"/>
           <p:cNvSpPr>
             <a:spLocks noGrp="1"/>
           </p:cNvSpPr>
@@ -4175,7 +6778,7 @@
         <p:spPr>
           <a:xfrm>
             <a:off x="457200" y="274680"/>
-            <a:ext cx="8229240" cy="1142640"/>
+            <a:ext cx="8228880" cy="1142280"/>
           </a:xfrm>
           <a:prstGeom prst="rect">
             <a:avLst/>
@@ -4195,6 +6798,9 @@
                 <a:spcPct val="100000"/>
               </a:lnSpc>
               <a:buNone/>
+              <a:tabLst>
+                <a:tab pos="0" algn="l"/>
+              </a:tabLst>
               <a:defRPr lang="en-US" sz="4400" b="0" u="none" strike="noStrike">
                 <a:solidFill>
                   <a:schemeClr val="dk1"/>
@@ -4211,6 +6817,9 @@
                 <a:spcPct val="100000"/>
               </a:lnSpc>
               <a:buNone/>
+              <a:tabLst>
+                <a:tab pos="0" algn="l"/>
+              </a:tabLst>
             </a:pPr>
             <a:r>
               <a:rPr lang="en-US" sz="4400" b="0" u="none" strike="noStrike">
@@ -4236,7 +6845,7 @@
       </p:sp>
       <p:sp>
         <p:nvSpPr>
-          <p:cNvPr id="27" name="PlaceHolder 2"/>
+          <p:cNvPr id="44" name="PlaceHolder 2"/>
           <p:cNvSpPr>
             <a:spLocks noGrp="1"/>
           </p:cNvSpPr>
@@ -4247,7 +6856,7 @@
         <p:spPr>
           <a:xfrm>
             <a:off x="457200" y="1600200"/>
-            <a:ext cx="4038120" cy="4525560"/>
+            <a:ext cx="4037760" cy="4525200"/>
           </a:xfrm>
           <a:prstGeom prst="rect">
             <a:avLst/>
@@ -4542,7 +7151,7 @@
       </p:sp>
       <p:sp>
         <p:nvSpPr>
-          <p:cNvPr id="28" name="PlaceHolder 3"/>
+          <p:cNvPr id="45" name="PlaceHolder 3"/>
           <p:cNvSpPr>
             <a:spLocks noGrp="1"/>
           </p:cNvSpPr>
@@ -4553,7 +7162,7 @@
         <p:spPr>
           <a:xfrm>
             <a:off x="4648320" y="1600200"/>
-            <a:ext cx="4038120" cy="4525560"/>
+            <a:ext cx="4037760" cy="4525200"/>
           </a:xfrm>
           <a:prstGeom prst="rect">
             <a:avLst/>
@@ -4848,18 +7457,18 @@
       </p:sp>
       <p:sp>
         <p:nvSpPr>
-          <p:cNvPr id="29" name="PlaceHolder 4"/>
+          <p:cNvPr id="46" name="PlaceHolder 4"/>
           <p:cNvSpPr>
             <a:spLocks noGrp="1"/>
           </p:cNvSpPr>
           <p:nvPr>
-            <p:ph type="dt" idx="16"/>
+            <p:ph type="dt" idx="25"/>
           </p:nvPr>
         </p:nvSpPr>
         <p:spPr>
           <a:xfrm>
             <a:off x="457200" y="6356520"/>
-            <a:ext cx="2133360" cy="364680"/>
+            <a:ext cx="2133000" cy="364320"/>
           </a:xfrm>
           <a:prstGeom prst="rect">
             <a:avLst/>
@@ -4879,6 +7488,9 @@
                 <a:spcPct val="100000"/>
               </a:lnSpc>
               <a:buNone/>
+              <a:tabLst>
+                <a:tab pos="0" algn="l"/>
+              </a:tabLst>
               <a:defRPr lang="en-US" sz="1200" b="0" u="none" strike="noStrike">
                 <a:solidFill>
                   <a:schemeClr val="dk1">
@@ -4897,6 +7509,9 @@
                 <a:spcPct val="100000"/>
               </a:lnSpc>
               <a:buNone/>
+              <a:tabLst>
+                <a:tab pos="0" algn="l"/>
+              </a:tabLst>
             </a:pPr>
             <a:r>
               <a:rPr lang="en-US" sz="1200" b="0" u="none" strike="noStrike">
@@ -4924,18 +7539,18 @@
       </p:sp>
       <p:sp>
         <p:nvSpPr>
-          <p:cNvPr id="30" name="PlaceHolder 5"/>
+          <p:cNvPr id="47" name="PlaceHolder 5"/>
           <p:cNvSpPr>
             <a:spLocks noGrp="1"/>
           </p:cNvSpPr>
           <p:nvPr>
-            <p:ph type="ftr" idx="17"/>
+            <p:ph type="ftr" idx="26"/>
           </p:nvPr>
         </p:nvSpPr>
         <p:spPr>
           <a:xfrm>
             <a:off x="3124080" y="6356520"/>
-            <a:ext cx="2895120" cy="364680"/>
+            <a:ext cx="2894760" cy="364320"/>
           </a:xfrm>
           <a:prstGeom prst="rect">
             <a:avLst/>
@@ -4951,7 +7566,13 @@
           </a:bodyPr>
           <a:lstStyle>
             <a:lvl1pPr indent="0" algn="ctr">
+              <a:lnSpc>
+                <a:spcPct val="100000"/>
+              </a:lnSpc>
               <a:buNone/>
+              <a:tabLst>
+                <a:tab pos="0" algn="l"/>
+              </a:tabLst>
               <a:defRPr lang="en-US" sz="1400" b="0" u="none" strike="noStrike">
                 <a:solidFill>
                   <a:srgbClr val="000000"/>
@@ -4964,7 +7585,13 @@
           </a:lstStyle>
           <a:p>
             <a:pPr indent="0" algn="ctr">
+              <a:lnSpc>
+                <a:spcPct val="100000"/>
+              </a:lnSpc>
               <a:buNone/>
+              <a:tabLst>
+                <a:tab pos="0" algn="l"/>
+              </a:tabLst>
             </a:pPr>
             <a:r>
               <a:rPr lang="en-US" sz="1400" b="0" u="none" strike="noStrike">
@@ -4990,18 +7617,18 @@
       </p:sp>
       <p:sp>
         <p:nvSpPr>
-          <p:cNvPr id="31" name="PlaceHolder 6"/>
+          <p:cNvPr id="48" name="PlaceHolder 6"/>
           <p:cNvSpPr>
             <a:spLocks noGrp="1"/>
           </p:cNvSpPr>
           <p:nvPr>
-            <p:ph type="sldNum" idx="18"/>
+            <p:ph type="sldNum" idx="27"/>
           </p:nvPr>
         </p:nvSpPr>
         <p:spPr>
           <a:xfrm>
             <a:off x="6553080" y="6356520"/>
-            <a:ext cx="2133360" cy="364680"/>
+            <a:ext cx="2133000" cy="364320"/>
           </a:xfrm>
           <a:prstGeom prst="rect">
             <a:avLst/>
@@ -5021,6 +7648,9 @@
                 <a:spcPct val="100000"/>
               </a:lnSpc>
               <a:buNone/>
+              <a:tabLst>
+                <a:tab pos="0" algn="l"/>
+              </a:tabLst>
               <a:defRPr lang="en-US" sz="1200" b="0" u="none" strike="noStrike">
                 <a:solidFill>
                   <a:schemeClr val="dk1">
@@ -5038,1007 +7668,13 @@
               <a:lnSpc>
                 <a:spcPct val="100000"/>
               </a:lnSpc>
-              <a:buNone/>
-            </a:pPr>
-            <a:fld id="{A9127103-5DA9-4952-94AF-2762DE62570E}" type="slidenum">
-              <a:rPr lang="en-US" sz="1200" b="0" u="none" strike="noStrike">
-                <a:solidFill>
-                  <a:schemeClr val="dk1">
-                    <a:tint val="75000"/>
-                  </a:schemeClr>
-                </a:solidFill>
-                <a:effectLst/>
-                <a:uFillTx/>
-                <a:latin typeface="Calibri"/>
-              </a:rPr>
-              <a:t>&lt;number&gt;</a:t>
-            </a:fld>
-            <a:endParaRPr lang="en-US" sz="1200" b="0" u="none" strike="noStrike">
-              <a:solidFill>
-                <a:srgbClr val="000000"/>
-              </a:solidFill>
-              <a:effectLst/>
-              <a:uFillTx/>
-              <a:latin typeface="Times New Roman"/>
-            </a:endParaRPr>
-          </a:p>
-        </p:txBody>
-      </p:sp>
-    </p:spTree>
-  </p:cSld>
-</p:sldLayout>
-</file>
-
-<file path=ppt/slideLayouts/slideLayout7.xml><?xml version="1.0" encoding="utf-8"?>
-<p:sldLayout xmlns:a="http://schemas.openxmlformats.org/drawingml/2006/main" xmlns:p="http://schemas.openxmlformats.org/presentationml/2006/main" xmlns:r="http://schemas.openxmlformats.org/officeDocument/2006/relationships" xmlns:p14="http://schemas.microsoft.com/office/powerpoint/2010/main" xmlns:p15="http://schemas.microsoft.com/office/powerpoint/2012/main" xmlns:mc="http://schemas.openxmlformats.org/markup-compatibility/2006" type="blank" preserve="1">
-  <p:cSld name="Comparison">
-    <p:bg>
-      <p:bgPr>
-        <a:solidFill>
-          <a:srgbClr val="FFFFFF"/>
-        </a:solidFill>
-      </p:bgPr>
-    </p:bg>
-    <p:spTree>
-      <p:nvGrpSpPr>
-        <p:cNvPr id="1" name=""/>
-        <p:cNvGrpSpPr/>
-        <p:nvPr/>
-      </p:nvGrpSpPr>
-      <p:grpSpPr>
-        <a:xfrm>
-          <a:off x="0" y="0"/>
-          <a:ext cx="0" cy="0"/>
-          <a:chOff x="0" y="0"/>
-          <a:chExt cx="0" cy="0"/>
-        </a:xfrm>
-      </p:grpSpPr>
-      <p:sp>
-        <p:nvSpPr>
-          <p:cNvPr id="32" name="PlaceHolder 1"/>
-          <p:cNvSpPr>
-            <a:spLocks noGrp="1"/>
-          </p:cNvSpPr>
-          <p:nvPr>
-            <p:ph type="title"/>
-          </p:nvPr>
-        </p:nvSpPr>
-        <p:spPr>
-          <a:xfrm>
-            <a:off x="457200" y="274680"/>
-            <a:ext cx="8229240" cy="1142640"/>
-          </a:xfrm>
-          <a:prstGeom prst="rect">
-            <a:avLst/>
-          </a:prstGeom>
-          <a:noFill/>
-          <a:ln w="0">
-            <a:noFill/>
-          </a:ln>
-        </p:spPr>
-        <p:txBody>
-          <a:bodyPr lIns="91440" tIns="45720" rIns="91440" bIns="45720" anchor="ctr">
-            <a:noAutofit/>
-          </a:bodyPr>
-          <a:lstStyle>
-            <a:lvl1pPr indent="0" algn="ctr" defTabSz="457200">
-              <a:lnSpc>
-                <a:spcPct val="100000"/>
-              </a:lnSpc>
-              <a:buNone/>
-              <a:defRPr lang="en-US" sz="4400" b="0" u="none" strike="noStrike">
-                <a:solidFill>
-                  <a:schemeClr val="dk1"/>
-                </a:solidFill>
-                <a:effectLst/>
-                <a:uFillTx/>
-                <a:latin typeface="Calibri"/>
-              </a:defRPr>
-            </a:lvl1pPr>
-          </a:lstStyle>
-          <a:p>
-            <a:pPr indent="0" algn="ctr" defTabSz="457200">
-              <a:lnSpc>
-                <a:spcPct val="100000"/>
-              </a:lnSpc>
-              <a:buNone/>
-            </a:pPr>
-            <a:r>
-              <a:rPr lang="en-US" sz="4400" b="0" u="none" strike="noStrike">
-                <a:solidFill>
-                  <a:schemeClr val="dk1"/>
-                </a:solidFill>
-                <a:effectLst/>
-                <a:uFillTx/>
-                <a:latin typeface="Calibri"/>
-              </a:rPr>
-              <a:t>Click to edit Master title style</a:t>
-            </a:r>
-            <a:endParaRPr lang="en-US" sz="4400" b="0" u="none" strike="noStrike">
-              <a:solidFill>
-                <a:schemeClr val="dk1"/>
-              </a:solidFill>
-              <a:effectLst/>
-              <a:uFillTx/>
-              <a:latin typeface="Calibri"/>
-            </a:endParaRPr>
-          </a:p>
-        </p:txBody>
-      </p:sp>
-      <p:sp>
-        <p:nvSpPr>
-          <p:cNvPr id="33" name="PlaceHolder 2"/>
-          <p:cNvSpPr>
-            <a:spLocks noGrp="1"/>
-          </p:cNvSpPr>
-          <p:nvPr>
-            <p:ph type="body"/>
-          </p:nvPr>
-        </p:nvSpPr>
-        <p:spPr>
-          <a:xfrm>
-            <a:off x="457200" y="1535040"/>
-            <a:ext cx="4039920" cy="639360"/>
-          </a:xfrm>
-          <a:prstGeom prst="rect">
-            <a:avLst/>
-          </a:prstGeom>
-          <a:noFill/>
-          <a:ln w="0">
-            <a:noFill/>
-          </a:ln>
-        </p:spPr>
-        <p:txBody>
-          <a:bodyPr lIns="91440" tIns="45720" rIns="91440" bIns="45720" anchor="b">
-            <a:noAutofit/>
-          </a:bodyPr>
-          <a:lstStyle>
-            <a:lvl1pPr indent="0" algn="l" defTabSz="457200">
-              <a:lnSpc>
-                <a:spcPct val="100000"/>
-              </a:lnSpc>
-              <a:spcBef>
-                <a:spcPts val="479"/>
-              </a:spcBef>
               <a:buNone/>
               <a:tabLst>
                 <a:tab pos="0" algn="l"/>
               </a:tabLst>
-              <a:defRPr lang="en-US" sz="2400" b="1" u="none" strike="noStrike">
-                <a:solidFill>
-                  <a:schemeClr val="dk1"/>
-                </a:solidFill>
-                <a:effectLst/>
-                <a:uFillTx/>
-                <a:latin typeface="Calibri"/>
-              </a:defRPr>
-            </a:lvl1pPr>
-          </a:lstStyle>
-          <a:p>
-            <a:pPr indent="0" algn="l" defTabSz="457200">
-              <a:lnSpc>
-                <a:spcPct val="100000"/>
-              </a:lnSpc>
-              <a:spcBef>
-                <a:spcPts val="479"/>
-              </a:spcBef>
-              <a:buNone/>
-              <a:tabLst>
-                <a:tab pos="0" algn="l"/>
-              </a:tabLst>
-            </a:pPr>
-            <a:r>
-              <a:rPr lang="en-US" sz="2400" b="1" u="none" strike="noStrike">
-                <a:solidFill>
-                  <a:schemeClr val="dk1"/>
-                </a:solidFill>
-                <a:effectLst/>
-                <a:uFillTx/>
-                <a:latin typeface="Calibri"/>
-              </a:rPr>
-              <a:t>Click to edit Master text styles</a:t>
-            </a:r>
-            <a:endParaRPr lang="en-US" sz="2400" b="0" u="none" strike="noStrike">
-              <a:solidFill>
-                <a:schemeClr val="dk1"/>
-              </a:solidFill>
-              <a:effectLst/>
-              <a:uFillTx/>
-              <a:latin typeface="Calibri"/>
-            </a:endParaRPr>
-          </a:p>
-        </p:txBody>
-      </p:sp>
-      <p:sp>
-        <p:nvSpPr>
-          <p:cNvPr id="34" name="PlaceHolder 3"/>
-          <p:cNvSpPr>
-            <a:spLocks noGrp="1"/>
-          </p:cNvSpPr>
-          <p:nvPr>
-            <p:ph type="body"/>
-          </p:nvPr>
-        </p:nvSpPr>
-        <p:spPr>
-          <a:xfrm>
-            <a:off x="457200" y="2174760"/>
-            <a:ext cx="4039920" cy="3951000"/>
-          </a:xfrm>
-          <a:prstGeom prst="rect">
-            <a:avLst/>
-          </a:prstGeom>
-          <a:noFill/>
-          <a:ln w="0">
-            <a:noFill/>
-          </a:ln>
-        </p:spPr>
-        <p:txBody>
-          <a:bodyPr lIns="91440" tIns="45720" rIns="91440" bIns="45720" anchor="t">
-            <a:noAutofit/>
-          </a:bodyPr>
-          <a:lstStyle>
-            <a:lvl1pPr algn="l" defTabSz="457200">
-              <a:lnSpc>
-                <a:spcPct val="100000"/>
-              </a:lnSpc>
-              <a:spcBef>
-                <a:spcPts val="479"/>
-              </a:spcBef>
-              <a:buClr>
-                <a:srgbClr val="000000"/>
-              </a:buClr>
-              <a:buFont typeface="Arial"/>
-              <a:buChar char="•"/>
-              <a:tabLst>
-                <a:tab pos="0" algn="l"/>
-              </a:tabLst>
-              <a:defRPr lang="en-US" sz="2400" b="0" u="none" strike="noStrike">
-                <a:solidFill>
-                  <a:schemeClr val="dk1"/>
-                </a:solidFill>
-                <a:effectLst/>
-                <a:uFillTx/>
-                <a:latin typeface="Calibri"/>
-              </a:defRPr>
-            </a:lvl1pPr>
-            <a:lvl2pPr lvl="1" algn="l" defTabSz="457200">
-              <a:lnSpc>
-                <a:spcPct val="100000"/>
-              </a:lnSpc>
-              <a:spcBef>
-                <a:spcPts val="400"/>
-              </a:spcBef>
-              <a:buClr>
-                <a:srgbClr val="000000"/>
-              </a:buClr>
-              <a:buFont typeface="Arial"/>
-              <a:buChar char="–"/>
-              <a:tabLst>
-                <a:tab pos="0" algn="l"/>
-              </a:tabLst>
-              <a:defRPr lang="en-US" sz="2000" b="0" u="none" strike="noStrike">
-                <a:solidFill>
-                  <a:schemeClr val="dk1"/>
-                </a:solidFill>
-                <a:effectLst/>
-                <a:uFillTx/>
-                <a:latin typeface="Calibri"/>
-              </a:defRPr>
-            </a:lvl2pPr>
-            <a:lvl3pPr lvl="2" algn="l" defTabSz="457200">
-              <a:lnSpc>
-                <a:spcPct val="100000"/>
-              </a:lnSpc>
-              <a:spcBef>
-                <a:spcPts val="360"/>
-              </a:spcBef>
-              <a:buClr>
-                <a:srgbClr val="000000"/>
-              </a:buClr>
-              <a:buFont typeface="Arial"/>
-              <a:buChar char="•"/>
-              <a:tabLst>
-                <a:tab pos="0" algn="l"/>
-              </a:tabLst>
-              <a:defRPr lang="en-US" sz="1800" b="0" u="none" strike="noStrike">
-                <a:solidFill>
-                  <a:schemeClr val="dk1"/>
-                </a:solidFill>
-                <a:effectLst/>
-                <a:uFillTx/>
-                <a:latin typeface="Calibri"/>
-              </a:defRPr>
-            </a:lvl3pPr>
-            <a:lvl4pPr lvl="3" algn="l" defTabSz="457200">
-              <a:lnSpc>
-                <a:spcPct val="100000"/>
-              </a:lnSpc>
-              <a:spcBef>
-                <a:spcPts val="320"/>
-              </a:spcBef>
-              <a:buClr>
-                <a:srgbClr val="000000"/>
-              </a:buClr>
-              <a:buFont typeface="Arial"/>
-              <a:buChar char="–"/>
-              <a:tabLst>
-                <a:tab pos="0" algn="l"/>
-              </a:tabLst>
-              <a:defRPr lang="en-US" sz="1600" b="0" u="none" strike="noStrike">
-                <a:solidFill>
-                  <a:schemeClr val="dk1"/>
-                </a:solidFill>
-                <a:effectLst/>
-                <a:uFillTx/>
-                <a:latin typeface="Calibri"/>
-              </a:defRPr>
-            </a:lvl4pPr>
-            <a:lvl5pPr lvl="4" algn="l" defTabSz="457200">
-              <a:lnSpc>
-                <a:spcPct val="100000"/>
-              </a:lnSpc>
-              <a:spcBef>
-                <a:spcPts val="320"/>
-              </a:spcBef>
-              <a:buClr>
-                <a:srgbClr val="000000"/>
-              </a:buClr>
-              <a:buFont typeface="Arial"/>
-              <a:buChar char="»"/>
-              <a:tabLst>
-                <a:tab pos="0" algn="l"/>
-              </a:tabLst>
-              <a:defRPr lang="en-US" sz="1600" b="0" u="none" strike="noStrike">
-                <a:solidFill>
-                  <a:schemeClr val="dk1"/>
-                </a:solidFill>
-                <a:effectLst/>
-                <a:uFillTx/>
-                <a:latin typeface="Calibri"/>
-              </a:defRPr>
-            </a:lvl5pPr>
-          </a:lstStyle>
-          <a:p>
-            <a:pPr marL="343080" indent="-343080" algn="l" defTabSz="457200">
-              <a:lnSpc>
-                <a:spcPct val="100000"/>
-              </a:lnSpc>
-              <a:spcBef>
-                <a:spcPts val="479"/>
-              </a:spcBef>
-              <a:buClr>
-                <a:srgbClr val="000000"/>
-              </a:buClr>
-              <a:buFont typeface="Arial"/>
-              <a:buChar char="•"/>
-              <a:tabLst>
-                <a:tab pos="0" algn="l"/>
-              </a:tabLst>
-            </a:pPr>
-            <a:r>
-              <a:rPr lang="en-US" sz="2400" b="0" u="none" strike="noStrike">
-                <a:solidFill>
-                  <a:schemeClr val="dk1"/>
-                </a:solidFill>
-                <a:effectLst/>
-                <a:uFillTx/>
-                <a:latin typeface="Calibri"/>
-              </a:rPr>
-              <a:t>Click to edit Master text styles</a:t>
-            </a:r>
-            <a:endParaRPr lang="en-US" sz="2400" b="0" u="none" strike="noStrike">
-              <a:solidFill>
-                <a:schemeClr val="dk1"/>
-              </a:solidFill>
-              <a:effectLst/>
-              <a:uFillTx/>
-              <a:latin typeface="Calibri"/>
-            </a:endParaRPr>
-          </a:p>
-          <a:p>
-            <a:pPr marL="743040" lvl="1" indent="-285840" algn="l" defTabSz="457200">
-              <a:lnSpc>
-                <a:spcPct val="100000"/>
-              </a:lnSpc>
-              <a:spcBef>
-                <a:spcPts val="400"/>
-              </a:spcBef>
-              <a:buClr>
-                <a:srgbClr val="000000"/>
-              </a:buClr>
-              <a:buFont typeface="Arial"/>
-              <a:buChar char="–"/>
-              <a:tabLst>
-                <a:tab pos="0" algn="l"/>
-              </a:tabLst>
-            </a:pPr>
-            <a:r>
-              <a:rPr lang="en-US" sz="2000" b="0" u="none" strike="noStrike">
-                <a:solidFill>
-                  <a:schemeClr val="dk1"/>
-                </a:solidFill>
-                <a:effectLst/>
-                <a:uFillTx/>
-                <a:latin typeface="Calibri"/>
-              </a:rPr>
-              <a:t>Second level</a:t>
-            </a:r>
-            <a:endParaRPr lang="en-US" sz="2000" b="0" u="none" strike="noStrike">
-              <a:solidFill>
-                <a:schemeClr val="dk1"/>
-              </a:solidFill>
-              <a:effectLst/>
-              <a:uFillTx/>
-              <a:latin typeface="Calibri"/>
-            </a:endParaRPr>
-          </a:p>
-          <a:p>
-            <a:pPr marL="1143000" lvl="2" indent="-228600" algn="l" defTabSz="457200">
-              <a:lnSpc>
-                <a:spcPct val="100000"/>
-              </a:lnSpc>
-              <a:spcBef>
-                <a:spcPts val="360"/>
-              </a:spcBef>
-              <a:buClr>
-                <a:srgbClr val="000000"/>
-              </a:buClr>
-              <a:buFont typeface="Arial"/>
-              <a:buChar char="•"/>
-              <a:tabLst>
-                <a:tab pos="0" algn="l"/>
-              </a:tabLst>
-            </a:pPr>
-            <a:r>
-              <a:rPr lang="en-US" sz="1800" b="0" u="none" strike="noStrike">
-                <a:solidFill>
-                  <a:schemeClr val="dk1"/>
-                </a:solidFill>
-                <a:effectLst/>
-                <a:uFillTx/>
-                <a:latin typeface="Calibri"/>
-              </a:rPr>
-              <a:t>Third level</a:t>
-            </a:r>
-            <a:endParaRPr lang="en-US" sz="1800" b="0" u="none" strike="noStrike">
-              <a:solidFill>
-                <a:schemeClr val="dk1"/>
-              </a:solidFill>
-              <a:effectLst/>
-              <a:uFillTx/>
-              <a:latin typeface="Calibri"/>
-            </a:endParaRPr>
-          </a:p>
-          <a:p>
-            <a:pPr marL="1600200" lvl="3" indent="-228600" algn="l" defTabSz="457200">
-              <a:lnSpc>
-                <a:spcPct val="100000"/>
-              </a:lnSpc>
-              <a:spcBef>
-                <a:spcPts val="320"/>
-              </a:spcBef>
-              <a:buClr>
-                <a:srgbClr val="000000"/>
-              </a:buClr>
-              <a:buFont typeface="Arial"/>
-              <a:buChar char="–"/>
-              <a:tabLst>
-                <a:tab pos="0" algn="l"/>
-              </a:tabLst>
-            </a:pPr>
-            <a:r>
-              <a:rPr lang="en-US" sz="1600" b="0" u="none" strike="noStrike">
-                <a:solidFill>
-                  <a:schemeClr val="dk1"/>
-                </a:solidFill>
-                <a:effectLst/>
-                <a:uFillTx/>
-                <a:latin typeface="Calibri"/>
-              </a:rPr>
-              <a:t>Fourth level</a:t>
-            </a:r>
-            <a:endParaRPr lang="en-US" sz="1600" b="0" u="none" strike="noStrike">
-              <a:solidFill>
-                <a:schemeClr val="dk1"/>
-              </a:solidFill>
-              <a:effectLst/>
-              <a:uFillTx/>
-              <a:latin typeface="Calibri"/>
-            </a:endParaRPr>
-          </a:p>
-          <a:p>
-            <a:pPr marL="2057400" lvl="4" indent="-228600" algn="l" defTabSz="457200">
-              <a:lnSpc>
-                <a:spcPct val="100000"/>
-              </a:lnSpc>
-              <a:spcBef>
-                <a:spcPts val="320"/>
-              </a:spcBef>
-              <a:buClr>
-                <a:srgbClr val="000000"/>
-              </a:buClr>
-              <a:buFont typeface="Arial"/>
-              <a:buChar char="»"/>
-              <a:tabLst>
-                <a:tab pos="0" algn="l"/>
-              </a:tabLst>
-            </a:pPr>
-            <a:r>
-              <a:rPr lang="en-US" sz="1600" b="0" u="none" strike="noStrike">
-                <a:solidFill>
-                  <a:schemeClr val="dk1"/>
-                </a:solidFill>
-                <a:effectLst/>
-                <a:uFillTx/>
-                <a:latin typeface="Calibri"/>
-              </a:rPr>
-              <a:t>Fifth level</a:t>
-            </a:r>
-            <a:endParaRPr lang="en-US" sz="1600" b="0" u="none" strike="noStrike">
-              <a:solidFill>
-                <a:schemeClr val="dk1"/>
-              </a:solidFill>
-              <a:effectLst/>
-              <a:uFillTx/>
-              <a:latin typeface="Calibri"/>
-            </a:endParaRPr>
-          </a:p>
-        </p:txBody>
-      </p:sp>
-      <p:sp>
-        <p:nvSpPr>
-          <p:cNvPr id="35" name="PlaceHolder 4"/>
-          <p:cNvSpPr>
-            <a:spLocks noGrp="1"/>
-          </p:cNvSpPr>
-          <p:nvPr>
-            <p:ph type="body"/>
-          </p:nvPr>
-        </p:nvSpPr>
-        <p:spPr>
-          <a:xfrm>
-            <a:off x="4645080" y="1535040"/>
-            <a:ext cx="4041360" cy="639360"/>
-          </a:xfrm>
-          <a:prstGeom prst="rect">
-            <a:avLst/>
-          </a:prstGeom>
-          <a:noFill/>
-          <a:ln w="0">
-            <a:noFill/>
-          </a:ln>
-        </p:spPr>
-        <p:txBody>
-          <a:bodyPr lIns="91440" tIns="45720" rIns="91440" bIns="45720" anchor="b">
-            <a:noAutofit/>
-          </a:bodyPr>
-          <a:lstStyle>
-            <a:lvl1pPr indent="0" algn="l" defTabSz="457200">
-              <a:lnSpc>
-                <a:spcPct val="100000"/>
-              </a:lnSpc>
-              <a:spcBef>
-                <a:spcPts val="479"/>
-              </a:spcBef>
-              <a:buNone/>
-              <a:tabLst>
-                <a:tab pos="0" algn="l"/>
-              </a:tabLst>
-              <a:defRPr lang="en-US" sz="2400" b="1" u="none" strike="noStrike">
-                <a:solidFill>
-                  <a:schemeClr val="dk1"/>
-                </a:solidFill>
-                <a:effectLst/>
-                <a:uFillTx/>
-                <a:latin typeface="Calibri"/>
-              </a:defRPr>
-            </a:lvl1pPr>
-          </a:lstStyle>
-          <a:p>
-            <a:pPr indent="0" algn="l" defTabSz="457200">
-              <a:lnSpc>
-                <a:spcPct val="100000"/>
-              </a:lnSpc>
-              <a:spcBef>
-                <a:spcPts val="479"/>
-              </a:spcBef>
-              <a:buNone/>
-              <a:tabLst>
-                <a:tab pos="0" algn="l"/>
-              </a:tabLst>
-            </a:pPr>
-            <a:r>
-              <a:rPr lang="en-US" sz="2400" b="1" u="none" strike="noStrike">
-                <a:solidFill>
-                  <a:schemeClr val="dk1"/>
-                </a:solidFill>
-                <a:effectLst/>
-                <a:uFillTx/>
-                <a:latin typeface="Calibri"/>
-              </a:rPr>
-              <a:t>Click to edit Master text styles</a:t>
-            </a:r>
-            <a:endParaRPr lang="en-US" sz="2400" b="0" u="none" strike="noStrike">
-              <a:solidFill>
-                <a:schemeClr val="dk1"/>
-              </a:solidFill>
-              <a:effectLst/>
-              <a:uFillTx/>
-              <a:latin typeface="Calibri"/>
-            </a:endParaRPr>
-          </a:p>
-        </p:txBody>
-      </p:sp>
-      <p:sp>
-        <p:nvSpPr>
-          <p:cNvPr id="36" name="PlaceHolder 5"/>
-          <p:cNvSpPr>
-            <a:spLocks noGrp="1"/>
-          </p:cNvSpPr>
-          <p:nvPr>
-            <p:ph type="body"/>
-          </p:nvPr>
-        </p:nvSpPr>
-        <p:spPr>
-          <a:xfrm>
-            <a:off x="4645080" y="2174760"/>
-            <a:ext cx="4041360" cy="3951000"/>
-          </a:xfrm>
-          <a:prstGeom prst="rect">
-            <a:avLst/>
-          </a:prstGeom>
-          <a:noFill/>
-          <a:ln w="0">
-            <a:noFill/>
-          </a:ln>
-        </p:spPr>
-        <p:txBody>
-          <a:bodyPr lIns="91440" tIns="45720" rIns="91440" bIns="45720" anchor="t">
-            <a:noAutofit/>
-          </a:bodyPr>
-          <a:lstStyle>
-            <a:lvl1pPr algn="l" defTabSz="457200">
-              <a:lnSpc>
-                <a:spcPct val="100000"/>
-              </a:lnSpc>
-              <a:spcBef>
-                <a:spcPts val="479"/>
-              </a:spcBef>
-              <a:buClr>
-                <a:srgbClr val="000000"/>
-              </a:buClr>
-              <a:buFont typeface="Arial"/>
-              <a:buChar char="•"/>
-              <a:tabLst>
-                <a:tab pos="0" algn="l"/>
-              </a:tabLst>
-              <a:defRPr lang="en-US" sz="2400" b="0" u="none" strike="noStrike">
-                <a:solidFill>
-                  <a:schemeClr val="dk1"/>
-                </a:solidFill>
-                <a:effectLst/>
-                <a:uFillTx/>
-                <a:latin typeface="Calibri"/>
-              </a:defRPr>
-            </a:lvl1pPr>
-            <a:lvl2pPr lvl="1" algn="l" defTabSz="457200">
-              <a:lnSpc>
-                <a:spcPct val="100000"/>
-              </a:lnSpc>
-              <a:spcBef>
-                <a:spcPts val="400"/>
-              </a:spcBef>
-              <a:buClr>
-                <a:srgbClr val="000000"/>
-              </a:buClr>
-              <a:buFont typeface="Arial"/>
-              <a:buChar char="–"/>
-              <a:tabLst>
-                <a:tab pos="0" algn="l"/>
-              </a:tabLst>
-              <a:defRPr lang="en-US" sz="2000" b="0" u="none" strike="noStrike">
-                <a:solidFill>
-                  <a:schemeClr val="dk1"/>
-                </a:solidFill>
-                <a:effectLst/>
-                <a:uFillTx/>
-                <a:latin typeface="Calibri"/>
-              </a:defRPr>
-            </a:lvl2pPr>
-            <a:lvl3pPr lvl="2" algn="l" defTabSz="457200">
-              <a:lnSpc>
-                <a:spcPct val="100000"/>
-              </a:lnSpc>
-              <a:spcBef>
-                <a:spcPts val="360"/>
-              </a:spcBef>
-              <a:buClr>
-                <a:srgbClr val="000000"/>
-              </a:buClr>
-              <a:buFont typeface="Arial"/>
-              <a:buChar char="•"/>
-              <a:tabLst>
-                <a:tab pos="0" algn="l"/>
-              </a:tabLst>
-              <a:defRPr lang="en-US" sz="1800" b="0" u="none" strike="noStrike">
-                <a:solidFill>
-                  <a:schemeClr val="dk1"/>
-                </a:solidFill>
-                <a:effectLst/>
-                <a:uFillTx/>
-                <a:latin typeface="Calibri"/>
-              </a:defRPr>
-            </a:lvl3pPr>
-            <a:lvl4pPr lvl="3" algn="l" defTabSz="457200">
-              <a:lnSpc>
-                <a:spcPct val="100000"/>
-              </a:lnSpc>
-              <a:spcBef>
-                <a:spcPts val="320"/>
-              </a:spcBef>
-              <a:buClr>
-                <a:srgbClr val="000000"/>
-              </a:buClr>
-              <a:buFont typeface="Arial"/>
-              <a:buChar char="–"/>
-              <a:tabLst>
-                <a:tab pos="0" algn="l"/>
-              </a:tabLst>
-              <a:defRPr lang="en-US" sz="1600" b="0" u="none" strike="noStrike">
-                <a:solidFill>
-                  <a:schemeClr val="dk1"/>
-                </a:solidFill>
-                <a:effectLst/>
-                <a:uFillTx/>
-                <a:latin typeface="Calibri"/>
-              </a:defRPr>
-            </a:lvl4pPr>
-            <a:lvl5pPr lvl="4" algn="l" defTabSz="457200">
-              <a:lnSpc>
-                <a:spcPct val="100000"/>
-              </a:lnSpc>
-              <a:spcBef>
-                <a:spcPts val="320"/>
-              </a:spcBef>
-              <a:buClr>
-                <a:srgbClr val="000000"/>
-              </a:buClr>
-              <a:buFont typeface="Arial"/>
-              <a:buChar char="»"/>
-              <a:tabLst>
-                <a:tab pos="0" algn="l"/>
-              </a:tabLst>
-              <a:defRPr lang="en-US" sz="1600" b="0" u="none" strike="noStrike">
-                <a:solidFill>
-                  <a:schemeClr val="dk1"/>
-                </a:solidFill>
-                <a:effectLst/>
-                <a:uFillTx/>
-                <a:latin typeface="Calibri"/>
-              </a:defRPr>
-            </a:lvl5pPr>
-          </a:lstStyle>
-          <a:p>
-            <a:pPr marL="343080" indent="-343080" algn="l" defTabSz="457200">
-              <a:lnSpc>
-                <a:spcPct val="100000"/>
-              </a:lnSpc>
-              <a:spcBef>
-                <a:spcPts val="479"/>
-              </a:spcBef>
-              <a:buClr>
-                <a:srgbClr val="000000"/>
-              </a:buClr>
-              <a:buFont typeface="Arial"/>
-              <a:buChar char="•"/>
-              <a:tabLst>
-                <a:tab pos="0" algn="l"/>
-              </a:tabLst>
-            </a:pPr>
-            <a:r>
-              <a:rPr lang="en-US" sz="2400" b="0" u="none" strike="noStrike">
-                <a:solidFill>
-                  <a:schemeClr val="dk1"/>
-                </a:solidFill>
-                <a:effectLst/>
-                <a:uFillTx/>
-                <a:latin typeface="Calibri"/>
-              </a:rPr>
-              <a:t>Click to edit Master text styles</a:t>
-            </a:r>
-            <a:endParaRPr lang="en-US" sz="2400" b="0" u="none" strike="noStrike">
-              <a:solidFill>
-                <a:schemeClr val="dk1"/>
-              </a:solidFill>
-              <a:effectLst/>
-              <a:uFillTx/>
-              <a:latin typeface="Calibri"/>
-            </a:endParaRPr>
-          </a:p>
-          <a:p>
-            <a:pPr marL="743040" lvl="1" indent="-285840" algn="l" defTabSz="457200">
-              <a:lnSpc>
-                <a:spcPct val="100000"/>
-              </a:lnSpc>
-              <a:spcBef>
-                <a:spcPts val="400"/>
-              </a:spcBef>
-              <a:buClr>
-                <a:srgbClr val="000000"/>
-              </a:buClr>
-              <a:buFont typeface="Arial"/>
-              <a:buChar char="–"/>
-              <a:tabLst>
-                <a:tab pos="0" algn="l"/>
-              </a:tabLst>
-            </a:pPr>
-            <a:r>
-              <a:rPr lang="en-US" sz="2000" b="0" u="none" strike="noStrike">
-                <a:solidFill>
-                  <a:schemeClr val="dk1"/>
-                </a:solidFill>
-                <a:effectLst/>
-                <a:uFillTx/>
-                <a:latin typeface="Calibri"/>
-              </a:rPr>
-              <a:t>Second level</a:t>
-            </a:r>
-            <a:endParaRPr lang="en-US" sz="2000" b="0" u="none" strike="noStrike">
-              <a:solidFill>
-                <a:schemeClr val="dk1"/>
-              </a:solidFill>
-              <a:effectLst/>
-              <a:uFillTx/>
-              <a:latin typeface="Calibri"/>
-            </a:endParaRPr>
-          </a:p>
-          <a:p>
-            <a:pPr marL="1143000" lvl="2" indent="-228600" algn="l" defTabSz="457200">
-              <a:lnSpc>
-                <a:spcPct val="100000"/>
-              </a:lnSpc>
-              <a:spcBef>
-                <a:spcPts val="360"/>
-              </a:spcBef>
-              <a:buClr>
-                <a:srgbClr val="000000"/>
-              </a:buClr>
-              <a:buFont typeface="Arial"/>
-              <a:buChar char="•"/>
-              <a:tabLst>
-                <a:tab pos="0" algn="l"/>
-              </a:tabLst>
-            </a:pPr>
-            <a:r>
-              <a:rPr lang="en-US" sz="1800" b="0" u="none" strike="noStrike">
-                <a:solidFill>
-                  <a:schemeClr val="dk1"/>
-                </a:solidFill>
-                <a:effectLst/>
-                <a:uFillTx/>
-                <a:latin typeface="Calibri"/>
-              </a:rPr>
-              <a:t>Third level</a:t>
-            </a:r>
-            <a:endParaRPr lang="en-US" sz="1800" b="0" u="none" strike="noStrike">
-              <a:solidFill>
-                <a:schemeClr val="dk1"/>
-              </a:solidFill>
-              <a:effectLst/>
-              <a:uFillTx/>
-              <a:latin typeface="Calibri"/>
-            </a:endParaRPr>
-          </a:p>
-          <a:p>
-            <a:pPr marL="1600200" lvl="3" indent="-228600" algn="l" defTabSz="457200">
-              <a:lnSpc>
-                <a:spcPct val="100000"/>
-              </a:lnSpc>
-              <a:spcBef>
-                <a:spcPts val="320"/>
-              </a:spcBef>
-              <a:buClr>
-                <a:srgbClr val="000000"/>
-              </a:buClr>
-              <a:buFont typeface="Arial"/>
-              <a:buChar char="–"/>
-              <a:tabLst>
-                <a:tab pos="0" algn="l"/>
-              </a:tabLst>
-            </a:pPr>
-            <a:r>
-              <a:rPr lang="en-US" sz="1600" b="0" u="none" strike="noStrike">
-                <a:solidFill>
-                  <a:schemeClr val="dk1"/>
-                </a:solidFill>
-                <a:effectLst/>
-                <a:uFillTx/>
-                <a:latin typeface="Calibri"/>
-              </a:rPr>
-              <a:t>Fourth level</a:t>
-            </a:r>
-            <a:endParaRPr lang="en-US" sz="1600" b="0" u="none" strike="noStrike">
-              <a:solidFill>
-                <a:schemeClr val="dk1"/>
-              </a:solidFill>
-              <a:effectLst/>
-              <a:uFillTx/>
-              <a:latin typeface="Calibri"/>
-            </a:endParaRPr>
-          </a:p>
-          <a:p>
-            <a:pPr marL="2057400" lvl="4" indent="-228600" algn="l" defTabSz="457200">
-              <a:lnSpc>
-                <a:spcPct val="100000"/>
-              </a:lnSpc>
-              <a:spcBef>
-                <a:spcPts val="320"/>
-              </a:spcBef>
-              <a:buClr>
-                <a:srgbClr val="000000"/>
-              </a:buClr>
-              <a:buFont typeface="Arial"/>
-              <a:buChar char="»"/>
-              <a:tabLst>
-                <a:tab pos="0" algn="l"/>
-              </a:tabLst>
-            </a:pPr>
-            <a:r>
-              <a:rPr lang="en-US" sz="1600" b="0" u="none" strike="noStrike">
-                <a:solidFill>
-                  <a:schemeClr val="dk1"/>
-                </a:solidFill>
-                <a:effectLst/>
-                <a:uFillTx/>
-                <a:latin typeface="Calibri"/>
-              </a:rPr>
-              <a:t>Fifth level</a:t>
-            </a:r>
-            <a:endParaRPr lang="en-US" sz="1600" b="0" u="none" strike="noStrike">
-              <a:solidFill>
-                <a:schemeClr val="dk1"/>
-              </a:solidFill>
-              <a:effectLst/>
-              <a:uFillTx/>
-              <a:latin typeface="Calibri"/>
-            </a:endParaRPr>
-          </a:p>
-        </p:txBody>
-      </p:sp>
-      <p:sp>
-        <p:nvSpPr>
-          <p:cNvPr id="37" name="PlaceHolder 6"/>
-          <p:cNvSpPr>
-            <a:spLocks noGrp="1"/>
-          </p:cNvSpPr>
-          <p:nvPr>
-            <p:ph type="dt" idx="19"/>
-          </p:nvPr>
-        </p:nvSpPr>
-        <p:spPr>
-          <a:xfrm>
-            <a:off x="457200" y="6356520"/>
-            <a:ext cx="2133360" cy="364680"/>
-          </a:xfrm>
-          <a:prstGeom prst="rect">
-            <a:avLst/>
-          </a:prstGeom>
-          <a:noFill/>
-          <a:ln w="0">
-            <a:noFill/>
-          </a:ln>
-        </p:spPr>
-        <p:txBody>
-          <a:bodyPr lIns="91440" tIns="45720" rIns="91440" bIns="45720" anchor="ctr">
-            <a:noAutofit/>
-          </a:bodyPr>
-          <a:lstStyle>
-            <a:lvl1pPr indent="0" algn="l" defTabSz="457200">
-              <a:lnSpc>
-                <a:spcPct val="100000"/>
-              </a:lnSpc>
-              <a:buNone/>
-              <a:defRPr lang="en-US" sz="1200" b="0" u="none" strike="noStrike">
+            </a:pPr>
+            <a:fld id="{E3F11ADF-0BB5-40BD-A105-CACF1D05475E}" type="slidenum">
+              <a:rPr lang="en-US" sz="1200" b="0" u="none" strike="noStrike">
                 <a:solidFill>
                   <a:schemeClr val="dk1">
                     <a:tint val="75000"/>
@@ -6047,168 +7683,6 @@
                 <a:effectLst/>
                 <a:uFillTx/>
                 <a:latin typeface="Calibri"/>
-              </a:defRPr>
-            </a:lvl1pPr>
-          </a:lstStyle>
-          <a:p>
-            <a:pPr indent="0" algn="l" defTabSz="457200">
-              <a:lnSpc>
-                <a:spcPct val="100000"/>
-              </a:lnSpc>
-              <a:buNone/>
-            </a:pPr>
-            <a:r>
-              <a:rPr lang="en-US" sz="1200" b="0" u="none" strike="noStrike">
-                <a:solidFill>
-                  <a:schemeClr val="dk1">
-                    <a:tint val="75000"/>
-                  </a:schemeClr>
-                </a:solidFill>
-                <a:effectLst/>
-                <a:uFillTx/>
-                <a:latin typeface="Calibri"/>
-              </a:rPr>
-              <a:t>&lt;date/time&gt;</a:t>
-            </a:r>
-            <a:endParaRPr lang="en-US" sz="1200" b="0" u="none" strike="noStrike">
-              <a:solidFill>
-                <a:srgbClr val="000000"/>
-              </a:solidFill>
-              <a:effectLst/>
-              <a:uFillTx/>
-              <a:latin typeface="Times New Roman"/>
-            </a:endParaRPr>
-          </a:p>
-        </p:txBody>
-      </p:sp>
-      <p:sp>
-        <p:nvSpPr>
-          <p:cNvPr id="38" name="PlaceHolder 7"/>
-          <p:cNvSpPr>
-            <a:spLocks noGrp="1"/>
-          </p:cNvSpPr>
-          <p:nvPr>
-            <p:ph type="ftr" idx="20"/>
-          </p:nvPr>
-        </p:nvSpPr>
-        <p:spPr>
-          <a:xfrm>
-            <a:off x="3124080" y="6356520"/>
-            <a:ext cx="2895120" cy="364680"/>
-          </a:xfrm>
-          <a:prstGeom prst="rect">
-            <a:avLst/>
-          </a:prstGeom>
-          <a:noFill/>
-          <a:ln w="0">
-            <a:noFill/>
-          </a:ln>
-        </p:spPr>
-        <p:txBody>
-          <a:bodyPr lIns="91440" tIns="45720" rIns="91440" bIns="45720" anchor="ctr">
-            <a:noAutofit/>
-          </a:bodyPr>
-          <a:lstStyle>
-            <a:lvl1pPr indent="0" algn="ctr">
-              <a:buNone/>
-              <a:defRPr lang="en-US" sz="1400" b="0" u="none" strike="noStrike">
-                <a:solidFill>
-                  <a:srgbClr val="000000"/>
-                </a:solidFill>
-                <a:effectLst/>
-                <a:uFillTx/>
-                <a:latin typeface="Times New Roman"/>
-              </a:defRPr>
-            </a:lvl1pPr>
-          </a:lstStyle>
-          <a:p>
-            <a:pPr indent="0" algn="ctr">
-              <a:buNone/>
-            </a:pPr>
-            <a:r>
-              <a:rPr lang="en-US" sz="1400" b="0" u="none" strike="noStrike">
-                <a:solidFill>
-                  <a:srgbClr val="000000"/>
-                </a:solidFill>
-                <a:effectLst/>
-                <a:uFillTx/>
-                <a:latin typeface="Times New Roman"/>
-              </a:rPr>
-              <a:t>&lt;footer&gt;</a:t>
-            </a:r>
-            <a:endParaRPr lang="en-US" sz="1400" b="0" u="none" strike="noStrike">
-              <a:solidFill>
-                <a:srgbClr val="000000"/>
-              </a:solidFill>
-              <a:effectLst/>
-              <a:uFillTx/>
-              <a:latin typeface="Times New Roman"/>
-            </a:endParaRPr>
-          </a:p>
-        </p:txBody>
-      </p:sp>
-      <p:sp>
-        <p:nvSpPr>
-          <p:cNvPr id="39" name="PlaceHolder 8"/>
-          <p:cNvSpPr>
-            <a:spLocks noGrp="1"/>
-          </p:cNvSpPr>
-          <p:nvPr>
-            <p:ph type="sldNum" idx="21"/>
-          </p:nvPr>
-        </p:nvSpPr>
-        <p:spPr>
-          <a:xfrm>
-            <a:off x="6553080" y="6356520"/>
-            <a:ext cx="2133360" cy="364680"/>
-          </a:xfrm>
-          <a:prstGeom prst="rect">
-            <a:avLst/>
-          </a:prstGeom>
-          <a:noFill/>
-          <a:ln w="0">
-            <a:noFill/>
-          </a:ln>
-        </p:spPr>
-        <p:txBody>
-          <a:bodyPr lIns="91440" tIns="45720" rIns="91440" bIns="45720" anchor="ctr">
-            <a:noAutofit/>
-          </a:bodyPr>
-          <a:lstStyle>
-            <a:lvl1pPr indent="0" algn="r" defTabSz="457200">
-              <a:lnSpc>
-                <a:spcPct val="100000"/>
-              </a:lnSpc>
-              <a:buNone/>
-              <a:defRPr lang="en-US" sz="1200" b="0" u="none" strike="noStrike">
-                <a:solidFill>
-                  <a:schemeClr val="dk1">
-                    <a:tint val="75000"/>
-                  </a:schemeClr>
-                </a:solidFill>
-                <a:effectLst/>
-                <a:uFillTx/>
-                <a:latin typeface="Calibri"/>
-              </a:defRPr>
-            </a:lvl1pPr>
-          </a:lstStyle>
-          <a:p>
-            <a:pPr indent="0" algn="r" defTabSz="457200">
-              <a:lnSpc>
-                <a:spcPct val="100000"/>
-              </a:lnSpc>
-              <a:buNone/>
-            </a:pPr>
-            <a:fld id="{5498E675-623C-4DC9-9D3A-78D2502B3D36}" type="slidenum">
-              <a:rPr lang="en-US" sz="1200" b="0" u="none" strike="noStrike">
-                <a:solidFill>
-                  <a:schemeClr val="dk1">
-                    <a:tint val="75000"/>
-                  </a:schemeClr>
-                </a:solidFill>
-                <a:effectLst/>
-                <a:uFillTx/>
-                <a:latin typeface="Calibri"/>
               </a:rPr>
               <a:t>&lt;number&gt;</a:t>
             </a:fld>
@@ -6219,1024 +7693,6 @@
               <a:effectLst/>
               <a:uFillTx/>
               <a:latin typeface="Times New Roman"/>
-            </a:endParaRPr>
-          </a:p>
-        </p:txBody>
-      </p:sp>
-    </p:spTree>
-  </p:cSld>
-</p:sldLayout>
-</file>
-
-<file path=ppt/slideLayouts/slideLayout8.xml><?xml version="1.0" encoding="utf-8"?>
-<p:sldLayout xmlns:a="http://schemas.openxmlformats.org/drawingml/2006/main" xmlns:p="http://schemas.openxmlformats.org/presentationml/2006/main" xmlns:r="http://schemas.openxmlformats.org/officeDocument/2006/relationships" xmlns:p14="http://schemas.microsoft.com/office/powerpoint/2010/main" xmlns:p15="http://schemas.microsoft.com/office/powerpoint/2012/main" xmlns:mc="http://schemas.openxmlformats.org/markup-compatibility/2006" type="titleOnly" preserve="1">
-  <p:cSld name="Title Only">
-    <p:bg>
-      <p:bgPr>
-        <a:solidFill>
-          <a:srgbClr val="FFFFFF"/>
-        </a:solidFill>
-      </p:bgPr>
-    </p:bg>
-    <p:spTree>
-      <p:nvGrpSpPr>
-        <p:cNvPr id="1" name=""/>
-        <p:cNvGrpSpPr/>
-        <p:nvPr/>
-      </p:nvGrpSpPr>
-      <p:grpSpPr>
-        <a:xfrm>
-          <a:off x="0" y="0"/>
-          <a:ext cx="0" cy="0"/>
-          <a:chOff x="0" y="0"/>
-          <a:chExt cx="0" cy="0"/>
-        </a:xfrm>
-      </p:grpSpPr>
-      <p:sp>
-        <p:nvSpPr>
-          <p:cNvPr id="40" name="PlaceHolder 1"/>
-          <p:cNvSpPr>
-            <a:spLocks noGrp="1"/>
-          </p:cNvSpPr>
-          <p:nvPr>
-            <p:ph type="title"/>
-          </p:nvPr>
-        </p:nvSpPr>
-        <p:spPr>
-          <a:xfrm>
-            <a:off x="457200" y="274680"/>
-            <a:ext cx="8229240" cy="1142640"/>
-          </a:xfrm>
-          <a:prstGeom prst="rect">
-            <a:avLst/>
-          </a:prstGeom>
-          <a:noFill/>
-          <a:ln w="0">
-            <a:noFill/>
-          </a:ln>
-        </p:spPr>
-        <p:txBody>
-          <a:bodyPr lIns="91440" tIns="45720" rIns="91440" bIns="45720" anchor="ctr">
-            <a:noAutofit/>
-          </a:bodyPr>
-          <a:lstStyle>
-            <a:lvl1pPr indent="0" algn="ctr" defTabSz="457200">
-              <a:lnSpc>
-                <a:spcPct val="100000"/>
-              </a:lnSpc>
-              <a:buNone/>
-              <a:defRPr lang="en-US" sz="4400" b="0" u="none" strike="noStrike">
-                <a:solidFill>
-                  <a:schemeClr val="dk1"/>
-                </a:solidFill>
-                <a:effectLst/>
-                <a:uFillTx/>
-                <a:latin typeface="Calibri"/>
-              </a:defRPr>
-            </a:lvl1pPr>
-          </a:lstStyle>
-          <a:p>
-            <a:pPr indent="0" algn="ctr" defTabSz="457200">
-              <a:lnSpc>
-                <a:spcPct val="100000"/>
-              </a:lnSpc>
-              <a:buNone/>
-            </a:pPr>
-            <a:r>
-              <a:rPr lang="en-US" sz="4400" b="0" u="none" strike="noStrike">
-                <a:solidFill>
-                  <a:schemeClr val="dk1"/>
-                </a:solidFill>
-                <a:effectLst/>
-                <a:uFillTx/>
-                <a:latin typeface="Calibri"/>
-              </a:rPr>
-              <a:t>Click to edit Master title style</a:t>
-            </a:r>
-            <a:endParaRPr lang="en-US" sz="4400" b="0" u="none" strike="noStrike">
-              <a:solidFill>
-                <a:schemeClr val="dk1"/>
-              </a:solidFill>
-              <a:effectLst/>
-              <a:uFillTx/>
-              <a:latin typeface="Calibri"/>
-            </a:endParaRPr>
-          </a:p>
-        </p:txBody>
-      </p:sp>
-      <p:sp>
-        <p:nvSpPr>
-          <p:cNvPr id="41" name="PlaceHolder 2"/>
-          <p:cNvSpPr>
-            <a:spLocks noGrp="1"/>
-          </p:cNvSpPr>
-          <p:nvPr>
-            <p:ph type="dt" idx="22"/>
-          </p:nvPr>
-        </p:nvSpPr>
-        <p:spPr>
-          <a:xfrm>
-            <a:off x="457200" y="6356520"/>
-            <a:ext cx="2133360" cy="364680"/>
-          </a:xfrm>
-          <a:prstGeom prst="rect">
-            <a:avLst/>
-          </a:prstGeom>
-          <a:noFill/>
-          <a:ln w="0">
-            <a:noFill/>
-          </a:ln>
-        </p:spPr>
-        <p:txBody>
-          <a:bodyPr lIns="91440" tIns="45720" rIns="91440" bIns="45720" anchor="ctr">
-            <a:noAutofit/>
-          </a:bodyPr>
-          <a:lstStyle>
-            <a:lvl1pPr indent="0" algn="l" defTabSz="457200">
-              <a:lnSpc>
-                <a:spcPct val="100000"/>
-              </a:lnSpc>
-              <a:buNone/>
-              <a:defRPr lang="en-US" sz="1200" b="0" u="none" strike="noStrike">
-                <a:solidFill>
-                  <a:schemeClr val="dk1">
-                    <a:tint val="75000"/>
-                  </a:schemeClr>
-                </a:solidFill>
-                <a:effectLst/>
-                <a:uFillTx/>
-                <a:latin typeface="Calibri"/>
-              </a:defRPr>
-            </a:lvl1pPr>
-          </a:lstStyle>
-          <a:p>
-            <a:pPr indent="0" algn="l" defTabSz="457200">
-              <a:lnSpc>
-                <a:spcPct val="100000"/>
-              </a:lnSpc>
-              <a:buNone/>
-            </a:pPr>
-            <a:r>
-              <a:rPr lang="en-US" sz="1200" b="0" u="none" strike="noStrike">
-                <a:solidFill>
-                  <a:schemeClr val="dk1">
-                    <a:tint val="75000"/>
-                  </a:schemeClr>
-                </a:solidFill>
-                <a:effectLst/>
-                <a:uFillTx/>
-                <a:latin typeface="Calibri"/>
-              </a:rPr>
-              <a:t>&lt;date/time&gt;</a:t>
-            </a:r>
-            <a:endParaRPr lang="en-US" sz="1200" b="0" u="none" strike="noStrike">
-              <a:solidFill>
-                <a:srgbClr val="000000"/>
-              </a:solidFill>
-              <a:effectLst/>
-              <a:uFillTx/>
-              <a:latin typeface="Times New Roman"/>
-            </a:endParaRPr>
-          </a:p>
-        </p:txBody>
-      </p:sp>
-      <p:sp>
-        <p:nvSpPr>
-          <p:cNvPr id="42" name="PlaceHolder 3"/>
-          <p:cNvSpPr>
-            <a:spLocks noGrp="1"/>
-          </p:cNvSpPr>
-          <p:nvPr>
-            <p:ph type="ftr" idx="23"/>
-          </p:nvPr>
-        </p:nvSpPr>
-        <p:spPr>
-          <a:xfrm>
-            <a:off x="3124080" y="6356520"/>
-            <a:ext cx="2895120" cy="364680"/>
-          </a:xfrm>
-          <a:prstGeom prst="rect">
-            <a:avLst/>
-          </a:prstGeom>
-          <a:noFill/>
-          <a:ln w="0">
-            <a:noFill/>
-          </a:ln>
-        </p:spPr>
-        <p:txBody>
-          <a:bodyPr lIns="91440" tIns="45720" rIns="91440" bIns="45720" anchor="ctr">
-            <a:noAutofit/>
-          </a:bodyPr>
-          <a:lstStyle>
-            <a:lvl1pPr indent="0" algn="ctr">
-              <a:buNone/>
-              <a:defRPr lang="en-US" sz="1400" b="0" u="none" strike="noStrike">
-                <a:solidFill>
-                  <a:srgbClr val="000000"/>
-                </a:solidFill>
-                <a:effectLst/>
-                <a:uFillTx/>
-                <a:latin typeface="Times New Roman"/>
-              </a:defRPr>
-            </a:lvl1pPr>
-          </a:lstStyle>
-          <a:p>
-            <a:pPr indent="0" algn="ctr">
-              <a:buNone/>
-            </a:pPr>
-            <a:r>
-              <a:rPr lang="en-US" sz="1400" b="0" u="none" strike="noStrike">
-                <a:solidFill>
-                  <a:srgbClr val="000000"/>
-                </a:solidFill>
-                <a:effectLst/>
-                <a:uFillTx/>
-                <a:latin typeface="Times New Roman"/>
-              </a:rPr>
-              <a:t>&lt;footer&gt;</a:t>
-            </a:r>
-            <a:endParaRPr lang="en-US" sz="1400" b="0" u="none" strike="noStrike">
-              <a:solidFill>
-                <a:srgbClr val="000000"/>
-              </a:solidFill>
-              <a:effectLst/>
-              <a:uFillTx/>
-              <a:latin typeface="Times New Roman"/>
-            </a:endParaRPr>
-          </a:p>
-        </p:txBody>
-      </p:sp>
-      <p:sp>
-        <p:nvSpPr>
-          <p:cNvPr id="43" name="PlaceHolder 4"/>
-          <p:cNvSpPr>
-            <a:spLocks noGrp="1"/>
-          </p:cNvSpPr>
-          <p:nvPr>
-            <p:ph type="sldNum" idx="24"/>
-          </p:nvPr>
-        </p:nvSpPr>
-        <p:spPr>
-          <a:xfrm>
-            <a:off x="6553080" y="6356520"/>
-            <a:ext cx="2133360" cy="364680"/>
-          </a:xfrm>
-          <a:prstGeom prst="rect">
-            <a:avLst/>
-          </a:prstGeom>
-          <a:noFill/>
-          <a:ln w="0">
-            <a:noFill/>
-          </a:ln>
-        </p:spPr>
-        <p:txBody>
-          <a:bodyPr lIns="91440" tIns="45720" rIns="91440" bIns="45720" anchor="ctr">
-            <a:noAutofit/>
-          </a:bodyPr>
-          <a:lstStyle>
-            <a:lvl1pPr indent="0" algn="r" defTabSz="457200">
-              <a:lnSpc>
-                <a:spcPct val="100000"/>
-              </a:lnSpc>
-              <a:buNone/>
-              <a:defRPr lang="en-US" sz="1200" b="0" u="none" strike="noStrike">
-                <a:solidFill>
-                  <a:schemeClr val="dk1">
-                    <a:tint val="75000"/>
-                  </a:schemeClr>
-                </a:solidFill>
-                <a:effectLst/>
-                <a:uFillTx/>
-                <a:latin typeface="Calibri"/>
-              </a:defRPr>
-            </a:lvl1pPr>
-          </a:lstStyle>
-          <a:p>
-            <a:pPr indent="0" algn="r" defTabSz="457200">
-              <a:lnSpc>
-                <a:spcPct val="100000"/>
-              </a:lnSpc>
-              <a:buNone/>
-            </a:pPr>
-            <a:fld id="{61378588-006B-44B6-BF58-1A61A753115D}" type="slidenum">
-              <a:rPr lang="en-US" sz="1200" b="0" u="none" strike="noStrike">
-                <a:solidFill>
-                  <a:schemeClr val="dk1">
-                    <a:tint val="75000"/>
-                  </a:schemeClr>
-                </a:solidFill>
-                <a:effectLst/>
-                <a:uFillTx/>
-                <a:latin typeface="Calibri"/>
-              </a:rPr>
-              <a:t>&lt;number&gt;</a:t>
-            </a:fld>
-            <a:endParaRPr lang="en-US" sz="1200" b="0" u="none" strike="noStrike">
-              <a:solidFill>
-                <a:srgbClr val="000000"/>
-              </a:solidFill>
-              <a:effectLst/>
-              <a:uFillTx/>
-              <a:latin typeface="Times New Roman"/>
-            </a:endParaRPr>
-          </a:p>
-        </p:txBody>
-      </p:sp>
-    </p:spTree>
-  </p:cSld>
-</p:sldLayout>
-</file>
-
-<file path=ppt/slideLayouts/slideLayout9.xml><?xml version="1.0" encoding="utf-8"?>
-<p:sldLayout xmlns:a="http://schemas.openxmlformats.org/drawingml/2006/main" xmlns:p="http://schemas.openxmlformats.org/presentationml/2006/main" xmlns:r="http://schemas.openxmlformats.org/officeDocument/2006/relationships" xmlns:p14="http://schemas.microsoft.com/office/powerpoint/2010/main" xmlns:p15="http://schemas.microsoft.com/office/powerpoint/2012/main" xmlns:mc="http://schemas.openxmlformats.org/markup-compatibility/2006" type="blank" preserve="1">
-  <p:cSld name="Blank">
-    <p:bg>
-      <p:bgPr>
-        <a:solidFill>
-          <a:srgbClr val="FFFFFF"/>
-        </a:solidFill>
-      </p:bgPr>
-    </p:bg>
-    <p:spTree>
-      <p:nvGrpSpPr>
-        <p:cNvPr id="1" name=""/>
-        <p:cNvGrpSpPr/>
-        <p:nvPr/>
-      </p:nvGrpSpPr>
-      <p:grpSpPr>
-        <a:xfrm>
-          <a:off x="0" y="0"/>
-          <a:ext cx="0" cy="0"/>
-          <a:chOff x="0" y="0"/>
-          <a:chExt cx="0" cy="0"/>
-        </a:xfrm>
-      </p:grpSpPr>
-      <p:sp>
-        <p:nvSpPr>
-          <p:cNvPr id="44" name="PlaceHolder 1"/>
-          <p:cNvSpPr>
-            <a:spLocks noGrp="1"/>
-          </p:cNvSpPr>
-          <p:nvPr>
-            <p:ph type="dt" idx="25"/>
-          </p:nvPr>
-        </p:nvSpPr>
-        <p:spPr>
-          <a:xfrm>
-            <a:off x="457200" y="6356520"/>
-            <a:ext cx="2133360" cy="364680"/>
-          </a:xfrm>
-          <a:prstGeom prst="rect">
-            <a:avLst/>
-          </a:prstGeom>
-          <a:noFill/>
-          <a:ln w="0">
-            <a:noFill/>
-          </a:ln>
-        </p:spPr>
-        <p:txBody>
-          <a:bodyPr lIns="91440" tIns="45720" rIns="91440" bIns="45720" anchor="ctr">
-            <a:noAutofit/>
-          </a:bodyPr>
-          <a:lstStyle>
-            <a:lvl1pPr indent="0" algn="l" defTabSz="457200">
-              <a:lnSpc>
-                <a:spcPct val="100000"/>
-              </a:lnSpc>
-              <a:buNone/>
-              <a:defRPr lang="en-US" sz="1200" b="0" u="none" strike="noStrike">
-                <a:solidFill>
-                  <a:schemeClr val="dk1">
-                    <a:tint val="75000"/>
-                  </a:schemeClr>
-                </a:solidFill>
-                <a:effectLst/>
-                <a:uFillTx/>
-                <a:latin typeface="Calibri"/>
-              </a:defRPr>
-            </a:lvl1pPr>
-          </a:lstStyle>
-          <a:p>
-            <a:pPr indent="0" algn="l" defTabSz="457200">
-              <a:lnSpc>
-                <a:spcPct val="100000"/>
-              </a:lnSpc>
-              <a:buNone/>
-            </a:pPr>
-            <a:r>
-              <a:rPr lang="en-US" sz="1200" b="0" u="none" strike="noStrike">
-                <a:solidFill>
-                  <a:schemeClr val="dk1">
-                    <a:tint val="75000"/>
-                  </a:schemeClr>
-                </a:solidFill>
-                <a:effectLst/>
-                <a:uFillTx/>
-                <a:latin typeface="Calibri"/>
-              </a:rPr>
-              <a:t>&lt;date/time&gt;</a:t>
-            </a:r>
-            <a:endParaRPr lang="en-US" sz="1200" b="0" u="none" strike="noStrike">
-              <a:solidFill>
-                <a:srgbClr val="000000"/>
-              </a:solidFill>
-              <a:effectLst/>
-              <a:uFillTx/>
-              <a:latin typeface="Times New Roman"/>
-            </a:endParaRPr>
-          </a:p>
-        </p:txBody>
-      </p:sp>
-      <p:sp>
-        <p:nvSpPr>
-          <p:cNvPr id="45" name="PlaceHolder 2"/>
-          <p:cNvSpPr>
-            <a:spLocks noGrp="1"/>
-          </p:cNvSpPr>
-          <p:nvPr>
-            <p:ph type="ftr" idx="26"/>
-          </p:nvPr>
-        </p:nvSpPr>
-        <p:spPr>
-          <a:xfrm>
-            <a:off x="3124080" y="6356520"/>
-            <a:ext cx="2895120" cy="364680"/>
-          </a:xfrm>
-          <a:prstGeom prst="rect">
-            <a:avLst/>
-          </a:prstGeom>
-          <a:noFill/>
-          <a:ln w="0">
-            <a:noFill/>
-          </a:ln>
-        </p:spPr>
-        <p:txBody>
-          <a:bodyPr lIns="91440" tIns="45720" rIns="91440" bIns="45720" anchor="ctr">
-            <a:noAutofit/>
-          </a:bodyPr>
-          <a:lstStyle>
-            <a:lvl1pPr indent="0" algn="ctr">
-              <a:buNone/>
-              <a:defRPr lang="en-US" sz="1400" b="0" u="none" strike="noStrike">
-                <a:solidFill>
-                  <a:srgbClr val="000000"/>
-                </a:solidFill>
-                <a:effectLst/>
-                <a:uFillTx/>
-                <a:latin typeface="Times New Roman"/>
-              </a:defRPr>
-            </a:lvl1pPr>
-          </a:lstStyle>
-          <a:p>
-            <a:pPr indent="0" algn="ctr">
-              <a:buNone/>
-            </a:pPr>
-            <a:r>
-              <a:rPr lang="en-US" sz="1400" b="0" u="none" strike="noStrike">
-                <a:solidFill>
-                  <a:srgbClr val="000000"/>
-                </a:solidFill>
-                <a:effectLst/>
-                <a:uFillTx/>
-                <a:latin typeface="Times New Roman"/>
-              </a:rPr>
-              <a:t>&lt;footer&gt;</a:t>
-            </a:r>
-            <a:endParaRPr lang="en-US" sz="1400" b="0" u="none" strike="noStrike">
-              <a:solidFill>
-                <a:srgbClr val="000000"/>
-              </a:solidFill>
-              <a:effectLst/>
-              <a:uFillTx/>
-              <a:latin typeface="Times New Roman"/>
-            </a:endParaRPr>
-          </a:p>
-        </p:txBody>
-      </p:sp>
-      <p:sp>
-        <p:nvSpPr>
-          <p:cNvPr id="46" name="PlaceHolder 3"/>
-          <p:cNvSpPr>
-            <a:spLocks noGrp="1"/>
-          </p:cNvSpPr>
-          <p:nvPr>
-            <p:ph type="sldNum" idx="27"/>
-          </p:nvPr>
-        </p:nvSpPr>
-        <p:spPr>
-          <a:xfrm>
-            <a:off x="6553080" y="6356520"/>
-            <a:ext cx="2133360" cy="364680"/>
-          </a:xfrm>
-          <a:prstGeom prst="rect">
-            <a:avLst/>
-          </a:prstGeom>
-          <a:noFill/>
-          <a:ln w="0">
-            <a:noFill/>
-          </a:ln>
-        </p:spPr>
-        <p:txBody>
-          <a:bodyPr lIns="91440" tIns="45720" rIns="91440" bIns="45720" anchor="ctr">
-            <a:noAutofit/>
-          </a:bodyPr>
-          <a:lstStyle>
-            <a:lvl1pPr indent="0" algn="r" defTabSz="457200">
-              <a:lnSpc>
-                <a:spcPct val="100000"/>
-              </a:lnSpc>
-              <a:buNone/>
-              <a:defRPr lang="en-US" sz="1200" b="0" u="none" strike="noStrike">
-                <a:solidFill>
-                  <a:schemeClr val="dk1">
-                    <a:tint val="75000"/>
-                  </a:schemeClr>
-                </a:solidFill>
-                <a:effectLst/>
-                <a:uFillTx/>
-                <a:latin typeface="Calibri"/>
-              </a:defRPr>
-            </a:lvl1pPr>
-          </a:lstStyle>
-          <a:p>
-            <a:pPr indent="0" algn="r" defTabSz="457200">
-              <a:lnSpc>
-                <a:spcPct val="100000"/>
-              </a:lnSpc>
-              <a:buNone/>
-            </a:pPr>
-            <a:fld id="{03F74B0B-3625-4647-AA7C-C4412A515156}" type="slidenum">
-              <a:rPr lang="en-US" sz="1200" b="0" u="none" strike="noStrike">
-                <a:solidFill>
-                  <a:schemeClr val="dk1">
-                    <a:tint val="75000"/>
-                  </a:schemeClr>
-                </a:solidFill>
-                <a:effectLst/>
-                <a:uFillTx/>
-                <a:latin typeface="Calibri"/>
-              </a:rPr>
-              <a:t>&lt;number&gt;</a:t>
-            </a:fld>
-            <a:endParaRPr lang="en-US" sz="1200" b="0" u="none" strike="noStrike">
-              <a:solidFill>
-                <a:srgbClr val="000000"/>
-              </a:solidFill>
-              <a:effectLst/>
-              <a:uFillTx/>
-              <a:latin typeface="Times New Roman"/>
-            </a:endParaRPr>
-          </a:p>
-        </p:txBody>
-      </p:sp>
-      <p:sp>
-        <p:nvSpPr>
-          <p:cNvPr id="47" name="PlaceHolder 4"/>
-          <p:cNvSpPr>
-            <a:spLocks noGrp="1"/>
-          </p:cNvSpPr>
-          <p:nvPr>
-            <p:ph type="title"/>
-          </p:nvPr>
-        </p:nvSpPr>
-        <p:spPr>
-          <a:xfrm>
-            <a:off x="609480" y="273600"/>
-            <a:ext cx="10972440" cy="1144800"/>
-          </a:xfrm>
-          <a:prstGeom prst="rect">
-            <a:avLst/>
-          </a:prstGeom>
-          <a:noFill/>
-          <a:ln w="0">
-            <a:noFill/>
-          </a:ln>
-        </p:spPr>
-        <p:txBody>
-          <a:bodyPr lIns="0" tIns="0" rIns="0" bIns="0" anchor="ctr">
-            <a:noAutofit/>
-          </a:bodyPr>
-          <a:lstStyle>
-            <a:lvl1pPr indent="0" algn="ctr" defTabSz="457200">
-              <a:buNone/>
-              <a:defRPr lang="en-US" sz="4400" b="0" u="none" strike="noStrike">
-                <a:solidFill>
-                  <a:schemeClr val="dk1"/>
-                </a:solidFill>
-                <a:effectLst/>
-                <a:uFillTx/>
-                <a:latin typeface="Calibri"/>
-              </a:defRPr>
-            </a:lvl1pPr>
-          </a:lstStyle>
-          <a:p>
-            <a:pPr indent="0" algn="ctr" defTabSz="457200">
-              <a:buNone/>
-            </a:pPr>
-            <a:r>
-              <a:rPr lang="en-US" sz="4400" b="0" u="none" strike="noStrike">
-                <a:solidFill>
-                  <a:schemeClr val="dk1"/>
-                </a:solidFill>
-                <a:effectLst/>
-                <a:uFillTx/>
-                <a:latin typeface="Calibri"/>
-              </a:rPr>
-              <a:t>Click to edit the title text format</a:t>
-            </a:r>
-            <a:endParaRPr lang="en-US" sz="4400" b="0" u="none" strike="noStrike">
-              <a:solidFill>
-                <a:schemeClr val="dk1"/>
-              </a:solidFill>
-              <a:effectLst/>
-              <a:uFillTx/>
-              <a:latin typeface="Calibri"/>
-            </a:endParaRPr>
-          </a:p>
-        </p:txBody>
-      </p:sp>
-      <p:sp>
-        <p:nvSpPr>
-          <p:cNvPr id="48" name="PlaceHolder 5"/>
-          <p:cNvSpPr>
-            <a:spLocks noGrp="1"/>
-          </p:cNvSpPr>
-          <p:nvPr>
-            <p:ph type="body"/>
-          </p:nvPr>
-        </p:nvSpPr>
-        <p:spPr>
-          <a:xfrm>
-            <a:off x="609480" y="1604520"/>
-            <a:ext cx="10972440" cy="3977280"/>
-          </a:xfrm>
-          <a:prstGeom prst="rect">
-            <a:avLst/>
-          </a:prstGeom>
-          <a:noFill/>
-          <a:ln w="0">
-            <a:noFill/>
-          </a:ln>
-        </p:spPr>
-        <p:txBody>
-          <a:bodyPr lIns="0" tIns="0" rIns="0" bIns="0" anchor="t">
-            <a:normAutofit/>
-          </a:bodyPr>
-          <a:lstStyle>
-            <a:lvl1pPr algn="l" defTabSz="457200">
-              <a:spcBef>
-                <a:spcPts val="641"/>
-              </a:spcBef>
-              <a:buClr>
-                <a:srgbClr val="000000"/>
-              </a:buClr>
-              <a:buFont typeface="Arial"/>
-              <a:buChar char="•"/>
-              <a:defRPr lang="en-US" sz="3200" b="0" u="none" strike="noStrike">
-                <a:solidFill>
-                  <a:schemeClr val="dk1"/>
-                </a:solidFill>
-                <a:effectLst/>
-                <a:uFillTx/>
-                <a:latin typeface="Calibri"/>
-              </a:defRPr>
-            </a:lvl1pPr>
-            <a:lvl2pPr lvl="1" algn="l" defTabSz="457200">
-              <a:spcBef>
-                <a:spcPts val="561"/>
-              </a:spcBef>
-              <a:buClr>
-                <a:srgbClr val="000000"/>
-              </a:buClr>
-              <a:buSzPct val="75000"/>
-              <a:buFont typeface="Symbol" charset="2"/>
-              <a:buChar char=""/>
-              <a:defRPr lang="en-US" sz="2800" b="0" u="none" strike="noStrike">
-                <a:solidFill>
-                  <a:schemeClr val="dk1"/>
-                </a:solidFill>
-                <a:effectLst/>
-                <a:uFillTx/>
-                <a:latin typeface="Calibri"/>
-              </a:defRPr>
-            </a:lvl2pPr>
-            <a:lvl3pPr lvl="2" algn="l" defTabSz="457200">
-              <a:spcBef>
-                <a:spcPts val="479"/>
-              </a:spcBef>
-              <a:buClr>
-                <a:srgbClr val="000000"/>
-              </a:buClr>
-              <a:buSzPct val="45000"/>
-              <a:buFont typeface="Wingdings" charset="2"/>
-              <a:buChar char=""/>
-              <a:defRPr lang="en-US" sz="2400" b="0" u="none" strike="noStrike">
-                <a:solidFill>
-                  <a:schemeClr val="dk1"/>
-                </a:solidFill>
-                <a:effectLst/>
-                <a:uFillTx/>
-                <a:latin typeface="Calibri"/>
-              </a:defRPr>
-            </a:lvl3pPr>
-            <a:lvl4pPr lvl="3" algn="l" defTabSz="457200">
-              <a:spcBef>
-                <a:spcPts val="400"/>
-              </a:spcBef>
-              <a:buClr>
-                <a:srgbClr val="000000"/>
-              </a:buClr>
-              <a:buSzPct val="75000"/>
-              <a:buFont typeface="Symbol" charset="2"/>
-              <a:buChar char=""/>
-              <a:defRPr lang="en-US" sz="2000" b="0" u="none" strike="noStrike">
-                <a:solidFill>
-                  <a:schemeClr val="dk1"/>
-                </a:solidFill>
-                <a:effectLst/>
-                <a:uFillTx/>
-                <a:latin typeface="Calibri"/>
-              </a:defRPr>
-            </a:lvl4pPr>
-            <a:lvl5pPr lvl="4" algn="l" defTabSz="457200">
-              <a:spcBef>
-                <a:spcPts val="400"/>
-              </a:spcBef>
-              <a:buClr>
-                <a:srgbClr val="000000"/>
-              </a:buClr>
-              <a:buSzPct val="45000"/>
-              <a:buFont typeface="Wingdings" charset="2"/>
-              <a:buChar char=""/>
-              <a:defRPr lang="en-US" sz="2000" b="0" u="none" strike="noStrike">
-                <a:solidFill>
-                  <a:schemeClr val="dk1"/>
-                </a:solidFill>
-                <a:effectLst/>
-                <a:uFillTx/>
-                <a:latin typeface="Calibri"/>
-              </a:defRPr>
-            </a:lvl5pPr>
-            <a:lvl6pPr lvl="5" algn="l" defTabSz="457200">
-              <a:spcBef>
-                <a:spcPts val="283"/>
-              </a:spcBef>
-              <a:buClr>
-                <a:srgbClr val="000000"/>
-              </a:buClr>
-              <a:buSzPct val="45000"/>
-              <a:buFont typeface="Wingdings" charset="2"/>
-              <a:buChar char=""/>
-              <a:defRPr lang="en-US" sz="2000" b="0" u="none" strike="noStrike">
-                <a:solidFill>
-                  <a:schemeClr val="dk1"/>
-                </a:solidFill>
-                <a:effectLst/>
-                <a:uFillTx/>
-                <a:latin typeface="Calibri"/>
-              </a:defRPr>
-            </a:lvl6pPr>
-            <a:lvl7pPr lvl="6" algn="l" defTabSz="457200">
-              <a:spcBef>
-                <a:spcPts val="283"/>
-              </a:spcBef>
-              <a:buClr>
-                <a:srgbClr val="000000"/>
-              </a:buClr>
-              <a:buSzPct val="45000"/>
-              <a:buFont typeface="Wingdings" charset="2"/>
-              <a:buChar char=""/>
-              <a:defRPr lang="en-US" sz="2000" b="0" u="none" strike="noStrike">
-                <a:solidFill>
-                  <a:schemeClr val="dk1"/>
-                </a:solidFill>
-                <a:effectLst/>
-                <a:uFillTx/>
-                <a:latin typeface="Calibri"/>
-              </a:defRPr>
-            </a:lvl7pPr>
-          </a:lstStyle>
-          <a:p>
-            <a:pPr marL="343080" indent="-343080" algn="l" defTabSz="457200">
-              <a:spcBef>
-                <a:spcPts val="641"/>
-              </a:spcBef>
-              <a:buClr>
-                <a:srgbClr val="000000"/>
-              </a:buClr>
-              <a:buFont typeface="Arial"/>
-              <a:buChar char="•"/>
-            </a:pPr>
-            <a:r>
-              <a:rPr lang="en-US" sz="3200" b="0" u="none" strike="noStrike">
-                <a:solidFill>
-                  <a:schemeClr val="dk1"/>
-                </a:solidFill>
-                <a:effectLst/>
-                <a:uFillTx/>
-                <a:latin typeface="Calibri"/>
-              </a:rPr>
-              <a:t>Click to edit the outline text format</a:t>
-            </a:r>
-            <a:endParaRPr lang="en-US" sz="3200" b="0" u="none" strike="noStrike">
-              <a:solidFill>
-                <a:schemeClr val="dk1"/>
-              </a:solidFill>
-              <a:effectLst/>
-              <a:uFillTx/>
-              <a:latin typeface="Calibri"/>
-            </a:endParaRPr>
-          </a:p>
-          <a:p>
-            <a:pPr marL="864000" lvl="1" indent="-324000" algn="l" defTabSz="457200">
-              <a:spcBef>
-                <a:spcPts val="561"/>
-              </a:spcBef>
-              <a:buClr>
-                <a:srgbClr val="000000"/>
-              </a:buClr>
-              <a:buSzPct val="75000"/>
-              <a:buFont typeface="Symbol" charset="2"/>
-              <a:buChar char=""/>
-            </a:pPr>
-            <a:r>
-              <a:rPr lang="en-US" sz="2800" b="0" u="none" strike="noStrike">
-                <a:solidFill>
-                  <a:schemeClr val="dk1"/>
-                </a:solidFill>
-                <a:effectLst/>
-                <a:uFillTx/>
-                <a:latin typeface="Calibri"/>
-              </a:rPr>
-              <a:t>Second Outline Level</a:t>
-            </a:r>
-            <a:endParaRPr lang="en-US" sz="2800" b="0" u="none" strike="noStrike">
-              <a:solidFill>
-                <a:schemeClr val="dk1"/>
-              </a:solidFill>
-              <a:effectLst/>
-              <a:uFillTx/>
-              <a:latin typeface="Calibri"/>
-            </a:endParaRPr>
-          </a:p>
-          <a:p>
-            <a:pPr marL="1296000" lvl="2" indent="-288000" algn="l" defTabSz="457200">
-              <a:spcBef>
-                <a:spcPts val="479"/>
-              </a:spcBef>
-              <a:buClr>
-                <a:srgbClr val="000000"/>
-              </a:buClr>
-              <a:buSzPct val="45000"/>
-              <a:buFont typeface="Wingdings" charset="2"/>
-              <a:buChar char=""/>
-            </a:pPr>
-            <a:r>
-              <a:rPr lang="en-US" sz="2400" b="0" u="none" strike="noStrike">
-                <a:solidFill>
-                  <a:schemeClr val="dk1"/>
-                </a:solidFill>
-                <a:effectLst/>
-                <a:uFillTx/>
-                <a:latin typeface="Calibri"/>
-              </a:rPr>
-              <a:t>Third Outline Level</a:t>
-            </a:r>
-            <a:endParaRPr lang="en-US" sz="2400" b="0" u="none" strike="noStrike">
-              <a:solidFill>
-                <a:schemeClr val="dk1"/>
-              </a:solidFill>
-              <a:effectLst/>
-              <a:uFillTx/>
-              <a:latin typeface="Calibri"/>
-            </a:endParaRPr>
-          </a:p>
-          <a:p>
-            <a:pPr marL="1728000" lvl="3" indent="-216000" algn="l" defTabSz="457200">
-              <a:spcBef>
-                <a:spcPts val="400"/>
-              </a:spcBef>
-              <a:buClr>
-                <a:srgbClr val="000000"/>
-              </a:buClr>
-              <a:buSzPct val="75000"/>
-              <a:buFont typeface="Symbol" charset="2"/>
-              <a:buChar char=""/>
-            </a:pPr>
-            <a:r>
-              <a:rPr lang="en-US" sz="2000" b="0" u="none" strike="noStrike">
-                <a:solidFill>
-                  <a:schemeClr val="dk1"/>
-                </a:solidFill>
-                <a:effectLst/>
-                <a:uFillTx/>
-                <a:latin typeface="Calibri"/>
-              </a:rPr>
-              <a:t>Fourth Outline Level</a:t>
-            </a:r>
-            <a:endParaRPr lang="en-US" sz="2000" b="0" u="none" strike="noStrike">
-              <a:solidFill>
-                <a:schemeClr val="dk1"/>
-              </a:solidFill>
-              <a:effectLst/>
-              <a:uFillTx/>
-              <a:latin typeface="Calibri"/>
-            </a:endParaRPr>
-          </a:p>
-          <a:p>
-            <a:pPr marL="2160000" lvl="4" indent="-216000" algn="l" defTabSz="457200">
-              <a:spcBef>
-                <a:spcPts val="400"/>
-              </a:spcBef>
-              <a:buClr>
-                <a:srgbClr val="000000"/>
-              </a:buClr>
-              <a:buSzPct val="45000"/>
-              <a:buFont typeface="Wingdings" charset="2"/>
-              <a:buChar char=""/>
-            </a:pPr>
-            <a:r>
-              <a:rPr lang="en-US" sz="2000" b="0" u="none" strike="noStrike">
-                <a:solidFill>
-                  <a:schemeClr val="dk1"/>
-                </a:solidFill>
-                <a:effectLst/>
-                <a:uFillTx/>
-                <a:latin typeface="Calibri"/>
-              </a:rPr>
-              <a:t>Fifth Outline Level</a:t>
-            </a:r>
-            <a:endParaRPr lang="en-US" sz="2000" b="0" u="none" strike="noStrike">
-              <a:solidFill>
-                <a:schemeClr val="dk1"/>
-              </a:solidFill>
-              <a:effectLst/>
-              <a:uFillTx/>
-              <a:latin typeface="Calibri"/>
-            </a:endParaRPr>
-          </a:p>
-          <a:p>
-            <a:pPr marL="2592000" lvl="5" indent="-216000" algn="l" defTabSz="457200">
-              <a:spcBef>
-                <a:spcPts val="283"/>
-              </a:spcBef>
-              <a:buClr>
-                <a:srgbClr val="000000"/>
-              </a:buClr>
-              <a:buSzPct val="45000"/>
-              <a:buFont typeface="Wingdings" charset="2"/>
-              <a:buChar char=""/>
-            </a:pPr>
-            <a:r>
-              <a:rPr lang="en-US" sz="2000" b="0" u="none" strike="noStrike">
-                <a:solidFill>
-                  <a:schemeClr val="dk1"/>
-                </a:solidFill>
-                <a:effectLst/>
-                <a:uFillTx/>
-                <a:latin typeface="Calibri"/>
-              </a:rPr>
-              <a:t>Sixth Outline Level</a:t>
-            </a:r>
-            <a:endParaRPr lang="en-US" sz="2000" b="0" u="none" strike="noStrike">
-              <a:solidFill>
-                <a:schemeClr val="dk1"/>
-              </a:solidFill>
-              <a:effectLst/>
-              <a:uFillTx/>
-              <a:latin typeface="Calibri"/>
-            </a:endParaRPr>
-          </a:p>
-          <a:p>
-            <a:pPr marL="3024000" lvl="6" indent="-216000" algn="l" defTabSz="457200">
-              <a:spcBef>
-                <a:spcPts val="283"/>
-              </a:spcBef>
-              <a:buClr>
-                <a:srgbClr val="000000"/>
-              </a:buClr>
-              <a:buSzPct val="45000"/>
-              <a:buFont typeface="Wingdings" charset="2"/>
-              <a:buChar char=""/>
-            </a:pPr>
-            <a:r>
-              <a:rPr lang="en-US" sz="2000" b="0" u="none" strike="noStrike">
-                <a:solidFill>
-                  <a:schemeClr val="dk1"/>
-                </a:solidFill>
-                <a:effectLst/>
-                <a:uFillTx/>
-                <a:latin typeface="Calibri"/>
-              </a:rPr>
-              <a:t>Seventh Outline Level</a:t>
-            </a:r>
-            <a:endParaRPr lang="en-US" sz="2000" b="0" u="none" strike="noStrike">
-              <a:solidFill>
-                <a:schemeClr val="dk1"/>
-              </a:solidFill>
-              <a:effectLst/>
-              <a:uFillTx/>
-              <a:latin typeface="Calibri"/>
             </a:endParaRPr>
           </a:p>
         </p:txBody>
@@ -7307,8 +7763,8 @@
         </p:nvSpPr>
         <p:spPr>
           <a:xfrm>
-            <a:off x="1371600" y="1366200"/>
-            <a:ext cx="10027440" cy="3434400"/>
+            <a:off x="914400" y="680760"/>
+            <a:ext cx="10027080" cy="3434040"/>
           </a:xfrm>
           <a:prstGeom prst="rect">
             <a:avLst/>
@@ -7346,6 +7802,311 @@
               <a:t>Trajectory inference: Slingshot and Monocle 3</a:t>
             </a:r>
             <a:endParaRPr lang="en-US" sz="2800" b="0" u="none" strike="noStrike">
+              <a:solidFill>
+                <a:srgbClr val="000000"/>
+              </a:solidFill>
+              <a:effectLst/>
+              <a:uFillTx/>
+              <a:latin typeface="Arial"/>
+            </a:endParaRPr>
+          </a:p>
+        </p:txBody>
+      </p:sp>
+      <p:sp>
+        <p:nvSpPr>
+          <p:cNvPr id="62" name=""/>
+          <p:cNvSpPr/>
+          <p:nvPr/>
+        </p:nvSpPr>
+        <p:spPr>
+          <a:xfrm>
+            <a:off x="228960" y="3886200"/>
+            <a:ext cx="8457480" cy="2566080"/>
+          </a:xfrm>
+          <a:prstGeom prst="rect">
+            <a:avLst/>
+          </a:prstGeom>
+          <a:noFill/>
+          <a:ln w="36720">
+            <a:solidFill>
+              <a:srgbClr val="FF0000"/>
+            </a:solidFill>
+            <a:round/>
+          </a:ln>
+        </p:spPr>
+        <p:style>
+          <a:lnRef idx="0"/>
+          <a:fillRef idx="0"/>
+          <a:effectRef idx="0"/>
+          <a:fontRef idx="minor"/>
+        </p:style>
+        <p:txBody>
+          <a:bodyPr lIns="108360" tIns="63360" rIns="108360" bIns="63360" anchor="t">
+            <a:spAutoFit/>
+          </a:bodyPr>
+          <a:p>
+            <a:pPr>
+              <a:lnSpc>
+                <a:spcPct val="100000"/>
+              </a:lnSpc>
+            </a:pPr>
+            <a:r>
+              <a:rPr lang="en-US" sz="3200" b="0" u="none" strike="noStrike">
+                <a:solidFill>
+                  <a:srgbClr val="000000"/>
+                </a:solidFill>
+                <a:effectLst/>
+                <a:uFillTx/>
+                <a:latin typeface="Arial"/>
+              </a:rPr>
+              <a:t>OnDemand for RStudio:</a:t>
+            </a:r>
+            <a:endParaRPr lang="en-US" sz="3200" b="0" u="none" strike="noStrike">
+              <a:solidFill>
+                <a:srgbClr val="000000"/>
+              </a:solidFill>
+              <a:effectLst/>
+              <a:uFillTx/>
+              <a:latin typeface="Arial"/>
+            </a:endParaRPr>
+          </a:p>
+          <a:p>
+            <a:pPr>
+              <a:lnSpc>
+                <a:spcPct val="100000"/>
+              </a:lnSpc>
+            </a:pPr>
+            <a:r>
+              <a:rPr lang="en-US" sz="3200" b="0" u="none" strike="noStrike">
+                <a:solidFill>
+                  <a:srgbClr val="000000"/>
+                </a:solidFill>
+                <a:effectLst/>
+                <a:uFillTx/>
+                <a:latin typeface="Arial"/>
+              </a:rPr>
+              <a:t>https://cgbs.cgu.edu.tw/</a:t>
+            </a:r>
+            <a:endParaRPr lang="en-US" sz="3200" b="0" u="none" strike="noStrike">
+              <a:solidFill>
+                <a:srgbClr val="000000"/>
+              </a:solidFill>
+              <a:effectLst/>
+              <a:uFillTx/>
+              <a:latin typeface="Arial"/>
+            </a:endParaRPr>
+          </a:p>
+          <a:p>
+            <a:pPr>
+              <a:lnSpc>
+                <a:spcPct val="100000"/>
+              </a:lnSpc>
+            </a:pPr>
+            <a:endParaRPr lang="en-US" sz="3200" b="0" u="none" strike="noStrike">
+              <a:solidFill>
+                <a:srgbClr val="000000"/>
+              </a:solidFill>
+              <a:effectLst/>
+              <a:uFillTx/>
+              <a:latin typeface="Arial"/>
+            </a:endParaRPr>
+          </a:p>
+          <a:p>
+            <a:pPr>
+              <a:lnSpc>
+                <a:spcPct val="100000"/>
+              </a:lnSpc>
+            </a:pPr>
+            <a:r>
+              <a:rPr lang="en-US" sz="3200" b="0" u="none" strike="noStrike">
+                <a:solidFill>
+                  <a:srgbClr val="000000"/>
+                </a:solidFill>
+                <a:effectLst/>
+                <a:uFillTx/>
+                <a:latin typeface="Arial"/>
+              </a:rPr>
+              <a:t>Course material for download at:</a:t>
+            </a:r>
+            <a:endParaRPr lang="en-US" sz="3200" b="0" u="none" strike="noStrike">
+              <a:solidFill>
+                <a:srgbClr val="000000"/>
+              </a:solidFill>
+              <a:effectLst/>
+              <a:uFillTx/>
+              <a:latin typeface="Arial"/>
+            </a:endParaRPr>
+          </a:p>
+          <a:p>
+            <a:pPr>
+              <a:lnSpc>
+                <a:spcPct val="100000"/>
+              </a:lnSpc>
+            </a:pPr>
+            <a:r>
+              <a:rPr lang="en-US" sz="3200" b="0" u="none" strike="noStrike">
+                <a:solidFill>
+                  <a:srgbClr val="000000"/>
+                </a:solidFill>
+                <a:effectLst/>
+                <a:uFillTx/>
+                <a:latin typeface="Arial"/>
+              </a:rPr>
+              <a:t>https://github.com/steverozen/handouts2026</a:t>
+            </a:r>
+            <a:endParaRPr lang="en-US" sz="3200" b="0" u="none" strike="noStrike">
+              <a:solidFill>
+                <a:srgbClr val="000000"/>
+              </a:solidFill>
+              <a:effectLst/>
+              <a:uFillTx/>
+              <a:latin typeface="Arial"/>
+            </a:endParaRPr>
+          </a:p>
+        </p:txBody>
+      </p:sp>
+      <p:sp>
+        <p:nvSpPr>
+          <p:cNvPr id="63" name=""/>
+          <p:cNvSpPr/>
+          <p:nvPr/>
+        </p:nvSpPr>
+        <p:spPr>
+          <a:xfrm>
+            <a:off x="1143000" y="1600200"/>
+            <a:ext cx="2377440" cy="1461240"/>
+          </a:xfrm>
+          <a:prstGeom prst="rect">
+            <a:avLst/>
+          </a:prstGeom>
+          <a:noFill/>
+          <a:ln w="0">
+            <a:noFill/>
+          </a:ln>
+        </p:spPr>
+        <p:style>
+          <a:lnRef idx="0"/>
+          <a:fillRef idx="0"/>
+          <a:effectRef idx="0"/>
+          <a:fontRef idx="minor"/>
+        </p:style>
+        <p:txBody>
+          <a:bodyPr lIns="90000" tIns="45000" rIns="90000" bIns="45000" anchor="t">
+            <a:spAutoFit/>
+          </a:bodyPr>
+          <a:p>
+            <a:pPr>
+              <a:lnSpc>
+                <a:spcPct val="100000"/>
+              </a:lnSpc>
+            </a:pPr>
+            <a:r>
+              <a:rPr lang="en-US" sz="1800" b="0" u="none" strike="noStrike">
+                <a:solidFill>
+                  <a:schemeClr val="dk1"/>
+                </a:solidFill>
+                <a:effectLst/>
+                <a:uFillTx/>
+                <a:latin typeface="Arial"/>
+                <a:ea typeface="Arial"/>
+              </a:rPr>
+              <a:t>August 5, 2026</a:t>
+            </a:r>
+            <a:endParaRPr lang="en-US" sz="1800" b="0" u="none" strike="noStrike">
+              <a:solidFill>
+                <a:srgbClr val="000000"/>
+              </a:solidFill>
+              <a:effectLst/>
+              <a:uFillTx/>
+              <a:latin typeface="Arial"/>
+            </a:endParaRPr>
+          </a:p>
+          <a:p>
+            <a:pPr>
+              <a:lnSpc>
+                <a:spcPct val="100000"/>
+              </a:lnSpc>
+            </a:pPr>
+            <a:r>
+              <a:rPr lang="en-US" sz="1800" b="0" u="none" strike="noStrike">
+                <a:solidFill>
+                  <a:schemeClr val="dk1"/>
+                </a:solidFill>
+                <a:effectLst/>
+                <a:uFillTx/>
+                <a:latin typeface="Arial"/>
+                <a:ea typeface="Arial"/>
+              </a:rPr>
+              <a:t>Steve Rozen</a:t>
+            </a:r>
+            <a:endParaRPr lang="en-US" sz="1800" b="0" u="none" strike="noStrike">
+              <a:solidFill>
+                <a:srgbClr val="000000"/>
+              </a:solidFill>
+              <a:effectLst/>
+              <a:uFillTx/>
+              <a:latin typeface="Arial"/>
+            </a:endParaRPr>
+          </a:p>
+          <a:p>
+            <a:pPr>
+              <a:lnSpc>
+                <a:spcPct val="100000"/>
+              </a:lnSpc>
+            </a:pPr>
+            <a:r>
+              <a:rPr lang="en-US" sz="1800" b="0" u="none" strike="noStrike">
+                <a:solidFill>
+                  <a:schemeClr val="dk1"/>
+                </a:solidFill>
+                <a:effectLst/>
+                <a:uFillTx/>
+                <a:latin typeface="Arial"/>
+                <a:ea typeface="Arial"/>
+              </a:rPr>
+              <a:t>severozen [at] pm.me</a:t>
+            </a:r>
+            <a:endParaRPr lang="en-US" sz="1800" b="0" u="none" strike="noStrike">
+              <a:solidFill>
+                <a:srgbClr val="000000"/>
+              </a:solidFill>
+              <a:effectLst/>
+              <a:uFillTx/>
+              <a:latin typeface="Arial"/>
+            </a:endParaRPr>
+          </a:p>
+          <a:p>
+            <a:pPr>
+              <a:lnSpc>
+                <a:spcPct val="100000"/>
+              </a:lnSpc>
+            </a:pPr>
+            <a:r>
+              <a:rPr lang="en-US" sz="1800" b="0" u="none" strike="noStrike">
+                <a:solidFill>
+                  <a:schemeClr val="dk1"/>
+                </a:solidFill>
+                <a:effectLst/>
+                <a:uFillTx/>
+                <a:latin typeface="Arial"/>
+                <a:ea typeface="Arial"/>
+              </a:rPr>
+              <a:t>sr110 [at] </a:t>
+            </a:r>
+            <a:r>
+              <a:rPr lang="en-US" sz="1800" b="0" u="sng" strike="noStrike">
+                <a:solidFill>
+                  <a:schemeClr val="hlink"/>
+                </a:solidFill>
+                <a:effectLst/>
+                <a:uFillTx/>
+                <a:latin typeface="Arial"/>
+                <a:ea typeface="Arial"/>
+                <a:hlinkClick r:id="rId1"/>
+              </a:rPr>
+              <a:t>duke.edu</a:t>
+            </a:r>
+            <a:endParaRPr lang="en-US" sz="1800" b="0" u="none" strike="noStrike">
               <a:solidFill>
                 <a:srgbClr val="000000"/>
               </a:solidFill>
@@ -7388,14 +8149,14 @@
       </p:grpSpPr>
       <p:sp>
         <p:nvSpPr>
-          <p:cNvPr id="76" name="TextBox 1"/>
+          <p:cNvPr id="78" name="TextBox 1"/>
           <p:cNvSpPr/>
           <p:nvPr/>
         </p:nvSpPr>
         <p:spPr>
           <a:xfrm>
             <a:off x="961560" y="640080"/>
-            <a:ext cx="9557640" cy="499680"/>
+            <a:ext cx="9557280" cy="499320"/>
           </a:xfrm>
           <a:prstGeom prst="rect">
             <a:avLst/>
@@ -7445,7 +8206,7 @@
       </p:sp>
       <p:pic>
         <p:nvPicPr>
-          <p:cNvPr id="77" name="Picture 2" descr="fig_vertices.png"/>
+          <p:cNvPr id="79" name="Picture 2" descr="fig_vertices.png"/>
           <p:cNvPicPr/>
           <p:nvPr/>
         </p:nvPicPr>
@@ -7456,7 +8217,7 @@
         <p:spPr>
           <a:xfrm>
             <a:off x="596160" y="1272600"/>
-            <a:ext cx="10999800" cy="4547880"/>
+            <a:ext cx="10999440" cy="4547520"/>
           </a:xfrm>
           <a:prstGeom prst="rect">
             <a:avLst/>
@@ -7469,14 +8230,14 @@
       </p:pic>
       <p:sp>
         <p:nvSpPr>
-          <p:cNvPr id="78" name="TextBox 3"/>
+          <p:cNvPr id="80" name="TextBox 3"/>
           <p:cNvSpPr/>
           <p:nvPr/>
         </p:nvSpPr>
         <p:spPr>
           <a:xfrm>
             <a:off x="961560" y="5910840"/>
-            <a:ext cx="9557640" cy="399600"/>
+            <a:ext cx="9557280" cy="399240"/>
           </a:xfrm>
           <a:prstGeom prst="rect">
             <a:avLst/>
@@ -7556,14 +8317,14 @@
       </p:grpSpPr>
       <p:sp>
         <p:nvSpPr>
-          <p:cNvPr id="79" name="TextBox 1"/>
+          <p:cNvPr id="81" name="TextBox 1"/>
           <p:cNvSpPr/>
           <p:nvPr/>
         </p:nvSpPr>
         <p:spPr>
           <a:xfrm>
             <a:off x="961560" y="640080"/>
-            <a:ext cx="9557640" cy="499680"/>
+            <a:ext cx="9557280" cy="499320"/>
           </a:xfrm>
           <a:prstGeom prst="rect">
             <a:avLst/>
@@ -7613,7 +8374,7 @@
       </p:sp>
       <p:pic>
         <p:nvPicPr>
-          <p:cNvPr id="80" name="Picture 2" descr="fig_contrast.png"/>
+          <p:cNvPr id="82" name="Picture 2" descr="fig_contrast.png"/>
           <p:cNvPicPr/>
           <p:nvPr/>
         </p:nvPicPr>
@@ -7624,7 +8385,7 @@
         <p:spPr>
           <a:xfrm>
             <a:off x="596160" y="1272600"/>
-            <a:ext cx="10999800" cy="4547880"/>
+            <a:ext cx="10999440" cy="4547520"/>
           </a:xfrm>
           <a:prstGeom prst="rect">
             <a:avLst/>
@@ -7637,14 +8398,14 @@
       </p:pic>
       <p:sp>
         <p:nvSpPr>
-          <p:cNvPr id="81" name="TextBox 3"/>
+          <p:cNvPr id="83" name="TextBox 3"/>
           <p:cNvSpPr/>
           <p:nvPr/>
         </p:nvSpPr>
         <p:spPr>
           <a:xfrm>
             <a:off x="961560" y="5910840"/>
-            <a:ext cx="9557640" cy="399600"/>
+            <a:ext cx="9557280" cy="399240"/>
           </a:xfrm>
           <a:prstGeom prst="rect">
             <a:avLst/>
@@ -7724,14 +8485,14 @@
       </p:grpSpPr>
       <p:sp>
         <p:nvSpPr>
-          <p:cNvPr id="82" name="TextBox 1"/>
+          <p:cNvPr id="84" name="TextBox 1"/>
           <p:cNvSpPr/>
           <p:nvPr/>
         </p:nvSpPr>
         <p:spPr>
           <a:xfrm>
             <a:off x="961560" y="640080"/>
-            <a:ext cx="9557640" cy="499680"/>
+            <a:ext cx="9557280" cy="499320"/>
           </a:xfrm>
           <a:prstGeom prst="rect">
             <a:avLst/>
@@ -7781,14 +8542,14 @@
       </p:sp>
       <p:sp>
         <p:nvSpPr>
-          <p:cNvPr id="83" name="TextBox 2"/>
+          <p:cNvPr id="85" name="TextBox 2"/>
           <p:cNvSpPr/>
           <p:nvPr/>
         </p:nvSpPr>
         <p:spPr>
           <a:xfrm>
-            <a:off x="961560" y="1472760"/>
-            <a:ext cx="2749680" cy="4111920"/>
+            <a:off x="228600" y="1472760"/>
+            <a:ext cx="3482280" cy="3744360"/>
           </a:xfrm>
           <a:prstGeom prst="rect">
             <a:avLst/>
@@ -8031,7 +8792,7 @@
                 <a:uFillTx/>
                 <a:latin typeface="Arial"/>
               </a:rPr>
-              <a:t>DE on pseudotime</a:t>
+              <a:t>Diff expression on pseudotime</a:t>
             </a:r>
             <a:endParaRPr lang="en-US" sz="1600" b="0" u="none" strike="noStrike">
               <a:solidFill>
@@ -8072,14 +8833,14 @@
       </p:sp>
       <p:sp>
         <p:nvSpPr>
-          <p:cNvPr id="84" name="TextBox 3"/>
+          <p:cNvPr id="86" name="TextBox 3"/>
           <p:cNvSpPr/>
           <p:nvPr/>
         </p:nvSpPr>
         <p:spPr>
           <a:xfrm>
             <a:off x="3711600" y="1472760"/>
-            <a:ext cx="3899520" cy="4111920"/>
+            <a:ext cx="3899160" cy="4111560"/>
           </a:xfrm>
           <a:prstGeom prst="rect">
             <a:avLst/>
@@ -8363,14 +9124,14 @@
       </p:sp>
       <p:sp>
         <p:nvSpPr>
-          <p:cNvPr id="85" name="TextBox 4"/>
+          <p:cNvPr id="87" name="TextBox 4"/>
           <p:cNvSpPr/>
           <p:nvPr/>
         </p:nvSpPr>
         <p:spPr>
           <a:xfrm>
             <a:off x="7611480" y="1472760"/>
-            <a:ext cx="3899520" cy="4111920"/>
+            <a:ext cx="3899160" cy="4111560"/>
           </a:xfrm>
           <a:prstGeom prst="rect">
             <a:avLst/>
@@ -8684,14 +9445,14 @@
       </p:grpSpPr>
       <p:sp>
         <p:nvSpPr>
-          <p:cNvPr id="86" name="TextBox 1"/>
+          <p:cNvPr id="88" name="TextBox 1"/>
           <p:cNvSpPr/>
           <p:nvPr/>
         </p:nvSpPr>
         <p:spPr>
           <a:xfrm>
             <a:off x="961560" y="1272600"/>
-            <a:ext cx="9557640" cy="4111920"/>
+            <a:ext cx="9557280" cy="4111560"/>
           </a:xfrm>
           <a:prstGeom prst="rect">
             <a:avLst/>
@@ -8894,14 +9655,14 @@
       </p:grpSpPr>
       <p:sp>
         <p:nvSpPr>
-          <p:cNvPr id="87" name="TextBox 1"/>
+          <p:cNvPr id="89" name="TextBox 1"/>
           <p:cNvSpPr/>
           <p:nvPr/>
         </p:nvSpPr>
         <p:spPr>
           <a:xfrm>
             <a:off x="961560" y="1272600"/>
-            <a:ext cx="9557640" cy="4111920"/>
+            <a:ext cx="9557280" cy="4111560"/>
           </a:xfrm>
           <a:prstGeom prst="rect">
             <a:avLst/>
@@ -9186,14 +9947,14 @@
       </p:grpSpPr>
       <p:sp>
         <p:nvSpPr>
-          <p:cNvPr id="88" name="TextBox 1"/>
+          <p:cNvPr id="90" name="TextBox 1"/>
           <p:cNvSpPr/>
           <p:nvPr/>
         </p:nvSpPr>
         <p:spPr>
           <a:xfrm>
             <a:off x="961560" y="1272600"/>
-            <a:ext cx="9557640" cy="4111920"/>
+            <a:ext cx="9557280" cy="3441960"/>
           </a:xfrm>
           <a:prstGeom prst="rect">
             <a:avLst/>
@@ -9228,7 +9989,7 @@
                 <a:uFillTx/>
                 <a:latin typeface="Arial"/>
               </a:rPr>
-              <a:t>Difference 3: per-lineage versus single pseudotime</a:t>
+              <a:t>Difference 3</a:t>
             </a:r>
             <a:endParaRPr lang="en-US" sz="2200" b="0" u="none" strike="noStrike">
               <a:solidFill>
@@ -9351,7 +10112,7 @@
                 <a:uFillTx/>
                 <a:latin typeface="Arial"/>
               </a:rPr>
-              <a:t>Monocle 3: one number per cell, so branch-specific questions mean subsetting and re-running</a:t>
+              <a:t>Monocle 3: one pseudotime per cell, so branch-specific questions mean subsetting and re-running</a:t>
             </a:r>
             <a:endParaRPr lang="en-US" sz="2200" b="0" u="none" strike="noStrike">
               <a:solidFill>
@@ -9396,14 +10157,14 @@
       </p:grpSpPr>
       <p:sp>
         <p:nvSpPr>
-          <p:cNvPr id="89" name="TextBox 1"/>
+          <p:cNvPr id="91" name="TextBox 1"/>
           <p:cNvSpPr/>
           <p:nvPr/>
         </p:nvSpPr>
         <p:spPr>
           <a:xfrm>
             <a:off x="961560" y="1272600"/>
-            <a:ext cx="9557640" cy="4111920"/>
+            <a:ext cx="9557280" cy="3106800"/>
           </a:xfrm>
           <a:prstGeom prst="rect">
             <a:avLst/>
@@ -9438,7 +10199,7 @@
                 <a:uFillTx/>
                 <a:latin typeface="Arial"/>
               </a:rPr>
-              <a:t>Difference 4: composable versus all-in-one</a:t>
+              <a:t>Difference 4</a:t>
             </a:r>
             <a:endParaRPr lang="en-US" sz="2200" b="0" u="none" strike="noStrike">
               <a:solidFill>
@@ -9606,14 +10367,14 @@
       </p:grpSpPr>
       <p:sp>
         <p:nvSpPr>
-          <p:cNvPr id="90" name="TextBox 1"/>
+          <p:cNvPr id="92" name="TextBox 1"/>
           <p:cNvSpPr/>
           <p:nvPr/>
         </p:nvSpPr>
         <p:spPr>
           <a:xfrm>
             <a:off x="961560" y="1272600"/>
-            <a:ext cx="9557640" cy="3837240"/>
+            <a:ext cx="9557280" cy="4172400"/>
           </a:xfrm>
           <a:prstGeom prst="rect">
             <a:avLst/>
@@ -9689,7 +10450,7 @@
                 <a:uFillTx/>
                 <a:latin typeface="Arial"/>
               </a:rPr>
-              <a:t>Slingshot will connect anything you give it. Feed it T cells and monocytes together and it will draw a lineage between them.</a:t>
+              <a:t>Slingshot will connect anything you give it. Feed it 2 differentiated cell type. e.g. T cells and monocytes and it will draw a lineage between them.</a:t>
             </a:r>
             <a:endParaRPr lang="en-US" sz="2200" b="0" u="none" strike="noStrike">
               <a:solidFill>
@@ -9812,7 +10573,7 @@
                 <a:uFillTx/>
                 <a:latin typeface="Arial"/>
               </a:rPr>
-              <a:t>Neither tool finds the root for you. Direction comes from biology.</a:t>
+              <a:t>In both cases you have to provide the root (starting point) based on the biology.</a:t>
             </a:r>
             <a:endParaRPr lang="en-US" sz="2200" b="0" u="none" strike="noStrike">
               <a:solidFill>
@@ -9857,14 +10618,14 @@
       </p:grpSpPr>
       <p:sp>
         <p:nvSpPr>
-          <p:cNvPr id="91" name="TextBox 1"/>
+          <p:cNvPr id="93" name="TextBox 1"/>
           <p:cNvSpPr/>
           <p:nvPr/>
         </p:nvSpPr>
         <p:spPr>
           <a:xfrm>
             <a:off x="961560" y="1272600"/>
-            <a:ext cx="9557640" cy="4111920"/>
+            <a:ext cx="9557280" cy="2771640"/>
           </a:xfrm>
           <a:prstGeom prst="rect">
             <a:avLst/>
@@ -9998,73 +10759,6 @@
                 <a:spcPct val="100000"/>
               </a:lnSpc>
             </a:pPr>
-            <a:endParaRPr lang="en-US" sz="2200" b="0" u="none" strike="noStrike">
-              <a:solidFill>
-                <a:srgbClr val="000000"/>
-              </a:solidFill>
-              <a:effectLst/>
-              <a:uFillTx/>
-              <a:latin typeface="Arial"/>
-            </a:endParaRPr>
-          </a:p>
-          <a:p>
-            <a:pPr defTabSz="457200">
-              <a:lnSpc>
-                <a:spcPct val="100000"/>
-              </a:lnSpc>
-            </a:pPr>
-            <a:r>
-              <a:rPr lang="en-US" sz="2200" b="0" u="none" strike="noStrike">
-                <a:solidFill>
-                  <a:srgbClr val="000000"/>
-                </a:solidFill>
-                <a:effectLst/>
-                <a:uFillTx/>
-                <a:latin typeface="Arial"/>
-              </a:rPr>
-              <a:t>In the dynverse benchmark Slingshot was among the top performers for linear and branching topologies</a:t>
-            </a:r>
-            <a:endParaRPr lang="en-US" sz="2200" b="0" u="none" strike="noStrike">
-              <a:solidFill>
-                <a:srgbClr val="000000"/>
-              </a:solidFill>
-              <a:effectLst/>
-              <a:uFillTx/>
-              <a:latin typeface="Arial"/>
-            </a:endParaRPr>
-          </a:p>
-          <a:p>
-            <a:pPr defTabSz="457200">
-              <a:lnSpc>
-                <a:spcPct val="100000"/>
-              </a:lnSpc>
-            </a:pPr>
-            <a:endParaRPr lang="en-US" sz="2200" b="0" u="none" strike="noStrike">
-              <a:solidFill>
-                <a:srgbClr val="000000"/>
-              </a:solidFill>
-              <a:effectLst/>
-              <a:uFillTx/>
-              <a:latin typeface="Arial"/>
-            </a:endParaRPr>
-          </a:p>
-          <a:p>
-            <a:pPr defTabSz="457200">
-              <a:lnSpc>
-                <a:spcPct val="100000"/>
-              </a:lnSpc>
-            </a:pPr>
-            <a:r>
-              <a:rPr lang="en-US" sz="2200" b="0" u="none" strike="noStrike">
-                <a:solidFill>
-                  <a:srgbClr val="000000"/>
-                </a:solidFill>
-                <a:effectLst/>
-                <a:uFillTx/>
-                <a:latin typeface="Arial"/>
-              </a:rPr>
-              <a:t>Note that the benchmark tested Monocle 2 (DDRTree), not Monocle 3, so that result does not transfer directly</a:t>
-            </a:r>
             <a:endParaRPr lang="en-US" sz="2200" b="0" u="none" strike="noStrike">
               <a:solidFill>
                 <a:srgbClr val="000000"/>
@@ -10108,14 +10802,14 @@
       </p:grpSpPr>
       <p:sp>
         <p:nvSpPr>
-          <p:cNvPr id="92" name="TextBox 1"/>
+          <p:cNvPr id="94" name="TextBox 1"/>
           <p:cNvSpPr/>
           <p:nvPr/>
         </p:nvSpPr>
         <p:spPr>
           <a:xfrm>
             <a:off x="961560" y="1272600"/>
-            <a:ext cx="9557640" cy="4111920"/>
+            <a:ext cx="9557280" cy="4111560"/>
           </a:xfrm>
           <a:prstGeom prst="rect">
             <a:avLst/>
@@ -10359,14 +11053,14 @@
       </p:grpSpPr>
       <p:sp>
         <p:nvSpPr>
-          <p:cNvPr id="62" name="TextBox 1"/>
+          <p:cNvPr id="64" name="TextBox 1"/>
           <p:cNvSpPr/>
           <p:nvPr/>
         </p:nvSpPr>
         <p:spPr>
           <a:xfrm>
             <a:off x="457200" y="627480"/>
-            <a:ext cx="11430000" cy="4173120"/>
+            <a:ext cx="11429640" cy="4172400"/>
           </a:xfrm>
           <a:prstGeom prst="rect">
             <a:avLst/>
@@ -10651,14 +11345,14 @@
       </p:grpSpPr>
       <p:sp>
         <p:nvSpPr>
-          <p:cNvPr id="93" name="TextBox 1"/>
+          <p:cNvPr id="95" name="TextBox 1"/>
           <p:cNvSpPr/>
           <p:nvPr/>
         </p:nvSpPr>
         <p:spPr>
           <a:xfrm>
             <a:off x="961560" y="1272600"/>
-            <a:ext cx="9557640" cy="4111920"/>
+            <a:ext cx="9557280" cy="4111560"/>
           </a:xfrm>
           <a:prstGeom prst="rect">
             <a:avLst/>
@@ -10902,14 +11596,14 @@
       </p:grpSpPr>
       <p:sp>
         <p:nvSpPr>
-          <p:cNvPr id="63" name="TextBox 1"/>
+          <p:cNvPr id="65" name="TextBox 1"/>
           <p:cNvSpPr/>
           <p:nvPr/>
         </p:nvSpPr>
         <p:spPr>
           <a:xfrm>
             <a:off x="957960" y="763920"/>
-            <a:ext cx="9557640" cy="2496600"/>
+            <a:ext cx="9557280" cy="2496600"/>
           </a:xfrm>
           <a:prstGeom prst="rect">
             <a:avLst/>
@@ -11093,14 +11787,14 @@
       </p:grpSpPr>
       <p:sp>
         <p:nvSpPr>
-          <p:cNvPr id="64" name="TextBox 1"/>
+          <p:cNvPr id="66" name="TextBox 1"/>
           <p:cNvSpPr/>
           <p:nvPr/>
         </p:nvSpPr>
         <p:spPr>
           <a:xfrm>
             <a:off x="729360" y="460440"/>
-            <a:ext cx="10700640" cy="3837240"/>
+            <a:ext cx="10700280" cy="3837240"/>
           </a:xfrm>
           <a:prstGeom prst="rect">
             <a:avLst/>
@@ -11344,14 +12038,14 @@
       </p:grpSpPr>
       <p:sp>
         <p:nvSpPr>
-          <p:cNvPr id="65" name="TextBox 1"/>
+          <p:cNvPr id="67" name="TextBox 1"/>
           <p:cNvSpPr/>
           <p:nvPr/>
         </p:nvSpPr>
         <p:spPr>
           <a:xfrm>
             <a:off x="961560" y="640080"/>
-            <a:ext cx="9557640" cy="499680"/>
+            <a:ext cx="9557280" cy="499320"/>
           </a:xfrm>
           <a:prstGeom prst="rect">
             <a:avLst/>
@@ -11401,7 +12095,7 @@
       </p:sp>
       <p:pic>
         <p:nvPicPr>
-          <p:cNvPr id="66" name="Picture 2" descr="fig_cluster_tree.png"/>
+          <p:cNvPr id="68" name="Picture 2" descr="fig_cluster_tree.png"/>
           <p:cNvPicPr/>
           <p:nvPr/>
         </p:nvPicPr>
@@ -11412,7 +12106,7 @@
         <p:spPr>
           <a:xfrm>
             <a:off x="596160" y="1272600"/>
-            <a:ext cx="10999800" cy="4547880"/>
+            <a:ext cx="10999440" cy="4547520"/>
           </a:xfrm>
           <a:prstGeom prst="rect">
             <a:avLst/>
@@ -11425,14 +12119,14 @@
       </p:pic>
       <p:sp>
         <p:nvSpPr>
-          <p:cNvPr id="67" name="TextBox 3"/>
+          <p:cNvPr id="69" name="TextBox 3"/>
           <p:cNvSpPr/>
           <p:nvPr/>
         </p:nvSpPr>
         <p:spPr>
           <a:xfrm>
             <a:off x="961560" y="5910840"/>
-            <a:ext cx="9557640" cy="399600"/>
+            <a:ext cx="9557280" cy="399240"/>
           </a:xfrm>
           <a:prstGeom prst="rect">
             <a:avLst/>
@@ -11512,14 +12206,14 @@
       </p:grpSpPr>
       <p:sp>
         <p:nvSpPr>
-          <p:cNvPr id="68" name="TextBox 1"/>
+          <p:cNvPr id="70" name="TextBox 1"/>
           <p:cNvSpPr/>
           <p:nvPr/>
         </p:nvSpPr>
         <p:spPr>
           <a:xfrm>
             <a:off x="961560" y="640080"/>
-            <a:ext cx="9557640" cy="499680"/>
+            <a:ext cx="9557280" cy="499320"/>
           </a:xfrm>
           <a:prstGeom prst="rect">
             <a:avLst/>
@@ -11569,7 +12263,7 @@
       </p:sp>
       <p:pic>
         <p:nvPicPr>
-          <p:cNvPr id="69" name="Picture 2" descr="fig_slingshot_curves.png"/>
+          <p:cNvPr id="71" name="Picture 2" descr="fig_slingshot_curves.png"/>
           <p:cNvPicPr/>
           <p:nvPr/>
         </p:nvPicPr>
@@ -11580,7 +12274,7 @@
         <p:spPr>
           <a:xfrm>
             <a:off x="1765800" y="1272600"/>
-            <a:ext cx="8660160" cy="4899600"/>
+            <a:ext cx="8659800" cy="4899240"/>
           </a:xfrm>
           <a:prstGeom prst="rect">
             <a:avLst/>
@@ -11593,14 +12287,14 @@
       </p:pic>
       <p:sp>
         <p:nvSpPr>
-          <p:cNvPr id="70" name="TextBox 3"/>
+          <p:cNvPr id="72" name="TextBox 3"/>
           <p:cNvSpPr/>
           <p:nvPr/>
         </p:nvSpPr>
         <p:spPr>
           <a:xfrm>
             <a:off x="961560" y="6262560"/>
-            <a:ext cx="9557640" cy="399600"/>
+            <a:ext cx="9557280" cy="399240"/>
           </a:xfrm>
           <a:prstGeom prst="rect">
             <a:avLst/>
@@ -11680,14 +12374,14 @@
       </p:grpSpPr>
       <p:sp>
         <p:nvSpPr>
-          <p:cNvPr id="71" name="TextBox 1"/>
+          <p:cNvPr id="73" name="TextBox 1"/>
           <p:cNvSpPr/>
           <p:nvPr/>
         </p:nvSpPr>
         <p:spPr>
           <a:xfrm>
             <a:off x="961560" y="1272600"/>
-            <a:ext cx="9557640" cy="3837240"/>
+            <a:ext cx="9557280" cy="3837240"/>
           </a:xfrm>
           <a:prstGeom prst="rect">
             <a:avLst/>
@@ -11931,14 +12625,14 @@
       </p:grpSpPr>
       <p:sp>
         <p:nvSpPr>
-          <p:cNvPr id="72" name="TextBox 1"/>
+          <p:cNvPr id="74" name="TextBox 1"/>
           <p:cNvSpPr/>
           <p:nvPr/>
         </p:nvSpPr>
         <p:spPr>
           <a:xfrm>
             <a:off x="961560" y="640080"/>
-            <a:ext cx="9557640" cy="499680"/>
+            <a:ext cx="9557280" cy="499320"/>
           </a:xfrm>
           <a:prstGeom prst="rect">
             <a:avLst/>
@@ -11988,7 +12682,7 @@
       </p:sp>
       <p:pic>
         <p:nvPicPr>
-          <p:cNvPr id="73" name="Picture 2" descr="fig_monocle_graph.png"/>
+          <p:cNvPr id="75" name="Picture 2" descr="fig_monocle_graph.png"/>
           <p:cNvPicPr/>
           <p:nvPr/>
         </p:nvPicPr>
@@ -11999,7 +12693,7 @@
         <p:spPr>
           <a:xfrm>
             <a:off x="1195920" y="1272600"/>
-            <a:ext cx="9799560" cy="4899600"/>
+            <a:ext cx="9799200" cy="4899240"/>
           </a:xfrm>
           <a:prstGeom prst="rect">
             <a:avLst/>
@@ -12012,14 +12706,14 @@
       </p:pic>
       <p:sp>
         <p:nvSpPr>
-          <p:cNvPr id="74" name="TextBox 3"/>
+          <p:cNvPr id="76" name="TextBox 3"/>
           <p:cNvSpPr/>
           <p:nvPr/>
         </p:nvSpPr>
         <p:spPr>
           <a:xfrm>
-            <a:off x="961560" y="6262560"/>
-            <a:ext cx="9557640" cy="399600"/>
+            <a:off x="777600" y="5329800"/>
+            <a:ext cx="9557280" cy="1004400"/>
           </a:xfrm>
           <a:prstGeom prst="rect">
             <a:avLst/>
@@ -12046,7 +12740,7 @@
               </a:lnSpc>
             </a:pPr>
             <a:r>
-              <a:rPr lang="en-US" sz="1400" b="0" u="none" strike="noStrike">
+              <a:rPr lang="en-US" sz="2000" b="0" u="none" strike="noStrike">
                 <a:solidFill>
                   <a:srgbClr val="000000"/>
                 </a:solidFill>
@@ -12056,7 +12750,7 @@
               </a:rPr>
               <a:t>Grey spokes show each cell assigned to its nearest vertex. Pseudotime is distance from the root along the black edges. Schematic, drawn to show the algorithm. Not package output.</a:t>
             </a:r>
-            <a:endParaRPr lang="en-US" sz="1400" b="0" u="none" strike="noStrike">
+            <a:endParaRPr lang="en-US" sz="2000" b="0" u="none" strike="noStrike">
               <a:solidFill>
                 <a:srgbClr val="000000"/>
               </a:solidFill>
@@ -12099,14 +12793,14 @@
       </p:grpSpPr>
       <p:sp>
         <p:nvSpPr>
-          <p:cNvPr id="75" name="TextBox 1"/>
+          <p:cNvPr id="77" name="TextBox 1"/>
           <p:cNvSpPr/>
           <p:nvPr/>
         </p:nvSpPr>
         <p:spPr>
           <a:xfrm>
             <a:off x="961560" y="1272600"/>
-            <a:ext cx="9557640" cy="4111920"/>
+            <a:ext cx="9557280" cy="4111560"/>
           </a:xfrm>
           <a:prstGeom prst="rect">
             <a:avLst/>

--- a/wed_aug_5_morning_tutorials/Steve_Rozen_R_trajectory_inference_2026_08_05.pptx
+++ b/wed_aug_5_morning_tutorials/Steve_Rozen_R_trajectory_inference_2026_08_05.pptx
@@ -32,8 +32,8 @@
 </file>
 
 <file path=ppt/slideLayouts/slideLayout1.xml><?xml version="1.0" encoding="utf-8"?>
-<p:sldLayout xmlns:a="http://schemas.openxmlformats.org/drawingml/2006/main" xmlns:p="http://schemas.openxmlformats.org/presentationml/2006/main" xmlns:r="http://schemas.openxmlformats.org/officeDocument/2006/relationships" xmlns:p14="http://schemas.microsoft.com/office/powerpoint/2010/main" xmlns:p15="http://schemas.microsoft.com/office/powerpoint/2012/main" xmlns:mc="http://schemas.openxmlformats.org/markup-compatibility/2006" type="blank" preserve="1">
-  <p:cSld name="Blank">
+<p:sldLayout xmlns:a="http://schemas.openxmlformats.org/drawingml/2006/main" xmlns:p="http://schemas.openxmlformats.org/presentationml/2006/main" xmlns:r="http://schemas.openxmlformats.org/officeDocument/2006/relationships" xmlns:p14="http://schemas.microsoft.com/office/powerpoint/2010/main" xmlns:p15="http://schemas.microsoft.com/office/powerpoint/2012/main" xmlns:mc="http://schemas.openxmlformats.org/markup-compatibility/2006" type="twoObj" preserve="1">
+  <p:cSld name="Two Content">
     <p:bg>
       <p:bgPr>
         <a:solidFill>
@@ -62,13 +62,703 @@
             <a:spLocks noGrp="1"/>
           </p:cNvSpPr>
           <p:nvPr>
+            <p:ph type="title"/>
+          </p:nvPr>
+        </p:nvSpPr>
+        <p:spPr>
+          <a:xfrm>
+            <a:off x="457200" y="274680"/>
+            <a:ext cx="8228520" cy="1141920"/>
+          </a:xfrm>
+          <a:prstGeom prst="rect">
+            <a:avLst/>
+          </a:prstGeom>
+          <a:noFill/>
+          <a:ln w="0">
+            <a:noFill/>
+          </a:ln>
+        </p:spPr>
+        <p:txBody>
+          <a:bodyPr lIns="91440" tIns="45720" rIns="91440" bIns="45720" anchor="ctr">
+            <a:noAutofit/>
+          </a:bodyPr>
+          <a:lstStyle>
+            <a:lvl1pPr indent="0" algn="ctr" defTabSz="457200">
+              <a:lnSpc>
+                <a:spcPct val="100000"/>
+              </a:lnSpc>
+              <a:buNone/>
+              <a:tabLst>
+                <a:tab pos="0" algn="l"/>
+              </a:tabLst>
+              <a:defRPr lang="en-US" sz="4400" b="0" u="none" strike="noStrike">
+                <a:solidFill>
+                  <a:schemeClr val="dk1"/>
+                </a:solidFill>
+                <a:effectLst/>
+                <a:uFillTx/>
+                <a:latin typeface="Calibri"/>
+              </a:defRPr>
+            </a:lvl1pPr>
+          </a:lstStyle>
+          <a:p>
+            <a:pPr indent="0" algn="ctr" defTabSz="457200">
+              <a:lnSpc>
+                <a:spcPct val="100000"/>
+              </a:lnSpc>
+              <a:buNone/>
+              <a:tabLst>
+                <a:tab pos="0" algn="l"/>
+              </a:tabLst>
+            </a:pPr>
+            <a:r>
+              <a:rPr lang="en-US" sz="4400" b="0" u="none" strike="noStrike">
+                <a:solidFill>
+                  <a:schemeClr val="dk1"/>
+                </a:solidFill>
+                <a:effectLst/>
+                <a:uFillTx/>
+                <a:latin typeface="Calibri"/>
+              </a:rPr>
+              <a:t>Click to edit Master title style</a:t>
+            </a:r>
+            <a:endParaRPr lang="en-US" sz="4400" b="0" u="none" strike="noStrike">
+              <a:solidFill>
+                <a:schemeClr val="dk1"/>
+              </a:solidFill>
+              <a:effectLst/>
+              <a:uFillTx/>
+              <a:latin typeface="Calibri"/>
+            </a:endParaRPr>
+          </a:p>
+        </p:txBody>
+      </p:sp>
+      <p:sp>
+        <p:nvSpPr>
+          <p:cNvPr id="3" name="PlaceHolder 2"/>
+          <p:cNvSpPr>
+            <a:spLocks noGrp="1"/>
+          </p:cNvSpPr>
+          <p:nvPr>
+            <p:ph type="body"/>
+          </p:nvPr>
+        </p:nvSpPr>
+        <p:spPr>
+          <a:xfrm>
+            <a:off x="457200" y="1600200"/>
+            <a:ext cx="4037400" cy="4524840"/>
+          </a:xfrm>
+          <a:prstGeom prst="rect">
+            <a:avLst/>
+          </a:prstGeom>
+          <a:noFill/>
+          <a:ln w="0">
+            <a:noFill/>
+          </a:ln>
+        </p:spPr>
+        <p:txBody>
+          <a:bodyPr lIns="91440" tIns="45720" rIns="91440" bIns="45720" anchor="t">
+            <a:noAutofit/>
+          </a:bodyPr>
+          <a:lstStyle>
+            <a:lvl1pPr algn="l" defTabSz="457200">
+              <a:lnSpc>
+                <a:spcPct val="100000"/>
+              </a:lnSpc>
+              <a:spcBef>
+                <a:spcPts val="561"/>
+              </a:spcBef>
+              <a:buClr>
+                <a:srgbClr val="000000"/>
+              </a:buClr>
+              <a:buFont typeface="Arial"/>
+              <a:buChar char="•"/>
+              <a:defRPr lang="en-US" sz="2800" b="0" u="none" strike="noStrike">
+                <a:solidFill>
+                  <a:schemeClr val="dk1"/>
+                </a:solidFill>
+                <a:effectLst/>
+                <a:uFillTx/>
+                <a:latin typeface="Calibri"/>
+              </a:defRPr>
+            </a:lvl1pPr>
+            <a:lvl2pPr lvl="1" algn="l" defTabSz="457200">
+              <a:lnSpc>
+                <a:spcPct val="100000"/>
+              </a:lnSpc>
+              <a:spcBef>
+                <a:spcPts val="479"/>
+              </a:spcBef>
+              <a:buClr>
+                <a:srgbClr val="000000"/>
+              </a:buClr>
+              <a:buFont typeface="Arial"/>
+              <a:buChar char="–"/>
+              <a:defRPr lang="en-US" sz="2400" b="0" u="none" strike="noStrike">
+                <a:solidFill>
+                  <a:schemeClr val="dk1"/>
+                </a:solidFill>
+                <a:effectLst/>
+                <a:uFillTx/>
+                <a:latin typeface="Calibri"/>
+              </a:defRPr>
+            </a:lvl2pPr>
+            <a:lvl3pPr lvl="2" algn="l" defTabSz="457200">
+              <a:lnSpc>
+                <a:spcPct val="100000"/>
+              </a:lnSpc>
+              <a:spcBef>
+                <a:spcPts val="400"/>
+              </a:spcBef>
+              <a:buClr>
+                <a:srgbClr val="000000"/>
+              </a:buClr>
+              <a:buFont typeface="Arial"/>
+              <a:buChar char="•"/>
+              <a:defRPr lang="en-US" sz="2000" b="0" u="none" strike="noStrike">
+                <a:solidFill>
+                  <a:schemeClr val="dk1"/>
+                </a:solidFill>
+                <a:effectLst/>
+                <a:uFillTx/>
+                <a:latin typeface="Calibri"/>
+              </a:defRPr>
+            </a:lvl3pPr>
+            <a:lvl4pPr lvl="3" algn="l" defTabSz="457200">
+              <a:lnSpc>
+                <a:spcPct val="100000"/>
+              </a:lnSpc>
+              <a:spcBef>
+                <a:spcPts val="360"/>
+              </a:spcBef>
+              <a:buClr>
+                <a:srgbClr val="000000"/>
+              </a:buClr>
+              <a:buFont typeface="Arial"/>
+              <a:buChar char="–"/>
+              <a:defRPr lang="en-US" sz="1800" b="0" u="none" strike="noStrike">
+                <a:solidFill>
+                  <a:schemeClr val="dk1"/>
+                </a:solidFill>
+                <a:effectLst/>
+                <a:uFillTx/>
+                <a:latin typeface="Calibri"/>
+              </a:defRPr>
+            </a:lvl4pPr>
+            <a:lvl5pPr lvl="4" algn="l" defTabSz="457200">
+              <a:lnSpc>
+                <a:spcPct val="100000"/>
+              </a:lnSpc>
+              <a:spcBef>
+                <a:spcPts val="360"/>
+              </a:spcBef>
+              <a:buClr>
+                <a:srgbClr val="000000"/>
+              </a:buClr>
+              <a:buFont typeface="Arial"/>
+              <a:buChar char="»"/>
+              <a:defRPr lang="en-US" sz="1800" b="0" u="none" strike="noStrike">
+                <a:solidFill>
+                  <a:schemeClr val="dk1"/>
+                </a:solidFill>
+                <a:effectLst/>
+                <a:uFillTx/>
+                <a:latin typeface="Calibri"/>
+              </a:defRPr>
+            </a:lvl5pPr>
+          </a:lstStyle>
+          <a:p>
+            <a:pPr marL="343080" indent="-343080" algn="l" defTabSz="457200">
+              <a:lnSpc>
+                <a:spcPct val="100000"/>
+              </a:lnSpc>
+              <a:spcBef>
+                <a:spcPts val="561"/>
+              </a:spcBef>
+              <a:buClr>
+                <a:srgbClr val="000000"/>
+              </a:buClr>
+              <a:buFont typeface="Arial"/>
+              <a:buChar char="•"/>
+            </a:pPr>
+            <a:r>
+              <a:rPr lang="en-US" sz="2800" b="0" u="none" strike="noStrike">
+                <a:solidFill>
+                  <a:schemeClr val="dk1"/>
+                </a:solidFill>
+                <a:effectLst/>
+                <a:uFillTx/>
+                <a:latin typeface="Calibri"/>
+              </a:rPr>
+              <a:t>Click to edit Master text styles</a:t>
+            </a:r>
+            <a:endParaRPr lang="en-US" sz="2800" b="0" u="none" strike="noStrike">
+              <a:solidFill>
+                <a:schemeClr val="dk1"/>
+              </a:solidFill>
+              <a:effectLst/>
+              <a:uFillTx/>
+              <a:latin typeface="Calibri"/>
+            </a:endParaRPr>
+          </a:p>
+          <a:p>
+            <a:pPr marL="743040" lvl="1" indent="-285840" algn="l" defTabSz="457200">
+              <a:lnSpc>
+                <a:spcPct val="100000"/>
+              </a:lnSpc>
+              <a:spcBef>
+                <a:spcPts val="479"/>
+              </a:spcBef>
+              <a:buClr>
+                <a:srgbClr val="000000"/>
+              </a:buClr>
+              <a:buFont typeface="Arial"/>
+              <a:buChar char="–"/>
+            </a:pPr>
+            <a:r>
+              <a:rPr lang="en-US" sz="2400" b="0" u="none" strike="noStrike">
+                <a:solidFill>
+                  <a:schemeClr val="dk1"/>
+                </a:solidFill>
+                <a:effectLst/>
+                <a:uFillTx/>
+                <a:latin typeface="Calibri"/>
+              </a:rPr>
+              <a:t>Second level</a:t>
+            </a:r>
+            <a:endParaRPr lang="en-US" sz="2400" b="0" u="none" strike="noStrike">
+              <a:solidFill>
+                <a:schemeClr val="dk1"/>
+              </a:solidFill>
+              <a:effectLst/>
+              <a:uFillTx/>
+              <a:latin typeface="Calibri"/>
+            </a:endParaRPr>
+          </a:p>
+          <a:p>
+            <a:pPr marL="1143000" lvl="2" indent="-228600" algn="l" defTabSz="457200">
+              <a:lnSpc>
+                <a:spcPct val="100000"/>
+              </a:lnSpc>
+              <a:spcBef>
+                <a:spcPts val="400"/>
+              </a:spcBef>
+              <a:buClr>
+                <a:srgbClr val="000000"/>
+              </a:buClr>
+              <a:buFont typeface="Arial"/>
+              <a:buChar char="•"/>
+            </a:pPr>
+            <a:r>
+              <a:rPr lang="en-US" sz="2000" b="0" u="none" strike="noStrike">
+                <a:solidFill>
+                  <a:schemeClr val="dk1"/>
+                </a:solidFill>
+                <a:effectLst/>
+                <a:uFillTx/>
+                <a:latin typeface="Calibri"/>
+              </a:rPr>
+              <a:t>Third level</a:t>
+            </a:r>
+            <a:endParaRPr lang="en-US" sz="2000" b="0" u="none" strike="noStrike">
+              <a:solidFill>
+                <a:schemeClr val="dk1"/>
+              </a:solidFill>
+              <a:effectLst/>
+              <a:uFillTx/>
+              <a:latin typeface="Calibri"/>
+            </a:endParaRPr>
+          </a:p>
+          <a:p>
+            <a:pPr marL="1600200" lvl="3" indent="-228600" algn="l" defTabSz="457200">
+              <a:lnSpc>
+                <a:spcPct val="100000"/>
+              </a:lnSpc>
+              <a:spcBef>
+                <a:spcPts val="360"/>
+              </a:spcBef>
+              <a:buClr>
+                <a:srgbClr val="000000"/>
+              </a:buClr>
+              <a:buFont typeface="Arial"/>
+              <a:buChar char="–"/>
+            </a:pPr>
+            <a:r>
+              <a:rPr lang="en-US" sz="1800" b="0" u="none" strike="noStrike">
+                <a:solidFill>
+                  <a:schemeClr val="dk1"/>
+                </a:solidFill>
+                <a:effectLst/>
+                <a:uFillTx/>
+                <a:latin typeface="Calibri"/>
+              </a:rPr>
+              <a:t>Fourth level</a:t>
+            </a:r>
+            <a:endParaRPr lang="en-US" sz="1800" b="0" u="none" strike="noStrike">
+              <a:solidFill>
+                <a:schemeClr val="dk1"/>
+              </a:solidFill>
+              <a:effectLst/>
+              <a:uFillTx/>
+              <a:latin typeface="Calibri"/>
+            </a:endParaRPr>
+          </a:p>
+          <a:p>
+            <a:pPr marL="2057400" lvl="4" indent="-228600" algn="l" defTabSz="457200">
+              <a:lnSpc>
+                <a:spcPct val="100000"/>
+              </a:lnSpc>
+              <a:spcBef>
+                <a:spcPts val="360"/>
+              </a:spcBef>
+              <a:buClr>
+                <a:srgbClr val="000000"/>
+              </a:buClr>
+              <a:buFont typeface="Arial"/>
+              <a:buChar char="»"/>
+            </a:pPr>
+            <a:r>
+              <a:rPr lang="en-US" sz="1800" b="0" u="none" strike="noStrike">
+                <a:solidFill>
+                  <a:schemeClr val="dk1"/>
+                </a:solidFill>
+                <a:effectLst/>
+                <a:uFillTx/>
+                <a:latin typeface="Calibri"/>
+              </a:rPr>
+              <a:t>Fifth level</a:t>
+            </a:r>
+            <a:endParaRPr lang="en-US" sz="1800" b="0" u="none" strike="noStrike">
+              <a:solidFill>
+                <a:schemeClr val="dk1"/>
+              </a:solidFill>
+              <a:effectLst/>
+              <a:uFillTx/>
+              <a:latin typeface="Calibri"/>
+            </a:endParaRPr>
+          </a:p>
+        </p:txBody>
+      </p:sp>
+      <p:sp>
+        <p:nvSpPr>
+          <p:cNvPr id="4" name="PlaceHolder 3"/>
+          <p:cNvSpPr>
+            <a:spLocks noGrp="1"/>
+          </p:cNvSpPr>
+          <p:nvPr>
+            <p:ph type="body"/>
+          </p:nvPr>
+        </p:nvSpPr>
+        <p:spPr>
+          <a:xfrm>
+            <a:off x="4648320" y="1600200"/>
+            <a:ext cx="4037400" cy="4524840"/>
+          </a:xfrm>
+          <a:prstGeom prst="rect">
+            <a:avLst/>
+          </a:prstGeom>
+          <a:noFill/>
+          <a:ln w="0">
+            <a:noFill/>
+          </a:ln>
+        </p:spPr>
+        <p:txBody>
+          <a:bodyPr lIns="91440" tIns="45720" rIns="91440" bIns="45720" anchor="t">
+            <a:noAutofit/>
+          </a:bodyPr>
+          <a:lstStyle>
+            <a:lvl1pPr algn="l" defTabSz="457200">
+              <a:lnSpc>
+                <a:spcPct val="100000"/>
+              </a:lnSpc>
+              <a:spcBef>
+                <a:spcPts val="561"/>
+              </a:spcBef>
+              <a:buClr>
+                <a:srgbClr val="000000"/>
+              </a:buClr>
+              <a:buFont typeface="Arial"/>
+              <a:buChar char="•"/>
+              <a:defRPr lang="en-US" sz="2800" b="0" u="none" strike="noStrike">
+                <a:solidFill>
+                  <a:schemeClr val="dk1"/>
+                </a:solidFill>
+                <a:effectLst/>
+                <a:uFillTx/>
+                <a:latin typeface="Calibri"/>
+              </a:defRPr>
+            </a:lvl1pPr>
+            <a:lvl2pPr lvl="1" algn="l" defTabSz="457200">
+              <a:lnSpc>
+                <a:spcPct val="100000"/>
+              </a:lnSpc>
+              <a:spcBef>
+                <a:spcPts val="479"/>
+              </a:spcBef>
+              <a:buClr>
+                <a:srgbClr val="000000"/>
+              </a:buClr>
+              <a:buFont typeface="Arial"/>
+              <a:buChar char="–"/>
+              <a:defRPr lang="en-US" sz="2400" b="0" u="none" strike="noStrike">
+                <a:solidFill>
+                  <a:schemeClr val="dk1"/>
+                </a:solidFill>
+                <a:effectLst/>
+                <a:uFillTx/>
+                <a:latin typeface="Calibri"/>
+              </a:defRPr>
+            </a:lvl2pPr>
+            <a:lvl3pPr lvl="2" algn="l" defTabSz="457200">
+              <a:lnSpc>
+                <a:spcPct val="100000"/>
+              </a:lnSpc>
+              <a:spcBef>
+                <a:spcPts val="400"/>
+              </a:spcBef>
+              <a:buClr>
+                <a:srgbClr val="000000"/>
+              </a:buClr>
+              <a:buFont typeface="Arial"/>
+              <a:buChar char="•"/>
+              <a:defRPr lang="en-US" sz="2000" b="0" u="none" strike="noStrike">
+                <a:solidFill>
+                  <a:schemeClr val="dk1"/>
+                </a:solidFill>
+                <a:effectLst/>
+                <a:uFillTx/>
+                <a:latin typeface="Calibri"/>
+              </a:defRPr>
+            </a:lvl3pPr>
+            <a:lvl4pPr lvl="3" algn="l" defTabSz="457200">
+              <a:lnSpc>
+                <a:spcPct val="100000"/>
+              </a:lnSpc>
+              <a:spcBef>
+                <a:spcPts val="360"/>
+              </a:spcBef>
+              <a:buClr>
+                <a:srgbClr val="000000"/>
+              </a:buClr>
+              <a:buFont typeface="Arial"/>
+              <a:buChar char="–"/>
+              <a:defRPr lang="en-US" sz="1800" b="0" u="none" strike="noStrike">
+                <a:solidFill>
+                  <a:schemeClr val="dk1"/>
+                </a:solidFill>
+                <a:effectLst/>
+                <a:uFillTx/>
+                <a:latin typeface="Calibri"/>
+              </a:defRPr>
+            </a:lvl4pPr>
+            <a:lvl5pPr lvl="4" algn="l" defTabSz="457200">
+              <a:lnSpc>
+                <a:spcPct val="100000"/>
+              </a:lnSpc>
+              <a:spcBef>
+                <a:spcPts val="360"/>
+              </a:spcBef>
+              <a:buClr>
+                <a:srgbClr val="000000"/>
+              </a:buClr>
+              <a:buFont typeface="Arial"/>
+              <a:buChar char="»"/>
+              <a:defRPr lang="en-US" sz="1800" b="0" u="none" strike="noStrike">
+                <a:solidFill>
+                  <a:schemeClr val="dk1"/>
+                </a:solidFill>
+                <a:effectLst/>
+                <a:uFillTx/>
+                <a:latin typeface="Calibri"/>
+              </a:defRPr>
+            </a:lvl5pPr>
+          </a:lstStyle>
+          <a:p>
+            <a:pPr marL="343080" indent="-343080" algn="l" defTabSz="457200">
+              <a:lnSpc>
+                <a:spcPct val="100000"/>
+              </a:lnSpc>
+              <a:spcBef>
+                <a:spcPts val="561"/>
+              </a:spcBef>
+              <a:buClr>
+                <a:srgbClr val="000000"/>
+              </a:buClr>
+              <a:buFont typeface="Arial"/>
+              <a:buChar char="•"/>
+            </a:pPr>
+            <a:r>
+              <a:rPr lang="en-US" sz="2800" b="0" u="none" strike="noStrike">
+                <a:solidFill>
+                  <a:schemeClr val="dk1"/>
+                </a:solidFill>
+                <a:effectLst/>
+                <a:uFillTx/>
+                <a:latin typeface="Calibri"/>
+              </a:rPr>
+              <a:t>Click to edit Master text styles</a:t>
+            </a:r>
+            <a:endParaRPr lang="en-US" sz="2800" b="0" u="none" strike="noStrike">
+              <a:solidFill>
+                <a:schemeClr val="dk1"/>
+              </a:solidFill>
+              <a:effectLst/>
+              <a:uFillTx/>
+              <a:latin typeface="Calibri"/>
+            </a:endParaRPr>
+          </a:p>
+          <a:p>
+            <a:pPr marL="743040" lvl="1" indent="-285840" algn="l" defTabSz="457200">
+              <a:lnSpc>
+                <a:spcPct val="100000"/>
+              </a:lnSpc>
+              <a:spcBef>
+                <a:spcPts val="479"/>
+              </a:spcBef>
+              <a:buClr>
+                <a:srgbClr val="000000"/>
+              </a:buClr>
+              <a:buFont typeface="Arial"/>
+              <a:buChar char="–"/>
+            </a:pPr>
+            <a:r>
+              <a:rPr lang="en-US" sz="2400" b="0" u="none" strike="noStrike">
+                <a:solidFill>
+                  <a:schemeClr val="dk1"/>
+                </a:solidFill>
+                <a:effectLst/>
+                <a:uFillTx/>
+                <a:latin typeface="Calibri"/>
+              </a:rPr>
+              <a:t>Second level</a:t>
+            </a:r>
+            <a:endParaRPr lang="en-US" sz="2400" b="0" u="none" strike="noStrike">
+              <a:solidFill>
+                <a:schemeClr val="dk1"/>
+              </a:solidFill>
+              <a:effectLst/>
+              <a:uFillTx/>
+              <a:latin typeface="Calibri"/>
+            </a:endParaRPr>
+          </a:p>
+          <a:p>
+            <a:pPr marL="1143000" lvl="2" indent="-228600" algn="l" defTabSz="457200">
+              <a:lnSpc>
+                <a:spcPct val="100000"/>
+              </a:lnSpc>
+              <a:spcBef>
+                <a:spcPts val="400"/>
+              </a:spcBef>
+              <a:buClr>
+                <a:srgbClr val="000000"/>
+              </a:buClr>
+              <a:buFont typeface="Arial"/>
+              <a:buChar char="•"/>
+            </a:pPr>
+            <a:r>
+              <a:rPr lang="en-US" sz="2000" b="0" u="none" strike="noStrike">
+                <a:solidFill>
+                  <a:schemeClr val="dk1"/>
+                </a:solidFill>
+                <a:effectLst/>
+                <a:uFillTx/>
+                <a:latin typeface="Calibri"/>
+              </a:rPr>
+              <a:t>Third level</a:t>
+            </a:r>
+            <a:endParaRPr lang="en-US" sz="2000" b="0" u="none" strike="noStrike">
+              <a:solidFill>
+                <a:schemeClr val="dk1"/>
+              </a:solidFill>
+              <a:effectLst/>
+              <a:uFillTx/>
+              <a:latin typeface="Calibri"/>
+            </a:endParaRPr>
+          </a:p>
+          <a:p>
+            <a:pPr marL="1600200" lvl="3" indent="-228600" algn="l" defTabSz="457200">
+              <a:lnSpc>
+                <a:spcPct val="100000"/>
+              </a:lnSpc>
+              <a:spcBef>
+                <a:spcPts val="360"/>
+              </a:spcBef>
+              <a:buClr>
+                <a:srgbClr val="000000"/>
+              </a:buClr>
+              <a:buFont typeface="Arial"/>
+              <a:buChar char="–"/>
+            </a:pPr>
+            <a:r>
+              <a:rPr lang="en-US" sz="1800" b="0" u="none" strike="noStrike">
+                <a:solidFill>
+                  <a:schemeClr val="dk1"/>
+                </a:solidFill>
+                <a:effectLst/>
+                <a:uFillTx/>
+                <a:latin typeface="Calibri"/>
+              </a:rPr>
+              <a:t>Fourth level</a:t>
+            </a:r>
+            <a:endParaRPr lang="en-US" sz="1800" b="0" u="none" strike="noStrike">
+              <a:solidFill>
+                <a:schemeClr val="dk1"/>
+              </a:solidFill>
+              <a:effectLst/>
+              <a:uFillTx/>
+              <a:latin typeface="Calibri"/>
+            </a:endParaRPr>
+          </a:p>
+          <a:p>
+            <a:pPr marL="2057400" lvl="4" indent="-228600" algn="l" defTabSz="457200">
+              <a:lnSpc>
+                <a:spcPct val="100000"/>
+              </a:lnSpc>
+              <a:spcBef>
+                <a:spcPts val="360"/>
+              </a:spcBef>
+              <a:buClr>
+                <a:srgbClr val="000000"/>
+              </a:buClr>
+              <a:buFont typeface="Arial"/>
+              <a:buChar char="»"/>
+            </a:pPr>
+            <a:r>
+              <a:rPr lang="en-US" sz="1800" b="0" u="none" strike="noStrike">
+                <a:solidFill>
+                  <a:schemeClr val="dk1"/>
+                </a:solidFill>
+                <a:effectLst/>
+                <a:uFillTx/>
+                <a:latin typeface="Calibri"/>
+              </a:rPr>
+              <a:t>Fifth level</a:t>
+            </a:r>
+            <a:endParaRPr lang="en-US" sz="1800" b="0" u="none" strike="noStrike">
+              <a:solidFill>
+                <a:schemeClr val="dk1"/>
+              </a:solidFill>
+              <a:effectLst/>
+              <a:uFillTx/>
+              <a:latin typeface="Calibri"/>
+            </a:endParaRPr>
+          </a:p>
+        </p:txBody>
+      </p:sp>
+      <p:sp>
+        <p:nvSpPr>
+          <p:cNvPr id="5" name="PlaceHolder 4"/>
+          <p:cNvSpPr>
+            <a:spLocks noGrp="1"/>
+          </p:cNvSpPr>
+          <p:nvPr>
             <p:ph type="dt" idx="1"/>
           </p:nvPr>
         </p:nvSpPr>
         <p:spPr>
           <a:xfrm>
             <a:off x="457200" y="6356520"/>
-            <a:ext cx="2133000" cy="364320"/>
+            <a:ext cx="2132640" cy="363960"/>
           </a:xfrm>
           <a:prstGeom prst="rect">
             <a:avLst/>
@@ -139,7 +829,7 @@
       </p:sp>
       <p:sp>
         <p:nvSpPr>
-          <p:cNvPr id="3" name="PlaceHolder 2"/>
+          <p:cNvPr id="6" name="PlaceHolder 5"/>
           <p:cNvSpPr>
             <a:spLocks noGrp="1"/>
           </p:cNvSpPr>
@@ -150,7 +840,7 @@
         <p:spPr>
           <a:xfrm>
             <a:off x="3124080" y="6356520"/>
-            <a:ext cx="2894760" cy="364320"/>
+            <a:ext cx="2894400" cy="363960"/>
           </a:xfrm>
           <a:prstGeom prst="rect">
             <a:avLst/>
@@ -217,7 +907,7 @@
       </p:sp>
       <p:sp>
         <p:nvSpPr>
-          <p:cNvPr id="4" name="PlaceHolder 3"/>
+          <p:cNvPr id="7" name="PlaceHolder 6"/>
           <p:cNvSpPr>
             <a:spLocks noGrp="1"/>
           </p:cNvSpPr>
@@ -228,7 +918,7 @@
         <p:spPr>
           <a:xfrm>
             <a:off x="6553080" y="6356520"/>
-            <a:ext cx="2133000" cy="364320"/>
+            <a:ext cx="2132640" cy="363960"/>
           </a:xfrm>
           <a:prstGeom prst="rect">
             <a:avLst/>
@@ -273,7 +963,7 @@
                 <a:tab pos="0" algn="l"/>
               </a:tabLst>
             </a:pPr>
-            <a:fld id="{0A1D1A07-91B5-401C-BE11-C58BBF945ADF}" type="slidenum">
+            <a:fld id="{32BCFB7F-8CD1-450A-8B1F-4F80F65497AB}" type="slidenum">
               <a:rPr lang="en-US" sz="1200" b="0" u="none" strike="noStrike">
                 <a:solidFill>
                   <a:schemeClr val="dk1">
@@ -297,9 +987,38 @@
           </a:p>
         </p:txBody>
       </p:sp>
+    </p:spTree>
+  </p:cSld>
+</p:sldLayout>
+</file>
+
+<file path=ppt/slideLayouts/slideLayout10.xml><?xml version="1.0" encoding="utf-8"?>
+<p:sldLayout xmlns:a="http://schemas.openxmlformats.org/drawingml/2006/main" xmlns:p="http://schemas.openxmlformats.org/presentationml/2006/main" xmlns:r="http://schemas.openxmlformats.org/officeDocument/2006/relationships" xmlns:p14="http://schemas.microsoft.com/office/powerpoint/2010/main" xmlns:p15="http://schemas.microsoft.com/office/powerpoint/2012/main" xmlns:mc="http://schemas.openxmlformats.org/markup-compatibility/2006" type="obj" preserve="1">
+  <p:cSld name="Title and Content">
+    <p:bg>
+      <p:bgPr>
+        <a:solidFill>
+          <a:srgbClr val="FFFFFF"/>
+        </a:solidFill>
+      </p:bgPr>
+    </p:bg>
+    <p:spTree>
+      <p:nvGrpSpPr>
+        <p:cNvPr id="1" name=""/>
+        <p:cNvGrpSpPr/>
+        <p:nvPr/>
+      </p:nvGrpSpPr>
+      <p:grpSpPr>
+        <a:xfrm>
+          <a:off x="0" y="0"/>
+          <a:ext cx="0" cy="0"/>
+          <a:chOff x="0" y="0"/>
+          <a:chExt cx="0" cy="0"/>
+        </a:xfrm>
+      </p:grpSpPr>
       <p:sp>
         <p:nvSpPr>
-          <p:cNvPr id="5" name="PlaceHolder 4"/>
+          <p:cNvPr id="51" name="PlaceHolder 1"/>
           <p:cNvSpPr>
             <a:spLocks noGrp="1"/>
           </p:cNvSpPr>
@@ -309,8 +1028,8 @@
         </p:nvSpPr>
         <p:spPr>
           <a:xfrm>
-            <a:off x="609480" y="273600"/>
-            <a:ext cx="10972080" cy="1144440"/>
+            <a:off x="457200" y="274680"/>
+            <a:ext cx="8228520" cy="1141920"/>
           </a:xfrm>
           <a:prstGeom prst="rect">
             <a:avLst/>
@@ -321,7 +1040,7 @@
           </a:ln>
         </p:spPr>
         <p:txBody>
-          <a:bodyPr lIns="0" tIns="0" rIns="0" bIns="0" anchor="ctr">
+          <a:bodyPr lIns="91440" tIns="45720" rIns="91440" bIns="45720" anchor="ctr">
             <a:noAutofit/>
           </a:bodyPr>
           <a:lstStyle>
@@ -362,7 +1081,7 @@
                 <a:uFillTx/>
                 <a:latin typeface="Calibri"/>
               </a:rPr>
-              <a:t>Click to edit the title text format</a:t>
+              <a:t>Click to edit Master title style</a:t>
             </a:r>
             <a:endParaRPr lang="en-US" sz="4400" b="0" u="none" strike="noStrike">
               <a:solidFill>
@@ -377,7 +1096,7 @@
       </p:sp>
       <p:sp>
         <p:nvSpPr>
-          <p:cNvPr id="6" name="PlaceHolder 5"/>
+          <p:cNvPr id="52" name="PlaceHolder 2"/>
           <p:cNvSpPr>
             <a:spLocks noGrp="1"/>
           </p:cNvSpPr>
@@ -387,8 +1106,8 @@
         </p:nvSpPr>
         <p:spPr>
           <a:xfrm>
-            <a:off x="609480" y="1604520"/>
-            <a:ext cx="10972080" cy="3976920"/>
+            <a:off x="457200" y="1600200"/>
+            <a:ext cx="8228520" cy="4524840"/>
           </a:xfrm>
           <a:prstGeom prst="rect">
             <a:avLst/>
@@ -399,8 +1118,8 @@
           </a:ln>
         </p:spPr>
         <p:txBody>
-          <a:bodyPr lIns="0" tIns="0" rIns="0" bIns="0" anchor="t">
-            <a:normAutofit/>
+          <a:bodyPr lIns="91440" tIns="45720" rIns="91440" bIns="45720" anchor="t">
+            <a:noAutofit/>
           </a:bodyPr>
           <a:lstStyle>
             <a:lvl1pPr algn="l" defTabSz="457200">
@@ -434,9 +1153,8 @@
               <a:buClr>
                 <a:srgbClr val="000000"/>
               </a:buClr>
-              <a:buSzPct val="75000"/>
-              <a:buFont typeface="Symbol" charset="2"/>
-              <a:buChar char=""/>
+              <a:buFont typeface="Arial"/>
+              <a:buChar char="–"/>
               <a:defRPr lang="en-US" sz="2800" b="0" u="none" strike="noStrike">
                 <a:solidFill>
                   <a:schemeClr val="dk1"/>
@@ -456,9 +1174,8 @@
               <a:buClr>
                 <a:srgbClr val="000000"/>
               </a:buClr>
-              <a:buSzPct val="45000"/>
-              <a:buFont typeface="Wingdings" charset="2"/>
-              <a:buChar char=""/>
+              <a:buFont typeface="Arial"/>
+              <a:buChar char="•"/>
               <a:defRPr lang="en-US" sz="2400" b="0" u="none" strike="noStrike">
                 <a:solidFill>
                   <a:schemeClr val="dk1"/>
@@ -478,9 +1195,8 @@
               <a:buClr>
                 <a:srgbClr val="000000"/>
               </a:buClr>
-              <a:buSzPct val="75000"/>
-              <a:buFont typeface="Symbol" charset="2"/>
-              <a:buChar char=""/>
+              <a:buFont typeface="Arial"/>
+              <a:buChar char="–"/>
               <a:defRPr lang="en-US" sz="2000" b="0" u="none" strike="noStrike">
                 <a:solidFill>
                   <a:schemeClr val="dk1"/>
@@ -500,9 +1216,8 @@
               <a:buClr>
                 <a:srgbClr val="000000"/>
               </a:buClr>
-              <a:buSzPct val="45000"/>
-              <a:buFont typeface="Wingdings" charset="2"/>
-              <a:buChar char=""/>
+              <a:buFont typeface="Arial"/>
+              <a:buChar char="»"/>
               <a:defRPr lang="en-US" sz="2000" b="0" u="none" strike="noStrike">
                 <a:solidFill>
                   <a:schemeClr val="dk1"/>
@@ -512,50 +1227,6 @@
                 <a:latin typeface="Calibri"/>
               </a:defRPr>
             </a:lvl5pPr>
-            <a:lvl6pPr lvl="5" algn="l" defTabSz="457200">
-              <a:lnSpc>
-                <a:spcPct val="100000"/>
-              </a:lnSpc>
-              <a:spcBef>
-                <a:spcPts val="283"/>
-              </a:spcBef>
-              <a:buClr>
-                <a:srgbClr val="000000"/>
-              </a:buClr>
-              <a:buSzPct val="45000"/>
-              <a:buFont typeface="Wingdings" charset="2"/>
-              <a:buChar char=""/>
-              <a:defRPr lang="en-US" sz="2000" b="0" u="none" strike="noStrike">
-                <a:solidFill>
-                  <a:schemeClr val="dk1"/>
-                </a:solidFill>
-                <a:effectLst/>
-                <a:uFillTx/>
-                <a:latin typeface="Calibri"/>
-              </a:defRPr>
-            </a:lvl6pPr>
-            <a:lvl7pPr lvl="6" algn="l" defTabSz="457200">
-              <a:lnSpc>
-                <a:spcPct val="100000"/>
-              </a:lnSpc>
-              <a:spcBef>
-                <a:spcPts val="283"/>
-              </a:spcBef>
-              <a:buClr>
-                <a:srgbClr val="000000"/>
-              </a:buClr>
-              <a:buSzPct val="45000"/>
-              <a:buFont typeface="Wingdings" charset="2"/>
-              <a:buChar char=""/>
-              <a:defRPr lang="en-US" sz="2000" b="0" u="none" strike="noStrike">
-                <a:solidFill>
-                  <a:schemeClr val="dk1"/>
-                </a:solidFill>
-                <a:effectLst/>
-                <a:uFillTx/>
-                <a:latin typeface="Calibri"/>
-              </a:defRPr>
-            </a:lvl7pPr>
           </a:lstStyle>
           <a:p>
             <a:pPr marL="343080" indent="-343080" algn="l" defTabSz="457200">
@@ -580,7 +1251,7 @@
                 <a:uFillTx/>
                 <a:latin typeface="Calibri"/>
               </a:rPr>
-              <a:t>Click to edit the outline text format</a:t>
+              <a:t>Click to edit Master text styles</a:t>
             </a:r>
             <a:endParaRPr lang="en-US" sz="3200" b="0" u="none" strike="noStrike">
               <a:solidFill>
@@ -592,7 +1263,7 @@
             </a:endParaRPr>
           </a:p>
           <a:p>
-            <a:pPr marL="864000" lvl="1" indent="-324000" algn="l" defTabSz="457200">
+            <a:pPr marL="743040" lvl="1" indent="-285840" algn="l" defTabSz="457200">
               <a:lnSpc>
                 <a:spcPct val="100000"/>
               </a:lnSpc>
@@ -602,9 +1273,8 @@
               <a:buClr>
                 <a:srgbClr val="000000"/>
               </a:buClr>
-              <a:buSzPct val="75000"/>
-              <a:buFont typeface="Symbol" charset="2"/>
-              <a:buChar char=""/>
+              <a:buFont typeface="Arial"/>
+              <a:buChar char="–"/>
             </a:pPr>
             <a:r>
               <a:rPr lang="en-US" sz="2800" b="0" u="none" strike="noStrike">
@@ -615,7 +1285,7 @@
                 <a:uFillTx/>
                 <a:latin typeface="Calibri"/>
               </a:rPr>
-              <a:t>Second Outline Level</a:t>
+              <a:t>Second level</a:t>
             </a:r>
             <a:endParaRPr lang="en-US" sz="2800" b="0" u="none" strike="noStrike">
               <a:solidFill>
@@ -627,7 +1297,7 @@
             </a:endParaRPr>
           </a:p>
           <a:p>
-            <a:pPr marL="1296000" lvl="2" indent="-288000" algn="l" defTabSz="457200">
+            <a:pPr marL="1143000" lvl="2" indent="-228600" algn="l" defTabSz="457200">
               <a:lnSpc>
                 <a:spcPct val="100000"/>
               </a:lnSpc>
@@ -637,9 +1307,8 @@
               <a:buClr>
                 <a:srgbClr val="000000"/>
               </a:buClr>
-              <a:buSzPct val="45000"/>
-              <a:buFont typeface="Wingdings" charset="2"/>
-              <a:buChar char=""/>
+              <a:buFont typeface="Arial"/>
+              <a:buChar char="•"/>
             </a:pPr>
             <a:r>
               <a:rPr lang="en-US" sz="2400" b="0" u="none" strike="noStrike">
@@ -650,7 +1319,7 @@
                 <a:uFillTx/>
                 <a:latin typeface="Calibri"/>
               </a:rPr>
-              <a:t>Third Outline Level</a:t>
+              <a:t>Third level</a:t>
             </a:r>
             <a:endParaRPr lang="en-US" sz="2400" b="0" u="none" strike="noStrike">
               <a:solidFill>
@@ -662,7 +1331,7 @@
             </a:endParaRPr>
           </a:p>
           <a:p>
-            <a:pPr marL="1728000" lvl="3" indent="-216000" algn="l" defTabSz="457200">
+            <a:pPr marL="1600200" lvl="3" indent="-228600" algn="l" defTabSz="457200">
               <a:lnSpc>
                 <a:spcPct val="100000"/>
               </a:lnSpc>
@@ -672,9 +1341,8 @@
               <a:buClr>
                 <a:srgbClr val="000000"/>
               </a:buClr>
-              <a:buSzPct val="75000"/>
-              <a:buFont typeface="Symbol" charset="2"/>
-              <a:buChar char=""/>
+              <a:buFont typeface="Arial"/>
+              <a:buChar char="–"/>
             </a:pPr>
             <a:r>
               <a:rPr lang="en-US" sz="2000" b="0" u="none" strike="noStrike">
@@ -685,7 +1353,7 @@
                 <a:uFillTx/>
                 <a:latin typeface="Calibri"/>
               </a:rPr>
-              <a:t>Fourth Outline Level</a:t>
+              <a:t>Fourth level</a:t>
             </a:r>
             <a:endParaRPr lang="en-US" sz="2000" b="0" u="none" strike="noStrike">
               <a:solidFill>
@@ -697,7 +1365,7 @@
             </a:endParaRPr>
           </a:p>
           <a:p>
-            <a:pPr marL="2160000" lvl="4" indent="-216000" algn="l" defTabSz="457200">
+            <a:pPr marL="2057400" lvl="4" indent="-228600" algn="l" defTabSz="457200">
               <a:lnSpc>
                 <a:spcPct val="100000"/>
               </a:lnSpc>
@@ -707,9 +1375,8 @@
               <a:buClr>
                 <a:srgbClr val="000000"/>
               </a:buClr>
-              <a:buSzPct val="45000"/>
-              <a:buFont typeface="Wingdings" charset="2"/>
-              <a:buChar char=""/>
+              <a:buFont typeface="Arial"/>
+              <a:buChar char="»"/>
             </a:pPr>
             <a:r>
               <a:rPr lang="en-US" sz="2000" b="0" u="none" strike="noStrike">
@@ -720,7 +1387,7 @@
                 <a:uFillTx/>
                 <a:latin typeface="Calibri"/>
               </a:rPr>
-              <a:t>Fifth Outline Level</a:t>
+              <a:t>Fifth level</a:t>
             </a:r>
             <a:endParaRPr lang="en-US" sz="2000" b="0" u="none" strike="noStrike">
               <a:solidFill>
@@ -731,74 +1398,246 @@
               <a:latin typeface="Calibri"/>
             </a:endParaRPr>
           </a:p>
-          <a:p>
-            <a:pPr marL="2592000" lvl="5" indent="-216000" algn="l" defTabSz="457200">
-              <a:lnSpc>
-                <a:spcPct val="100000"/>
-              </a:lnSpc>
-              <a:spcBef>
-                <a:spcPts val="283"/>
-              </a:spcBef>
-              <a:buClr>
-                <a:srgbClr val="000000"/>
-              </a:buClr>
-              <a:buSzPct val="45000"/>
-              <a:buFont typeface="Wingdings" charset="2"/>
-              <a:buChar char=""/>
-            </a:pPr>
-            <a:r>
-              <a:rPr lang="en-US" sz="2000" b="0" u="none" strike="noStrike">
-                <a:solidFill>
-                  <a:schemeClr val="dk1"/>
-                </a:solidFill>
-                <a:effectLst/>
-                <a:uFillTx/>
-                <a:latin typeface="Calibri"/>
-              </a:rPr>
-              <a:t>Sixth Outline Level</a:t>
-            </a:r>
-            <a:endParaRPr lang="en-US" sz="2000" b="0" u="none" strike="noStrike">
-              <a:solidFill>
-                <a:schemeClr val="dk1"/>
-              </a:solidFill>
-              <a:effectLst/>
-              <a:uFillTx/>
-              <a:latin typeface="Calibri"/>
-            </a:endParaRPr>
-          </a:p>
-          <a:p>
-            <a:pPr marL="3024000" lvl="6" indent="-216000" algn="l" defTabSz="457200">
-              <a:lnSpc>
-                <a:spcPct val="100000"/>
-              </a:lnSpc>
-              <a:spcBef>
-                <a:spcPts val="283"/>
-              </a:spcBef>
-              <a:buClr>
-                <a:srgbClr val="000000"/>
-              </a:buClr>
-              <a:buSzPct val="45000"/>
-              <a:buFont typeface="Wingdings" charset="2"/>
-              <a:buChar char=""/>
-            </a:pPr>
-            <a:r>
-              <a:rPr lang="en-US" sz="2000" b="0" u="none" strike="noStrike">
-                <a:solidFill>
-                  <a:schemeClr val="dk1"/>
-                </a:solidFill>
-                <a:effectLst/>
-                <a:uFillTx/>
-                <a:latin typeface="Calibri"/>
-              </a:rPr>
-              <a:t>Seventh Outline Level</a:t>
-            </a:r>
-            <a:endParaRPr lang="en-US" sz="2000" b="0" u="none" strike="noStrike">
-              <a:solidFill>
-                <a:schemeClr val="dk1"/>
-              </a:solidFill>
-              <a:effectLst/>
-              <a:uFillTx/>
-              <a:latin typeface="Calibri"/>
+        </p:txBody>
+      </p:sp>
+      <p:sp>
+        <p:nvSpPr>
+          <p:cNvPr id="53" name="PlaceHolder 3"/>
+          <p:cNvSpPr>
+            <a:spLocks noGrp="1"/>
+          </p:cNvSpPr>
+          <p:nvPr>
+            <p:ph type="dt" idx="28"/>
+          </p:nvPr>
+        </p:nvSpPr>
+        <p:spPr>
+          <a:xfrm>
+            <a:off x="457200" y="6356520"/>
+            <a:ext cx="2132640" cy="363960"/>
+          </a:xfrm>
+          <a:prstGeom prst="rect">
+            <a:avLst/>
+          </a:prstGeom>
+          <a:noFill/>
+          <a:ln w="0">
+            <a:noFill/>
+          </a:ln>
+        </p:spPr>
+        <p:txBody>
+          <a:bodyPr lIns="91440" tIns="45720" rIns="91440" bIns="45720" anchor="ctr">
+            <a:noAutofit/>
+          </a:bodyPr>
+          <a:lstStyle>
+            <a:lvl1pPr indent="0" algn="l" defTabSz="457200">
+              <a:lnSpc>
+                <a:spcPct val="100000"/>
+              </a:lnSpc>
+              <a:buNone/>
+              <a:tabLst>
+                <a:tab pos="0" algn="l"/>
+              </a:tabLst>
+              <a:defRPr lang="en-US" sz="1200" b="0" u="none" strike="noStrike">
+                <a:solidFill>
+                  <a:schemeClr val="dk1">
+                    <a:tint val="75000"/>
+                  </a:schemeClr>
+                </a:solidFill>
+                <a:effectLst/>
+                <a:uFillTx/>
+                <a:latin typeface="Calibri"/>
+              </a:defRPr>
+            </a:lvl1pPr>
+          </a:lstStyle>
+          <a:p>
+            <a:pPr indent="0" algn="l" defTabSz="457200">
+              <a:lnSpc>
+                <a:spcPct val="100000"/>
+              </a:lnSpc>
+              <a:buNone/>
+              <a:tabLst>
+                <a:tab pos="0" algn="l"/>
+              </a:tabLst>
+            </a:pPr>
+            <a:r>
+              <a:rPr lang="en-US" sz="1200" b="0" u="none" strike="noStrike">
+                <a:solidFill>
+                  <a:schemeClr val="dk1">
+                    <a:tint val="75000"/>
+                  </a:schemeClr>
+                </a:solidFill>
+                <a:effectLst/>
+                <a:uFillTx/>
+                <a:latin typeface="Calibri"/>
+              </a:rPr>
+              <a:t>&lt;date/time&gt;</a:t>
+            </a:r>
+            <a:endParaRPr lang="en-US" sz="1200" b="0" u="none" strike="noStrike">
+              <a:solidFill>
+                <a:srgbClr val="000000"/>
+              </a:solidFill>
+              <a:effectLst/>
+              <a:uFillTx/>
+              <a:latin typeface="Times New Roman"/>
+            </a:endParaRPr>
+          </a:p>
+        </p:txBody>
+      </p:sp>
+      <p:sp>
+        <p:nvSpPr>
+          <p:cNvPr id="54" name="PlaceHolder 4"/>
+          <p:cNvSpPr>
+            <a:spLocks noGrp="1"/>
+          </p:cNvSpPr>
+          <p:nvPr>
+            <p:ph type="ftr" idx="29"/>
+          </p:nvPr>
+        </p:nvSpPr>
+        <p:spPr>
+          <a:xfrm>
+            <a:off x="3124080" y="6356520"/>
+            <a:ext cx="2894400" cy="363960"/>
+          </a:xfrm>
+          <a:prstGeom prst="rect">
+            <a:avLst/>
+          </a:prstGeom>
+          <a:noFill/>
+          <a:ln w="0">
+            <a:noFill/>
+          </a:ln>
+        </p:spPr>
+        <p:txBody>
+          <a:bodyPr lIns="91440" tIns="45720" rIns="91440" bIns="45720" anchor="ctr">
+            <a:noAutofit/>
+          </a:bodyPr>
+          <a:lstStyle>
+            <a:lvl1pPr indent="0" algn="ctr">
+              <a:lnSpc>
+                <a:spcPct val="100000"/>
+              </a:lnSpc>
+              <a:buNone/>
+              <a:tabLst>
+                <a:tab pos="0" algn="l"/>
+              </a:tabLst>
+              <a:defRPr lang="en-US" sz="1400" b="0" u="none" strike="noStrike">
+                <a:solidFill>
+                  <a:srgbClr val="000000"/>
+                </a:solidFill>
+                <a:effectLst/>
+                <a:uFillTx/>
+                <a:latin typeface="Times New Roman"/>
+              </a:defRPr>
+            </a:lvl1pPr>
+          </a:lstStyle>
+          <a:p>
+            <a:pPr indent="0" algn="ctr">
+              <a:lnSpc>
+                <a:spcPct val="100000"/>
+              </a:lnSpc>
+              <a:buNone/>
+              <a:tabLst>
+                <a:tab pos="0" algn="l"/>
+              </a:tabLst>
+            </a:pPr>
+            <a:r>
+              <a:rPr lang="en-US" sz="1400" b="0" u="none" strike="noStrike">
+                <a:solidFill>
+                  <a:srgbClr val="000000"/>
+                </a:solidFill>
+                <a:effectLst/>
+                <a:uFillTx/>
+                <a:latin typeface="Times New Roman"/>
+              </a:rPr>
+              <a:t>&lt;footer&gt;</a:t>
+            </a:r>
+            <a:endParaRPr lang="en-US" sz="1400" b="0" u="none" strike="noStrike">
+              <a:solidFill>
+                <a:srgbClr val="000000"/>
+              </a:solidFill>
+              <a:effectLst/>
+              <a:uFillTx/>
+              <a:latin typeface="Times New Roman"/>
+            </a:endParaRPr>
+          </a:p>
+        </p:txBody>
+      </p:sp>
+      <p:sp>
+        <p:nvSpPr>
+          <p:cNvPr id="55" name="PlaceHolder 5"/>
+          <p:cNvSpPr>
+            <a:spLocks noGrp="1"/>
+          </p:cNvSpPr>
+          <p:nvPr>
+            <p:ph type="sldNum" idx="30"/>
+          </p:nvPr>
+        </p:nvSpPr>
+        <p:spPr>
+          <a:xfrm>
+            <a:off x="6553080" y="6356520"/>
+            <a:ext cx="2132640" cy="363960"/>
+          </a:xfrm>
+          <a:prstGeom prst="rect">
+            <a:avLst/>
+          </a:prstGeom>
+          <a:noFill/>
+          <a:ln w="0">
+            <a:noFill/>
+          </a:ln>
+        </p:spPr>
+        <p:txBody>
+          <a:bodyPr lIns="91440" tIns="45720" rIns="91440" bIns="45720" anchor="ctr">
+            <a:noAutofit/>
+          </a:bodyPr>
+          <a:lstStyle>
+            <a:lvl1pPr indent="0" algn="r" defTabSz="457200">
+              <a:lnSpc>
+                <a:spcPct val="100000"/>
+              </a:lnSpc>
+              <a:buNone/>
+              <a:tabLst>
+                <a:tab pos="0" algn="l"/>
+              </a:tabLst>
+              <a:defRPr lang="en-US" sz="1200" b="0" u="none" strike="noStrike">
+                <a:solidFill>
+                  <a:schemeClr val="dk1">
+                    <a:tint val="75000"/>
+                  </a:schemeClr>
+                </a:solidFill>
+                <a:effectLst/>
+                <a:uFillTx/>
+                <a:latin typeface="Calibri"/>
+              </a:defRPr>
+            </a:lvl1pPr>
+          </a:lstStyle>
+          <a:p>
+            <a:pPr indent="0" algn="r" defTabSz="457200">
+              <a:lnSpc>
+                <a:spcPct val="100000"/>
+              </a:lnSpc>
+              <a:buNone/>
+              <a:tabLst>
+                <a:tab pos="0" algn="l"/>
+              </a:tabLst>
+            </a:pPr>
+            <a:fld id="{BC81A871-F049-4318-9183-0CF3C09A8C57}" type="slidenum">
+              <a:rPr lang="en-US" sz="1200" b="0" u="none" strike="noStrike">
+                <a:solidFill>
+                  <a:schemeClr val="dk1">
+                    <a:tint val="75000"/>
+                  </a:schemeClr>
+                </a:solidFill>
+                <a:effectLst/>
+                <a:uFillTx/>
+                <a:latin typeface="Calibri"/>
+              </a:rPr>
+              <a:t>&lt;number&gt;</a:t>
+            </a:fld>
+            <a:endParaRPr lang="en-US" sz="1200" b="0" u="none" strike="noStrike">
+              <a:solidFill>
+                <a:srgbClr val="000000"/>
+              </a:solidFill>
+              <a:effectLst/>
+              <a:uFillTx/>
+              <a:latin typeface="Times New Roman"/>
             </a:endParaRPr>
           </a:p>
         </p:txBody>
@@ -808,7 +1647,446 @@
 </p:sldLayout>
 </file>
 
-<file path=ppt/slideLayouts/slideLayout10.xml><?xml version="1.0" encoding="utf-8"?>
+<file path=ppt/slideLayouts/slideLayout11.xml><?xml version="1.0" encoding="utf-8"?>
+<p:sldLayout xmlns:a="http://schemas.openxmlformats.org/drawingml/2006/main" xmlns:p="http://schemas.openxmlformats.org/presentationml/2006/main" xmlns:r="http://schemas.openxmlformats.org/officeDocument/2006/relationships" xmlns:p14="http://schemas.microsoft.com/office/powerpoint/2010/main" xmlns:p15="http://schemas.microsoft.com/office/powerpoint/2012/main" xmlns:mc="http://schemas.openxmlformats.org/markup-compatibility/2006" type="blank" preserve="1">
+  <p:cSld name="Section Header">
+    <p:bg>
+      <p:bgPr>
+        <a:solidFill>
+          <a:srgbClr val="FFFFFF"/>
+        </a:solidFill>
+      </p:bgPr>
+    </p:bg>
+    <p:spTree>
+      <p:nvGrpSpPr>
+        <p:cNvPr id="1" name=""/>
+        <p:cNvGrpSpPr/>
+        <p:nvPr/>
+      </p:nvGrpSpPr>
+      <p:grpSpPr>
+        <a:xfrm>
+          <a:off x="0" y="0"/>
+          <a:ext cx="0" cy="0"/>
+          <a:chOff x="0" y="0"/>
+          <a:chExt cx="0" cy="0"/>
+        </a:xfrm>
+      </p:grpSpPr>
+      <p:sp>
+        <p:nvSpPr>
+          <p:cNvPr id="56" name="PlaceHolder 1"/>
+          <p:cNvSpPr>
+            <a:spLocks noGrp="1"/>
+          </p:cNvSpPr>
+          <p:nvPr>
+            <p:ph type="title"/>
+          </p:nvPr>
+        </p:nvSpPr>
+        <p:spPr>
+          <a:xfrm>
+            <a:off x="722160" y="4406760"/>
+            <a:ext cx="7771320" cy="1361160"/>
+          </a:xfrm>
+          <a:prstGeom prst="rect">
+            <a:avLst/>
+          </a:prstGeom>
+          <a:noFill/>
+          <a:ln w="0">
+            <a:noFill/>
+          </a:ln>
+        </p:spPr>
+        <p:txBody>
+          <a:bodyPr lIns="91440" tIns="45720" rIns="91440" bIns="45720" anchor="t">
+            <a:noAutofit/>
+          </a:bodyPr>
+          <a:lstStyle>
+            <a:lvl1pPr indent="0" algn="l" defTabSz="457200">
+              <a:lnSpc>
+                <a:spcPct val="100000"/>
+              </a:lnSpc>
+              <a:buNone/>
+              <a:tabLst>
+                <a:tab pos="0" algn="l"/>
+              </a:tabLst>
+              <a:defRPr lang="en-US" sz="4000" b="1" u="none" strike="noStrike" cap="all">
+                <a:solidFill>
+                  <a:schemeClr val="dk1"/>
+                </a:solidFill>
+                <a:effectLst/>
+                <a:uFillTx/>
+                <a:latin typeface="Calibri"/>
+              </a:defRPr>
+            </a:lvl1pPr>
+          </a:lstStyle>
+          <a:p>
+            <a:pPr indent="0" algn="l" defTabSz="457200">
+              <a:lnSpc>
+                <a:spcPct val="100000"/>
+              </a:lnSpc>
+              <a:buNone/>
+              <a:tabLst>
+                <a:tab pos="0" algn="l"/>
+              </a:tabLst>
+            </a:pPr>
+            <a:r>
+              <a:rPr lang="en-US" sz="4000" b="1" u="none" strike="noStrike" cap="all">
+                <a:solidFill>
+                  <a:schemeClr val="dk1"/>
+                </a:solidFill>
+                <a:effectLst/>
+                <a:uFillTx/>
+                <a:latin typeface="Calibri"/>
+              </a:rPr>
+              <a:t>Click to edit Master title style</a:t>
+            </a:r>
+            <a:endParaRPr lang="en-US" sz="4000" b="1" u="none" strike="noStrike" cap="all">
+              <a:solidFill>
+                <a:schemeClr val="dk1"/>
+              </a:solidFill>
+              <a:effectLst/>
+              <a:uFillTx/>
+              <a:latin typeface="Calibri"/>
+            </a:endParaRPr>
+          </a:p>
+        </p:txBody>
+      </p:sp>
+      <p:sp>
+        <p:nvSpPr>
+          <p:cNvPr id="57" name="PlaceHolder 2"/>
+          <p:cNvSpPr>
+            <a:spLocks noGrp="1"/>
+          </p:cNvSpPr>
+          <p:nvPr>
+            <p:ph type="body"/>
+          </p:nvPr>
+        </p:nvSpPr>
+        <p:spPr>
+          <a:xfrm>
+            <a:off x="722160" y="2906640"/>
+            <a:ext cx="7771320" cy="1499040"/>
+          </a:xfrm>
+          <a:prstGeom prst="rect">
+            <a:avLst/>
+          </a:prstGeom>
+          <a:noFill/>
+          <a:ln w="0">
+            <a:noFill/>
+          </a:ln>
+        </p:spPr>
+        <p:txBody>
+          <a:bodyPr lIns="91440" tIns="45720" rIns="91440" bIns="45720" anchor="b">
+            <a:noAutofit/>
+          </a:bodyPr>
+          <a:lstStyle>
+            <a:lvl1pPr indent="0" algn="l" defTabSz="457200">
+              <a:lnSpc>
+                <a:spcPct val="100000"/>
+              </a:lnSpc>
+              <a:spcBef>
+                <a:spcPts val="400"/>
+              </a:spcBef>
+              <a:buNone/>
+              <a:tabLst>
+                <a:tab pos="0" algn="l"/>
+              </a:tabLst>
+              <a:defRPr lang="en-US" sz="2000" b="0" u="none" strike="noStrike">
+                <a:solidFill>
+                  <a:schemeClr val="dk1">
+                    <a:tint val="75000"/>
+                  </a:schemeClr>
+                </a:solidFill>
+                <a:effectLst/>
+                <a:uFillTx/>
+                <a:latin typeface="Calibri"/>
+              </a:defRPr>
+            </a:lvl1pPr>
+          </a:lstStyle>
+          <a:p>
+            <a:pPr indent="0" algn="l" defTabSz="457200">
+              <a:lnSpc>
+                <a:spcPct val="100000"/>
+              </a:lnSpc>
+              <a:spcBef>
+                <a:spcPts val="400"/>
+              </a:spcBef>
+              <a:buNone/>
+              <a:tabLst>
+                <a:tab pos="0" algn="l"/>
+              </a:tabLst>
+            </a:pPr>
+            <a:r>
+              <a:rPr lang="en-US" sz="2000" b="0" u="none" strike="noStrike">
+                <a:solidFill>
+                  <a:schemeClr val="dk1">
+                    <a:tint val="75000"/>
+                  </a:schemeClr>
+                </a:solidFill>
+                <a:effectLst/>
+                <a:uFillTx/>
+                <a:latin typeface="Calibri"/>
+              </a:rPr>
+              <a:t>Click to edit Master text styles</a:t>
+            </a:r>
+            <a:endParaRPr lang="en-US" sz="2000" b="0" u="none" strike="noStrike">
+              <a:solidFill>
+                <a:schemeClr val="dk1">
+                  <a:tint val="75000"/>
+                </a:schemeClr>
+              </a:solidFill>
+              <a:effectLst/>
+              <a:uFillTx/>
+              <a:latin typeface="Calibri"/>
+            </a:endParaRPr>
+          </a:p>
+        </p:txBody>
+      </p:sp>
+      <p:sp>
+        <p:nvSpPr>
+          <p:cNvPr id="58" name="PlaceHolder 3"/>
+          <p:cNvSpPr>
+            <a:spLocks noGrp="1"/>
+          </p:cNvSpPr>
+          <p:nvPr>
+            <p:ph type="dt" idx="31"/>
+          </p:nvPr>
+        </p:nvSpPr>
+        <p:spPr>
+          <a:xfrm>
+            <a:off x="457200" y="6356520"/>
+            <a:ext cx="2132640" cy="363960"/>
+          </a:xfrm>
+          <a:prstGeom prst="rect">
+            <a:avLst/>
+          </a:prstGeom>
+          <a:noFill/>
+          <a:ln w="0">
+            <a:noFill/>
+          </a:ln>
+        </p:spPr>
+        <p:txBody>
+          <a:bodyPr lIns="91440" tIns="45720" rIns="91440" bIns="45720" anchor="ctr">
+            <a:noAutofit/>
+          </a:bodyPr>
+          <a:lstStyle>
+            <a:lvl1pPr indent="0" algn="l" defTabSz="457200">
+              <a:lnSpc>
+                <a:spcPct val="100000"/>
+              </a:lnSpc>
+              <a:buNone/>
+              <a:tabLst>
+                <a:tab pos="0" algn="l"/>
+              </a:tabLst>
+              <a:defRPr lang="en-US" sz="1200" b="0" u="none" strike="noStrike">
+                <a:solidFill>
+                  <a:schemeClr val="dk1">
+                    <a:tint val="75000"/>
+                  </a:schemeClr>
+                </a:solidFill>
+                <a:effectLst/>
+                <a:uFillTx/>
+                <a:latin typeface="Calibri"/>
+              </a:defRPr>
+            </a:lvl1pPr>
+          </a:lstStyle>
+          <a:p>
+            <a:pPr indent="0" algn="l" defTabSz="457200">
+              <a:lnSpc>
+                <a:spcPct val="100000"/>
+              </a:lnSpc>
+              <a:buNone/>
+              <a:tabLst>
+                <a:tab pos="0" algn="l"/>
+              </a:tabLst>
+            </a:pPr>
+            <a:r>
+              <a:rPr lang="en-US" sz="1200" b="0" u="none" strike="noStrike">
+                <a:solidFill>
+                  <a:schemeClr val="dk1">
+                    <a:tint val="75000"/>
+                  </a:schemeClr>
+                </a:solidFill>
+                <a:effectLst/>
+                <a:uFillTx/>
+                <a:latin typeface="Calibri"/>
+              </a:rPr>
+              <a:t>&lt;date/time&gt;</a:t>
+            </a:r>
+            <a:endParaRPr lang="en-US" sz="1200" b="0" u="none" strike="noStrike">
+              <a:solidFill>
+                <a:srgbClr val="000000"/>
+              </a:solidFill>
+              <a:effectLst/>
+              <a:uFillTx/>
+              <a:latin typeface="Times New Roman"/>
+            </a:endParaRPr>
+          </a:p>
+        </p:txBody>
+      </p:sp>
+      <p:sp>
+        <p:nvSpPr>
+          <p:cNvPr id="59" name="PlaceHolder 4"/>
+          <p:cNvSpPr>
+            <a:spLocks noGrp="1"/>
+          </p:cNvSpPr>
+          <p:nvPr>
+            <p:ph type="ftr" idx="32"/>
+          </p:nvPr>
+        </p:nvSpPr>
+        <p:spPr>
+          <a:xfrm>
+            <a:off x="3124080" y="6356520"/>
+            <a:ext cx="2894400" cy="363960"/>
+          </a:xfrm>
+          <a:prstGeom prst="rect">
+            <a:avLst/>
+          </a:prstGeom>
+          <a:noFill/>
+          <a:ln w="0">
+            <a:noFill/>
+          </a:ln>
+        </p:spPr>
+        <p:txBody>
+          <a:bodyPr lIns="91440" tIns="45720" rIns="91440" bIns="45720" anchor="ctr">
+            <a:noAutofit/>
+          </a:bodyPr>
+          <a:lstStyle>
+            <a:lvl1pPr indent="0" algn="ctr">
+              <a:lnSpc>
+                <a:spcPct val="100000"/>
+              </a:lnSpc>
+              <a:buNone/>
+              <a:tabLst>
+                <a:tab pos="0" algn="l"/>
+              </a:tabLst>
+              <a:defRPr lang="en-US" sz="1400" b="0" u="none" strike="noStrike">
+                <a:solidFill>
+                  <a:srgbClr val="000000"/>
+                </a:solidFill>
+                <a:effectLst/>
+                <a:uFillTx/>
+                <a:latin typeface="Times New Roman"/>
+              </a:defRPr>
+            </a:lvl1pPr>
+          </a:lstStyle>
+          <a:p>
+            <a:pPr indent="0" algn="ctr">
+              <a:lnSpc>
+                <a:spcPct val="100000"/>
+              </a:lnSpc>
+              <a:buNone/>
+              <a:tabLst>
+                <a:tab pos="0" algn="l"/>
+              </a:tabLst>
+            </a:pPr>
+            <a:r>
+              <a:rPr lang="en-US" sz="1400" b="0" u="none" strike="noStrike">
+                <a:solidFill>
+                  <a:srgbClr val="000000"/>
+                </a:solidFill>
+                <a:effectLst/>
+                <a:uFillTx/>
+                <a:latin typeface="Times New Roman"/>
+              </a:rPr>
+              <a:t>&lt;footer&gt;</a:t>
+            </a:r>
+            <a:endParaRPr lang="en-US" sz="1400" b="0" u="none" strike="noStrike">
+              <a:solidFill>
+                <a:srgbClr val="000000"/>
+              </a:solidFill>
+              <a:effectLst/>
+              <a:uFillTx/>
+              <a:latin typeface="Times New Roman"/>
+            </a:endParaRPr>
+          </a:p>
+        </p:txBody>
+      </p:sp>
+      <p:sp>
+        <p:nvSpPr>
+          <p:cNvPr id="60" name="PlaceHolder 5"/>
+          <p:cNvSpPr>
+            <a:spLocks noGrp="1"/>
+          </p:cNvSpPr>
+          <p:nvPr>
+            <p:ph type="sldNum" idx="33"/>
+          </p:nvPr>
+        </p:nvSpPr>
+        <p:spPr>
+          <a:xfrm>
+            <a:off x="6553080" y="6356520"/>
+            <a:ext cx="2132640" cy="363960"/>
+          </a:xfrm>
+          <a:prstGeom prst="rect">
+            <a:avLst/>
+          </a:prstGeom>
+          <a:noFill/>
+          <a:ln w="0">
+            <a:noFill/>
+          </a:ln>
+        </p:spPr>
+        <p:txBody>
+          <a:bodyPr lIns="91440" tIns="45720" rIns="91440" bIns="45720" anchor="ctr">
+            <a:noAutofit/>
+          </a:bodyPr>
+          <a:lstStyle>
+            <a:lvl1pPr indent="0" algn="r" defTabSz="457200">
+              <a:lnSpc>
+                <a:spcPct val="100000"/>
+              </a:lnSpc>
+              <a:buNone/>
+              <a:tabLst>
+                <a:tab pos="0" algn="l"/>
+              </a:tabLst>
+              <a:defRPr lang="en-US" sz="1200" b="0" u="none" strike="noStrike">
+                <a:solidFill>
+                  <a:schemeClr val="dk1">
+                    <a:tint val="75000"/>
+                  </a:schemeClr>
+                </a:solidFill>
+                <a:effectLst/>
+                <a:uFillTx/>
+                <a:latin typeface="Calibri"/>
+              </a:defRPr>
+            </a:lvl1pPr>
+          </a:lstStyle>
+          <a:p>
+            <a:pPr indent="0" algn="r" defTabSz="457200">
+              <a:lnSpc>
+                <a:spcPct val="100000"/>
+              </a:lnSpc>
+              <a:buNone/>
+              <a:tabLst>
+                <a:tab pos="0" algn="l"/>
+              </a:tabLst>
+            </a:pPr>
+            <a:fld id="{56AC361C-1377-4DA5-B00C-2F6C952827D2}" type="slidenum">
+              <a:rPr lang="en-US" sz="1200" b="0" u="none" strike="noStrike">
+                <a:solidFill>
+                  <a:schemeClr val="dk1">
+                    <a:tint val="75000"/>
+                  </a:schemeClr>
+                </a:solidFill>
+                <a:effectLst/>
+                <a:uFillTx/>
+                <a:latin typeface="Calibri"/>
+              </a:rPr>
+              <a:t>&lt;number&gt;</a:t>
+            </a:fld>
+            <a:endParaRPr lang="en-US" sz="1200" b="0" u="none" strike="noStrike">
+              <a:solidFill>
+                <a:srgbClr val="000000"/>
+              </a:solidFill>
+              <a:effectLst/>
+              <a:uFillTx/>
+              <a:latin typeface="Times New Roman"/>
+            </a:endParaRPr>
+          </a:p>
+        </p:txBody>
+      </p:sp>
+    </p:spTree>
+  </p:cSld>
+</p:sldLayout>
+</file>
+
+<file path=ppt/slideLayouts/slideLayout2.xml><?xml version="1.0" encoding="utf-8"?>
 <p:sldLayout xmlns:a="http://schemas.openxmlformats.org/drawingml/2006/main" xmlns:p="http://schemas.openxmlformats.org/presentationml/2006/main" xmlns:r="http://schemas.openxmlformats.org/officeDocument/2006/relationships" xmlns:p14="http://schemas.microsoft.com/office/powerpoint/2010/main" xmlns:p15="http://schemas.microsoft.com/office/powerpoint/2012/main" xmlns:mc="http://schemas.openxmlformats.org/markup-compatibility/2006" type="blank" preserve="1">
   <p:cSld name="Comparison">
     <p:bg>
@@ -834,7 +2112,7 @@
       </p:grpSpPr>
       <p:sp>
         <p:nvSpPr>
-          <p:cNvPr id="49" name="PlaceHolder 1"/>
+          <p:cNvPr id="8" name="PlaceHolder 1"/>
           <p:cNvSpPr>
             <a:spLocks noGrp="1"/>
           </p:cNvSpPr>
@@ -845,7 +2123,7 @@
         <p:spPr>
           <a:xfrm>
             <a:off x="457200" y="274680"/>
-            <a:ext cx="8228880" cy="1142280"/>
+            <a:ext cx="8228520" cy="1141920"/>
           </a:xfrm>
           <a:prstGeom prst="rect">
             <a:avLst/>
@@ -912,7 +2190,7 @@
       </p:sp>
       <p:sp>
         <p:nvSpPr>
-          <p:cNvPr id="50" name="PlaceHolder 2"/>
+          <p:cNvPr id="9" name="PlaceHolder 2"/>
           <p:cNvSpPr>
             <a:spLocks noGrp="1"/>
           </p:cNvSpPr>
@@ -923,7 +2201,7 @@
         <p:spPr>
           <a:xfrm>
             <a:off x="457200" y="1535040"/>
-            <a:ext cx="4039560" cy="639000"/>
+            <a:ext cx="4039200" cy="638640"/>
           </a:xfrm>
           <a:prstGeom prst="rect">
             <a:avLst/>
@@ -996,7 +2274,7 @@
       </p:sp>
       <p:sp>
         <p:nvSpPr>
-          <p:cNvPr id="51" name="PlaceHolder 3"/>
+          <p:cNvPr id="10" name="PlaceHolder 3"/>
           <p:cNvSpPr>
             <a:spLocks noGrp="1"/>
           </p:cNvSpPr>
@@ -1007,7 +2285,7 @@
         <p:spPr>
           <a:xfrm>
             <a:off x="457200" y="2174760"/>
-            <a:ext cx="4039560" cy="3950640"/>
+            <a:ext cx="4039200" cy="3950280"/>
           </a:xfrm>
           <a:prstGeom prst="rect">
             <a:avLst/>
@@ -1332,7 +2610,7 @@
       </p:sp>
       <p:sp>
         <p:nvSpPr>
-          <p:cNvPr id="52" name="PlaceHolder 4"/>
+          <p:cNvPr id="11" name="PlaceHolder 4"/>
           <p:cNvSpPr>
             <a:spLocks noGrp="1"/>
           </p:cNvSpPr>
@@ -1343,7 +2621,7 @@
         <p:spPr>
           <a:xfrm>
             <a:off x="4645080" y="1535040"/>
-            <a:ext cx="4041000" cy="639000"/>
+            <a:ext cx="4040640" cy="638640"/>
           </a:xfrm>
           <a:prstGeom prst="rect">
             <a:avLst/>
@@ -1416,7 +2694,7 @@
       </p:sp>
       <p:sp>
         <p:nvSpPr>
-          <p:cNvPr id="53" name="PlaceHolder 5"/>
+          <p:cNvPr id="12" name="PlaceHolder 5"/>
           <p:cNvSpPr>
             <a:spLocks noGrp="1"/>
           </p:cNvSpPr>
@@ -1427,7 +2705,7 @@
         <p:spPr>
           <a:xfrm>
             <a:off x="4645080" y="2174760"/>
-            <a:ext cx="4041000" cy="3950640"/>
+            <a:ext cx="4040640" cy="3950280"/>
           </a:xfrm>
           <a:prstGeom prst="rect">
             <a:avLst/>
@@ -1752,18 +3030,18 @@
       </p:sp>
       <p:sp>
         <p:nvSpPr>
-          <p:cNvPr id="54" name="PlaceHolder 6"/>
+          <p:cNvPr id="13" name="PlaceHolder 6"/>
           <p:cNvSpPr>
             <a:spLocks noGrp="1"/>
           </p:cNvSpPr>
           <p:nvPr>
-            <p:ph type="dt" idx="28"/>
+            <p:ph type="dt" idx="4"/>
           </p:nvPr>
         </p:nvSpPr>
         <p:spPr>
           <a:xfrm>
             <a:off x="457200" y="6356520"/>
-            <a:ext cx="2133000" cy="364320"/>
+            <a:ext cx="2132640" cy="363960"/>
           </a:xfrm>
           <a:prstGeom prst="rect">
             <a:avLst/>
@@ -1834,18 +3112,18 @@
       </p:sp>
       <p:sp>
         <p:nvSpPr>
-          <p:cNvPr id="55" name="PlaceHolder 7"/>
+          <p:cNvPr id="14" name="PlaceHolder 7"/>
           <p:cNvSpPr>
             <a:spLocks noGrp="1"/>
           </p:cNvSpPr>
           <p:nvPr>
-            <p:ph type="ftr" idx="29"/>
+            <p:ph type="ftr" idx="5"/>
           </p:nvPr>
         </p:nvSpPr>
         <p:spPr>
           <a:xfrm>
             <a:off x="3124080" y="6356520"/>
-            <a:ext cx="2894760" cy="364320"/>
+            <a:ext cx="2894400" cy="363960"/>
           </a:xfrm>
           <a:prstGeom prst="rect">
             <a:avLst/>
@@ -1912,18 +3190,18 @@
       </p:sp>
       <p:sp>
         <p:nvSpPr>
-          <p:cNvPr id="56" name="PlaceHolder 8"/>
+          <p:cNvPr id="15" name="PlaceHolder 8"/>
           <p:cNvSpPr>
             <a:spLocks noGrp="1"/>
           </p:cNvSpPr>
           <p:nvPr>
-            <p:ph type="sldNum" idx="30"/>
+            <p:ph type="sldNum" idx="6"/>
           </p:nvPr>
         </p:nvSpPr>
         <p:spPr>
           <a:xfrm>
             <a:off x="6553080" y="6356520"/>
-            <a:ext cx="2133000" cy="364320"/>
+            <a:ext cx="2132640" cy="363960"/>
           </a:xfrm>
           <a:prstGeom prst="rect">
             <a:avLst/>
@@ -1968,7 +3246,7 @@
                 <a:tab pos="0" algn="l"/>
               </a:tabLst>
             </a:pPr>
-            <a:fld id="{BFA19FC1-4BB8-454E-ADAC-E8E03B9E41F2}" type="slidenum">
+            <a:fld id="{27E26258-0448-4197-9340-5375B59EA6F2}" type="slidenum">
               <a:rPr lang="en-US" sz="1200" b="0" u="none" strike="noStrike">
                 <a:solidFill>
                   <a:schemeClr val="dk1">
@@ -1997,7 +3275,7 @@
 </p:sldLayout>
 </file>
 
-<file path=ppt/slideLayouts/slideLayout11.xml><?xml version="1.0" encoding="utf-8"?>
+<file path=ppt/slideLayouts/slideLayout3.xml><?xml version="1.0" encoding="utf-8"?>
 <p:sldLayout xmlns:a="http://schemas.openxmlformats.org/drawingml/2006/main" xmlns:p="http://schemas.openxmlformats.org/presentationml/2006/main" xmlns:r="http://schemas.openxmlformats.org/officeDocument/2006/relationships" xmlns:p14="http://schemas.microsoft.com/office/powerpoint/2010/main" xmlns:p15="http://schemas.microsoft.com/office/powerpoint/2012/main" xmlns:mc="http://schemas.openxmlformats.org/markup-compatibility/2006" type="titleOnly" preserve="1">
   <p:cSld name="Title Only">
     <p:bg>
@@ -2023,7 +3301,7 @@
       </p:grpSpPr>
       <p:sp>
         <p:nvSpPr>
-          <p:cNvPr id="57" name="PlaceHolder 1"/>
+          <p:cNvPr id="16" name="PlaceHolder 1"/>
           <p:cNvSpPr>
             <a:spLocks noGrp="1"/>
           </p:cNvSpPr>
@@ -2034,7 +3312,7 @@
         <p:spPr>
           <a:xfrm>
             <a:off x="457200" y="274680"/>
-            <a:ext cx="8228880" cy="1142280"/>
+            <a:ext cx="8228520" cy="1141920"/>
           </a:xfrm>
           <a:prstGeom prst="rect">
             <a:avLst/>
@@ -2101,18 +3379,18 @@
       </p:sp>
       <p:sp>
         <p:nvSpPr>
-          <p:cNvPr id="58" name="PlaceHolder 2"/>
+          <p:cNvPr id="17" name="PlaceHolder 2"/>
           <p:cNvSpPr>
             <a:spLocks noGrp="1"/>
           </p:cNvSpPr>
           <p:nvPr>
-            <p:ph type="dt" idx="31"/>
+            <p:ph type="dt" idx="7"/>
           </p:nvPr>
         </p:nvSpPr>
         <p:spPr>
           <a:xfrm>
             <a:off x="457200" y="6356520"/>
-            <a:ext cx="2133000" cy="364320"/>
+            <a:ext cx="2132640" cy="363960"/>
           </a:xfrm>
           <a:prstGeom prst="rect">
             <a:avLst/>
@@ -2183,18 +3461,18 @@
       </p:sp>
       <p:sp>
         <p:nvSpPr>
-          <p:cNvPr id="59" name="PlaceHolder 3"/>
+          <p:cNvPr id="18" name="PlaceHolder 3"/>
           <p:cNvSpPr>
             <a:spLocks noGrp="1"/>
           </p:cNvSpPr>
           <p:nvPr>
-            <p:ph type="ftr" idx="32"/>
+            <p:ph type="ftr" idx="8"/>
           </p:nvPr>
         </p:nvSpPr>
         <p:spPr>
           <a:xfrm>
             <a:off x="3124080" y="6356520"/>
-            <a:ext cx="2894760" cy="364320"/>
+            <a:ext cx="2894400" cy="363960"/>
           </a:xfrm>
           <a:prstGeom prst="rect">
             <a:avLst/>
@@ -2261,18 +3539,18 @@
       </p:sp>
       <p:sp>
         <p:nvSpPr>
-          <p:cNvPr id="60" name="PlaceHolder 4"/>
+          <p:cNvPr id="19" name="PlaceHolder 4"/>
           <p:cNvSpPr>
             <a:spLocks noGrp="1"/>
           </p:cNvSpPr>
           <p:nvPr>
-            <p:ph type="sldNum" idx="33"/>
+            <p:ph type="sldNum" idx="9"/>
           </p:nvPr>
         </p:nvSpPr>
         <p:spPr>
           <a:xfrm>
             <a:off x="6553080" y="6356520"/>
-            <a:ext cx="2133000" cy="364320"/>
+            <a:ext cx="2132640" cy="363960"/>
           </a:xfrm>
           <a:prstGeom prst="rect">
             <a:avLst/>
@@ -2317,7 +3595,7 @@
                 <a:tab pos="0" algn="l"/>
               </a:tabLst>
             </a:pPr>
-            <a:fld id="{CAC9C5E5-EE0C-4BBE-AC22-0EF980935626}" type="slidenum">
+            <a:fld id="{15469142-ED25-48C6-8139-A7A870A34D03}" type="slidenum">
               <a:rPr lang="en-US" sz="1200" b="0" u="none" strike="noStrike">
                 <a:solidFill>
                   <a:schemeClr val="dk1">
@@ -2346,7 +3624,784 @@
 </p:sldLayout>
 </file>
 
-<file path=ppt/slideLayouts/slideLayout2.xml><?xml version="1.0" encoding="utf-8"?>
+<file path=ppt/slideLayouts/slideLayout4.xml><?xml version="1.0" encoding="utf-8"?>
+<p:sldLayout xmlns:a="http://schemas.openxmlformats.org/drawingml/2006/main" xmlns:p="http://schemas.openxmlformats.org/presentationml/2006/main" xmlns:r="http://schemas.openxmlformats.org/officeDocument/2006/relationships" xmlns:p14="http://schemas.microsoft.com/office/powerpoint/2010/main" xmlns:p15="http://schemas.microsoft.com/office/powerpoint/2012/main" xmlns:mc="http://schemas.openxmlformats.org/markup-compatibility/2006" type="blank" preserve="1">
+  <p:cSld name="Blank">
+    <p:bg>
+      <p:bgPr>
+        <a:solidFill>
+          <a:srgbClr val="FFFFFF"/>
+        </a:solidFill>
+      </p:bgPr>
+    </p:bg>
+    <p:spTree>
+      <p:nvGrpSpPr>
+        <p:cNvPr id="1" name=""/>
+        <p:cNvGrpSpPr/>
+        <p:nvPr/>
+      </p:nvGrpSpPr>
+      <p:grpSpPr>
+        <a:xfrm>
+          <a:off x="0" y="0"/>
+          <a:ext cx="0" cy="0"/>
+          <a:chOff x="0" y="0"/>
+          <a:chExt cx="0" cy="0"/>
+        </a:xfrm>
+      </p:grpSpPr>
+      <p:sp>
+        <p:nvSpPr>
+          <p:cNvPr id="20" name="PlaceHolder 1"/>
+          <p:cNvSpPr>
+            <a:spLocks noGrp="1"/>
+          </p:cNvSpPr>
+          <p:nvPr>
+            <p:ph type="dt" idx="10"/>
+          </p:nvPr>
+        </p:nvSpPr>
+        <p:spPr>
+          <a:xfrm>
+            <a:off x="457200" y="6356520"/>
+            <a:ext cx="2132640" cy="363960"/>
+          </a:xfrm>
+          <a:prstGeom prst="rect">
+            <a:avLst/>
+          </a:prstGeom>
+          <a:noFill/>
+          <a:ln w="0">
+            <a:noFill/>
+          </a:ln>
+        </p:spPr>
+        <p:txBody>
+          <a:bodyPr lIns="91440" tIns="45720" rIns="91440" bIns="45720" anchor="ctr">
+            <a:noAutofit/>
+          </a:bodyPr>
+          <a:lstStyle>
+            <a:lvl1pPr indent="0" algn="l" defTabSz="457200">
+              <a:lnSpc>
+                <a:spcPct val="100000"/>
+              </a:lnSpc>
+              <a:buNone/>
+              <a:tabLst>
+                <a:tab pos="0" algn="l"/>
+              </a:tabLst>
+              <a:defRPr lang="en-US" sz="1200" b="0" u="none" strike="noStrike">
+                <a:solidFill>
+                  <a:schemeClr val="dk1">
+                    <a:tint val="75000"/>
+                  </a:schemeClr>
+                </a:solidFill>
+                <a:effectLst/>
+                <a:uFillTx/>
+                <a:latin typeface="Calibri"/>
+              </a:defRPr>
+            </a:lvl1pPr>
+          </a:lstStyle>
+          <a:p>
+            <a:pPr indent="0" algn="l" defTabSz="457200">
+              <a:lnSpc>
+                <a:spcPct val="100000"/>
+              </a:lnSpc>
+              <a:buNone/>
+              <a:tabLst>
+                <a:tab pos="0" algn="l"/>
+              </a:tabLst>
+            </a:pPr>
+            <a:r>
+              <a:rPr lang="en-US" sz="1200" b="0" u="none" strike="noStrike">
+                <a:solidFill>
+                  <a:schemeClr val="dk1">
+                    <a:tint val="75000"/>
+                  </a:schemeClr>
+                </a:solidFill>
+                <a:effectLst/>
+                <a:uFillTx/>
+                <a:latin typeface="Calibri"/>
+              </a:rPr>
+              <a:t>&lt;date/time&gt;</a:t>
+            </a:r>
+            <a:endParaRPr lang="en-US" sz="1200" b="0" u="none" strike="noStrike">
+              <a:solidFill>
+                <a:srgbClr val="000000"/>
+              </a:solidFill>
+              <a:effectLst/>
+              <a:uFillTx/>
+              <a:latin typeface="Times New Roman"/>
+            </a:endParaRPr>
+          </a:p>
+        </p:txBody>
+      </p:sp>
+      <p:sp>
+        <p:nvSpPr>
+          <p:cNvPr id="21" name="PlaceHolder 2"/>
+          <p:cNvSpPr>
+            <a:spLocks noGrp="1"/>
+          </p:cNvSpPr>
+          <p:nvPr>
+            <p:ph type="ftr" idx="11"/>
+          </p:nvPr>
+        </p:nvSpPr>
+        <p:spPr>
+          <a:xfrm>
+            <a:off x="3124080" y="6356520"/>
+            <a:ext cx="2894400" cy="363960"/>
+          </a:xfrm>
+          <a:prstGeom prst="rect">
+            <a:avLst/>
+          </a:prstGeom>
+          <a:noFill/>
+          <a:ln w="0">
+            <a:noFill/>
+          </a:ln>
+        </p:spPr>
+        <p:txBody>
+          <a:bodyPr lIns="91440" tIns="45720" rIns="91440" bIns="45720" anchor="ctr">
+            <a:noAutofit/>
+          </a:bodyPr>
+          <a:lstStyle>
+            <a:lvl1pPr indent="0" algn="ctr">
+              <a:lnSpc>
+                <a:spcPct val="100000"/>
+              </a:lnSpc>
+              <a:buNone/>
+              <a:tabLst>
+                <a:tab pos="0" algn="l"/>
+              </a:tabLst>
+              <a:defRPr lang="en-US" sz="1400" b="0" u="none" strike="noStrike">
+                <a:solidFill>
+                  <a:srgbClr val="000000"/>
+                </a:solidFill>
+                <a:effectLst/>
+                <a:uFillTx/>
+                <a:latin typeface="Times New Roman"/>
+              </a:defRPr>
+            </a:lvl1pPr>
+          </a:lstStyle>
+          <a:p>
+            <a:pPr indent="0" algn="ctr">
+              <a:lnSpc>
+                <a:spcPct val="100000"/>
+              </a:lnSpc>
+              <a:buNone/>
+              <a:tabLst>
+                <a:tab pos="0" algn="l"/>
+              </a:tabLst>
+            </a:pPr>
+            <a:r>
+              <a:rPr lang="en-US" sz="1400" b="0" u="none" strike="noStrike">
+                <a:solidFill>
+                  <a:srgbClr val="000000"/>
+                </a:solidFill>
+                <a:effectLst/>
+                <a:uFillTx/>
+                <a:latin typeface="Times New Roman"/>
+              </a:rPr>
+              <a:t>&lt;footer&gt;</a:t>
+            </a:r>
+            <a:endParaRPr lang="en-US" sz="1400" b="0" u="none" strike="noStrike">
+              <a:solidFill>
+                <a:srgbClr val="000000"/>
+              </a:solidFill>
+              <a:effectLst/>
+              <a:uFillTx/>
+              <a:latin typeface="Times New Roman"/>
+            </a:endParaRPr>
+          </a:p>
+        </p:txBody>
+      </p:sp>
+      <p:sp>
+        <p:nvSpPr>
+          <p:cNvPr id="22" name="PlaceHolder 3"/>
+          <p:cNvSpPr>
+            <a:spLocks noGrp="1"/>
+          </p:cNvSpPr>
+          <p:nvPr>
+            <p:ph type="sldNum" idx="12"/>
+          </p:nvPr>
+        </p:nvSpPr>
+        <p:spPr>
+          <a:xfrm>
+            <a:off x="6553080" y="6356520"/>
+            <a:ext cx="2132640" cy="363960"/>
+          </a:xfrm>
+          <a:prstGeom prst="rect">
+            <a:avLst/>
+          </a:prstGeom>
+          <a:noFill/>
+          <a:ln w="0">
+            <a:noFill/>
+          </a:ln>
+        </p:spPr>
+        <p:txBody>
+          <a:bodyPr lIns="91440" tIns="45720" rIns="91440" bIns="45720" anchor="ctr">
+            <a:noAutofit/>
+          </a:bodyPr>
+          <a:lstStyle>
+            <a:lvl1pPr indent="0" algn="r" defTabSz="457200">
+              <a:lnSpc>
+                <a:spcPct val="100000"/>
+              </a:lnSpc>
+              <a:buNone/>
+              <a:tabLst>
+                <a:tab pos="0" algn="l"/>
+              </a:tabLst>
+              <a:defRPr lang="en-US" sz="1200" b="0" u="none" strike="noStrike">
+                <a:solidFill>
+                  <a:schemeClr val="dk1">
+                    <a:tint val="75000"/>
+                  </a:schemeClr>
+                </a:solidFill>
+                <a:effectLst/>
+                <a:uFillTx/>
+                <a:latin typeface="Calibri"/>
+              </a:defRPr>
+            </a:lvl1pPr>
+          </a:lstStyle>
+          <a:p>
+            <a:pPr indent="0" algn="r" defTabSz="457200">
+              <a:lnSpc>
+                <a:spcPct val="100000"/>
+              </a:lnSpc>
+              <a:buNone/>
+              <a:tabLst>
+                <a:tab pos="0" algn="l"/>
+              </a:tabLst>
+            </a:pPr>
+            <a:fld id="{0C969AA0-CFB1-4475-9D76-19D3834A62A6}" type="slidenum">
+              <a:rPr lang="en-US" sz="1200" b="0" u="none" strike="noStrike">
+                <a:solidFill>
+                  <a:schemeClr val="dk1">
+                    <a:tint val="75000"/>
+                  </a:schemeClr>
+                </a:solidFill>
+                <a:effectLst/>
+                <a:uFillTx/>
+                <a:latin typeface="Calibri"/>
+              </a:rPr>
+              <a:t>&lt;number&gt;</a:t>
+            </a:fld>
+            <a:endParaRPr lang="en-US" sz="1200" b="0" u="none" strike="noStrike">
+              <a:solidFill>
+                <a:srgbClr val="000000"/>
+              </a:solidFill>
+              <a:effectLst/>
+              <a:uFillTx/>
+              <a:latin typeface="Times New Roman"/>
+            </a:endParaRPr>
+          </a:p>
+        </p:txBody>
+      </p:sp>
+      <p:sp>
+        <p:nvSpPr>
+          <p:cNvPr id="23" name="PlaceHolder 4"/>
+          <p:cNvSpPr>
+            <a:spLocks noGrp="1"/>
+          </p:cNvSpPr>
+          <p:nvPr>
+            <p:ph type="title"/>
+          </p:nvPr>
+        </p:nvSpPr>
+        <p:spPr>
+          <a:xfrm>
+            <a:off x="609480" y="273600"/>
+            <a:ext cx="10971720" cy="1144080"/>
+          </a:xfrm>
+          <a:prstGeom prst="rect">
+            <a:avLst/>
+          </a:prstGeom>
+          <a:noFill/>
+          <a:ln w="0">
+            <a:noFill/>
+          </a:ln>
+        </p:spPr>
+        <p:txBody>
+          <a:bodyPr lIns="0" tIns="0" rIns="0" bIns="0" anchor="ctr">
+            <a:noAutofit/>
+          </a:bodyPr>
+          <a:lstStyle>
+            <a:lvl1pPr indent="0" algn="ctr" defTabSz="457200">
+              <a:lnSpc>
+                <a:spcPct val="100000"/>
+              </a:lnSpc>
+              <a:buNone/>
+              <a:tabLst>
+                <a:tab pos="0" algn="l"/>
+              </a:tabLst>
+              <a:defRPr lang="en-US" sz="4400" b="0" u="none" strike="noStrike">
+                <a:solidFill>
+                  <a:schemeClr val="dk1"/>
+                </a:solidFill>
+                <a:effectLst/>
+                <a:uFillTx/>
+                <a:latin typeface="Calibri"/>
+              </a:defRPr>
+            </a:lvl1pPr>
+          </a:lstStyle>
+          <a:p>
+            <a:pPr indent="0" algn="ctr" defTabSz="457200">
+              <a:lnSpc>
+                <a:spcPct val="100000"/>
+              </a:lnSpc>
+              <a:buNone/>
+              <a:tabLst>
+                <a:tab pos="0" algn="l"/>
+              </a:tabLst>
+            </a:pPr>
+            <a:r>
+              <a:rPr lang="en-US" sz="4400" b="0" u="none" strike="noStrike">
+                <a:solidFill>
+                  <a:schemeClr val="dk1"/>
+                </a:solidFill>
+                <a:effectLst/>
+                <a:uFillTx/>
+                <a:latin typeface="Calibri"/>
+              </a:rPr>
+              <a:t>Click to edit the title text format</a:t>
+            </a:r>
+            <a:endParaRPr lang="en-US" sz="4400" b="0" u="none" strike="noStrike">
+              <a:solidFill>
+                <a:schemeClr val="dk1"/>
+              </a:solidFill>
+              <a:effectLst/>
+              <a:uFillTx/>
+              <a:latin typeface="Calibri"/>
+            </a:endParaRPr>
+          </a:p>
+        </p:txBody>
+      </p:sp>
+      <p:sp>
+        <p:nvSpPr>
+          <p:cNvPr id="24" name="PlaceHolder 5"/>
+          <p:cNvSpPr>
+            <a:spLocks noGrp="1"/>
+          </p:cNvSpPr>
+          <p:nvPr>
+            <p:ph type="body"/>
+          </p:nvPr>
+        </p:nvSpPr>
+        <p:spPr>
+          <a:xfrm>
+            <a:off x="609480" y="1604520"/>
+            <a:ext cx="10971720" cy="3976560"/>
+          </a:xfrm>
+          <a:prstGeom prst="rect">
+            <a:avLst/>
+          </a:prstGeom>
+          <a:noFill/>
+          <a:ln w="0">
+            <a:noFill/>
+          </a:ln>
+        </p:spPr>
+        <p:txBody>
+          <a:bodyPr lIns="0" tIns="0" rIns="0" bIns="0" anchor="t">
+            <a:normAutofit/>
+          </a:bodyPr>
+          <a:lstStyle>
+            <a:lvl1pPr algn="l" defTabSz="457200">
+              <a:lnSpc>
+                <a:spcPct val="100000"/>
+              </a:lnSpc>
+              <a:spcBef>
+                <a:spcPts val="641"/>
+              </a:spcBef>
+              <a:buClr>
+                <a:srgbClr val="000000"/>
+              </a:buClr>
+              <a:buFont typeface="Arial"/>
+              <a:buChar char="•"/>
+              <a:defRPr lang="en-US" sz="3200" b="0" u="none" strike="noStrike">
+                <a:solidFill>
+                  <a:schemeClr val="dk1"/>
+                </a:solidFill>
+                <a:effectLst/>
+                <a:uFillTx/>
+                <a:latin typeface="Calibri"/>
+              </a:defRPr>
+            </a:lvl1pPr>
+            <a:lvl2pPr lvl="1" algn="l" defTabSz="457200">
+              <a:lnSpc>
+                <a:spcPct val="100000"/>
+              </a:lnSpc>
+              <a:spcBef>
+                <a:spcPts val="561"/>
+              </a:spcBef>
+              <a:buClr>
+                <a:srgbClr val="000000"/>
+              </a:buClr>
+              <a:buSzPct val="75000"/>
+              <a:buFont typeface="Symbol" charset="2"/>
+              <a:buChar char=""/>
+              <a:defRPr lang="en-US" sz="2800" b="0" u="none" strike="noStrike">
+                <a:solidFill>
+                  <a:schemeClr val="dk1"/>
+                </a:solidFill>
+                <a:effectLst/>
+                <a:uFillTx/>
+                <a:latin typeface="Calibri"/>
+              </a:defRPr>
+            </a:lvl2pPr>
+            <a:lvl3pPr lvl="2" algn="l" defTabSz="457200">
+              <a:lnSpc>
+                <a:spcPct val="100000"/>
+              </a:lnSpc>
+              <a:spcBef>
+                <a:spcPts val="479"/>
+              </a:spcBef>
+              <a:buClr>
+                <a:srgbClr val="000000"/>
+              </a:buClr>
+              <a:buSzPct val="45000"/>
+              <a:buFont typeface="Wingdings" charset="2"/>
+              <a:buChar char=""/>
+              <a:defRPr lang="en-US" sz="2400" b="0" u="none" strike="noStrike">
+                <a:solidFill>
+                  <a:schemeClr val="dk1"/>
+                </a:solidFill>
+                <a:effectLst/>
+                <a:uFillTx/>
+                <a:latin typeface="Calibri"/>
+              </a:defRPr>
+            </a:lvl3pPr>
+            <a:lvl4pPr lvl="3" algn="l" defTabSz="457200">
+              <a:lnSpc>
+                <a:spcPct val="100000"/>
+              </a:lnSpc>
+              <a:spcBef>
+                <a:spcPts val="400"/>
+              </a:spcBef>
+              <a:buClr>
+                <a:srgbClr val="000000"/>
+              </a:buClr>
+              <a:buSzPct val="75000"/>
+              <a:buFont typeface="Symbol" charset="2"/>
+              <a:buChar char=""/>
+              <a:defRPr lang="en-US" sz="2000" b="0" u="none" strike="noStrike">
+                <a:solidFill>
+                  <a:schemeClr val="dk1"/>
+                </a:solidFill>
+                <a:effectLst/>
+                <a:uFillTx/>
+                <a:latin typeface="Calibri"/>
+              </a:defRPr>
+            </a:lvl4pPr>
+            <a:lvl5pPr lvl="4" algn="l" defTabSz="457200">
+              <a:lnSpc>
+                <a:spcPct val="100000"/>
+              </a:lnSpc>
+              <a:spcBef>
+                <a:spcPts val="400"/>
+              </a:spcBef>
+              <a:buClr>
+                <a:srgbClr val="000000"/>
+              </a:buClr>
+              <a:buSzPct val="45000"/>
+              <a:buFont typeface="Wingdings" charset="2"/>
+              <a:buChar char=""/>
+              <a:defRPr lang="en-US" sz="2000" b="0" u="none" strike="noStrike">
+                <a:solidFill>
+                  <a:schemeClr val="dk1"/>
+                </a:solidFill>
+                <a:effectLst/>
+                <a:uFillTx/>
+                <a:latin typeface="Calibri"/>
+              </a:defRPr>
+            </a:lvl5pPr>
+            <a:lvl6pPr lvl="5" algn="l" defTabSz="457200">
+              <a:lnSpc>
+                <a:spcPct val="100000"/>
+              </a:lnSpc>
+              <a:spcBef>
+                <a:spcPts val="283"/>
+              </a:spcBef>
+              <a:buClr>
+                <a:srgbClr val="000000"/>
+              </a:buClr>
+              <a:buSzPct val="45000"/>
+              <a:buFont typeface="Wingdings" charset="2"/>
+              <a:buChar char=""/>
+              <a:defRPr lang="en-US" sz="2000" b="0" u="none" strike="noStrike">
+                <a:solidFill>
+                  <a:schemeClr val="dk1"/>
+                </a:solidFill>
+                <a:effectLst/>
+                <a:uFillTx/>
+                <a:latin typeface="Calibri"/>
+              </a:defRPr>
+            </a:lvl6pPr>
+            <a:lvl7pPr lvl="6" algn="l" defTabSz="457200">
+              <a:lnSpc>
+                <a:spcPct val="100000"/>
+              </a:lnSpc>
+              <a:spcBef>
+                <a:spcPts val="283"/>
+              </a:spcBef>
+              <a:buClr>
+                <a:srgbClr val="000000"/>
+              </a:buClr>
+              <a:buSzPct val="45000"/>
+              <a:buFont typeface="Wingdings" charset="2"/>
+              <a:buChar char=""/>
+              <a:defRPr lang="en-US" sz="2000" b="0" u="none" strike="noStrike">
+                <a:solidFill>
+                  <a:schemeClr val="dk1"/>
+                </a:solidFill>
+                <a:effectLst/>
+                <a:uFillTx/>
+                <a:latin typeface="Calibri"/>
+              </a:defRPr>
+            </a:lvl7pPr>
+          </a:lstStyle>
+          <a:p>
+            <a:pPr marL="343080" indent="-343080" algn="l" defTabSz="457200">
+              <a:lnSpc>
+                <a:spcPct val="100000"/>
+              </a:lnSpc>
+              <a:spcBef>
+                <a:spcPts val="641"/>
+              </a:spcBef>
+              <a:buClr>
+                <a:srgbClr val="000000"/>
+              </a:buClr>
+              <a:buFont typeface="Arial"/>
+              <a:buChar char="•"/>
+            </a:pPr>
+            <a:r>
+              <a:rPr lang="en-US" sz="3200" b="0" u="none" strike="noStrike">
+                <a:solidFill>
+                  <a:schemeClr val="dk1"/>
+                </a:solidFill>
+                <a:effectLst/>
+                <a:uFillTx/>
+                <a:latin typeface="Calibri"/>
+              </a:rPr>
+              <a:t>Click to edit the outline text format</a:t>
+            </a:r>
+            <a:endParaRPr lang="en-US" sz="3200" b="0" u="none" strike="noStrike">
+              <a:solidFill>
+                <a:schemeClr val="dk1"/>
+              </a:solidFill>
+              <a:effectLst/>
+              <a:uFillTx/>
+              <a:latin typeface="Calibri"/>
+            </a:endParaRPr>
+          </a:p>
+          <a:p>
+            <a:pPr marL="864000" lvl="1" indent="-324000" algn="l" defTabSz="457200">
+              <a:lnSpc>
+                <a:spcPct val="100000"/>
+              </a:lnSpc>
+              <a:spcBef>
+                <a:spcPts val="561"/>
+              </a:spcBef>
+              <a:buClr>
+                <a:srgbClr val="000000"/>
+              </a:buClr>
+              <a:buSzPct val="75000"/>
+              <a:buFont typeface="Symbol" charset="2"/>
+              <a:buChar char=""/>
+            </a:pPr>
+            <a:r>
+              <a:rPr lang="en-US" sz="2800" b="0" u="none" strike="noStrike">
+                <a:solidFill>
+                  <a:schemeClr val="dk1"/>
+                </a:solidFill>
+                <a:effectLst/>
+                <a:uFillTx/>
+                <a:latin typeface="Calibri"/>
+              </a:rPr>
+              <a:t>Second Outline Level</a:t>
+            </a:r>
+            <a:endParaRPr lang="en-US" sz="2800" b="0" u="none" strike="noStrike">
+              <a:solidFill>
+                <a:schemeClr val="dk1"/>
+              </a:solidFill>
+              <a:effectLst/>
+              <a:uFillTx/>
+              <a:latin typeface="Calibri"/>
+            </a:endParaRPr>
+          </a:p>
+          <a:p>
+            <a:pPr marL="1296000" lvl="2" indent="-288000" algn="l" defTabSz="457200">
+              <a:lnSpc>
+                <a:spcPct val="100000"/>
+              </a:lnSpc>
+              <a:spcBef>
+                <a:spcPts val="479"/>
+              </a:spcBef>
+              <a:buClr>
+                <a:srgbClr val="000000"/>
+              </a:buClr>
+              <a:buSzPct val="45000"/>
+              <a:buFont typeface="Wingdings" charset="2"/>
+              <a:buChar char=""/>
+            </a:pPr>
+            <a:r>
+              <a:rPr lang="en-US" sz="2400" b="0" u="none" strike="noStrike">
+                <a:solidFill>
+                  <a:schemeClr val="dk1"/>
+                </a:solidFill>
+                <a:effectLst/>
+                <a:uFillTx/>
+                <a:latin typeface="Calibri"/>
+              </a:rPr>
+              <a:t>Third Outline Level</a:t>
+            </a:r>
+            <a:endParaRPr lang="en-US" sz="2400" b="0" u="none" strike="noStrike">
+              <a:solidFill>
+                <a:schemeClr val="dk1"/>
+              </a:solidFill>
+              <a:effectLst/>
+              <a:uFillTx/>
+              <a:latin typeface="Calibri"/>
+            </a:endParaRPr>
+          </a:p>
+          <a:p>
+            <a:pPr marL="1728000" lvl="3" indent="-216000" algn="l" defTabSz="457200">
+              <a:lnSpc>
+                <a:spcPct val="100000"/>
+              </a:lnSpc>
+              <a:spcBef>
+                <a:spcPts val="400"/>
+              </a:spcBef>
+              <a:buClr>
+                <a:srgbClr val="000000"/>
+              </a:buClr>
+              <a:buSzPct val="75000"/>
+              <a:buFont typeface="Symbol" charset="2"/>
+              <a:buChar char=""/>
+            </a:pPr>
+            <a:r>
+              <a:rPr lang="en-US" sz="2000" b="0" u="none" strike="noStrike">
+                <a:solidFill>
+                  <a:schemeClr val="dk1"/>
+                </a:solidFill>
+                <a:effectLst/>
+                <a:uFillTx/>
+                <a:latin typeface="Calibri"/>
+              </a:rPr>
+              <a:t>Fourth Outline Level</a:t>
+            </a:r>
+            <a:endParaRPr lang="en-US" sz="2000" b="0" u="none" strike="noStrike">
+              <a:solidFill>
+                <a:schemeClr val="dk1"/>
+              </a:solidFill>
+              <a:effectLst/>
+              <a:uFillTx/>
+              <a:latin typeface="Calibri"/>
+            </a:endParaRPr>
+          </a:p>
+          <a:p>
+            <a:pPr marL="2160000" lvl="4" indent="-216000" algn="l" defTabSz="457200">
+              <a:lnSpc>
+                <a:spcPct val="100000"/>
+              </a:lnSpc>
+              <a:spcBef>
+                <a:spcPts val="400"/>
+              </a:spcBef>
+              <a:buClr>
+                <a:srgbClr val="000000"/>
+              </a:buClr>
+              <a:buSzPct val="45000"/>
+              <a:buFont typeface="Wingdings" charset="2"/>
+              <a:buChar char=""/>
+            </a:pPr>
+            <a:r>
+              <a:rPr lang="en-US" sz="2000" b="0" u="none" strike="noStrike">
+                <a:solidFill>
+                  <a:schemeClr val="dk1"/>
+                </a:solidFill>
+                <a:effectLst/>
+                <a:uFillTx/>
+                <a:latin typeface="Calibri"/>
+              </a:rPr>
+              <a:t>Fifth Outline Level</a:t>
+            </a:r>
+            <a:endParaRPr lang="en-US" sz="2000" b="0" u="none" strike="noStrike">
+              <a:solidFill>
+                <a:schemeClr val="dk1"/>
+              </a:solidFill>
+              <a:effectLst/>
+              <a:uFillTx/>
+              <a:latin typeface="Calibri"/>
+            </a:endParaRPr>
+          </a:p>
+          <a:p>
+            <a:pPr marL="2592000" lvl="5" indent="-216000" algn="l" defTabSz="457200">
+              <a:lnSpc>
+                <a:spcPct val="100000"/>
+              </a:lnSpc>
+              <a:spcBef>
+                <a:spcPts val="283"/>
+              </a:spcBef>
+              <a:buClr>
+                <a:srgbClr val="000000"/>
+              </a:buClr>
+              <a:buSzPct val="45000"/>
+              <a:buFont typeface="Wingdings" charset="2"/>
+              <a:buChar char=""/>
+            </a:pPr>
+            <a:r>
+              <a:rPr lang="en-US" sz="2000" b="0" u="none" strike="noStrike">
+                <a:solidFill>
+                  <a:schemeClr val="dk1"/>
+                </a:solidFill>
+                <a:effectLst/>
+                <a:uFillTx/>
+                <a:latin typeface="Calibri"/>
+              </a:rPr>
+              <a:t>Sixth Outline Level</a:t>
+            </a:r>
+            <a:endParaRPr lang="en-US" sz="2000" b="0" u="none" strike="noStrike">
+              <a:solidFill>
+                <a:schemeClr val="dk1"/>
+              </a:solidFill>
+              <a:effectLst/>
+              <a:uFillTx/>
+              <a:latin typeface="Calibri"/>
+            </a:endParaRPr>
+          </a:p>
+          <a:p>
+            <a:pPr marL="3024000" lvl="6" indent="-216000" algn="l" defTabSz="457200">
+              <a:lnSpc>
+                <a:spcPct val="100000"/>
+              </a:lnSpc>
+              <a:spcBef>
+                <a:spcPts val="283"/>
+              </a:spcBef>
+              <a:buClr>
+                <a:srgbClr val="000000"/>
+              </a:buClr>
+              <a:buSzPct val="45000"/>
+              <a:buFont typeface="Wingdings" charset="2"/>
+              <a:buChar char=""/>
+            </a:pPr>
+            <a:r>
+              <a:rPr lang="en-US" sz="2000" b="0" u="none" strike="noStrike">
+                <a:solidFill>
+                  <a:schemeClr val="dk1"/>
+                </a:solidFill>
+                <a:effectLst/>
+                <a:uFillTx/>
+                <a:latin typeface="Calibri"/>
+              </a:rPr>
+              <a:t>Seventh Outline Level</a:t>
+            </a:r>
+            <a:endParaRPr lang="en-US" sz="2000" b="0" u="none" strike="noStrike">
+              <a:solidFill>
+                <a:schemeClr val="dk1"/>
+              </a:solidFill>
+              <a:effectLst/>
+              <a:uFillTx/>
+              <a:latin typeface="Calibri"/>
+            </a:endParaRPr>
+          </a:p>
+        </p:txBody>
+      </p:sp>
+    </p:spTree>
+  </p:cSld>
+</p:sldLayout>
+</file>
+
+<file path=ppt/slideLayouts/slideLayout5.xml><?xml version="1.0" encoding="utf-8"?>
 <p:sldLayout xmlns:a="http://schemas.openxmlformats.org/drawingml/2006/main" xmlns:p="http://schemas.openxmlformats.org/presentationml/2006/main" xmlns:r="http://schemas.openxmlformats.org/officeDocument/2006/relationships" xmlns:p14="http://schemas.microsoft.com/office/powerpoint/2010/main" xmlns:p15="http://schemas.microsoft.com/office/powerpoint/2012/main" xmlns:mc="http://schemas.openxmlformats.org/markup-compatibility/2006" type="blank" preserve="1">
   <p:cSld name="Content with Caption">
     <p:bg>
@@ -2372,7 +4427,7 @@
       </p:grpSpPr>
       <p:sp>
         <p:nvSpPr>
-          <p:cNvPr id="7" name="PlaceHolder 1"/>
+          <p:cNvPr id="25" name="PlaceHolder 1"/>
           <p:cNvSpPr>
             <a:spLocks noGrp="1"/>
           </p:cNvSpPr>
@@ -2383,7 +4438,7 @@
         <p:spPr>
           <a:xfrm>
             <a:off x="457200" y="272880"/>
-            <a:ext cx="3007440" cy="1161360"/>
+            <a:ext cx="3007080" cy="1161000"/>
           </a:xfrm>
           <a:prstGeom prst="rect">
             <a:avLst/>
@@ -2450,7 +4505,7 @@
       </p:sp>
       <p:sp>
         <p:nvSpPr>
-          <p:cNvPr id="8" name="PlaceHolder 2"/>
+          <p:cNvPr id="26" name="PlaceHolder 2"/>
           <p:cNvSpPr>
             <a:spLocks noGrp="1"/>
           </p:cNvSpPr>
@@ -2461,7 +4516,7 @@
         <p:spPr>
           <a:xfrm>
             <a:off x="3575160" y="272880"/>
-            <a:ext cx="5110920" cy="5852520"/>
+            <a:ext cx="5110560" cy="5852160"/>
           </a:xfrm>
           <a:prstGeom prst="rect">
             <a:avLst/>
@@ -2756,7 +4811,7 @@
       </p:sp>
       <p:sp>
         <p:nvSpPr>
-          <p:cNvPr id="9" name="PlaceHolder 3"/>
+          <p:cNvPr id="27" name="PlaceHolder 3"/>
           <p:cNvSpPr>
             <a:spLocks noGrp="1"/>
           </p:cNvSpPr>
@@ -2767,7 +4822,7 @@
         <p:spPr>
           <a:xfrm>
             <a:off x="457200" y="1434960"/>
-            <a:ext cx="3007440" cy="4690440"/>
+            <a:ext cx="3007080" cy="4690080"/>
           </a:xfrm>
           <a:prstGeom prst="rect">
             <a:avLst/>
@@ -2840,18 +4895,18 @@
       </p:sp>
       <p:sp>
         <p:nvSpPr>
-          <p:cNvPr id="10" name="PlaceHolder 4"/>
+          <p:cNvPr id="28" name="PlaceHolder 4"/>
           <p:cNvSpPr>
             <a:spLocks noGrp="1"/>
           </p:cNvSpPr>
           <p:nvPr>
-            <p:ph type="dt" idx="4"/>
+            <p:ph type="dt" idx="13"/>
           </p:nvPr>
         </p:nvSpPr>
         <p:spPr>
           <a:xfrm>
             <a:off x="457200" y="6356520"/>
-            <a:ext cx="2133000" cy="364320"/>
+            <a:ext cx="2132640" cy="363960"/>
           </a:xfrm>
           <a:prstGeom prst="rect">
             <a:avLst/>
@@ -2922,18 +4977,18 @@
       </p:sp>
       <p:sp>
         <p:nvSpPr>
-          <p:cNvPr id="11" name="PlaceHolder 5"/>
+          <p:cNvPr id="29" name="PlaceHolder 5"/>
           <p:cNvSpPr>
             <a:spLocks noGrp="1"/>
           </p:cNvSpPr>
           <p:nvPr>
-            <p:ph type="ftr" idx="5"/>
+            <p:ph type="ftr" idx="14"/>
           </p:nvPr>
         </p:nvSpPr>
         <p:spPr>
           <a:xfrm>
             <a:off x="3124080" y="6356520"/>
-            <a:ext cx="2894760" cy="364320"/>
+            <a:ext cx="2894400" cy="363960"/>
           </a:xfrm>
           <a:prstGeom prst="rect">
             <a:avLst/>
@@ -3000,18 +5055,18 @@
       </p:sp>
       <p:sp>
         <p:nvSpPr>
-          <p:cNvPr id="12" name="PlaceHolder 6"/>
+          <p:cNvPr id="30" name="PlaceHolder 6"/>
           <p:cNvSpPr>
             <a:spLocks noGrp="1"/>
           </p:cNvSpPr>
           <p:nvPr>
-            <p:ph type="sldNum" idx="6"/>
+            <p:ph type="sldNum" idx="15"/>
           </p:nvPr>
         </p:nvSpPr>
         <p:spPr>
           <a:xfrm>
             <a:off x="6553080" y="6356520"/>
-            <a:ext cx="2133000" cy="364320"/>
+            <a:ext cx="2132640" cy="363960"/>
           </a:xfrm>
           <a:prstGeom prst="rect">
             <a:avLst/>
@@ -3056,7 +5111,7 @@
                 <a:tab pos="0" algn="l"/>
               </a:tabLst>
             </a:pPr>
-            <a:fld id="{8FA858F1-FE33-486F-9C6C-84B31CAB0EC4}" type="slidenum">
+            <a:fld id="{9E936037-D63E-4C2E-9410-4E3EAFC903ED}" type="slidenum">
               <a:rPr lang="en-US" sz="1200" b="0" u="none" strike="noStrike">
                 <a:solidFill>
                   <a:schemeClr val="dk1">
@@ -3085,7 +5140,7 @@
 </p:sldLayout>
 </file>
 
-<file path=ppt/slideLayouts/slideLayout3.xml><?xml version="1.0" encoding="utf-8"?>
+<file path=ppt/slideLayouts/slideLayout6.xml><?xml version="1.0" encoding="utf-8"?>
 <p:sldLayout xmlns:a="http://schemas.openxmlformats.org/drawingml/2006/main" xmlns:p="http://schemas.openxmlformats.org/presentationml/2006/main" xmlns:r="http://schemas.openxmlformats.org/officeDocument/2006/relationships" xmlns:p14="http://schemas.microsoft.com/office/powerpoint/2010/main" xmlns:p15="http://schemas.microsoft.com/office/powerpoint/2012/main" xmlns:mc="http://schemas.openxmlformats.org/markup-compatibility/2006" type="blank" preserve="1">
   <p:cSld name="Picture with Caption">
     <p:bg>
@@ -3111,7 +5166,7 @@
       </p:grpSpPr>
       <p:sp>
         <p:nvSpPr>
-          <p:cNvPr id="13" name="PlaceHolder 1"/>
+          <p:cNvPr id="31" name="PlaceHolder 1"/>
           <p:cNvSpPr>
             <a:spLocks noGrp="1"/>
           </p:cNvSpPr>
@@ -3122,7 +5177,7 @@
         <p:spPr>
           <a:xfrm>
             <a:off x="1792440" y="4800600"/>
-            <a:ext cx="5485680" cy="565920"/>
+            <a:ext cx="5485320" cy="565560"/>
           </a:xfrm>
           <a:prstGeom prst="rect">
             <a:avLst/>
@@ -3189,7 +5244,7 @@
       </p:sp>
       <p:sp>
         <p:nvSpPr>
-          <p:cNvPr id="14" name="PlaceHolder 2"/>
+          <p:cNvPr id="32" name="PlaceHolder 2"/>
           <p:cNvSpPr>
             <a:spLocks noGrp="1"/>
           </p:cNvSpPr>
@@ -3200,7 +5255,7 @@
         <p:spPr>
           <a:xfrm>
             <a:off x="1792440" y="612720"/>
-            <a:ext cx="5485680" cy="4114080"/>
+            <a:ext cx="5485320" cy="4113720"/>
           </a:xfrm>
           <a:prstGeom prst="rect">
             <a:avLst/>
@@ -3659,7 +5714,7 @@
       </p:sp>
       <p:sp>
         <p:nvSpPr>
-          <p:cNvPr id="15" name="PlaceHolder 3"/>
+          <p:cNvPr id="33" name="PlaceHolder 3"/>
           <p:cNvSpPr>
             <a:spLocks noGrp="1"/>
           </p:cNvSpPr>
@@ -3670,7 +5725,7 @@
         <p:spPr>
           <a:xfrm>
             <a:off x="1792440" y="5367240"/>
-            <a:ext cx="5485680" cy="804240"/>
+            <a:ext cx="5485320" cy="803880"/>
           </a:xfrm>
           <a:prstGeom prst="rect">
             <a:avLst/>
@@ -3743,18 +5798,18 @@
       </p:sp>
       <p:sp>
         <p:nvSpPr>
-          <p:cNvPr id="16" name="PlaceHolder 4"/>
+          <p:cNvPr id="34" name="PlaceHolder 4"/>
           <p:cNvSpPr>
             <a:spLocks noGrp="1"/>
           </p:cNvSpPr>
           <p:nvPr>
-            <p:ph type="dt" idx="7"/>
+            <p:ph type="dt" idx="16"/>
           </p:nvPr>
         </p:nvSpPr>
         <p:spPr>
           <a:xfrm>
             <a:off x="457200" y="6356520"/>
-            <a:ext cx="2133000" cy="364320"/>
+            <a:ext cx="2132640" cy="363960"/>
           </a:xfrm>
           <a:prstGeom prst="rect">
             <a:avLst/>
@@ -3825,18 +5880,18 @@
       </p:sp>
       <p:sp>
         <p:nvSpPr>
-          <p:cNvPr id="17" name="PlaceHolder 5"/>
+          <p:cNvPr id="35" name="PlaceHolder 5"/>
           <p:cNvSpPr>
             <a:spLocks noGrp="1"/>
           </p:cNvSpPr>
           <p:nvPr>
-            <p:ph type="ftr" idx="8"/>
+            <p:ph type="ftr" idx="17"/>
           </p:nvPr>
         </p:nvSpPr>
         <p:spPr>
           <a:xfrm>
             <a:off x="3124080" y="6356520"/>
-            <a:ext cx="2894760" cy="364320"/>
+            <a:ext cx="2894400" cy="363960"/>
           </a:xfrm>
           <a:prstGeom prst="rect">
             <a:avLst/>
@@ -3903,18 +5958,18 @@
       </p:sp>
       <p:sp>
         <p:nvSpPr>
-          <p:cNvPr id="18" name="PlaceHolder 6"/>
+          <p:cNvPr id="36" name="PlaceHolder 6"/>
           <p:cNvSpPr>
             <a:spLocks noGrp="1"/>
           </p:cNvSpPr>
           <p:nvPr>
-            <p:ph type="sldNum" idx="9"/>
+            <p:ph type="sldNum" idx="18"/>
           </p:nvPr>
         </p:nvSpPr>
         <p:spPr>
           <a:xfrm>
             <a:off x="6553080" y="6356520"/>
-            <a:ext cx="2133000" cy="364320"/>
+            <a:ext cx="2132640" cy="363960"/>
           </a:xfrm>
           <a:prstGeom prst="rect">
             <a:avLst/>
@@ -3959,7 +6014,7 @@
                 <a:tab pos="0" algn="l"/>
               </a:tabLst>
             </a:pPr>
-            <a:fld id="{EF746BD6-2133-4A47-B75E-6D7A619D35C5}" type="slidenum">
+            <a:fld id="{6845DAC5-371F-4EFD-AE35-E305C369E2D7}" type="slidenum">
               <a:rPr lang="en-US" sz="1200" b="0" u="none" strike="noStrike">
                 <a:solidFill>
                   <a:schemeClr val="dk1">
@@ -3988,7 +6043,7 @@
 </p:sldLayout>
 </file>
 
-<file path=ppt/slideLayouts/slideLayout4.xml><?xml version="1.0" encoding="utf-8"?>
+<file path=ppt/slideLayouts/slideLayout7.xml><?xml version="1.0" encoding="utf-8"?>
 <p:sldLayout xmlns:a="http://schemas.openxmlformats.org/drawingml/2006/main" xmlns:p="http://schemas.openxmlformats.org/presentationml/2006/main" xmlns:r="http://schemas.openxmlformats.org/officeDocument/2006/relationships" xmlns:p14="http://schemas.microsoft.com/office/powerpoint/2010/main" xmlns:p15="http://schemas.microsoft.com/office/powerpoint/2012/main" xmlns:mc="http://schemas.openxmlformats.org/markup-compatibility/2006" type="title" preserve="1">
   <p:cSld name="Title Slide">
     <p:bg>
@@ -4014,7 +6069,7 @@
       </p:grpSpPr>
       <p:sp>
         <p:nvSpPr>
-          <p:cNvPr id="19" name="PlaceHolder 1"/>
+          <p:cNvPr id="37" name="PlaceHolder 1"/>
           <p:cNvSpPr>
             <a:spLocks noGrp="1"/>
           </p:cNvSpPr>
@@ -4025,7 +6080,7 @@
         <p:spPr>
           <a:xfrm>
             <a:off x="685800" y="2130480"/>
-            <a:ext cx="7771680" cy="1469160"/>
+            <a:ext cx="7771320" cy="1468800"/>
           </a:xfrm>
           <a:prstGeom prst="rect">
             <a:avLst/>
@@ -4092,18 +6147,18 @@
       </p:sp>
       <p:sp>
         <p:nvSpPr>
-          <p:cNvPr id="20" name="PlaceHolder 2"/>
+          <p:cNvPr id="38" name="PlaceHolder 2"/>
           <p:cNvSpPr>
             <a:spLocks noGrp="1"/>
           </p:cNvSpPr>
           <p:nvPr>
-            <p:ph type="dt" idx="10"/>
+            <p:ph type="dt" idx="19"/>
           </p:nvPr>
         </p:nvSpPr>
         <p:spPr>
           <a:xfrm>
             <a:off x="457200" y="6356520"/>
-            <a:ext cx="2133000" cy="364320"/>
+            <a:ext cx="2132640" cy="363960"/>
           </a:xfrm>
           <a:prstGeom prst="rect">
             <a:avLst/>
@@ -4174,18 +6229,18 @@
       </p:sp>
       <p:sp>
         <p:nvSpPr>
-          <p:cNvPr id="21" name="PlaceHolder 3"/>
+          <p:cNvPr id="39" name="PlaceHolder 3"/>
           <p:cNvSpPr>
             <a:spLocks noGrp="1"/>
           </p:cNvSpPr>
           <p:nvPr>
-            <p:ph type="ftr" idx="11"/>
+            <p:ph type="ftr" idx="20"/>
           </p:nvPr>
         </p:nvSpPr>
         <p:spPr>
           <a:xfrm>
             <a:off x="3124080" y="6356520"/>
-            <a:ext cx="2894760" cy="364320"/>
+            <a:ext cx="2894400" cy="363960"/>
           </a:xfrm>
           <a:prstGeom prst="rect">
             <a:avLst/>
@@ -4252,18 +6307,18 @@
       </p:sp>
       <p:sp>
         <p:nvSpPr>
-          <p:cNvPr id="22" name="PlaceHolder 4"/>
+          <p:cNvPr id="40" name="PlaceHolder 4"/>
           <p:cNvSpPr>
             <a:spLocks noGrp="1"/>
           </p:cNvSpPr>
           <p:nvPr>
-            <p:ph type="sldNum" idx="12"/>
+            <p:ph type="sldNum" idx="21"/>
           </p:nvPr>
         </p:nvSpPr>
         <p:spPr>
           <a:xfrm>
             <a:off x="6553080" y="6356520"/>
-            <a:ext cx="2133000" cy="364320"/>
+            <a:ext cx="2132640" cy="363960"/>
           </a:xfrm>
           <a:prstGeom prst="rect">
             <a:avLst/>
@@ -4308,7 +6363,7 @@
                 <a:tab pos="0" algn="l"/>
               </a:tabLst>
             </a:pPr>
-            <a:fld id="{F59071BB-22D4-4425-8447-9CD08CCCF274}" type="slidenum">
+            <a:fld id="{47304CF8-76E7-4D97-9F1E-9A4ADFE746AC}" type="slidenum">
               <a:rPr lang="en-US" sz="1200" b="0" u="none" strike="noStrike">
                 <a:solidFill>
                   <a:schemeClr val="dk1">
@@ -4337,7 +6392,7 @@
 </p:sldLayout>
 </file>
 
-<file path=ppt/slideLayouts/slideLayout5.xml><?xml version="1.0" encoding="utf-8"?>
+<file path=ppt/slideLayouts/slideLayout8.xml><?xml version="1.0" encoding="utf-8"?>
 <p:sldLayout xmlns:a="http://schemas.openxmlformats.org/drawingml/2006/main" xmlns:p="http://schemas.openxmlformats.org/presentationml/2006/main" xmlns:r="http://schemas.openxmlformats.org/officeDocument/2006/relationships" xmlns:p14="http://schemas.microsoft.com/office/powerpoint/2010/main" xmlns:p15="http://schemas.microsoft.com/office/powerpoint/2012/main" xmlns:mc="http://schemas.openxmlformats.org/markup-compatibility/2006" type="vertTx" preserve="1">
   <p:cSld name="Title and Vertical Text">
     <p:bg>
@@ -4363,7 +6418,7 @@
       </p:grpSpPr>
       <p:sp>
         <p:nvSpPr>
-          <p:cNvPr id="23" name="PlaceHolder 1"/>
+          <p:cNvPr id="41" name="PlaceHolder 1"/>
           <p:cNvSpPr>
             <a:spLocks noGrp="1"/>
           </p:cNvSpPr>
@@ -4374,7 +6429,7 @@
         <p:spPr>
           <a:xfrm>
             <a:off x="457200" y="274680"/>
-            <a:ext cx="8228880" cy="1142280"/>
+            <a:ext cx="8228520" cy="1141920"/>
           </a:xfrm>
           <a:prstGeom prst="rect">
             <a:avLst/>
@@ -4441,7 +6496,7 @@
       </p:sp>
       <p:sp>
         <p:nvSpPr>
-          <p:cNvPr id="24" name="PlaceHolder 2"/>
+          <p:cNvPr id="42" name="PlaceHolder 2"/>
           <p:cNvSpPr>
             <a:spLocks noGrp="1"/>
           </p:cNvSpPr>
@@ -4452,7 +6507,7 @@
         <p:spPr>
           <a:xfrm>
             <a:off x="457200" y="1600200"/>
-            <a:ext cx="8228880" cy="4525200"/>
+            <a:ext cx="8228520" cy="4524840"/>
           </a:xfrm>
           <a:prstGeom prst="rect">
             <a:avLst/>
@@ -4747,18 +6802,18 @@
       </p:sp>
       <p:sp>
         <p:nvSpPr>
-          <p:cNvPr id="25" name="PlaceHolder 3"/>
+          <p:cNvPr id="43" name="PlaceHolder 3"/>
           <p:cNvSpPr>
             <a:spLocks noGrp="1"/>
           </p:cNvSpPr>
           <p:nvPr>
-            <p:ph type="dt" idx="13"/>
+            <p:ph type="dt" idx="22"/>
           </p:nvPr>
         </p:nvSpPr>
         <p:spPr>
           <a:xfrm>
             <a:off x="457200" y="6356520"/>
-            <a:ext cx="2133000" cy="364320"/>
+            <a:ext cx="2132640" cy="363960"/>
           </a:xfrm>
           <a:prstGeom prst="rect">
             <a:avLst/>
@@ -4829,18 +6884,18 @@
       </p:sp>
       <p:sp>
         <p:nvSpPr>
-          <p:cNvPr id="26" name="PlaceHolder 4"/>
+          <p:cNvPr id="44" name="PlaceHolder 4"/>
           <p:cNvSpPr>
             <a:spLocks noGrp="1"/>
           </p:cNvSpPr>
           <p:nvPr>
-            <p:ph type="ftr" idx="14"/>
+            <p:ph type="ftr" idx="23"/>
           </p:nvPr>
         </p:nvSpPr>
         <p:spPr>
           <a:xfrm>
             <a:off x="3124080" y="6356520"/>
-            <a:ext cx="2894760" cy="364320"/>
+            <a:ext cx="2894400" cy="363960"/>
           </a:xfrm>
           <a:prstGeom prst="rect">
             <a:avLst/>
@@ -4907,18 +6962,18 @@
       </p:sp>
       <p:sp>
         <p:nvSpPr>
-          <p:cNvPr id="27" name="PlaceHolder 5"/>
+          <p:cNvPr id="45" name="PlaceHolder 5"/>
           <p:cNvSpPr>
             <a:spLocks noGrp="1"/>
           </p:cNvSpPr>
           <p:nvPr>
-            <p:ph type="sldNum" idx="15"/>
+            <p:ph type="sldNum" idx="24"/>
           </p:nvPr>
         </p:nvSpPr>
         <p:spPr>
           <a:xfrm>
             <a:off x="6553080" y="6356520"/>
-            <a:ext cx="2133000" cy="364320"/>
+            <a:ext cx="2132640" cy="363960"/>
           </a:xfrm>
           <a:prstGeom prst="rect">
             <a:avLst/>
@@ -4963,7 +7018,7 @@
                 <a:tab pos="0" algn="l"/>
               </a:tabLst>
             </a:pPr>
-            <a:fld id="{34E1ECCA-58BA-491B-8322-657F608C4EEB}" type="slidenum">
+            <a:fld id="{764909EA-C015-4053-9E37-1C846FB7865D}" type="slidenum">
               <a:rPr lang="en-US" sz="1200" b="0" u="none" strike="noStrike">
                 <a:solidFill>
                   <a:schemeClr val="dk1">
@@ -4992,7 +7047,7 @@
 </p:sldLayout>
 </file>
 
-<file path=ppt/slideLayouts/slideLayout6.xml><?xml version="1.0" encoding="utf-8"?>
+<file path=ppt/slideLayouts/slideLayout9.xml><?xml version="1.0" encoding="utf-8"?>
 <p:sldLayout xmlns:a="http://schemas.openxmlformats.org/drawingml/2006/main" xmlns:p="http://schemas.openxmlformats.org/presentationml/2006/main" xmlns:r="http://schemas.openxmlformats.org/officeDocument/2006/relationships" xmlns:p14="http://schemas.microsoft.com/office/powerpoint/2010/main" xmlns:p15="http://schemas.microsoft.com/office/powerpoint/2012/main" xmlns:mc="http://schemas.openxmlformats.org/markup-compatibility/2006" type="vertTitleAndTx" preserve="1">
   <p:cSld name="Vertical Title and Text">
     <p:bg>
@@ -5018,7 +7073,7 @@
       </p:grpSpPr>
       <p:sp>
         <p:nvSpPr>
-          <p:cNvPr id="28" name="PlaceHolder 1"/>
+          <p:cNvPr id="46" name="PlaceHolder 1"/>
           <p:cNvSpPr>
             <a:spLocks noGrp="1"/>
           </p:cNvSpPr>
@@ -5029,7 +7084,7 @@
         <p:spPr>
           <a:xfrm>
             <a:off x="6629400" y="274680"/>
-            <a:ext cx="2056680" cy="5850720"/>
+            <a:ext cx="2056320" cy="5850360"/>
           </a:xfrm>
           <a:prstGeom prst="rect">
             <a:avLst/>
@@ -5096,7 +7151,7 @@
       </p:sp>
       <p:sp>
         <p:nvSpPr>
-          <p:cNvPr id="29" name="PlaceHolder 2"/>
+          <p:cNvPr id="47" name="PlaceHolder 2"/>
           <p:cNvSpPr>
             <a:spLocks noGrp="1"/>
           </p:cNvSpPr>
@@ -5107,7 +7162,7 @@
         <p:spPr>
           <a:xfrm>
             <a:off x="457200" y="274680"/>
-            <a:ext cx="6019200" cy="5850720"/>
+            <a:ext cx="6018840" cy="5850360"/>
           </a:xfrm>
           <a:prstGeom prst="rect">
             <a:avLst/>
@@ -5402,18 +7457,18 @@
       </p:sp>
       <p:sp>
         <p:nvSpPr>
-          <p:cNvPr id="30" name="PlaceHolder 3"/>
+          <p:cNvPr id="48" name="PlaceHolder 3"/>
           <p:cNvSpPr>
             <a:spLocks noGrp="1"/>
           </p:cNvSpPr>
           <p:nvPr>
-            <p:ph type="dt" idx="16"/>
+            <p:ph type="dt" idx="25"/>
           </p:nvPr>
         </p:nvSpPr>
         <p:spPr>
           <a:xfrm>
             <a:off x="457200" y="6356520"/>
-            <a:ext cx="2133000" cy="364320"/>
+            <a:ext cx="2132640" cy="363960"/>
           </a:xfrm>
           <a:prstGeom prst="rect">
             <a:avLst/>
@@ -5484,18 +7539,18 @@
       </p:sp>
       <p:sp>
         <p:nvSpPr>
-          <p:cNvPr id="31" name="PlaceHolder 4"/>
+          <p:cNvPr id="49" name="PlaceHolder 4"/>
           <p:cNvSpPr>
             <a:spLocks noGrp="1"/>
           </p:cNvSpPr>
           <p:nvPr>
-            <p:ph type="ftr" idx="17"/>
+            <p:ph type="ftr" idx="26"/>
           </p:nvPr>
         </p:nvSpPr>
         <p:spPr>
           <a:xfrm>
             <a:off x="3124080" y="6356520"/>
-            <a:ext cx="2894760" cy="364320"/>
+            <a:ext cx="2894400" cy="363960"/>
           </a:xfrm>
           <a:prstGeom prst="rect">
             <a:avLst/>
@@ -5562,18 +7617,18 @@
       </p:sp>
       <p:sp>
         <p:nvSpPr>
-          <p:cNvPr id="32" name="PlaceHolder 5"/>
+          <p:cNvPr id="50" name="PlaceHolder 5"/>
           <p:cNvSpPr>
             <a:spLocks noGrp="1"/>
           </p:cNvSpPr>
           <p:nvPr>
-            <p:ph type="sldNum" idx="18"/>
+            <p:ph type="sldNum" idx="27"/>
           </p:nvPr>
         </p:nvSpPr>
         <p:spPr>
           <a:xfrm>
             <a:off x="6553080" y="6356520"/>
-            <a:ext cx="2133000" cy="364320"/>
+            <a:ext cx="2132640" cy="363960"/>
           </a:xfrm>
           <a:prstGeom prst="rect">
             <a:avLst/>
@@ -5618,2062 +7673,7 @@
                 <a:tab pos="0" algn="l"/>
               </a:tabLst>
             </a:pPr>
-            <a:fld id="{77B24DB6-B862-4737-9872-EE5B264517B4}" type="slidenum">
-              <a:rPr lang="en-US" sz="1200" b="0" u="none" strike="noStrike">
-                <a:solidFill>
-                  <a:schemeClr val="dk1">
-                    <a:tint val="75000"/>
-                  </a:schemeClr>
-                </a:solidFill>
-                <a:effectLst/>
-                <a:uFillTx/>
-                <a:latin typeface="Calibri"/>
-              </a:rPr>
-              <a:t>&lt;number&gt;</a:t>
-            </a:fld>
-            <a:endParaRPr lang="en-US" sz="1200" b="0" u="none" strike="noStrike">
-              <a:solidFill>
-                <a:srgbClr val="000000"/>
-              </a:solidFill>
-              <a:effectLst/>
-              <a:uFillTx/>
-              <a:latin typeface="Times New Roman"/>
-            </a:endParaRPr>
-          </a:p>
-        </p:txBody>
-      </p:sp>
-    </p:spTree>
-  </p:cSld>
-</p:sldLayout>
-</file>
-
-<file path=ppt/slideLayouts/slideLayout7.xml><?xml version="1.0" encoding="utf-8"?>
-<p:sldLayout xmlns:a="http://schemas.openxmlformats.org/drawingml/2006/main" xmlns:p="http://schemas.openxmlformats.org/presentationml/2006/main" xmlns:r="http://schemas.openxmlformats.org/officeDocument/2006/relationships" xmlns:p14="http://schemas.microsoft.com/office/powerpoint/2010/main" xmlns:p15="http://schemas.microsoft.com/office/powerpoint/2012/main" xmlns:mc="http://schemas.openxmlformats.org/markup-compatibility/2006" type="obj" preserve="1">
-  <p:cSld name="Title and Content">
-    <p:bg>
-      <p:bgPr>
-        <a:solidFill>
-          <a:srgbClr val="FFFFFF"/>
-        </a:solidFill>
-      </p:bgPr>
-    </p:bg>
-    <p:spTree>
-      <p:nvGrpSpPr>
-        <p:cNvPr id="1" name=""/>
-        <p:cNvGrpSpPr/>
-        <p:nvPr/>
-      </p:nvGrpSpPr>
-      <p:grpSpPr>
-        <a:xfrm>
-          <a:off x="0" y="0"/>
-          <a:ext cx="0" cy="0"/>
-          <a:chOff x="0" y="0"/>
-          <a:chExt cx="0" cy="0"/>
-        </a:xfrm>
-      </p:grpSpPr>
-      <p:sp>
-        <p:nvSpPr>
-          <p:cNvPr id="33" name="PlaceHolder 1"/>
-          <p:cNvSpPr>
-            <a:spLocks noGrp="1"/>
-          </p:cNvSpPr>
-          <p:nvPr>
-            <p:ph type="title"/>
-          </p:nvPr>
-        </p:nvSpPr>
-        <p:spPr>
-          <a:xfrm>
-            <a:off x="457200" y="274680"/>
-            <a:ext cx="8228880" cy="1142280"/>
-          </a:xfrm>
-          <a:prstGeom prst="rect">
-            <a:avLst/>
-          </a:prstGeom>
-          <a:noFill/>
-          <a:ln w="0">
-            <a:noFill/>
-          </a:ln>
-        </p:spPr>
-        <p:txBody>
-          <a:bodyPr lIns="91440" tIns="45720" rIns="91440" bIns="45720" anchor="ctr">
-            <a:noAutofit/>
-          </a:bodyPr>
-          <a:lstStyle>
-            <a:lvl1pPr indent="0" algn="ctr" defTabSz="457200">
-              <a:lnSpc>
-                <a:spcPct val="100000"/>
-              </a:lnSpc>
-              <a:buNone/>
-              <a:tabLst>
-                <a:tab pos="0" algn="l"/>
-              </a:tabLst>
-              <a:defRPr lang="en-US" sz="4400" b="0" u="none" strike="noStrike">
-                <a:solidFill>
-                  <a:schemeClr val="dk1"/>
-                </a:solidFill>
-                <a:effectLst/>
-                <a:uFillTx/>
-                <a:latin typeface="Calibri"/>
-              </a:defRPr>
-            </a:lvl1pPr>
-          </a:lstStyle>
-          <a:p>
-            <a:pPr indent="0" algn="ctr" defTabSz="457200">
-              <a:lnSpc>
-                <a:spcPct val="100000"/>
-              </a:lnSpc>
-              <a:buNone/>
-              <a:tabLst>
-                <a:tab pos="0" algn="l"/>
-              </a:tabLst>
-            </a:pPr>
-            <a:r>
-              <a:rPr lang="en-US" sz="4400" b="0" u="none" strike="noStrike">
-                <a:solidFill>
-                  <a:schemeClr val="dk1"/>
-                </a:solidFill>
-                <a:effectLst/>
-                <a:uFillTx/>
-                <a:latin typeface="Calibri"/>
-              </a:rPr>
-              <a:t>Click to edit Master title style</a:t>
-            </a:r>
-            <a:endParaRPr lang="en-US" sz="4400" b="0" u="none" strike="noStrike">
-              <a:solidFill>
-                <a:schemeClr val="dk1"/>
-              </a:solidFill>
-              <a:effectLst/>
-              <a:uFillTx/>
-              <a:latin typeface="Calibri"/>
-            </a:endParaRPr>
-          </a:p>
-        </p:txBody>
-      </p:sp>
-      <p:sp>
-        <p:nvSpPr>
-          <p:cNvPr id="34" name="PlaceHolder 2"/>
-          <p:cNvSpPr>
-            <a:spLocks noGrp="1"/>
-          </p:cNvSpPr>
-          <p:nvPr>
-            <p:ph type="body"/>
-          </p:nvPr>
-        </p:nvSpPr>
-        <p:spPr>
-          <a:xfrm>
-            <a:off x="457200" y="1600200"/>
-            <a:ext cx="8228880" cy="4525200"/>
-          </a:xfrm>
-          <a:prstGeom prst="rect">
-            <a:avLst/>
-          </a:prstGeom>
-          <a:noFill/>
-          <a:ln w="0">
-            <a:noFill/>
-          </a:ln>
-        </p:spPr>
-        <p:txBody>
-          <a:bodyPr lIns="91440" tIns="45720" rIns="91440" bIns="45720" anchor="t">
-            <a:noAutofit/>
-          </a:bodyPr>
-          <a:lstStyle>
-            <a:lvl1pPr algn="l" defTabSz="457200">
-              <a:lnSpc>
-                <a:spcPct val="100000"/>
-              </a:lnSpc>
-              <a:spcBef>
-                <a:spcPts val="641"/>
-              </a:spcBef>
-              <a:buClr>
-                <a:srgbClr val="000000"/>
-              </a:buClr>
-              <a:buFont typeface="Arial"/>
-              <a:buChar char="•"/>
-              <a:defRPr lang="en-US" sz="3200" b="0" u="none" strike="noStrike">
-                <a:solidFill>
-                  <a:schemeClr val="dk1"/>
-                </a:solidFill>
-                <a:effectLst/>
-                <a:uFillTx/>
-                <a:latin typeface="Calibri"/>
-              </a:defRPr>
-            </a:lvl1pPr>
-            <a:lvl2pPr lvl="1" algn="l" defTabSz="457200">
-              <a:lnSpc>
-                <a:spcPct val="100000"/>
-              </a:lnSpc>
-              <a:spcBef>
-                <a:spcPts val="561"/>
-              </a:spcBef>
-              <a:buClr>
-                <a:srgbClr val="000000"/>
-              </a:buClr>
-              <a:buFont typeface="Arial"/>
-              <a:buChar char="–"/>
-              <a:defRPr lang="en-US" sz="2800" b="0" u="none" strike="noStrike">
-                <a:solidFill>
-                  <a:schemeClr val="dk1"/>
-                </a:solidFill>
-                <a:effectLst/>
-                <a:uFillTx/>
-                <a:latin typeface="Calibri"/>
-              </a:defRPr>
-            </a:lvl2pPr>
-            <a:lvl3pPr lvl="2" algn="l" defTabSz="457200">
-              <a:lnSpc>
-                <a:spcPct val="100000"/>
-              </a:lnSpc>
-              <a:spcBef>
-                <a:spcPts val="479"/>
-              </a:spcBef>
-              <a:buClr>
-                <a:srgbClr val="000000"/>
-              </a:buClr>
-              <a:buFont typeface="Arial"/>
-              <a:buChar char="•"/>
-              <a:defRPr lang="en-US" sz="2400" b="0" u="none" strike="noStrike">
-                <a:solidFill>
-                  <a:schemeClr val="dk1"/>
-                </a:solidFill>
-                <a:effectLst/>
-                <a:uFillTx/>
-                <a:latin typeface="Calibri"/>
-              </a:defRPr>
-            </a:lvl3pPr>
-            <a:lvl4pPr lvl="3" algn="l" defTabSz="457200">
-              <a:lnSpc>
-                <a:spcPct val="100000"/>
-              </a:lnSpc>
-              <a:spcBef>
-                <a:spcPts val="400"/>
-              </a:spcBef>
-              <a:buClr>
-                <a:srgbClr val="000000"/>
-              </a:buClr>
-              <a:buFont typeface="Arial"/>
-              <a:buChar char="–"/>
-              <a:defRPr lang="en-US" sz="2000" b="0" u="none" strike="noStrike">
-                <a:solidFill>
-                  <a:schemeClr val="dk1"/>
-                </a:solidFill>
-                <a:effectLst/>
-                <a:uFillTx/>
-                <a:latin typeface="Calibri"/>
-              </a:defRPr>
-            </a:lvl4pPr>
-            <a:lvl5pPr lvl="4" algn="l" defTabSz="457200">
-              <a:lnSpc>
-                <a:spcPct val="100000"/>
-              </a:lnSpc>
-              <a:spcBef>
-                <a:spcPts val="400"/>
-              </a:spcBef>
-              <a:buClr>
-                <a:srgbClr val="000000"/>
-              </a:buClr>
-              <a:buFont typeface="Arial"/>
-              <a:buChar char="»"/>
-              <a:defRPr lang="en-US" sz="2000" b="0" u="none" strike="noStrike">
-                <a:solidFill>
-                  <a:schemeClr val="dk1"/>
-                </a:solidFill>
-                <a:effectLst/>
-                <a:uFillTx/>
-                <a:latin typeface="Calibri"/>
-              </a:defRPr>
-            </a:lvl5pPr>
-          </a:lstStyle>
-          <a:p>
-            <a:pPr marL="343080" indent="-343080" algn="l" defTabSz="457200">
-              <a:lnSpc>
-                <a:spcPct val="100000"/>
-              </a:lnSpc>
-              <a:spcBef>
-                <a:spcPts val="641"/>
-              </a:spcBef>
-              <a:buClr>
-                <a:srgbClr val="000000"/>
-              </a:buClr>
-              <a:buFont typeface="Arial"/>
-              <a:buChar char="•"/>
-            </a:pPr>
-            <a:r>
-              <a:rPr lang="en-US" sz="3200" b="0" u="none" strike="noStrike">
-                <a:solidFill>
-                  <a:schemeClr val="dk1"/>
-                </a:solidFill>
-                <a:effectLst/>
-                <a:uFillTx/>
-                <a:latin typeface="Calibri"/>
-              </a:rPr>
-              <a:t>Click to edit Master text styles</a:t>
-            </a:r>
-            <a:endParaRPr lang="en-US" sz="3200" b="0" u="none" strike="noStrike">
-              <a:solidFill>
-                <a:schemeClr val="dk1"/>
-              </a:solidFill>
-              <a:effectLst/>
-              <a:uFillTx/>
-              <a:latin typeface="Calibri"/>
-            </a:endParaRPr>
-          </a:p>
-          <a:p>
-            <a:pPr marL="743040" lvl="1" indent="-285840" algn="l" defTabSz="457200">
-              <a:lnSpc>
-                <a:spcPct val="100000"/>
-              </a:lnSpc>
-              <a:spcBef>
-                <a:spcPts val="561"/>
-              </a:spcBef>
-              <a:buClr>
-                <a:srgbClr val="000000"/>
-              </a:buClr>
-              <a:buFont typeface="Arial"/>
-              <a:buChar char="–"/>
-            </a:pPr>
-            <a:r>
-              <a:rPr lang="en-US" sz="2800" b="0" u="none" strike="noStrike">
-                <a:solidFill>
-                  <a:schemeClr val="dk1"/>
-                </a:solidFill>
-                <a:effectLst/>
-                <a:uFillTx/>
-                <a:latin typeface="Calibri"/>
-              </a:rPr>
-              <a:t>Second level</a:t>
-            </a:r>
-            <a:endParaRPr lang="en-US" sz="2800" b="0" u="none" strike="noStrike">
-              <a:solidFill>
-                <a:schemeClr val="dk1"/>
-              </a:solidFill>
-              <a:effectLst/>
-              <a:uFillTx/>
-              <a:latin typeface="Calibri"/>
-            </a:endParaRPr>
-          </a:p>
-          <a:p>
-            <a:pPr marL="1143000" lvl="2" indent="-228600" algn="l" defTabSz="457200">
-              <a:lnSpc>
-                <a:spcPct val="100000"/>
-              </a:lnSpc>
-              <a:spcBef>
-                <a:spcPts val="479"/>
-              </a:spcBef>
-              <a:buClr>
-                <a:srgbClr val="000000"/>
-              </a:buClr>
-              <a:buFont typeface="Arial"/>
-              <a:buChar char="•"/>
-            </a:pPr>
-            <a:r>
-              <a:rPr lang="en-US" sz="2400" b="0" u="none" strike="noStrike">
-                <a:solidFill>
-                  <a:schemeClr val="dk1"/>
-                </a:solidFill>
-                <a:effectLst/>
-                <a:uFillTx/>
-                <a:latin typeface="Calibri"/>
-              </a:rPr>
-              <a:t>Third level</a:t>
-            </a:r>
-            <a:endParaRPr lang="en-US" sz="2400" b="0" u="none" strike="noStrike">
-              <a:solidFill>
-                <a:schemeClr val="dk1"/>
-              </a:solidFill>
-              <a:effectLst/>
-              <a:uFillTx/>
-              <a:latin typeface="Calibri"/>
-            </a:endParaRPr>
-          </a:p>
-          <a:p>
-            <a:pPr marL="1600200" lvl="3" indent="-228600" algn="l" defTabSz="457200">
-              <a:lnSpc>
-                <a:spcPct val="100000"/>
-              </a:lnSpc>
-              <a:spcBef>
-                <a:spcPts val="400"/>
-              </a:spcBef>
-              <a:buClr>
-                <a:srgbClr val="000000"/>
-              </a:buClr>
-              <a:buFont typeface="Arial"/>
-              <a:buChar char="–"/>
-            </a:pPr>
-            <a:r>
-              <a:rPr lang="en-US" sz="2000" b="0" u="none" strike="noStrike">
-                <a:solidFill>
-                  <a:schemeClr val="dk1"/>
-                </a:solidFill>
-                <a:effectLst/>
-                <a:uFillTx/>
-                <a:latin typeface="Calibri"/>
-              </a:rPr>
-              <a:t>Fourth level</a:t>
-            </a:r>
-            <a:endParaRPr lang="en-US" sz="2000" b="0" u="none" strike="noStrike">
-              <a:solidFill>
-                <a:schemeClr val="dk1"/>
-              </a:solidFill>
-              <a:effectLst/>
-              <a:uFillTx/>
-              <a:latin typeface="Calibri"/>
-            </a:endParaRPr>
-          </a:p>
-          <a:p>
-            <a:pPr marL="2057400" lvl="4" indent="-228600" algn="l" defTabSz="457200">
-              <a:lnSpc>
-                <a:spcPct val="100000"/>
-              </a:lnSpc>
-              <a:spcBef>
-                <a:spcPts val="400"/>
-              </a:spcBef>
-              <a:buClr>
-                <a:srgbClr val="000000"/>
-              </a:buClr>
-              <a:buFont typeface="Arial"/>
-              <a:buChar char="»"/>
-            </a:pPr>
-            <a:r>
-              <a:rPr lang="en-US" sz="2000" b="0" u="none" strike="noStrike">
-                <a:solidFill>
-                  <a:schemeClr val="dk1"/>
-                </a:solidFill>
-                <a:effectLst/>
-                <a:uFillTx/>
-                <a:latin typeface="Calibri"/>
-              </a:rPr>
-              <a:t>Fifth level</a:t>
-            </a:r>
-            <a:endParaRPr lang="en-US" sz="2000" b="0" u="none" strike="noStrike">
-              <a:solidFill>
-                <a:schemeClr val="dk1"/>
-              </a:solidFill>
-              <a:effectLst/>
-              <a:uFillTx/>
-              <a:latin typeface="Calibri"/>
-            </a:endParaRPr>
-          </a:p>
-        </p:txBody>
-      </p:sp>
-      <p:sp>
-        <p:nvSpPr>
-          <p:cNvPr id="35" name="PlaceHolder 3"/>
-          <p:cNvSpPr>
-            <a:spLocks noGrp="1"/>
-          </p:cNvSpPr>
-          <p:nvPr>
-            <p:ph type="dt" idx="19"/>
-          </p:nvPr>
-        </p:nvSpPr>
-        <p:spPr>
-          <a:xfrm>
-            <a:off x="457200" y="6356520"/>
-            <a:ext cx="2133000" cy="364320"/>
-          </a:xfrm>
-          <a:prstGeom prst="rect">
-            <a:avLst/>
-          </a:prstGeom>
-          <a:noFill/>
-          <a:ln w="0">
-            <a:noFill/>
-          </a:ln>
-        </p:spPr>
-        <p:txBody>
-          <a:bodyPr lIns="91440" tIns="45720" rIns="91440" bIns="45720" anchor="ctr">
-            <a:noAutofit/>
-          </a:bodyPr>
-          <a:lstStyle>
-            <a:lvl1pPr indent="0" algn="l" defTabSz="457200">
-              <a:lnSpc>
-                <a:spcPct val="100000"/>
-              </a:lnSpc>
-              <a:buNone/>
-              <a:tabLst>
-                <a:tab pos="0" algn="l"/>
-              </a:tabLst>
-              <a:defRPr lang="en-US" sz="1200" b="0" u="none" strike="noStrike">
-                <a:solidFill>
-                  <a:schemeClr val="dk1">
-                    <a:tint val="75000"/>
-                  </a:schemeClr>
-                </a:solidFill>
-                <a:effectLst/>
-                <a:uFillTx/>
-                <a:latin typeface="Calibri"/>
-              </a:defRPr>
-            </a:lvl1pPr>
-          </a:lstStyle>
-          <a:p>
-            <a:pPr indent="0" algn="l" defTabSz="457200">
-              <a:lnSpc>
-                <a:spcPct val="100000"/>
-              </a:lnSpc>
-              <a:buNone/>
-              <a:tabLst>
-                <a:tab pos="0" algn="l"/>
-              </a:tabLst>
-            </a:pPr>
-            <a:r>
-              <a:rPr lang="en-US" sz="1200" b="0" u="none" strike="noStrike">
-                <a:solidFill>
-                  <a:schemeClr val="dk1">
-                    <a:tint val="75000"/>
-                  </a:schemeClr>
-                </a:solidFill>
-                <a:effectLst/>
-                <a:uFillTx/>
-                <a:latin typeface="Calibri"/>
-              </a:rPr>
-              <a:t>&lt;date/time&gt;</a:t>
-            </a:r>
-            <a:endParaRPr lang="en-US" sz="1200" b="0" u="none" strike="noStrike">
-              <a:solidFill>
-                <a:srgbClr val="000000"/>
-              </a:solidFill>
-              <a:effectLst/>
-              <a:uFillTx/>
-              <a:latin typeface="Times New Roman"/>
-            </a:endParaRPr>
-          </a:p>
-        </p:txBody>
-      </p:sp>
-      <p:sp>
-        <p:nvSpPr>
-          <p:cNvPr id="36" name="PlaceHolder 4"/>
-          <p:cNvSpPr>
-            <a:spLocks noGrp="1"/>
-          </p:cNvSpPr>
-          <p:nvPr>
-            <p:ph type="ftr" idx="20"/>
-          </p:nvPr>
-        </p:nvSpPr>
-        <p:spPr>
-          <a:xfrm>
-            <a:off x="3124080" y="6356520"/>
-            <a:ext cx="2894760" cy="364320"/>
-          </a:xfrm>
-          <a:prstGeom prst="rect">
-            <a:avLst/>
-          </a:prstGeom>
-          <a:noFill/>
-          <a:ln w="0">
-            <a:noFill/>
-          </a:ln>
-        </p:spPr>
-        <p:txBody>
-          <a:bodyPr lIns="91440" tIns="45720" rIns="91440" bIns="45720" anchor="ctr">
-            <a:noAutofit/>
-          </a:bodyPr>
-          <a:lstStyle>
-            <a:lvl1pPr indent="0" algn="ctr">
-              <a:lnSpc>
-                <a:spcPct val="100000"/>
-              </a:lnSpc>
-              <a:buNone/>
-              <a:tabLst>
-                <a:tab pos="0" algn="l"/>
-              </a:tabLst>
-              <a:defRPr lang="en-US" sz="1400" b="0" u="none" strike="noStrike">
-                <a:solidFill>
-                  <a:srgbClr val="000000"/>
-                </a:solidFill>
-                <a:effectLst/>
-                <a:uFillTx/>
-                <a:latin typeface="Times New Roman"/>
-              </a:defRPr>
-            </a:lvl1pPr>
-          </a:lstStyle>
-          <a:p>
-            <a:pPr indent="0" algn="ctr">
-              <a:lnSpc>
-                <a:spcPct val="100000"/>
-              </a:lnSpc>
-              <a:buNone/>
-              <a:tabLst>
-                <a:tab pos="0" algn="l"/>
-              </a:tabLst>
-            </a:pPr>
-            <a:r>
-              <a:rPr lang="en-US" sz="1400" b="0" u="none" strike="noStrike">
-                <a:solidFill>
-                  <a:srgbClr val="000000"/>
-                </a:solidFill>
-                <a:effectLst/>
-                <a:uFillTx/>
-                <a:latin typeface="Times New Roman"/>
-              </a:rPr>
-              <a:t>&lt;footer&gt;</a:t>
-            </a:r>
-            <a:endParaRPr lang="en-US" sz="1400" b="0" u="none" strike="noStrike">
-              <a:solidFill>
-                <a:srgbClr val="000000"/>
-              </a:solidFill>
-              <a:effectLst/>
-              <a:uFillTx/>
-              <a:latin typeface="Times New Roman"/>
-            </a:endParaRPr>
-          </a:p>
-        </p:txBody>
-      </p:sp>
-      <p:sp>
-        <p:nvSpPr>
-          <p:cNvPr id="37" name="PlaceHolder 5"/>
-          <p:cNvSpPr>
-            <a:spLocks noGrp="1"/>
-          </p:cNvSpPr>
-          <p:nvPr>
-            <p:ph type="sldNum" idx="21"/>
-          </p:nvPr>
-        </p:nvSpPr>
-        <p:spPr>
-          <a:xfrm>
-            <a:off x="6553080" y="6356520"/>
-            <a:ext cx="2133000" cy="364320"/>
-          </a:xfrm>
-          <a:prstGeom prst="rect">
-            <a:avLst/>
-          </a:prstGeom>
-          <a:noFill/>
-          <a:ln w="0">
-            <a:noFill/>
-          </a:ln>
-        </p:spPr>
-        <p:txBody>
-          <a:bodyPr lIns="91440" tIns="45720" rIns="91440" bIns="45720" anchor="ctr">
-            <a:noAutofit/>
-          </a:bodyPr>
-          <a:lstStyle>
-            <a:lvl1pPr indent="0" algn="r" defTabSz="457200">
-              <a:lnSpc>
-                <a:spcPct val="100000"/>
-              </a:lnSpc>
-              <a:buNone/>
-              <a:tabLst>
-                <a:tab pos="0" algn="l"/>
-              </a:tabLst>
-              <a:defRPr lang="en-US" sz="1200" b="0" u="none" strike="noStrike">
-                <a:solidFill>
-                  <a:schemeClr val="dk1">
-                    <a:tint val="75000"/>
-                  </a:schemeClr>
-                </a:solidFill>
-                <a:effectLst/>
-                <a:uFillTx/>
-                <a:latin typeface="Calibri"/>
-              </a:defRPr>
-            </a:lvl1pPr>
-          </a:lstStyle>
-          <a:p>
-            <a:pPr indent="0" algn="r" defTabSz="457200">
-              <a:lnSpc>
-                <a:spcPct val="100000"/>
-              </a:lnSpc>
-              <a:buNone/>
-              <a:tabLst>
-                <a:tab pos="0" algn="l"/>
-              </a:tabLst>
-            </a:pPr>
-            <a:fld id="{C554D95B-ED82-4F0B-A789-35E5873C4FC0}" type="slidenum">
-              <a:rPr lang="en-US" sz="1200" b="0" u="none" strike="noStrike">
-                <a:solidFill>
-                  <a:schemeClr val="dk1">
-                    <a:tint val="75000"/>
-                  </a:schemeClr>
-                </a:solidFill>
-                <a:effectLst/>
-                <a:uFillTx/>
-                <a:latin typeface="Calibri"/>
-              </a:rPr>
-              <a:t>&lt;number&gt;</a:t>
-            </a:fld>
-            <a:endParaRPr lang="en-US" sz="1200" b="0" u="none" strike="noStrike">
-              <a:solidFill>
-                <a:srgbClr val="000000"/>
-              </a:solidFill>
-              <a:effectLst/>
-              <a:uFillTx/>
-              <a:latin typeface="Times New Roman"/>
-            </a:endParaRPr>
-          </a:p>
-        </p:txBody>
-      </p:sp>
-    </p:spTree>
-  </p:cSld>
-</p:sldLayout>
-</file>
-
-<file path=ppt/slideLayouts/slideLayout8.xml><?xml version="1.0" encoding="utf-8"?>
-<p:sldLayout xmlns:a="http://schemas.openxmlformats.org/drawingml/2006/main" xmlns:p="http://schemas.openxmlformats.org/presentationml/2006/main" xmlns:r="http://schemas.openxmlformats.org/officeDocument/2006/relationships" xmlns:p14="http://schemas.microsoft.com/office/powerpoint/2010/main" xmlns:p15="http://schemas.microsoft.com/office/powerpoint/2012/main" xmlns:mc="http://schemas.openxmlformats.org/markup-compatibility/2006" type="blank" preserve="1">
-  <p:cSld name="Section Header">
-    <p:bg>
-      <p:bgPr>
-        <a:solidFill>
-          <a:srgbClr val="FFFFFF"/>
-        </a:solidFill>
-      </p:bgPr>
-    </p:bg>
-    <p:spTree>
-      <p:nvGrpSpPr>
-        <p:cNvPr id="1" name=""/>
-        <p:cNvGrpSpPr/>
-        <p:nvPr/>
-      </p:nvGrpSpPr>
-      <p:grpSpPr>
-        <a:xfrm>
-          <a:off x="0" y="0"/>
-          <a:ext cx="0" cy="0"/>
-          <a:chOff x="0" y="0"/>
-          <a:chExt cx="0" cy="0"/>
-        </a:xfrm>
-      </p:grpSpPr>
-      <p:sp>
-        <p:nvSpPr>
-          <p:cNvPr id="38" name="PlaceHolder 1"/>
-          <p:cNvSpPr>
-            <a:spLocks noGrp="1"/>
-          </p:cNvSpPr>
-          <p:nvPr>
-            <p:ph type="title"/>
-          </p:nvPr>
-        </p:nvSpPr>
-        <p:spPr>
-          <a:xfrm>
-            <a:off x="722160" y="4406760"/>
-            <a:ext cx="7771680" cy="1361520"/>
-          </a:xfrm>
-          <a:prstGeom prst="rect">
-            <a:avLst/>
-          </a:prstGeom>
-          <a:noFill/>
-          <a:ln w="0">
-            <a:noFill/>
-          </a:ln>
-        </p:spPr>
-        <p:txBody>
-          <a:bodyPr lIns="91440" tIns="45720" rIns="91440" bIns="45720" anchor="t">
-            <a:noAutofit/>
-          </a:bodyPr>
-          <a:lstStyle>
-            <a:lvl1pPr indent="0" algn="l" defTabSz="457200">
-              <a:lnSpc>
-                <a:spcPct val="100000"/>
-              </a:lnSpc>
-              <a:buNone/>
-              <a:tabLst>
-                <a:tab pos="0" algn="l"/>
-              </a:tabLst>
-              <a:defRPr lang="en-US" sz="4000" b="1" u="none" strike="noStrike" cap="all">
-                <a:solidFill>
-                  <a:schemeClr val="dk1"/>
-                </a:solidFill>
-                <a:effectLst/>
-                <a:uFillTx/>
-                <a:latin typeface="Calibri"/>
-              </a:defRPr>
-            </a:lvl1pPr>
-          </a:lstStyle>
-          <a:p>
-            <a:pPr indent="0" algn="l" defTabSz="457200">
-              <a:lnSpc>
-                <a:spcPct val="100000"/>
-              </a:lnSpc>
-              <a:buNone/>
-              <a:tabLst>
-                <a:tab pos="0" algn="l"/>
-              </a:tabLst>
-            </a:pPr>
-            <a:r>
-              <a:rPr lang="en-US" sz="4000" b="1" u="none" strike="noStrike" cap="all">
-                <a:solidFill>
-                  <a:schemeClr val="dk1"/>
-                </a:solidFill>
-                <a:effectLst/>
-                <a:uFillTx/>
-                <a:latin typeface="Calibri"/>
-              </a:rPr>
-              <a:t>Click to edit Master title style</a:t>
-            </a:r>
-            <a:endParaRPr lang="en-US" sz="4000" b="1" u="none" strike="noStrike" cap="all">
-              <a:solidFill>
-                <a:schemeClr val="dk1"/>
-              </a:solidFill>
-              <a:effectLst/>
-              <a:uFillTx/>
-              <a:latin typeface="Calibri"/>
-            </a:endParaRPr>
-          </a:p>
-        </p:txBody>
-      </p:sp>
-      <p:sp>
-        <p:nvSpPr>
-          <p:cNvPr id="39" name="PlaceHolder 2"/>
-          <p:cNvSpPr>
-            <a:spLocks noGrp="1"/>
-          </p:cNvSpPr>
-          <p:nvPr>
-            <p:ph type="body"/>
-          </p:nvPr>
-        </p:nvSpPr>
-        <p:spPr>
-          <a:xfrm>
-            <a:off x="722160" y="2906640"/>
-            <a:ext cx="7771680" cy="1499400"/>
-          </a:xfrm>
-          <a:prstGeom prst="rect">
-            <a:avLst/>
-          </a:prstGeom>
-          <a:noFill/>
-          <a:ln w="0">
-            <a:noFill/>
-          </a:ln>
-        </p:spPr>
-        <p:txBody>
-          <a:bodyPr lIns="91440" tIns="45720" rIns="91440" bIns="45720" anchor="b">
-            <a:noAutofit/>
-          </a:bodyPr>
-          <a:lstStyle>
-            <a:lvl1pPr indent="0" algn="l" defTabSz="457200">
-              <a:lnSpc>
-                <a:spcPct val="100000"/>
-              </a:lnSpc>
-              <a:spcBef>
-                <a:spcPts val="400"/>
-              </a:spcBef>
-              <a:buNone/>
-              <a:tabLst>
-                <a:tab pos="0" algn="l"/>
-              </a:tabLst>
-              <a:defRPr lang="en-US" sz="2000" b="0" u="none" strike="noStrike">
-                <a:solidFill>
-                  <a:schemeClr val="dk1">
-                    <a:tint val="75000"/>
-                  </a:schemeClr>
-                </a:solidFill>
-                <a:effectLst/>
-                <a:uFillTx/>
-                <a:latin typeface="Calibri"/>
-              </a:defRPr>
-            </a:lvl1pPr>
-          </a:lstStyle>
-          <a:p>
-            <a:pPr indent="0" algn="l" defTabSz="457200">
-              <a:lnSpc>
-                <a:spcPct val="100000"/>
-              </a:lnSpc>
-              <a:spcBef>
-                <a:spcPts val="400"/>
-              </a:spcBef>
-              <a:buNone/>
-              <a:tabLst>
-                <a:tab pos="0" algn="l"/>
-              </a:tabLst>
-            </a:pPr>
-            <a:r>
-              <a:rPr lang="en-US" sz="2000" b="0" u="none" strike="noStrike">
-                <a:solidFill>
-                  <a:schemeClr val="dk1">
-                    <a:tint val="75000"/>
-                  </a:schemeClr>
-                </a:solidFill>
-                <a:effectLst/>
-                <a:uFillTx/>
-                <a:latin typeface="Calibri"/>
-              </a:rPr>
-              <a:t>Click to edit Master text styles</a:t>
-            </a:r>
-            <a:endParaRPr lang="en-US" sz="2000" b="0" u="none" strike="noStrike">
-              <a:solidFill>
-                <a:schemeClr val="dk1">
-                  <a:tint val="75000"/>
-                </a:schemeClr>
-              </a:solidFill>
-              <a:effectLst/>
-              <a:uFillTx/>
-              <a:latin typeface="Calibri"/>
-            </a:endParaRPr>
-          </a:p>
-        </p:txBody>
-      </p:sp>
-      <p:sp>
-        <p:nvSpPr>
-          <p:cNvPr id="40" name="PlaceHolder 3"/>
-          <p:cNvSpPr>
-            <a:spLocks noGrp="1"/>
-          </p:cNvSpPr>
-          <p:nvPr>
-            <p:ph type="dt" idx="22"/>
-          </p:nvPr>
-        </p:nvSpPr>
-        <p:spPr>
-          <a:xfrm>
-            <a:off x="457200" y="6356520"/>
-            <a:ext cx="2133000" cy="364320"/>
-          </a:xfrm>
-          <a:prstGeom prst="rect">
-            <a:avLst/>
-          </a:prstGeom>
-          <a:noFill/>
-          <a:ln w="0">
-            <a:noFill/>
-          </a:ln>
-        </p:spPr>
-        <p:txBody>
-          <a:bodyPr lIns="91440" tIns="45720" rIns="91440" bIns="45720" anchor="ctr">
-            <a:noAutofit/>
-          </a:bodyPr>
-          <a:lstStyle>
-            <a:lvl1pPr indent="0" algn="l" defTabSz="457200">
-              <a:lnSpc>
-                <a:spcPct val="100000"/>
-              </a:lnSpc>
-              <a:buNone/>
-              <a:tabLst>
-                <a:tab pos="0" algn="l"/>
-              </a:tabLst>
-              <a:defRPr lang="en-US" sz="1200" b="0" u="none" strike="noStrike">
-                <a:solidFill>
-                  <a:schemeClr val="dk1">
-                    <a:tint val="75000"/>
-                  </a:schemeClr>
-                </a:solidFill>
-                <a:effectLst/>
-                <a:uFillTx/>
-                <a:latin typeface="Calibri"/>
-              </a:defRPr>
-            </a:lvl1pPr>
-          </a:lstStyle>
-          <a:p>
-            <a:pPr indent="0" algn="l" defTabSz="457200">
-              <a:lnSpc>
-                <a:spcPct val="100000"/>
-              </a:lnSpc>
-              <a:buNone/>
-              <a:tabLst>
-                <a:tab pos="0" algn="l"/>
-              </a:tabLst>
-            </a:pPr>
-            <a:r>
-              <a:rPr lang="en-US" sz="1200" b="0" u="none" strike="noStrike">
-                <a:solidFill>
-                  <a:schemeClr val="dk1">
-                    <a:tint val="75000"/>
-                  </a:schemeClr>
-                </a:solidFill>
-                <a:effectLst/>
-                <a:uFillTx/>
-                <a:latin typeface="Calibri"/>
-              </a:rPr>
-              <a:t>&lt;date/time&gt;</a:t>
-            </a:r>
-            <a:endParaRPr lang="en-US" sz="1200" b="0" u="none" strike="noStrike">
-              <a:solidFill>
-                <a:srgbClr val="000000"/>
-              </a:solidFill>
-              <a:effectLst/>
-              <a:uFillTx/>
-              <a:latin typeface="Times New Roman"/>
-            </a:endParaRPr>
-          </a:p>
-        </p:txBody>
-      </p:sp>
-      <p:sp>
-        <p:nvSpPr>
-          <p:cNvPr id="41" name="PlaceHolder 4"/>
-          <p:cNvSpPr>
-            <a:spLocks noGrp="1"/>
-          </p:cNvSpPr>
-          <p:nvPr>
-            <p:ph type="ftr" idx="23"/>
-          </p:nvPr>
-        </p:nvSpPr>
-        <p:spPr>
-          <a:xfrm>
-            <a:off x="3124080" y="6356520"/>
-            <a:ext cx="2894760" cy="364320"/>
-          </a:xfrm>
-          <a:prstGeom prst="rect">
-            <a:avLst/>
-          </a:prstGeom>
-          <a:noFill/>
-          <a:ln w="0">
-            <a:noFill/>
-          </a:ln>
-        </p:spPr>
-        <p:txBody>
-          <a:bodyPr lIns="91440" tIns="45720" rIns="91440" bIns="45720" anchor="ctr">
-            <a:noAutofit/>
-          </a:bodyPr>
-          <a:lstStyle>
-            <a:lvl1pPr indent="0" algn="ctr">
-              <a:lnSpc>
-                <a:spcPct val="100000"/>
-              </a:lnSpc>
-              <a:buNone/>
-              <a:tabLst>
-                <a:tab pos="0" algn="l"/>
-              </a:tabLst>
-              <a:defRPr lang="en-US" sz="1400" b="0" u="none" strike="noStrike">
-                <a:solidFill>
-                  <a:srgbClr val="000000"/>
-                </a:solidFill>
-                <a:effectLst/>
-                <a:uFillTx/>
-                <a:latin typeface="Times New Roman"/>
-              </a:defRPr>
-            </a:lvl1pPr>
-          </a:lstStyle>
-          <a:p>
-            <a:pPr indent="0" algn="ctr">
-              <a:lnSpc>
-                <a:spcPct val="100000"/>
-              </a:lnSpc>
-              <a:buNone/>
-              <a:tabLst>
-                <a:tab pos="0" algn="l"/>
-              </a:tabLst>
-            </a:pPr>
-            <a:r>
-              <a:rPr lang="en-US" sz="1400" b="0" u="none" strike="noStrike">
-                <a:solidFill>
-                  <a:srgbClr val="000000"/>
-                </a:solidFill>
-                <a:effectLst/>
-                <a:uFillTx/>
-                <a:latin typeface="Times New Roman"/>
-              </a:rPr>
-              <a:t>&lt;footer&gt;</a:t>
-            </a:r>
-            <a:endParaRPr lang="en-US" sz="1400" b="0" u="none" strike="noStrike">
-              <a:solidFill>
-                <a:srgbClr val="000000"/>
-              </a:solidFill>
-              <a:effectLst/>
-              <a:uFillTx/>
-              <a:latin typeface="Times New Roman"/>
-            </a:endParaRPr>
-          </a:p>
-        </p:txBody>
-      </p:sp>
-      <p:sp>
-        <p:nvSpPr>
-          <p:cNvPr id="42" name="PlaceHolder 5"/>
-          <p:cNvSpPr>
-            <a:spLocks noGrp="1"/>
-          </p:cNvSpPr>
-          <p:nvPr>
-            <p:ph type="sldNum" idx="24"/>
-          </p:nvPr>
-        </p:nvSpPr>
-        <p:spPr>
-          <a:xfrm>
-            <a:off x="6553080" y="6356520"/>
-            <a:ext cx="2133000" cy="364320"/>
-          </a:xfrm>
-          <a:prstGeom prst="rect">
-            <a:avLst/>
-          </a:prstGeom>
-          <a:noFill/>
-          <a:ln w="0">
-            <a:noFill/>
-          </a:ln>
-        </p:spPr>
-        <p:txBody>
-          <a:bodyPr lIns="91440" tIns="45720" rIns="91440" bIns="45720" anchor="ctr">
-            <a:noAutofit/>
-          </a:bodyPr>
-          <a:lstStyle>
-            <a:lvl1pPr indent="0" algn="r" defTabSz="457200">
-              <a:lnSpc>
-                <a:spcPct val="100000"/>
-              </a:lnSpc>
-              <a:buNone/>
-              <a:tabLst>
-                <a:tab pos="0" algn="l"/>
-              </a:tabLst>
-              <a:defRPr lang="en-US" sz="1200" b="0" u="none" strike="noStrike">
-                <a:solidFill>
-                  <a:schemeClr val="dk1">
-                    <a:tint val="75000"/>
-                  </a:schemeClr>
-                </a:solidFill>
-                <a:effectLst/>
-                <a:uFillTx/>
-                <a:latin typeface="Calibri"/>
-              </a:defRPr>
-            </a:lvl1pPr>
-          </a:lstStyle>
-          <a:p>
-            <a:pPr indent="0" algn="r" defTabSz="457200">
-              <a:lnSpc>
-                <a:spcPct val="100000"/>
-              </a:lnSpc>
-              <a:buNone/>
-              <a:tabLst>
-                <a:tab pos="0" algn="l"/>
-              </a:tabLst>
-            </a:pPr>
-            <a:fld id="{3B72471C-7D1A-4E68-A3F3-BE327EB7A48E}" type="slidenum">
-              <a:rPr lang="en-US" sz="1200" b="0" u="none" strike="noStrike">
-                <a:solidFill>
-                  <a:schemeClr val="dk1">
-                    <a:tint val="75000"/>
-                  </a:schemeClr>
-                </a:solidFill>
-                <a:effectLst/>
-                <a:uFillTx/>
-                <a:latin typeface="Calibri"/>
-              </a:rPr>
-              <a:t>&lt;number&gt;</a:t>
-            </a:fld>
-            <a:endParaRPr lang="en-US" sz="1200" b="0" u="none" strike="noStrike">
-              <a:solidFill>
-                <a:srgbClr val="000000"/>
-              </a:solidFill>
-              <a:effectLst/>
-              <a:uFillTx/>
-              <a:latin typeface="Times New Roman"/>
-            </a:endParaRPr>
-          </a:p>
-        </p:txBody>
-      </p:sp>
-    </p:spTree>
-  </p:cSld>
-</p:sldLayout>
-</file>
-
-<file path=ppt/slideLayouts/slideLayout9.xml><?xml version="1.0" encoding="utf-8"?>
-<p:sldLayout xmlns:a="http://schemas.openxmlformats.org/drawingml/2006/main" xmlns:p="http://schemas.openxmlformats.org/presentationml/2006/main" xmlns:r="http://schemas.openxmlformats.org/officeDocument/2006/relationships" xmlns:p14="http://schemas.microsoft.com/office/powerpoint/2010/main" xmlns:p15="http://schemas.microsoft.com/office/powerpoint/2012/main" xmlns:mc="http://schemas.openxmlformats.org/markup-compatibility/2006" type="twoObj" preserve="1">
-  <p:cSld name="Two Content">
-    <p:bg>
-      <p:bgPr>
-        <a:solidFill>
-          <a:srgbClr val="FFFFFF"/>
-        </a:solidFill>
-      </p:bgPr>
-    </p:bg>
-    <p:spTree>
-      <p:nvGrpSpPr>
-        <p:cNvPr id="1" name=""/>
-        <p:cNvGrpSpPr/>
-        <p:nvPr/>
-      </p:nvGrpSpPr>
-      <p:grpSpPr>
-        <a:xfrm>
-          <a:off x="0" y="0"/>
-          <a:ext cx="0" cy="0"/>
-          <a:chOff x="0" y="0"/>
-          <a:chExt cx="0" cy="0"/>
-        </a:xfrm>
-      </p:grpSpPr>
-      <p:sp>
-        <p:nvSpPr>
-          <p:cNvPr id="43" name="PlaceHolder 1"/>
-          <p:cNvSpPr>
-            <a:spLocks noGrp="1"/>
-          </p:cNvSpPr>
-          <p:nvPr>
-            <p:ph type="title"/>
-          </p:nvPr>
-        </p:nvSpPr>
-        <p:spPr>
-          <a:xfrm>
-            <a:off x="457200" y="274680"/>
-            <a:ext cx="8228880" cy="1142280"/>
-          </a:xfrm>
-          <a:prstGeom prst="rect">
-            <a:avLst/>
-          </a:prstGeom>
-          <a:noFill/>
-          <a:ln w="0">
-            <a:noFill/>
-          </a:ln>
-        </p:spPr>
-        <p:txBody>
-          <a:bodyPr lIns="91440" tIns="45720" rIns="91440" bIns="45720" anchor="ctr">
-            <a:noAutofit/>
-          </a:bodyPr>
-          <a:lstStyle>
-            <a:lvl1pPr indent="0" algn="ctr" defTabSz="457200">
-              <a:lnSpc>
-                <a:spcPct val="100000"/>
-              </a:lnSpc>
-              <a:buNone/>
-              <a:tabLst>
-                <a:tab pos="0" algn="l"/>
-              </a:tabLst>
-              <a:defRPr lang="en-US" sz="4400" b="0" u="none" strike="noStrike">
-                <a:solidFill>
-                  <a:schemeClr val="dk1"/>
-                </a:solidFill>
-                <a:effectLst/>
-                <a:uFillTx/>
-                <a:latin typeface="Calibri"/>
-              </a:defRPr>
-            </a:lvl1pPr>
-          </a:lstStyle>
-          <a:p>
-            <a:pPr indent="0" algn="ctr" defTabSz="457200">
-              <a:lnSpc>
-                <a:spcPct val="100000"/>
-              </a:lnSpc>
-              <a:buNone/>
-              <a:tabLst>
-                <a:tab pos="0" algn="l"/>
-              </a:tabLst>
-            </a:pPr>
-            <a:r>
-              <a:rPr lang="en-US" sz="4400" b="0" u="none" strike="noStrike">
-                <a:solidFill>
-                  <a:schemeClr val="dk1"/>
-                </a:solidFill>
-                <a:effectLst/>
-                <a:uFillTx/>
-                <a:latin typeface="Calibri"/>
-              </a:rPr>
-              <a:t>Click to edit Master title style</a:t>
-            </a:r>
-            <a:endParaRPr lang="en-US" sz="4400" b="0" u="none" strike="noStrike">
-              <a:solidFill>
-                <a:schemeClr val="dk1"/>
-              </a:solidFill>
-              <a:effectLst/>
-              <a:uFillTx/>
-              <a:latin typeface="Calibri"/>
-            </a:endParaRPr>
-          </a:p>
-        </p:txBody>
-      </p:sp>
-      <p:sp>
-        <p:nvSpPr>
-          <p:cNvPr id="44" name="PlaceHolder 2"/>
-          <p:cNvSpPr>
-            <a:spLocks noGrp="1"/>
-          </p:cNvSpPr>
-          <p:nvPr>
-            <p:ph type="body"/>
-          </p:nvPr>
-        </p:nvSpPr>
-        <p:spPr>
-          <a:xfrm>
-            <a:off x="457200" y="1600200"/>
-            <a:ext cx="4037760" cy="4525200"/>
-          </a:xfrm>
-          <a:prstGeom prst="rect">
-            <a:avLst/>
-          </a:prstGeom>
-          <a:noFill/>
-          <a:ln w="0">
-            <a:noFill/>
-          </a:ln>
-        </p:spPr>
-        <p:txBody>
-          <a:bodyPr lIns="91440" tIns="45720" rIns="91440" bIns="45720" anchor="t">
-            <a:noAutofit/>
-          </a:bodyPr>
-          <a:lstStyle>
-            <a:lvl1pPr algn="l" defTabSz="457200">
-              <a:lnSpc>
-                <a:spcPct val="100000"/>
-              </a:lnSpc>
-              <a:spcBef>
-                <a:spcPts val="561"/>
-              </a:spcBef>
-              <a:buClr>
-                <a:srgbClr val="000000"/>
-              </a:buClr>
-              <a:buFont typeface="Arial"/>
-              <a:buChar char="•"/>
-              <a:defRPr lang="en-US" sz="2800" b="0" u="none" strike="noStrike">
-                <a:solidFill>
-                  <a:schemeClr val="dk1"/>
-                </a:solidFill>
-                <a:effectLst/>
-                <a:uFillTx/>
-                <a:latin typeface="Calibri"/>
-              </a:defRPr>
-            </a:lvl1pPr>
-            <a:lvl2pPr lvl="1" algn="l" defTabSz="457200">
-              <a:lnSpc>
-                <a:spcPct val="100000"/>
-              </a:lnSpc>
-              <a:spcBef>
-                <a:spcPts val="479"/>
-              </a:spcBef>
-              <a:buClr>
-                <a:srgbClr val="000000"/>
-              </a:buClr>
-              <a:buFont typeface="Arial"/>
-              <a:buChar char="–"/>
-              <a:defRPr lang="en-US" sz="2400" b="0" u="none" strike="noStrike">
-                <a:solidFill>
-                  <a:schemeClr val="dk1"/>
-                </a:solidFill>
-                <a:effectLst/>
-                <a:uFillTx/>
-                <a:latin typeface="Calibri"/>
-              </a:defRPr>
-            </a:lvl2pPr>
-            <a:lvl3pPr lvl="2" algn="l" defTabSz="457200">
-              <a:lnSpc>
-                <a:spcPct val="100000"/>
-              </a:lnSpc>
-              <a:spcBef>
-                <a:spcPts val="400"/>
-              </a:spcBef>
-              <a:buClr>
-                <a:srgbClr val="000000"/>
-              </a:buClr>
-              <a:buFont typeface="Arial"/>
-              <a:buChar char="•"/>
-              <a:defRPr lang="en-US" sz="2000" b="0" u="none" strike="noStrike">
-                <a:solidFill>
-                  <a:schemeClr val="dk1"/>
-                </a:solidFill>
-                <a:effectLst/>
-                <a:uFillTx/>
-                <a:latin typeface="Calibri"/>
-              </a:defRPr>
-            </a:lvl3pPr>
-            <a:lvl4pPr lvl="3" algn="l" defTabSz="457200">
-              <a:lnSpc>
-                <a:spcPct val="100000"/>
-              </a:lnSpc>
-              <a:spcBef>
-                <a:spcPts val="360"/>
-              </a:spcBef>
-              <a:buClr>
-                <a:srgbClr val="000000"/>
-              </a:buClr>
-              <a:buFont typeface="Arial"/>
-              <a:buChar char="–"/>
-              <a:defRPr lang="en-US" sz="1800" b="0" u="none" strike="noStrike">
-                <a:solidFill>
-                  <a:schemeClr val="dk1"/>
-                </a:solidFill>
-                <a:effectLst/>
-                <a:uFillTx/>
-                <a:latin typeface="Calibri"/>
-              </a:defRPr>
-            </a:lvl4pPr>
-            <a:lvl5pPr lvl="4" algn="l" defTabSz="457200">
-              <a:lnSpc>
-                <a:spcPct val="100000"/>
-              </a:lnSpc>
-              <a:spcBef>
-                <a:spcPts val="360"/>
-              </a:spcBef>
-              <a:buClr>
-                <a:srgbClr val="000000"/>
-              </a:buClr>
-              <a:buFont typeface="Arial"/>
-              <a:buChar char="»"/>
-              <a:defRPr lang="en-US" sz="1800" b="0" u="none" strike="noStrike">
-                <a:solidFill>
-                  <a:schemeClr val="dk1"/>
-                </a:solidFill>
-                <a:effectLst/>
-                <a:uFillTx/>
-                <a:latin typeface="Calibri"/>
-              </a:defRPr>
-            </a:lvl5pPr>
-          </a:lstStyle>
-          <a:p>
-            <a:pPr marL="343080" indent="-343080" algn="l" defTabSz="457200">
-              <a:lnSpc>
-                <a:spcPct val="100000"/>
-              </a:lnSpc>
-              <a:spcBef>
-                <a:spcPts val="561"/>
-              </a:spcBef>
-              <a:buClr>
-                <a:srgbClr val="000000"/>
-              </a:buClr>
-              <a:buFont typeface="Arial"/>
-              <a:buChar char="•"/>
-            </a:pPr>
-            <a:r>
-              <a:rPr lang="en-US" sz="2800" b="0" u="none" strike="noStrike">
-                <a:solidFill>
-                  <a:schemeClr val="dk1"/>
-                </a:solidFill>
-                <a:effectLst/>
-                <a:uFillTx/>
-                <a:latin typeface="Calibri"/>
-              </a:rPr>
-              <a:t>Click to edit Master text styles</a:t>
-            </a:r>
-            <a:endParaRPr lang="en-US" sz="2800" b="0" u="none" strike="noStrike">
-              <a:solidFill>
-                <a:schemeClr val="dk1"/>
-              </a:solidFill>
-              <a:effectLst/>
-              <a:uFillTx/>
-              <a:latin typeface="Calibri"/>
-            </a:endParaRPr>
-          </a:p>
-          <a:p>
-            <a:pPr marL="743040" lvl="1" indent="-285840" algn="l" defTabSz="457200">
-              <a:lnSpc>
-                <a:spcPct val="100000"/>
-              </a:lnSpc>
-              <a:spcBef>
-                <a:spcPts val="479"/>
-              </a:spcBef>
-              <a:buClr>
-                <a:srgbClr val="000000"/>
-              </a:buClr>
-              <a:buFont typeface="Arial"/>
-              <a:buChar char="–"/>
-            </a:pPr>
-            <a:r>
-              <a:rPr lang="en-US" sz="2400" b="0" u="none" strike="noStrike">
-                <a:solidFill>
-                  <a:schemeClr val="dk1"/>
-                </a:solidFill>
-                <a:effectLst/>
-                <a:uFillTx/>
-                <a:latin typeface="Calibri"/>
-              </a:rPr>
-              <a:t>Second level</a:t>
-            </a:r>
-            <a:endParaRPr lang="en-US" sz="2400" b="0" u="none" strike="noStrike">
-              <a:solidFill>
-                <a:schemeClr val="dk1"/>
-              </a:solidFill>
-              <a:effectLst/>
-              <a:uFillTx/>
-              <a:latin typeface="Calibri"/>
-            </a:endParaRPr>
-          </a:p>
-          <a:p>
-            <a:pPr marL="1143000" lvl="2" indent="-228600" algn="l" defTabSz="457200">
-              <a:lnSpc>
-                <a:spcPct val="100000"/>
-              </a:lnSpc>
-              <a:spcBef>
-                <a:spcPts val="400"/>
-              </a:spcBef>
-              <a:buClr>
-                <a:srgbClr val="000000"/>
-              </a:buClr>
-              <a:buFont typeface="Arial"/>
-              <a:buChar char="•"/>
-            </a:pPr>
-            <a:r>
-              <a:rPr lang="en-US" sz="2000" b="0" u="none" strike="noStrike">
-                <a:solidFill>
-                  <a:schemeClr val="dk1"/>
-                </a:solidFill>
-                <a:effectLst/>
-                <a:uFillTx/>
-                <a:latin typeface="Calibri"/>
-              </a:rPr>
-              <a:t>Third level</a:t>
-            </a:r>
-            <a:endParaRPr lang="en-US" sz="2000" b="0" u="none" strike="noStrike">
-              <a:solidFill>
-                <a:schemeClr val="dk1"/>
-              </a:solidFill>
-              <a:effectLst/>
-              <a:uFillTx/>
-              <a:latin typeface="Calibri"/>
-            </a:endParaRPr>
-          </a:p>
-          <a:p>
-            <a:pPr marL="1600200" lvl="3" indent="-228600" algn="l" defTabSz="457200">
-              <a:lnSpc>
-                <a:spcPct val="100000"/>
-              </a:lnSpc>
-              <a:spcBef>
-                <a:spcPts val="360"/>
-              </a:spcBef>
-              <a:buClr>
-                <a:srgbClr val="000000"/>
-              </a:buClr>
-              <a:buFont typeface="Arial"/>
-              <a:buChar char="–"/>
-            </a:pPr>
-            <a:r>
-              <a:rPr lang="en-US" sz="1800" b="0" u="none" strike="noStrike">
-                <a:solidFill>
-                  <a:schemeClr val="dk1"/>
-                </a:solidFill>
-                <a:effectLst/>
-                <a:uFillTx/>
-                <a:latin typeface="Calibri"/>
-              </a:rPr>
-              <a:t>Fourth level</a:t>
-            </a:r>
-            <a:endParaRPr lang="en-US" sz="1800" b="0" u="none" strike="noStrike">
-              <a:solidFill>
-                <a:schemeClr val="dk1"/>
-              </a:solidFill>
-              <a:effectLst/>
-              <a:uFillTx/>
-              <a:latin typeface="Calibri"/>
-            </a:endParaRPr>
-          </a:p>
-          <a:p>
-            <a:pPr marL="2057400" lvl="4" indent="-228600" algn="l" defTabSz="457200">
-              <a:lnSpc>
-                <a:spcPct val="100000"/>
-              </a:lnSpc>
-              <a:spcBef>
-                <a:spcPts val="360"/>
-              </a:spcBef>
-              <a:buClr>
-                <a:srgbClr val="000000"/>
-              </a:buClr>
-              <a:buFont typeface="Arial"/>
-              <a:buChar char="»"/>
-            </a:pPr>
-            <a:r>
-              <a:rPr lang="en-US" sz="1800" b="0" u="none" strike="noStrike">
-                <a:solidFill>
-                  <a:schemeClr val="dk1"/>
-                </a:solidFill>
-                <a:effectLst/>
-                <a:uFillTx/>
-                <a:latin typeface="Calibri"/>
-              </a:rPr>
-              <a:t>Fifth level</a:t>
-            </a:r>
-            <a:endParaRPr lang="en-US" sz="1800" b="0" u="none" strike="noStrike">
-              <a:solidFill>
-                <a:schemeClr val="dk1"/>
-              </a:solidFill>
-              <a:effectLst/>
-              <a:uFillTx/>
-              <a:latin typeface="Calibri"/>
-            </a:endParaRPr>
-          </a:p>
-        </p:txBody>
-      </p:sp>
-      <p:sp>
-        <p:nvSpPr>
-          <p:cNvPr id="45" name="PlaceHolder 3"/>
-          <p:cNvSpPr>
-            <a:spLocks noGrp="1"/>
-          </p:cNvSpPr>
-          <p:nvPr>
-            <p:ph type="body"/>
-          </p:nvPr>
-        </p:nvSpPr>
-        <p:spPr>
-          <a:xfrm>
-            <a:off x="4648320" y="1600200"/>
-            <a:ext cx="4037760" cy="4525200"/>
-          </a:xfrm>
-          <a:prstGeom prst="rect">
-            <a:avLst/>
-          </a:prstGeom>
-          <a:noFill/>
-          <a:ln w="0">
-            <a:noFill/>
-          </a:ln>
-        </p:spPr>
-        <p:txBody>
-          <a:bodyPr lIns="91440" tIns="45720" rIns="91440" bIns="45720" anchor="t">
-            <a:noAutofit/>
-          </a:bodyPr>
-          <a:lstStyle>
-            <a:lvl1pPr algn="l" defTabSz="457200">
-              <a:lnSpc>
-                <a:spcPct val="100000"/>
-              </a:lnSpc>
-              <a:spcBef>
-                <a:spcPts val="561"/>
-              </a:spcBef>
-              <a:buClr>
-                <a:srgbClr val="000000"/>
-              </a:buClr>
-              <a:buFont typeface="Arial"/>
-              <a:buChar char="•"/>
-              <a:defRPr lang="en-US" sz="2800" b="0" u="none" strike="noStrike">
-                <a:solidFill>
-                  <a:schemeClr val="dk1"/>
-                </a:solidFill>
-                <a:effectLst/>
-                <a:uFillTx/>
-                <a:latin typeface="Calibri"/>
-              </a:defRPr>
-            </a:lvl1pPr>
-            <a:lvl2pPr lvl="1" algn="l" defTabSz="457200">
-              <a:lnSpc>
-                <a:spcPct val="100000"/>
-              </a:lnSpc>
-              <a:spcBef>
-                <a:spcPts val="479"/>
-              </a:spcBef>
-              <a:buClr>
-                <a:srgbClr val="000000"/>
-              </a:buClr>
-              <a:buFont typeface="Arial"/>
-              <a:buChar char="–"/>
-              <a:defRPr lang="en-US" sz="2400" b="0" u="none" strike="noStrike">
-                <a:solidFill>
-                  <a:schemeClr val="dk1"/>
-                </a:solidFill>
-                <a:effectLst/>
-                <a:uFillTx/>
-                <a:latin typeface="Calibri"/>
-              </a:defRPr>
-            </a:lvl2pPr>
-            <a:lvl3pPr lvl="2" algn="l" defTabSz="457200">
-              <a:lnSpc>
-                <a:spcPct val="100000"/>
-              </a:lnSpc>
-              <a:spcBef>
-                <a:spcPts val="400"/>
-              </a:spcBef>
-              <a:buClr>
-                <a:srgbClr val="000000"/>
-              </a:buClr>
-              <a:buFont typeface="Arial"/>
-              <a:buChar char="•"/>
-              <a:defRPr lang="en-US" sz="2000" b="0" u="none" strike="noStrike">
-                <a:solidFill>
-                  <a:schemeClr val="dk1"/>
-                </a:solidFill>
-                <a:effectLst/>
-                <a:uFillTx/>
-                <a:latin typeface="Calibri"/>
-              </a:defRPr>
-            </a:lvl3pPr>
-            <a:lvl4pPr lvl="3" algn="l" defTabSz="457200">
-              <a:lnSpc>
-                <a:spcPct val="100000"/>
-              </a:lnSpc>
-              <a:spcBef>
-                <a:spcPts val="360"/>
-              </a:spcBef>
-              <a:buClr>
-                <a:srgbClr val="000000"/>
-              </a:buClr>
-              <a:buFont typeface="Arial"/>
-              <a:buChar char="–"/>
-              <a:defRPr lang="en-US" sz="1800" b="0" u="none" strike="noStrike">
-                <a:solidFill>
-                  <a:schemeClr val="dk1"/>
-                </a:solidFill>
-                <a:effectLst/>
-                <a:uFillTx/>
-                <a:latin typeface="Calibri"/>
-              </a:defRPr>
-            </a:lvl4pPr>
-            <a:lvl5pPr lvl="4" algn="l" defTabSz="457200">
-              <a:lnSpc>
-                <a:spcPct val="100000"/>
-              </a:lnSpc>
-              <a:spcBef>
-                <a:spcPts val="360"/>
-              </a:spcBef>
-              <a:buClr>
-                <a:srgbClr val="000000"/>
-              </a:buClr>
-              <a:buFont typeface="Arial"/>
-              <a:buChar char="»"/>
-              <a:defRPr lang="en-US" sz="1800" b="0" u="none" strike="noStrike">
-                <a:solidFill>
-                  <a:schemeClr val="dk1"/>
-                </a:solidFill>
-                <a:effectLst/>
-                <a:uFillTx/>
-                <a:latin typeface="Calibri"/>
-              </a:defRPr>
-            </a:lvl5pPr>
-          </a:lstStyle>
-          <a:p>
-            <a:pPr marL="343080" indent="-343080" algn="l" defTabSz="457200">
-              <a:lnSpc>
-                <a:spcPct val="100000"/>
-              </a:lnSpc>
-              <a:spcBef>
-                <a:spcPts val="561"/>
-              </a:spcBef>
-              <a:buClr>
-                <a:srgbClr val="000000"/>
-              </a:buClr>
-              <a:buFont typeface="Arial"/>
-              <a:buChar char="•"/>
-            </a:pPr>
-            <a:r>
-              <a:rPr lang="en-US" sz="2800" b="0" u="none" strike="noStrike">
-                <a:solidFill>
-                  <a:schemeClr val="dk1"/>
-                </a:solidFill>
-                <a:effectLst/>
-                <a:uFillTx/>
-                <a:latin typeface="Calibri"/>
-              </a:rPr>
-              <a:t>Click to edit Master text styles</a:t>
-            </a:r>
-            <a:endParaRPr lang="en-US" sz="2800" b="0" u="none" strike="noStrike">
-              <a:solidFill>
-                <a:schemeClr val="dk1"/>
-              </a:solidFill>
-              <a:effectLst/>
-              <a:uFillTx/>
-              <a:latin typeface="Calibri"/>
-            </a:endParaRPr>
-          </a:p>
-          <a:p>
-            <a:pPr marL="743040" lvl="1" indent="-285840" algn="l" defTabSz="457200">
-              <a:lnSpc>
-                <a:spcPct val="100000"/>
-              </a:lnSpc>
-              <a:spcBef>
-                <a:spcPts val="479"/>
-              </a:spcBef>
-              <a:buClr>
-                <a:srgbClr val="000000"/>
-              </a:buClr>
-              <a:buFont typeface="Arial"/>
-              <a:buChar char="–"/>
-            </a:pPr>
-            <a:r>
-              <a:rPr lang="en-US" sz="2400" b="0" u="none" strike="noStrike">
-                <a:solidFill>
-                  <a:schemeClr val="dk1"/>
-                </a:solidFill>
-                <a:effectLst/>
-                <a:uFillTx/>
-                <a:latin typeface="Calibri"/>
-              </a:rPr>
-              <a:t>Second level</a:t>
-            </a:r>
-            <a:endParaRPr lang="en-US" sz="2400" b="0" u="none" strike="noStrike">
-              <a:solidFill>
-                <a:schemeClr val="dk1"/>
-              </a:solidFill>
-              <a:effectLst/>
-              <a:uFillTx/>
-              <a:latin typeface="Calibri"/>
-            </a:endParaRPr>
-          </a:p>
-          <a:p>
-            <a:pPr marL="1143000" lvl="2" indent="-228600" algn="l" defTabSz="457200">
-              <a:lnSpc>
-                <a:spcPct val="100000"/>
-              </a:lnSpc>
-              <a:spcBef>
-                <a:spcPts val="400"/>
-              </a:spcBef>
-              <a:buClr>
-                <a:srgbClr val="000000"/>
-              </a:buClr>
-              <a:buFont typeface="Arial"/>
-              <a:buChar char="•"/>
-            </a:pPr>
-            <a:r>
-              <a:rPr lang="en-US" sz="2000" b="0" u="none" strike="noStrike">
-                <a:solidFill>
-                  <a:schemeClr val="dk1"/>
-                </a:solidFill>
-                <a:effectLst/>
-                <a:uFillTx/>
-                <a:latin typeface="Calibri"/>
-              </a:rPr>
-              <a:t>Third level</a:t>
-            </a:r>
-            <a:endParaRPr lang="en-US" sz="2000" b="0" u="none" strike="noStrike">
-              <a:solidFill>
-                <a:schemeClr val="dk1"/>
-              </a:solidFill>
-              <a:effectLst/>
-              <a:uFillTx/>
-              <a:latin typeface="Calibri"/>
-            </a:endParaRPr>
-          </a:p>
-          <a:p>
-            <a:pPr marL="1600200" lvl="3" indent="-228600" algn="l" defTabSz="457200">
-              <a:lnSpc>
-                <a:spcPct val="100000"/>
-              </a:lnSpc>
-              <a:spcBef>
-                <a:spcPts val="360"/>
-              </a:spcBef>
-              <a:buClr>
-                <a:srgbClr val="000000"/>
-              </a:buClr>
-              <a:buFont typeface="Arial"/>
-              <a:buChar char="–"/>
-            </a:pPr>
-            <a:r>
-              <a:rPr lang="en-US" sz="1800" b="0" u="none" strike="noStrike">
-                <a:solidFill>
-                  <a:schemeClr val="dk1"/>
-                </a:solidFill>
-                <a:effectLst/>
-                <a:uFillTx/>
-                <a:latin typeface="Calibri"/>
-              </a:rPr>
-              <a:t>Fourth level</a:t>
-            </a:r>
-            <a:endParaRPr lang="en-US" sz="1800" b="0" u="none" strike="noStrike">
-              <a:solidFill>
-                <a:schemeClr val="dk1"/>
-              </a:solidFill>
-              <a:effectLst/>
-              <a:uFillTx/>
-              <a:latin typeface="Calibri"/>
-            </a:endParaRPr>
-          </a:p>
-          <a:p>
-            <a:pPr marL="2057400" lvl="4" indent="-228600" algn="l" defTabSz="457200">
-              <a:lnSpc>
-                <a:spcPct val="100000"/>
-              </a:lnSpc>
-              <a:spcBef>
-                <a:spcPts val="360"/>
-              </a:spcBef>
-              <a:buClr>
-                <a:srgbClr val="000000"/>
-              </a:buClr>
-              <a:buFont typeface="Arial"/>
-              <a:buChar char="»"/>
-            </a:pPr>
-            <a:r>
-              <a:rPr lang="en-US" sz="1800" b="0" u="none" strike="noStrike">
-                <a:solidFill>
-                  <a:schemeClr val="dk1"/>
-                </a:solidFill>
-                <a:effectLst/>
-                <a:uFillTx/>
-                <a:latin typeface="Calibri"/>
-              </a:rPr>
-              <a:t>Fifth level</a:t>
-            </a:r>
-            <a:endParaRPr lang="en-US" sz="1800" b="0" u="none" strike="noStrike">
-              <a:solidFill>
-                <a:schemeClr val="dk1"/>
-              </a:solidFill>
-              <a:effectLst/>
-              <a:uFillTx/>
-              <a:latin typeface="Calibri"/>
-            </a:endParaRPr>
-          </a:p>
-        </p:txBody>
-      </p:sp>
-      <p:sp>
-        <p:nvSpPr>
-          <p:cNvPr id="46" name="PlaceHolder 4"/>
-          <p:cNvSpPr>
-            <a:spLocks noGrp="1"/>
-          </p:cNvSpPr>
-          <p:nvPr>
-            <p:ph type="dt" idx="25"/>
-          </p:nvPr>
-        </p:nvSpPr>
-        <p:spPr>
-          <a:xfrm>
-            <a:off x="457200" y="6356520"/>
-            <a:ext cx="2133000" cy="364320"/>
-          </a:xfrm>
-          <a:prstGeom prst="rect">
-            <a:avLst/>
-          </a:prstGeom>
-          <a:noFill/>
-          <a:ln w="0">
-            <a:noFill/>
-          </a:ln>
-        </p:spPr>
-        <p:txBody>
-          <a:bodyPr lIns="91440" tIns="45720" rIns="91440" bIns="45720" anchor="ctr">
-            <a:noAutofit/>
-          </a:bodyPr>
-          <a:lstStyle>
-            <a:lvl1pPr indent="0" algn="l" defTabSz="457200">
-              <a:lnSpc>
-                <a:spcPct val="100000"/>
-              </a:lnSpc>
-              <a:buNone/>
-              <a:tabLst>
-                <a:tab pos="0" algn="l"/>
-              </a:tabLst>
-              <a:defRPr lang="en-US" sz="1200" b="0" u="none" strike="noStrike">
-                <a:solidFill>
-                  <a:schemeClr val="dk1">
-                    <a:tint val="75000"/>
-                  </a:schemeClr>
-                </a:solidFill>
-                <a:effectLst/>
-                <a:uFillTx/>
-                <a:latin typeface="Calibri"/>
-              </a:defRPr>
-            </a:lvl1pPr>
-          </a:lstStyle>
-          <a:p>
-            <a:pPr indent="0" algn="l" defTabSz="457200">
-              <a:lnSpc>
-                <a:spcPct val="100000"/>
-              </a:lnSpc>
-              <a:buNone/>
-              <a:tabLst>
-                <a:tab pos="0" algn="l"/>
-              </a:tabLst>
-            </a:pPr>
-            <a:r>
-              <a:rPr lang="en-US" sz="1200" b="0" u="none" strike="noStrike">
-                <a:solidFill>
-                  <a:schemeClr val="dk1">
-                    <a:tint val="75000"/>
-                  </a:schemeClr>
-                </a:solidFill>
-                <a:effectLst/>
-                <a:uFillTx/>
-                <a:latin typeface="Calibri"/>
-              </a:rPr>
-              <a:t>&lt;date/time&gt;</a:t>
-            </a:r>
-            <a:endParaRPr lang="en-US" sz="1200" b="0" u="none" strike="noStrike">
-              <a:solidFill>
-                <a:srgbClr val="000000"/>
-              </a:solidFill>
-              <a:effectLst/>
-              <a:uFillTx/>
-              <a:latin typeface="Times New Roman"/>
-            </a:endParaRPr>
-          </a:p>
-        </p:txBody>
-      </p:sp>
-      <p:sp>
-        <p:nvSpPr>
-          <p:cNvPr id="47" name="PlaceHolder 5"/>
-          <p:cNvSpPr>
-            <a:spLocks noGrp="1"/>
-          </p:cNvSpPr>
-          <p:nvPr>
-            <p:ph type="ftr" idx="26"/>
-          </p:nvPr>
-        </p:nvSpPr>
-        <p:spPr>
-          <a:xfrm>
-            <a:off x="3124080" y="6356520"/>
-            <a:ext cx="2894760" cy="364320"/>
-          </a:xfrm>
-          <a:prstGeom prst="rect">
-            <a:avLst/>
-          </a:prstGeom>
-          <a:noFill/>
-          <a:ln w="0">
-            <a:noFill/>
-          </a:ln>
-        </p:spPr>
-        <p:txBody>
-          <a:bodyPr lIns="91440" tIns="45720" rIns="91440" bIns="45720" anchor="ctr">
-            <a:noAutofit/>
-          </a:bodyPr>
-          <a:lstStyle>
-            <a:lvl1pPr indent="0" algn="ctr">
-              <a:lnSpc>
-                <a:spcPct val="100000"/>
-              </a:lnSpc>
-              <a:buNone/>
-              <a:tabLst>
-                <a:tab pos="0" algn="l"/>
-              </a:tabLst>
-              <a:defRPr lang="en-US" sz="1400" b="0" u="none" strike="noStrike">
-                <a:solidFill>
-                  <a:srgbClr val="000000"/>
-                </a:solidFill>
-                <a:effectLst/>
-                <a:uFillTx/>
-                <a:latin typeface="Times New Roman"/>
-              </a:defRPr>
-            </a:lvl1pPr>
-          </a:lstStyle>
-          <a:p>
-            <a:pPr indent="0" algn="ctr">
-              <a:lnSpc>
-                <a:spcPct val="100000"/>
-              </a:lnSpc>
-              <a:buNone/>
-              <a:tabLst>
-                <a:tab pos="0" algn="l"/>
-              </a:tabLst>
-            </a:pPr>
-            <a:r>
-              <a:rPr lang="en-US" sz="1400" b="0" u="none" strike="noStrike">
-                <a:solidFill>
-                  <a:srgbClr val="000000"/>
-                </a:solidFill>
-                <a:effectLst/>
-                <a:uFillTx/>
-                <a:latin typeface="Times New Roman"/>
-              </a:rPr>
-              <a:t>&lt;footer&gt;</a:t>
-            </a:r>
-            <a:endParaRPr lang="en-US" sz="1400" b="0" u="none" strike="noStrike">
-              <a:solidFill>
-                <a:srgbClr val="000000"/>
-              </a:solidFill>
-              <a:effectLst/>
-              <a:uFillTx/>
-              <a:latin typeface="Times New Roman"/>
-            </a:endParaRPr>
-          </a:p>
-        </p:txBody>
-      </p:sp>
-      <p:sp>
-        <p:nvSpPr>
-          <p:cNvPr id="48" name="PlaceHolder 6"/>
-          <p:cNvSpPr>
-            <a:spLocks noGrp="1"/>
-          </p:cNvSpPr>
-          <p:nvPr>
-            <p:ph type="sldNum" idx="27"/>
-          </p:nvPr>
-        </p:nvSpPr>
-        <p:spPr>
-          <a:xfrm>
-            <a:off x="6553080" y="6356520"/>
-            <a:ext cx="2133000" cy="364320"/>
-          </a:xfrm>
-          <a:prstGeom prst="rect">
-            <a:avLst/>
-          </a:prstGeom>
-          <a:noFill/>
-          <a:ln w="0">
-            <a:noFill/>
-          </a:ln>
-        </p:spPr>
-        <p:txBody>
-          <a:bodyPr lIns="91440" tIns="45720" rIns="91440" bIns="45720" anchor="ctr">
-            <a:noAutofit/>
-          </a:bodyPr>
-          <a:lstStyle>
-            <a:lvl1pPr indent="0" algn="r" defTabSz="457200">
-              <a:lnSpc>
-                <a:spcPct val="100000"/>
-              </a:lnSpc>
-              <a:buNone/>
-              <a:tabLst>
-                <a:tab pos="0" algn="l"/>
-              </a:tabLst>
-              <a:defRPr lang="en-US" sz="1200" b="0" u="none" strike="noStrike">
-                <a:solidFill>
-                  <a:schemeClr val="dk1">
-                    <a:tint val="75000"/>
-                  </a:schemeClr>
-                </a:solidFill>
-                <a:effectLst/>
-                <a:uFillTx/>
-                <a:latin typeface="Calibri"/>
-              </a:defRPr>
-            </a:lvl1pPr>
-          </a:lstStyle>
-          <a:p>
-            <a:pPr indent="0" algn="r" defTabSz="457200">
-              <a:lnSpc>
-                <a:spcPct val="100000"/>
-              </a:lnSpc>
-              <a:buNone/>
-              <a:tabLst>
-                <a:tab pos="0" algn="l"/>
-              </a:tabLst>
-            </a:pPr>
-            <a:fld id="{E3F11ADF-0BB5-40BD-A105-CACF1D05475E}" type="slidenum">
+            <a:fld id="{CFC355F3-1802-451C-B457-0D23DACD1611}" type="slidenum">
               <a:rPr lang="en-US" sz="1200" b="0" u="none" strike="noStrike">
                 <a:solidFill>
                   <a:schemeClr val="dk1">
@@ -7764,7 +7764,7 @@
         <p:spPr>
           <a:xfrm>
             <a:off x="914400" y="680760"/>
-            <a:ext cx="10027080" cy="3434040"/>
+            <a:ext cx="10026720" cy="3433680"/>
           </a:xfrm>
           <a:prstGeom prst="rect">
             <a:avLst/>
@@ -7821,7 +7821,7 @@
         <p:spPr>
           <a:xfrm>
             <a:off x="228960" y="3886200"/>
-            <a:ext cx="8457480" cy="2566080"/>
+            <a:ext cx="8457120" cy="1102680"/>
           </a:xfrm>
           <a:prstGeom prst="rect">
             <a:avLst/>
@@ -7859,73 +7859,6 @@
                 <a:uFillTx/>
                 <a:latin typeface="Arial"/>
               </a:rPr>
-              <a:t>OnDemand for RStudio:</a:t>
-            </a:r>
-            <a:endParaRPr lang="en-US" sz="3200" b="0" u="none" strike="noStrike">
-              <a:solidFill>
-                <a:srgbClr val="000000"/>
-              </a:solidFill>
-              <a:effectLst/>
-              <a:uFillTx/>
-              <a:latin typeface="Arial"/>
-            </a:endParaRPr>
-          </a:p>
-          <a:p>
-            <a:pPr>
-              <a:lnSpc>
-                <a:spcPct val="100000"/>
-              </a:lnSpc>
-            </a:pPr>
-            <a:r>
-              <a:rPr lang="en-US" sz="3200" b="0" u="none" strike="noStrike">
-                <a:solidFill>
-                  <a:srgbClr val="000000"/>
-                </a:solidFill>
-                <a:effectLst/>
-                <a:uFillTx/>
-                <a:latin typeface="Arial"/>
-              </a:rPr>
-              <a:t>https://cgbs.cgu.edu.tw/</a:t>
-            </a:r>
-            <a:endParaRPr lang="en-US" sz="3200" b="0" u="none" strike="noStrike">
-              <a:solidFill>
-                <a:srgbClr val="000000"/>
-              </a:solidFill>
-              <a:effectLst/>
-              <a:uFillTx/>
-              <a:latin typeface="Arial"/>
-            </a:endParaRPr>
-          </a:p>
-          <a:p>
-            <a:pPr>
-              <a:lnSpc>
-                <a:spcPct val="100000"/>
-              </a:lnSpc>
-            </a:pPr>
-            <a:endParaRPr lang="en-US" sz="3200" b="0" u="none" strike="noStrike">
-              <a:solidFill>
-                <a:srgbClr val="000000"/>
-              </a:solidFill>
-              <a:effectLst/>
-              <a:uFillTx/>
-              <a:latin typeface="Arial"/>
-            </a:endParaRPr>
-          </a:p>
-          <a:p>
-            <a:pPr>
-              <a:lnSpc>
-                <a:spcPct val="100000"/>
-              </a:lnSpc>
-            </a:pPr>
-            <a:r>
-              <a:rPr lang="en-US" sz="3200" b="0" u="none" strike="noStrike">
-                <a:solidFill>
-                  <a:srgbClr val="000000"/>
-                </a:solidFill>
-                <a:effectLst/>
-                <a:uFillTx/>
-                <a:latin typeface="Arial"/>
-              </a:rPr>
               <a:t>Course material for download at:</a:t>
             </a:r>
             <a:endParaRPr lang="en-US" sz="3200" b="0" u="none" strike="noStrike">
@@ -7974,7 +7907,7 @@
         <p:spPr>
           <a:xfrm>
             <a:off x="1143000" y="1600200"/>
-            <a:ext cx="2377440" cy="1461240"/>
+            <a:ext cx="2377080" cy="1461240"/>
           </a:xfrm>
           <a:prstGeom prst="rect">
             <a:avLst/>
@@ -8156,7 +8089,7 @@
         <p:spPr>
           <a:xfrm>
             <a:off x="961560" y="640080"/>
-            <a:ext cx="9557280" cy="499320"/>
+            <a:ext cx="9556920" cy="498960"/>
           </a:xfrm>
           <a:prstGeom prst="rect">
             <a:avLst/>
@@ -8217,7 +8150,7 @@
         <p:spPr>
           <a:xfrm>
             <a:off x="596160" y="1272600"/>
-            <a:ext cx="10999440" cy="4547520"/>
+            <a:ext cx="10999080" cy="4547160"/>
           </a:xfrm>
           <a:prstGeom prst="rect">
             <a:avLst/>
@@ -8237,7 +8170,7 @@
         <p:spPr>
           <a:xfrm>
             <a:off x="961560" y="5910840"/>
-            <a:ext cx="9557280" cy="399240"/>
+            <a:ext cx="9556920" cy="398880"/>
           </a:xfrm>
           <a:prstGeom prst="rect">
             <a:avLst/>
@@ -8324,7 +8257,7 @@
         <p:spPr>
           <a:xfrm>
             <a:off x="961560" y="640080"/>
-            <a:ext cx="9557280" cy="499320"/>
+            <a:ext cx="9556920" cy="498960"/>
           </a:xfrm>
           <a:prstGeom prst="rect">
             <a:avLst/>
@@ -8385,7 +8318,7 @@
         <p:spPr>
           <a:xfrm>
             <a:off x="596160" y="1272600"/>
-            <a:ext cx="10999440" cy="4547520"/>
+            <a:ext cx="10999080" cy="4547160"/>
           </a:xfrm>
           <a:prstGeom prst="rect">
             <a:avLst/>
@@ -8405,7 +8338,7 @@
         <p:spPr>
           <a:xfrm>
             <a:off x="961560" y="5910840"/>
-            <a:ext cx="9557280" cy="399240"/>
+            <a:ext cx="9556920" cy="398880"/>
           </a:xfrm>
           <a:prstGeom prst="rect">
             <a:avLst/>
@@ -8492,7 +8425,7 @@
         <p:spPr>
           <a:xfrm>
             <a:off x="961560" y="640080"/>
-            <a:ext cx="9557280" cy="499320"/>
+            <a:ext cx="9556920" cy="498960"/>
           </a:xfrm>
           <a:prstGeom prst="rect">
             <a:avLst/>
@@ -8549,7 +8482,7 @@
         <p:spPr>
           <a:xfrm>
             <a:off x="228600" y="1472760"/>
-            <a:ext cx="3482280" cy="3744360"/>
+            <a:ext cx="3481920" cy="3743640"/>
           </a:xfrm>
           <a:prstGeom prst="rect">
             <a:avLst/>
@@ -8840,7 +8773,7 @@
         <p:spPr>
           <a:xfrm>
             <a:off x="3711600" y="1472760"/>
-            <a:ext cx="3899160" cy="4111560"/>
+            <a:ext cx="3898800" cy="4111200"/>
           </a:xfrm>
           <a:prstGeom prst="rect">
             <a:avLst/>
@@ -9131,7 +9064,7 @@
         <p:spPr>
           <a:xfrm>
             <a:off x="7611480" y="1472760"/>
-            <a:ext cx="3899160" cy="4111560"/>
+            <a:ext cx="3898800" cy="4111200"/>
           </a:xfrm>
           <a:prstGeom prst="rect">
             <a:avLst/>
@@ -9452,7 +9385,7 @@
         <p:spPr>
           <a:xfrm>
             <a:off x="961560" y="1272600"/>
-            <a:ext cx="9557280" cy="4111560"/>
+            <a:ext cx="9556920" cy="4111200"/>
           </a:xfrm>
           <a:prstGeom prst="rect">
             <a:avLst/>
@@ -9662,7 +9595,7 @@
         <p:spPr>
           <a:xfrm>
             <a:off x="961560" y="1272600"/>
-            <a:ext cx="9557280" cy="4111560"/>
+            <a:ext cx="9556920" cy="4111200"/>
           </a:xfrm>
           <a:prstGeom prst="rect">
             <a:avLst/>
@@ -9954,7 +9887,7 @@
         <p:spPr>
           <a:xfrm>
             <a:off x="961560" y="1272600"/>
-            <a:ext cx="9557280" cy="3441960"/>
+            <a:ext cx="9556920" cy="3441240"/>
           </a:xfrm>
           <a:prstGeom prst="rect">
             <a:avLst/>
@@ -10164,7 +10097,7 @@
         <p:spPr>
           <a:xfrm>
             <a:off x="961560" y="1272600"/>
-            <a:ext cx="9557280" cy="3106800"/>
+            <a:ext cx="9556920" cy="3106080"/>
           </a:xfrm>
           <a:prstGeom prst="rect">
             <a:avLst/>
@@ -10374,7 +10307,7 @@
         <p:spPr>
           <a:xfrm>
             <a:off x="961560" y="1272600"/>
-            <a:ext cx="9557280" cy="4172400"/>
+            <a:ext cx="9556920" cy="4172400"/>
           </a:xfrm>
           <a:prstGeom prst="rect">
             <a:avLst/>
@@ -10625,7 +10558,7 @@
         <p:spPr>
           <a:xfrm>
             <a:off x="961560" y="1272600"/>
-            <a:ext cx="9557280" cy="2771640"/>
+            <a:ext cx="9556920" cy="2770920"/>
           </a:xfrm>
           <a:prstGeom prst="rect">
             <a:avLst/>
@@ -10809,7 +10742,7 @@
         <p:spPr>
           <a:xfrm>
             <a:off x="961560" y="1272600"/>
-            <a:ext cx="9557280" cy="4111560"/>
+            <a:ext cx="9556920" cy="4111200"/>
           </a:xfrm>
           <a:prstGeom prst="rect">
             <a:avLst/>
@@ -11060,7 +10993,7 @@
         <p:spPr>
           <a:xfrm>
             <a:off x="457200" y="627480"/>
-            <a:ext cx="11429640" cy="4172400"/>
+            <a:ext cx="11429280" cy="4172400"/>
           </a:xfrm>
           <a:prstGeom prst="rect">
             <a:avLst/>
@@ -11352,7 +11285,7 @@
         <p:spPr>
           <a:xfrm>
             <a:off x="961560" y="1272600"/>
-            <a:ext cx="9557280" cy="4111560"/>
+            <a:ext cx="9556920" cy="4111200"/>
           </a:xfrm>
           <a:prstGeom prst="rect">
             <a:avLst/>
@@ -11603,7 +11536,7 @@
         <p:spPr>
           <a:xfrm>
             <a:off x="957960" y="763920"/>
-            <a:ext cx="9557280" cy="2496600"/>
+            <a:ext cx="9556920" cy="2496600"/>
           </a:xfrm>
           <a:prstGeom prst="rect">
             <a:avLst/>
@@ -11794,7 +11727,7 @@
         <p:spPr>
           <a:xfrm>
             <a:off x="729360" y="460440"/>
-            <a:ext cx="10700280" cy="3837240"/>
+            <a:ext cx="10699920" cy="3837240"/>
           </a:xfrm>
           <a:prstGeom prst="rect">
             <a:avLst/>
@@ -12045,7 +11978,7 @@
         <p:spPr>
           <a:xfrm>
             <a:off x="961560" y="640080"/>
-            <a:ext cx="9557280" cy="499320"/>
+            <a:ext cx="9556920" cy="498960"/>
           </a:xfrm>
           <a:prstGeom prst="rect">
             <a:avLst/>
@@ -12106,7 +12039,7 @@
         <p:spPr>
           <a:xfrm>
             <a:off x="596160" y="1272600"/>
-            <a:ext cx="10999440" cy="4547520"/>
+            <a:ext cx="10999080" cy="4547160"/>
           </a:xfrm>
           <a:prstGeom prst="rect">
             <a:avLst/>
@@ -12126,7 +12059,7 @@
         <p:spPr>
           <a:xfrm>
             <a:off x="961560" y="5910840"/>
-            <a:ext cx="9557280" cy="399240"/>
+            <a:ext cx="9556920" cy="398880"/>
           </a:xfrm>
           <a:prstGeom prst="rect">
             <a:avLst/>
@@ -12213,7 +12146,7 @@
         <p:spPr>
           <a:xfrm>
             <a:off x="961560" y="640080"/>
-            <a:ext cx="9557280" cy="499320"/>
+            <a:ext cx="9556920" cy="498960"/>
           </a:xfrm>
           <a:prstGeom prst="rect">
             <a:avLst/>
@@ -12274,7 +12207,7 @@
         <p:spPr>
           <a:xfrm>
             <a:off x="1765800" y="1272600"/>
-            <a:ext cx="8659800" cy="4899240"/>
+            <a:ext cx="8659440" cy="4898880"/>
           </a:xfrm>
           <a:prstGeom prst="rect">
             <a:avLst/>
@@ -12294,7 +12227,7 @@
         <p:spPr>
           <a:xfrm>
             <a:off x="961560" y="6262560"/>
-            <a:ext cx="9557280" cy="399240"/>
+            <a:ext cx="9556920" cy="398880"/>
           </a:xfrm>
           <a:prstGeom prst="rect">
             <a:avLst/>
@@ -12381,7 +12314,7 @@
         <p:spPr>
           <a:xfrm>
             <a:off x="961560" y="1272600"/>
-            <a:ext cx="9557280" cy="3837240"/>
+            <a:ext cx="9556920" cy="3837240"/>
           </a:xfrm>
           <a:prstGeom prst="rect">
             <a:avLst/>
@@ -12632,7 +12565,7 @@
         <p:spPr>
           <a:xfrm>
             <a:off x="961560" y="640080"/>
-            <a:ext cx="9557280" cy="499320"/>
+            <a:ext cx="9556920" cy="498960"/>
           </a:xfrm>
           <a:prstGeom prst="rect">
             <a:avLst/>
@@ -12693,7 +12626,7 @@
         <p:spPr>
           <a:xfrm>
             <a:off x="1195920" y="1272600"/>
-            <a:ext cx="9799200" cy="4899240"/>
+            <a:ext cx="9798840" cy="4898880"/>
           </a:xfrm>
           <a:prstGeom prst="rect">
             <a:avLst/>
@@ -12713,7 +12646,7 @@
         <p:spPr>
           <a:xfrm>
             <a:off x="777600" y="5329800"/>
-            <a:ext cx="9557280" cy="1004400"/>
+            <a:ext cx="9556920" cy="1004400"/>
           </a:xfrm>
           <a:prstGeom prst="rect">
             <a:avLst/>
@@ -12800,7 +12733,7 @@
         <p:spPr>
           <a:xfrm>
             <a:off x="961560" y="1272600"/>
-            <a:ext cx="9557280" cy="4111560"/>
+            <a:ext cx="9556920" cy="4111200"/>
           </a:xfrm>
           <a:prstGeom prst="rect">
             <a:avLst/>
